--- a/docs/cbg_saback.pptx
+++ b/docs/cbg_saback.pptx
@@ -5,30 +5,31 @@
     <p:sldMasterId id="2147483648" r:id="rId1"/>
   </p:sldMasterIdLst>
   <p:notesMasterIdLst>
-    <p:notesMasterId r:id="rId23"/>
+    <p:notesMasterId r:id="rId24"/>
   </p:notesMasterIdLst>
   <p:sldIdLst>
     <p:sldId id="1574" r:id="rId2"/>
     <p:sldId id="1597" r:id="rId3"/>
-    <p:sldId id="1575" r:id="rId4"/>
-    <p:sldId id="1596" r:id="rId5"/>
-    <p:sldId id="1579" r:id="rId6"/>
-    <p:sldId id="1580" r:id="rId7"/>
-    <p:sldId id="1582" r:id="rId8"/>
-    <p:sldId id="1581" r:id="rId9"/>
-    <p:sldId id="1583" r:id="rId10"/>
-    <p:sldId id="1584" r:id="rId11"/>
-    <p:sldId id="1585" r:id="rId12"/>
-    <p:sldId id="1586" r:id="rId13"/>
-    <p:sldId id="1587" r:id="rId14"/>
-    <p:sldId id="1588" r:id="rId15"/>
-    <p:sldId id="1589" r:id="rId16"/>
-    <p:sldId id="1590" r:id="rId17"/>
-    <p:sldId id="1591" r:id="rId18"/>
-    <p:sldId id="1594" r:id="rId19"/>
-    <p:sldId id="1592" r:id="rId20"/>
-    <p:sldId id="1593" r:id="rId21"/>
-    <p:sldId id="1595" r:id="rId22"/>
+    <p:sldId id="1598" r:id="rId4"/>
+    <p:sldId id="1575" r:id="rId5"/>
+    <p:sldId id="1596" r:id="rId6"/>
+    <p:sldId id="1579" r:id="rId7"/>
+    <p:sldId id="1580" r:id="rId8"/>
+    <p:sldId id="1582" r:id="rId9"/>
+    <p:sldId id="1581" r:id="rId10"/>
+    <p:sldId id="1583" r:id="rId11"/>
+    <p:sldId id="1584" r:id="rId12"/>
+    <p:sldId id="1585" r:id="rId13"/>
+    <p:sldId id="1586" r:id="rId14"/>
+    <p:sldId id="1587" r:id="rId15"/>
+    <p:sldId id="1588" r:id="rId16"/>
+    <p:sldId id="1589" r:id="rId17"/>
+    <p:sldId id="1590" r:id="rId18"/>
+    <p:sldId id="1591" r:id="rId19"/>
+    <p:sldId id="1594" r:id="rId20"/>
+    <p:sldId id="1592" r:id="rId21"/>
+    <p:sldId id="1593" r:id="rId22"/>
+    <p:sldId id="1595" r:id="rId23"/>
   </p:sldIdLst>
   <p:sldSz cx="12192000" cy="6858000"/>
   <p:notesSz cx="6858000" cy="9144000"/>
@@ -533,7 +534,7 @@
           <a:p>
             <a:fld id="{2915196C-CDBC-4DEE-A220-849C85FC22AC}" type="datetimeFigureOut">
               <a:rPr lang="he-IL" smtClean="0"/>
-              <a:t>ט"ו/טבת/תשפ"ו</a:t>
+              <a:t>ט"ז/טבת/תשפ"ו</a:t>
             </a:fld>
             <a:endParaRPr lang="he-IL"/>
           </a:p>
@@ -885,12 +886,18 @@
 </p:notes>
 </file>
 
-<file path=ppt/notesSlides/notesSlide2.xml><?xml version="1.0" encoding="utf-8"?>
+<file path=ppt/notesSlides/notesSlide10.xml><?xml version="1.0" encoding="utf-8"?>
 <p:notes xmlns:a="http://schemas.openxmlformats.org/drawingml/2006/main" xmlns:r="http://schemas.openxmlformats.org/officeDocument/2006/relationships" xmlns:p="http://schemas.openxmlformats.org/presentationml/2006/main">
   <p:cSld>
     <p:spTree>
       <p:nvGrpSpPr>
-        <p:cNvPr id="1" name=""/>
+        <p:cNvPr id="1" name="">
+          <a:extLst>
+            <a:ext uri="{FF2B5EF4-FFF2-40B4-BE49-F238E27FC236}">
+              <a16:creationId xmlns:a16="http://schemas.microsoft.com/office/drawing/2014/main" id="{6B4DD219-5D86-EF6C-D07F-3B5EA548CC17}"/>
+            </a:ext>
+          </a:extLst>
+        </p:cNvPr>
         <p:cNvGrpSpPr/>
         <p:nvPr/>
       </p:nvGrpSpPr>
@@ -904,7 +911,13 @@
       </p:grpSpPr>
       <p:sp>
         <p:nvSpPr>
-          <p:cNvPr id="2" name="Slide Image Placeholder 1"/>
+          <p:cNvPr id="2" name="Slide Image Placeholder 1">
+            <a:extLst>
+              <a:ext uri="{FF2B5EF4-FFF2-40B4-BE49-F238E27FC236}">
+                <a16:creationId xmlns:a16="http://schemas.microsoft.com/office/drawing/2014/main" id="{F4F405D6-737F-0B98-5C5A-8C8384851430}"/>
+              </a:ext>
+            </a:extLst>
+          </p:cNvPr>
           <p:cNvSpPr>
             <a:spLocks noGrp="1" noRot="1" noChangeAspect="1"/>
           </p:cNvSpPr>
@@ -923,7 +936,13 @@
       </p:sp>
       <p:sp>
         <p:nvSpPr>
-          <p:cNvPr id="3" name="Notes Placeholder 2"/>
+          <p:cNvPr id="3" name="Notes Placeholder 2">
+            <a:extLst>
+              <a:ext uri="{FF2B5EF4-FFF2-40B4-BE49-F238E27FC236}">
+                <a16:creationId xmlns:a16="http://schemas.microsoft.com/office/drawing/2014/main" id="{831326A5-3FFB-7341-842A-243943CE0784}"/>
+              </a:ext>
+            </a:extLst>
+          </p:cNvPr>
           <p:cNvSpPr>
             <a:spLocks noGrp="1"/>
           </p:cNvSpPr>
@@ -936,187 +955,19 @@
           <a:bodyPr/>
           <a:lstStyle/>
           <a:p>
-            <a:r>
-              <a:rPr lang="en-IL" dirty="0"/>
-              <a:t>[1] </a:t>
-            </a:r>
-            <a:r>
-              <a:rPr lang="en-US" sz="1200" b="0" i="0" kern="1200" dirty="0" err="1">
-                <a:solidFill>
-                  <a:schemeClr val="tx1"/>
-                </a:solidFill>
-                <a:effectLst/>
-                <a:latin typeface="+mn-lt"/>
-                <a:ea typeface="+mn-ea"/>
-                <a:cs typeface="+mn-cs"/>
-              </a:rPr>
-              <a:t>Seckin</a:t>
-            </a:r>
-            <a:r>
-              <a:rPr lang="en-US" sz="1200" b="0" i="0" kern="1200" dirty="0">
-                <a:solidFill>
-                  <a:schemeClr val="tx1"/>
-                </a:solidFill>
-                <a:effectLst/>
-                <a:latin typeface="+mn-lt"/>
-                <a:ea typeface="+mn-ea"/>
-                <a:cs typeface="+mn-cs"/>
-              </a:rPr>
-              <a:t>, O. C., Pote, M., </a:t>
-            </a:r>
-            <a:r>
-              <a:rPr lang="en-US" sz="1200" b="0" i="0" kern="1200" dirty="0" err="1">
-                <a:solidFill>
-                  <a:schemeClr val="tx1"/>
-                </a:solidFill>
-                <a:effectLst/>
-                <a:latin typeface="+mn-lt"/>
-                <a:ea typeface="+mn-ea"/>
-                <a:cs typeface="+mn-cs"/>
-              </a:rPr>
-              <a:t>Nwala</a:t>
-            </a:r>
-            <a:r>
-              <a:rPr lang="en-US" sz="1200" b="0" i="0" kern="1200" dirty="0">
-                <a:solidFill>
-                  <a:schemeClr val="tx1"/>
-                </a:solidFill>
-                <a:effectLst/>
-                <a:latin typeface="+mn-lt"/>
-                <a:ea typeface="+mn-ea"/>
-                <a:cs typeface="+mn-cs"/>
-              </a:rPr>
-              <a:t>, A. C., Yin, L., </a:t>
-            </a:r>
-            <a:r>
-              <a:rPr lang="en-US" sz="1200" b="0" i="0" kern="1200" dirty="0" err="1">
-                <a:solidFill>
-                  <a:schemeClr val="tx1"/>
-                </a:solidFill>
-                <a:effectLst/>
-                <a:latin typeface="+mn-lt"/>
-                <a:ea typeface="+mn-ea"/>
-                <a:cs typeface="+mn-cs"/>
-              </a:rPr>
-              <a:t>Luceri</a:t>
-            </a:r>
-            <a:r>
-              <a:rPr lang="en-US" sz="1200" b="0" i="0" kern="1200" dirty="0">
-                <a:solidFill>
-                  <a:schemeClr val="tx1"/>
-                </a:solidFill>
-                <a:effectLst/>
-                <a:latin typeface="+mn-lt"/>
-                <a:ea typeface="+mn-ea"/>
-                <a:cs typeface="+mn-cs"/>
-              </a:rPr>
-              <a:t>, L., Flammini, A., &amp; Menczer, F. (2025, June). Labeled datasets for research on information operations. In </a:t>
-            </a:r>
-            <a:r>
-              <a:rPr lang="en-US" sz="1200" b="0" i="1" kern="1200" dirty="0">
-                <a:solidFill>
-                  <a:schemeClr val="tx1"/>
-                </a:solidFill>
-                <a:effectLst/>
-                <a:latin typeface="+mn-lt"/>
-                <a:ea typeface="+mn-ea"/>
-                <a:cs typeface="+mn-cs"/>
-              </a:rPr>
-              <a:t>Proceedings of the International AAAI Conference on Web and Social Media</a:t>
-            </a:r>
-            <a:r>
-              <a:rPr lang="en-US" sz="1200" b="0" i="0" kern="1200" dirty="0">
-                <a:solidFill>
-                  <a:schemeClr val="tx1"/>
-                </a:solidFill>
-                <a:effectLst/>
-                <a:latin typeface="+mn-lt"/>
-                <a:ea typeface="+mn-ea"/>
-                <a:cs typeface="+mn-cs"/>
-              </a:rPr>
-              <a:t> (Vol. 19, pp. 2567-2574).</a:t>
-            </a:r>
-          </a:p>
-          <a:p>
-            <a:r>
-              <a:rPr lang="en-US" sz="1200" b="0" i="0" kern="1200" dirty="0">
-                <a:solidFill>
-                  <a:schemeClr val="tx1"/>
-                </a:solidFill>
-                <a:effectLst/>
-                <a:latin typeface="+mn-lt"/>
-                <a:ea typeface="+mn-ea"/>
-                <a:cs typeface="+mn-cs"/>
-              </a:rPr>
-              <a:t>[2] Balasubramanian, A., Zou, V., Narayana, H., You, C., </a:t>
-            </a:r>
-            <a:r>
-              <a:rPr lang="en-US" sz="1200" b="0" i="0" kern="1200" dirty="0" err="1">
-                <a:solidFill>
-                  <a:schemeClr val="tx1"/>
-                </a:solidFill>
-                <a:effectLst/>
-                <a:latin typeface="+mn-lt"/>
-                <a:ea typeface="+mn-ea"/>
-                <a:cs typeface="+mn-cs"/>
-              </a:rPr>
-              <a:t>Luceri</a:t>
-            </a:r>
-            <a:r>
-              <a:rPr lang="en-US" sz="1200" b="0" i="0" kern="1200" dirty="0">
-                <a:solidFill>
-                  <a:schemeClr val="tx1"/>
-                </a:solidFill>
-                <a:effectLst/>
-                <a:latin typeface="+mn-lt"/>
-                <a:ea typeface="+mn-ea"/>
-                <a:cs typeface="+mn-cs"/>
-              </a:rPr>
-              <a:t>, L., &amp; Ferrara, E. (2024). A public dataset tracking social media discourse about the 2024 us presidential election on twitter/x. </a:t>
-            </a:r>
-            <a:r>
-              <a:rPr lang="en-US" sz="1200" b="0" i="1" kern="1200" dirty="0" err="1">
-                <a:solidFill>
-                  <a:schemeClr val="tx1"/>
-                </a:solidFill>
-                <a:effectLst/>
-                <a:latin typeface="+mn-lt"/>
-                <a:ea typeface="+mn-ea"/>
-                <a:cs typeface="+mn-cs"/>
-              </a:rPr>
-              <a:t>arXiv</a:t>
-            </a:r>
-            <a:r>
-              <a:rPr lang="en-US" sz="1200" b="0" i="1" kern="1200" dirty="0">
-                <a:solidFill>
-                  <a:schemeClr val="tx1"/>
-                </a:solidFill>
-                <a:effectLst/>
-                <a:latin typeface="+mn-lt"/>
-                <a:ea typeface="+mn-ea"/>
-                <a:cs typeface="+mn-cs"/>
-              </a:rPr>
-              <a:t> preprint arXiv:2411.00376</a:t>
-            </a:r>
-            <a:r>
-              <a:rPr lang="en-US" sz="1200" b="0" i="0" kern="1200" dirty="0">
-                <a:solidFill>
-                  <a:schemeClr val="tx1"/>
-                </a:solidFill>
-                <a:effectLst/>
-                <a:latin typeface="+mn-lt"/>
-                <a:ea typeface="+mn-ea"/>
-                <a:cs typeface="+mn-cs"/>
-              </a:rPr>
-              <a:t>.</a:t>
-            </a:r>
             <a:endParaRPr lang="en-IL" dirty="0"/>
           </a:p>
         </p:txBody>
       </p:sp>
       <p:sp>
         <p:nvSpPr>
-          <p:cNvPr id="4" name="Slide Number Placeholder 3"/>
+          <p:cNvPr id="4" name="Slide Number Placeholder 3">
+            <a:extLst>
+              <a:ext uri="{FF2B5EF4-FFF2-40B4-BE49-F238E27FC236}">
+                <a16:creationId xmlns:a16="http://schemas.microsoft.com/office/drawing/2014/main" id="{288EC46E-FC93-25C0-25F6-76A42270733B}"/>
+              </a:ext>
+            </a:extLst>
+          </p:cNvPr>
           <p:cNvSpPr>
             <a:spLocks noGrp="1"/>
           </p:cNvSpPr>
@@ -1131,7 +982,7 @@
           <a:p>
             <a:fld id="{7F6CD5E7-A5BE-4430-AD67-E129D63AAC5C}" type="slidenum">
               <a:rPr lang="he-IL" smtClean="0"/>
-              <a:t>4</a:t>
+              <a:t>22</a:t>
             </a:fld>
             <a:endParaRPr lang="he-IL"/>
           </a:p>
@@ -1140,7 +991,115 @@
     </p:spTree>
     <p:extLst>
       <p:ext uri="{BB962C8B-B14F-4D97-AF65-F5344CB8AC3E}">
-        <p14:creationId xmlns:p14="http://schemas.microsoft.com/office/powerpoint/2010/main" val="4212091859"/>
+        <p14:creationId xmlns:p14="http://schemas.microsoft.com/office/powerpoint/2010/main" val="2140052368"/>
+      </p:ext>
+    </p:extLst>
+  </p:cSld>
+  <p:clrMapOvr>
+    <a:masterClrMapping/>
+  </p:clrMapOvr>
+</p:notes>
+</file>
+
+<file path=ppt/notesSlides/notesSlide2.xml><?xml version="1.0" encoding="utf-8"?>
+<p:notes xmlns:a="http://schemas.openxmlformats.org/drawingml/2006/main" xmlns:r="http://schemas.openxmlformats.org/officeDocument/2006/relationships" xmlns:p="http://schemas.openxmlformats.org/presentationml/2006/main">
+  <p:cSld>
+    <p:spTree>
+      <p:nvGrpSpPr>
+        <p:cNvPr id="1" name="">
+          <a:extLst>
+            <a:ext uri="{FF2B5EF4-FFF2-40B4-BE49-F238E27FC236}">
+              <a16:creationId xmlns:a16="http://schemas.microsoft.com/office/drawing/2014/main" id="{CC2D1B19-9B3F-52B4-1406-A3E8B63FF083}"/>
+            </a:ext>
+          </a:extLst>
+        </p:cNvPr>
+        <p:cNvGrpSpPr/>
+        <p:nvPr/>
+      </p:nvGrpSpPr>
+      <p:grpSpPr>
+        <a:xfrm>
+          <a:off x="0" y="0"/>
+          <a:ext cx="0" cy="0"/>
+          <a:chOff x="0" y="0"/>
+          <a:chExt cx="0" cy="0"/>
+        </a:xfrm>
+      </p:grpSpPr>
+      <p:sp>
+        <p:nvSpPr>
+          <p:cNvPr id="2" name="Slide Image Placeholder 1">
+            <a:extLst>
+              <a:ext uri="{FF2B5EF4-FFF2-40B4-BE49-F238E27FC236}">
+                <a16:creationId xmlns:a16="http://schemas.microsoft.com/office/drawing/2014/main" id="{D4D9148B-DCE7-D348-6B8B-486CD7F7936E}"/>
+              </a:ext>
+            </a:extLst>
+          </p:cNvPr>
+          <p:cNvSpPr>
+            <a:spLocks noGrp="1" noRot="1" noChangeAspect="1"/>
+          </p:cNvSpPr>
+          <p:nvPr>
+            <p:ph type="sldImg"/>
+          </p:nvPr>
+        </p:nvSpPr>
+        <p:spPr/>
+      </p:sp>
+      <p:sp>
+        <p:nvSpPr>
+          <p:cNvPr id="3" name="Notes Placeholder 2">
+            <a:extLst>
+              <a:ext uri="{FF2B5EF4-FFF2-40B4-BE49-F238E27FC236}">
+                <a16:creationId xmlns:a16="http://schemas.microsoft.com/office/drawing/2014/main" id="{1BBAED3D-2BE5-A730-602C-04D8CCCB7452}"/>
+              </a:ext>
+            </a:extLst>
+          </p:cNvPr>
+          <p:cNvSpPr>
+            <a:spLocks noGrp="1"/>
+          </p:cNvSpPr>
+          <p:nvPr>
+            <p:ph type="body" idx="1"/>
+          </p:nvPr>
+        </p:nvSpPr>
+        <p:spPr/>
+        <p:txBody>
+          <a:bodyPr/>
+          <a:lstStyle/>
+          <a:p>
+            <a:endParaRPr lang="en-IL" dirty="0"/>
+          </a:p>
+        </p:txBody>
+      </p:sp>
+      <p:sp>
+        <p:nvSpPr>
+          <p:cNvPr id="4" name="Slide Number Placeholder 3">
+            <a:extLst>
+              <a:ext uri="{FF2B5EF4-FFF2-40B4-BE49-F238E27FC236}">
+                <a16:creationId xmlns:a16="http://schemas.microsoft.com/office/drawing/2014/main" id="{1DADDE7B-A372-3AE3-02CF-4C8AE5991A08}"/>
+              </a:ext>
+            </a:extLst>
+          </p:cNvPr>
+          <p:cNvSpPr>
+            <a:spLocks noGrp="1"/>
+          </p:cNvSpPr>
+          <p:nvPr>
+            <p:ph type="sldNum" sz="quarter" idx="5"/>
+          </p:nvPr>
+        </p:nvSpPr>
+        <p:spPr/>
+        <p:txBody>
+          <a:bodyPr/>
+          <a:lstStyle/>
+          <a:p>
+            <a:fld id="{7F6CD5E7-A5BE-4430-AD67-E129D63AAC5C}" type="slidenum">
+              <a:rPr lang="he-IL" smtClean="0"/>
+              <a:t>3</a:t>
+            </a:fld>
+            <a:endParaRPr lang="he-IL"/>
+          </a:p>
+        </p:txBody>
+      </p:sp>
+    </p:spTree>
+    <p:extLst>
+      <p:ext uri="{BB962C8B-B14F-4D97-AF65-F5344CB8AC3E}">
+        <p14:creationId xmlns:p14="http://schemas.microsoft.com/office/powerpoint/2010/main" val="955212291"/>
       </p:ext>
     </p:extLst>
   </p:cSld>
@@ -1202,24 +1161,178 @@
           <a:lstStyle/>
           <a:p>
             <a:r>
-              <a:rPr lang="en-GB" sz="1200" dirty="0"/>
-              <a:t>used</a:t>
-            </a:r>
-            <a:r>
-              <a:rPr lang="en-GB" sz="1600" dirty="0"/>
-              <a:t> </a:t>
-            </a:r>
-            <a:r>
-              <a:rPr lang="en-GB" sz="1200" dirty="0"/>
-              <a:t>in</a:t>
-            </a:r>
-            <a:r>
-              <a:rPr lang="en-GB" sz="1600" dirty="0"/>
-              <a:t> </a:t>
-            </a:r>
-            <a:r>
-              <a:rPr lang="en-GB" sz="1200" dirty="0"/>
-              <a:t>natural language processing and information retrieval</a:t>
+              <a:rPr lang="en-IL" dirty="0"/>
+              <a:t>[1] </a:t>
+            </a:r>
+            <a:r>
+              <a:rPr lang="en-US" sz="1200" b="0" i="0" kern="1200" dirty="0" err="1">
+                <a:solidFill>
+                  <a:schemeClr val="tx1"/>
+                </a:solidFill>
+                <a:effectLst/>
+                <a:latin typeface="+mn-lt"/>
+                <a:ea typeface="+mn-ea"/>
+                <a:cs typeface="+mn-cs"/>
+              </a:rPr>
+              <a:t>Seckin</a:t>
+            </a:r>
+            <a:r>
+              <a:rPr lang="en-US" sz="1200" b="0" i="0" kern="1200" dirty="0">
+                <a:solidFill>
+                  <a:schemeClr val="tx1"/>
+                </a:solidFill>
+                <a:effectLst/>
+                <a:latin typeface="+mn-lt"/>
+                <a:ea typeface="+mn-ea"/>
+                <a:cs typeface="+mn-cs"/>
+              </a:rPr>
+              <a:t>, O. C., Pote, M., </a:t>
+            </a:r>
+            <a:r>
+              <a:rPr lang="en-US" sz="1200" b="0" i="0" kern="1200" dirty="0" err="1">
+                <a:solidFill>
+                  <a:schemeClr val="tx1"/>
+                </a:solidFill>
+                <a:effectLst/>
+                <a:latin typeface="+mn-lt"/>
+                <a:ea typeface="+mn-ea"/>
+                <a:cs typeface="+mn-cs"/>
+              </a:rPr>
+              <a:t>Nwala</a:t>
+            </a:r>
+            <a:r>
+              <a:rPr lang="en-US" sz="1200" b="0" i="0" kern="1200" dirty="0">
+                <a:solidFill>
+                  <a:schemeClr val="tx1"/>
+                </a:solidFill>
+                <a:effectLst/>
+                <a:latin typeface="+mn-lt"/>
+                <a:ea typeface="+mn-ea"/>
+                <a:cs typeface="+mn-cs"/>
+              </a:rPr>
+              <a:t>, A. C., Yin, L., </a:t>
+            </a:r>
+            <a:r>
+              <a:rPr lang="en-US" sz="1200" b="0" i="0" kern="1200" dirty="0" err="1">
+                <a:solidFill>
+                  <a:schemeClr val="tx1"/>
+                </a:solidFill>
+                <a:effectLst/>
+                <a:latin typeface="+mn-lt"/>
+                <a:ea typeface="+mn-ea"/>
+                <a:cs typeface="+mn-cs"/>
+              </a:rPr>
+              <a:t>Luceri</a:t>
+            </a:r>
+            <a:r>
+              <a:rPr lang="en-US" sz="1200" b="0" i="0" kern="1200" dirty="0">
+                <a:solidFill>
+                  <a:schemeClr val="tx1"/>
+                </a:solidFill>
+                <a:effectLst/>
+                <a:latin typeface="+mn-lt"/>
+                <a:ea typeface="+mn-ea"/>
+                <a:cs typeface="+mn-cs"/>
+              </a:rPr>
+              <a:t>, L., Flammini, A., &amp; Menczer, F. (2025, June). Labeled datasets for research on information operations. In </a:t>
+            </a:r>
+            <a:r>
+              <a:rPr lang="en-US" sz="1200" b="0" i="1" kern="1200" dirty="0">
+                <a:solidFill>
+                  <a:schemeClr val="tx1"/>
+                </a:solidFill>
+                <a:effectLst/>
+                <a:latin typeface="+mn-lt"/>
+                <a:ea typeface="+mn-ea"/>
+                <a:cs typeface="+mn-cs"/>
+              </a:rPr>
+              <a:t>Proceedings of the International AAAI Conference on Web and Social Media</a:t>
+            </a:r>
+            <a:r>
+              <a:rPr lang="en-US" sz="1200" b="0" i="0" kern="1200" dirty="0">
+                <a:solidFill>
+                  <a:schemeClr val="tx1"/>
+                </a:solidFill>
+                <a:effectLst/>
+                <a:latin typeface="+mn-lt"/>
+                <a:ea typeface="+mn-ea"/>
+                <a:cs typeface="+mn-cs"/>
+              </a:rPr>
+              <a:t> (Vol. 19, pp. 2567-2574).</a:t>
+            </a:r>
+          </a:p>
+          <a:p>
+            <a:r>
+              <a:rPr lang="en-US" sz="1200" b="0" i="0" kern="1200" dirty="0">
+                <a:solidFill>
+                  <a:schemeClr val="tx1"/>
+                </a:solidFill>
+                <a:effectLst/>
+                <a:latin typeface="+mn-lt"/>
+                <a:ea typeface="+mn-ea"/>
+                <a:cs typeface="+mn-cs"/>
+              </a:rPr>
+              <a:t>[2] Balasubramanian, A., Zou, V., Narayana, H., You, C., </a:t>
+            </a:r>
+            <a:r>
+              <a:rPr lang="en-US" sz="1200" b="0" i="0" kern="1200" dirty="0" err="1">
+                <a:solidFill>
+                  <a:schemeClr val="tx1"/>
+                </a:solidFill>
+                <a:effectLst/>
+                <a:latin typeface="+mn-lt"/>
+                <a:ea typeface="+mn-ea"/>
+                <a:cs typeface="+mn-cs"/>
+              </a:rPr>
+              <a:t>Luceri</a:t>
+            </a:r>
+            <a:r>
+              <a:rPr lang="en-US" sz="1200" b="0" i="0" kern="1200" dirty="0">
+                <a:solidFill>
+                  <a:schemeClr val="tx1"/>
+                </a:solidFill>
+                <a:effectLst/>
+                <a:latin typeface="+mn-lt"/>
+                <a:ea typeface="+mn-ea"/>
+                <a:cs typeface="+mn-cs"/>
+              </a:rPr>
+              <a:t>, L., &amp; Ferrara, E. (2024). A public dataset tracking social media discourse about the 2024 us presidential election on twitter/x. </a:t>
+            </a:r>
+            <a:r>
+              <a:rPr lang="en-US" sz="1200" b="0" i="1" kern="1200" dirty="0" err="1">
+                <a:solidFill>
+                  <a:schemeClr val="tx1"/>
+                </a:solidFill>
+                <a:effectLst/>
+                <a:latin typeface="+mn-lt"/>
+                <a:ea typeface="+mn-ea"/>
+                <a:cs typeface="+mn-cs"/>
+              </a:rPr>
+              <a:t>arXiv</a:t>
+            </a:r>
+            <a:r>
+              <a:rPr lang="en-US" sz="1200" b="0" i="1" kern="1200" dirty="0">
+                <a:solidFill>
+                  <a:schemeClr val="tx1"/>
+                </a:solidFill>
+                <a:effectLst/>
+                <a:latin typeface="+mn-lt"/>
+                <a:ea typeface="+mn-ea"/>
+                <a:cs typeface="+mn-cs"/>
+              </a:rPr>
+              <a:t> preprint arXiv:2411.00376</a:t>
+            </a:r>
+            <a:r>
+              <a:rPr lang="en-US" sz="1200" b="0" i="0" kern="1200" dirty="0">
+                <a:solidFill>
+                  <a:schemeClr val="tx1"/>
+                </a:solidFill>
+                <a:effectLst/>
+                <a:latin typeface="+mn-lt"/>
+                <a:ea typeface="+mn-ea"/>
+                <a:cs typeface="+mn-cs"/>
+              </a:rPr>
+              <a:t>.</a:t>
             </a:r>
             <a:endParaRPr lang="en-IL" dirty="0"/>
           </a:p>
@@ -1242,7 +1355,7 @@
           <a:p>
             <a:fld id="{7F6CD5E7-A5BE-4430-AD67-E129D63AAC5C}" type="slidenum">
               <a:rPr lang="he-IL" smtClean="0"/>
-              <a:t>10</a:t>
+              <a:t>5</a:t>
             </a:fld>
             <a:endParaRPr lang="he-IL"/>
           </a:p>
@@ -1251,7 +1364,7 @@
     </p:spTree>
     <p:extLst>
       <p:ext uri="{BB962C8B-B14F-4D97-AF65-F5344CB8AC3E}">
-        <p14:creationId xmlns:p14="http://schemas.microsoft.com/office/powerpoint/2010/main" val="2785503547"/>
+        <p14:creationId xmlns:p14="http://schemas.microsoft.com/office/powerpoint/2010/main" val="4212091859"/>
       </p:ext>
     </p:extLst>
   </p:cSld>
@@ -1312,6 +1425,26 @@
           <a:bodyPr/>
           <a:lstStyle/>
           <a:p>
+            <a:r>
+              <a:rPr lang="en-GB" sz="1200" dirty="0"/>
+              <a:t>used</a:t>
+            </a:r>
+            <a:r>
+              <a:rPr lang="en-GB" sz="1600" dirty="0"/>
+              <a:t> </a:t>
+            </a:r>
+            <a:r>
+              <a:rPr lang="en-GB" sz="1200" dirty="0"/>
+              <a:t>in</a:t>
+            </a:r>
+            <a:r>
+              <a:rPr lang="en-GB" sz="1600" dirty="0"/>
+              <a:t> </a:t>
+            </a:r>
+            <a:r>
+              <a:rPr lang="en-GB" sz="1200" dirty="0"/>
+              <a:t>natural language processing and information retrieval</a:t>
+            </a:r>
             <a:endParaRPr lang="en-IL" dirty="0"/>
           </a:p>
         </p:txBody>
@@ -1333,7 +1466,98 @@
           <a:p>
             <a:fld id="{7F6CD5E7-A5BE-4430-AD67-E129D63AAC5C}" type="slidenum">
               <a:rPr lang="he-IL" smtClean="0"/>
-              <a:t>13</a:t>
+              <a:t>11</a:t>
+            </a:fld>
+            <a:endParaRPr lang="he-IL"/>
+          </a:p>
+        </p:txBody>
+      </p:sp>
+    </p:spTree>
+    <p:extLst>
+      <p:ext uri="{BB962C8B-B14F-4D97-AF65-F5344CB8AC3E}">
+        <p14:creationId xmlns:p14="http://schemas.microsoft.com/office/powerpoint/2010/main" val="2785503547"/>
+      </p:ext>
+    </p:extLst>
+  </p:cSld>
+  <p:clrMapOvr>
+    <a:masterClrMapping/>
+  </p:clrMapOvr>
+</p:notes>
+</file>
+
+<file path=ppt/notesSlides/notesSlide5.xml><?xml version="1.0" encoding="utf-8"?>
+<p:notes xmlns:a="http://schemas.openxmlformats.org/drawingml/2006/main" xmlns:r="http://schemas.openxmlformats.org/officeDocument/2006/relationships" xmlns:p="http://schemas.openxmlformats.org/presentationml/2006/main">
+  <p:cSld>
+    <p:spTree>
+      <p:nvGrpSpPr>
+        <p:cNvPr id="1" name=""/>
+        <p:cNvGrpSpPr/>
+        <p:nvPr/>
+      </p:nvGrpSpPr>
+      <p:grpSpPr>
+        <a:xfrm>
+          <a:off x="0" y="0"/>
+          <a:ext cx="0" cy="0"/>
+          <a:chOff x="0" y="0"/>
+          <a:chExt cx="0" cy="0"/>
+        </a:xfrm>
+      </p:grpSpPr>
+      <p:sp>
+        <p:nvSpPr>
+          <p:cNvPr id="2" name="Slide Image Placeholder 1"/>
+          <p:cNvSpPr>
+            <a:spLocks noGrp="1" noRot="1" noChangeAspect="1"/>
+          </p:cNvSpPr>
+          <p:nvPr>
+            <p:ph type="sldImg"/>
+          </p:nvPr>
+        </p:nvSpPr>
+        <p:spPr/>
+        <p:txBody>
+          <a:bodyPr/>
+          <a:lstStyle/>
+          <a:p>
+            <a:endParaRPr lang="en-IL"/>
+          </a:p>
+        </p:txBody>
+      </p:sp>
+      <p:sp>
+        <p:nvSpPr>
+          <p:cNvPr id="3" name="Notes Placeholder 2"/>
+          <p:cNvSpPr>
+            <a:spLocks noGrp="1"/>
+          </p:cNvSpPr>
+          <p:nvPr>
+            <p:ph type="body" idx="1"/>
+          </p:nvPr>
+        </p:nvSpPr>
+        <p:spPr/>
+        <p:txBody>
+          <a:bodyPr/>
+          <a:lstStyle/>
+          <a:p>
+            <a:endParaRPr lang="en-IL" dirty="0"/>
+          </a:p>
+        </p:txBody>
+      </p:sp>
+      <p:sp>
+        <p:nvSpPr>
+          <p:cNvPr id="4" name="Slide Number Placeholder 3"/>
+          <p:cNvSpPr>
+            <a:spLocks noGrp="1"/>
+          </p:cNvSpPr>
+          <p:nvPr>
+            <p:ph type="sldNum" sz="quarter" idx="5"/>
+          </p:nvPr>
+        </p:nvSpPr>
+        <p:spPr/>
+        <p:txBody>
+          <a:bodyPr/>
+          <a:lstStyle/>
+          <a:p>
+            <a:fld id="{7F6CD5E7-A5BE-4430-AD67-E129D63AAC5C}" type="slidenum">
+              <a:rPr lang="he-IL" smtClean="0"/>
+              <a:t>14</a:t>
             </a:fld>
             <a:endParaRPr lang="he-IL"/>
           </a:p>
@@ -1352,7 +1576,7 @@
 </p:notes>
 </file>
 
-<file path=ppt/notesSlides/notesSlide5.xml><?xml version="1.0" encoding="utf-8"?>
+<file path=ppt/notesSlides/notesSlide6.xml><?xml version="1.0" encoding="utf-8"?>
 <p:notes xmlns:a="http://schemas.openxmlformats.org/drawingml/2006/main" xmlns:r="http://schemas.openxmlformats.org/officeDocument/2006/relationships" xmlns:p="http://schemas.openxmlformats.org/presentationml/2006/main">
   <p:cSld>
     <p:spTree>
@@ -1448,7 +1672,7 @@
           <a:p>
             <a:fld id="{7F6CD5E7-A5BE-4430-AD67-E129D63AAC5C}" type="slidenum">
               <a:rPr lang="he-IL" smtClean="0"/>
-              <a:t>15</a:t>
+              <a:t>16</a:t>
             </a:fld>
             <a:endParaRPr lang="he-IL"/>
           </a:p>
@@ -1467,7 +1691,7 @@
 </p:notes>
 </file>
 
-<file path=ppt/notesSlides/notesSlide6.xml><?xml version="1.0" encoding="utf-8"?>
+<file path=ppt/notesSlides/notesSlide7.xml><?xml version="1.0" encoding="utf-8"?>
 <p:notes xmlns:a="http://schemas.openxmlformats.org/drawingml/2006/main" xmlns:r="http://schemas.openxmlformats.org/officeDocument/2006/relationships" xmlns:p="http://schemas.openxmlformats.org/presentationml/2006/main">
   <p:cSld>
     <p:spTree>
@@ -1563,7 +1787,7 @@
           <a:p>
             <a:fld id="{7F6CD5E7-A5BE-4430-AD67-E129D63AAC5C}" type="slidenum">
               <a:rPr lang="he-IL" smtClean="0"/>
-              <a:t>17</a:t>
+              <a:t>18</a:t>
             </a:fld>
             <a:endParaRPr lang="he-IL"/>
           </a:p>
@@ -1582,7 +1806,7 @@
 </p:notes>
 </file>
 
-<file path=ppt/notesSlides/notesSlide7.xml><?xml version="1.0" encoding="utf-8"?>
+<file path=ppt/notesSlides/notesSlide8.xml><?xml version="1.0" encoding="utf-8"?>
 <p:notes xmlns:a="http://schemas.openxmlformats.org/drawingml/2006/main" xmlns:r="http://schemas.openxmlformats.org/officeDocument/2006/relationships" xmlns:p="http://schemas.openxmlformats.org/presentationml/2006/main">
   <p:cSld>
     <p:spTree>
@@ -1678,7 +1902,7 @@
           <a:p>
             <a:fld id="{7F6CD5E7-A5BE-4430-AD67-E129D63AAC5C}" type="slidenum">
               <a:rPr lang="he-IL" smtClean="0"/>
-              <a:t>18</a:t>
+              <a:t>19</a:t>
             </a:fld>
             <a:endParaRPr lang="he-IL"/>
           </a:p>
@@ -1697,7 +1921,7 @@
 </p:notes>
 </file>
 
-<file path=ppt/notesSlides/notesSlide8.xml><?xml version="1.0" encoding="utf-8"?>
+<file path=ppt/notesSlides/notesSlide9.xml><?xml version="1.0" encoding="utf-8"?>
 <p:notes xmlns:a="http://schemas.openxmlformats.org/drawingml/2006/main" xmlns:r="http://schemas.openxmlformats.org/officeDocument/2006/relationships" xmlns:p="http://schemas.openxmlformats.org/presentationml/2006/main">
   <p:cSld>
     <p:spTree>
@@ -1793,7 +2017,7 @@
           <a:p>
             <a:fld id="{7F6CD5E7-A5BE-4430-AD67-E129D63AAC5C}" type="slidenum">
               <a:rPr lang="he-IL" smtClean="0"/>
-              <a:t>20</a:t>
+              <a:t>21</a:t>
             </a:fld>
             <a:endParaRPr lang="he-IL"/>
           </a:p>
@@ -1803,121 +2027,6 @@
     <p:extLst>
       <p:ext uri="{BB962C8B-B14F-4D97-AF65-F5344CB8AC3E}">
         <p14:creationId xmlns:p14="http://schemas.microsoft.com/office/powerpoint/2010/main" val="1174506778"/>
-      </p:ext>
-    </p:extLst>
-  </p:cSld>
-  <p:clrMapOvr>
-    <a:masterClrMapping/>
-  </p:clrMapOvr>
-</p:notes>
-</file>
-
-<file path=ppt/notesSlides/notesSlide9.xml><?xml version="1.0" encoding="utf-8"?>
-<p:notes xmlns:a="http://schemas.openxmlformats.org/drawingml/2006/main" xmlns:r="http://schemas.openxmlformats.org/officeDocument/2006/relationships" xmlns:p="http://schemas.openxmlformats.org/presentationml/2006/main">
-  <p:cSld>
-    <p:spTree>
-      <p:nvGrpSpPr>
-        <p:cNvPr id="1" name="">
-          <a:extLst>
-            <a:ext uri="{FF2B5EF4-FFF2-40B4-BE49-F238E27FC236}">
-              <a16:creationId xmlns:a16="http://schemas.microsoft.com/office/drawing/2014/main" id="{6B4DD219-5D86-EF6C-D07F-3B5EA548CC17}"/>
-            </a:ext>
-          </a:extLst>
-        </p:cNvPr>
-        <p:cNvGrpSpPr/>
-        <p:nvPr/>
-      </p:nvGrpSpPr>
-      <p:grpSpPr>
-        <a:xfrm>
-          <a:off x="0" y="0"/>
-          <a:ext cx="0" cy="0"/>
-          <a:chOff x="0" y="0"/>
-          <a:chExt cx="0" cy="0"/>
-        </a:xfrm>
-      </p:grpSpPr>
-      <p:sp>
-        <p:nvSpPr>
-          <p:cNvPr id="2" name="Slide Image Placeholder 1">
-            <a:extLst>
-              <a:ext uri="{FF2B5EF4-FFF2-40B4-BE49-F238E27FC236}">
-                <a16:creationId xmlns:a16="http://schemas.microsoft.com/office/drawing/2014/main" id="{F4F405D6-737F-0B98-5C5A-8C8384851430}"/>
-              </a:ext>
-            </a:extLst>
-          </p:cNvPr>
-          <p:cNvSpPr>
-            <a:spLocks noGrp="1" noRot="1" noChangeAspect="1"/>
-          </p:cNvSpPr>
-          <p:nvPr>
-            <p:ph type="sldImg"/>
-          </p:nvPr>
-        </p:nvSpPr>
-        <p:spPr/>
-        <p:txBody>
-          <a:bodyPr/>
-          <a:lstStyle/>
-          <a:p>
-            <a:endParaRPr lang="en-IL"/>
-          </a:p>
-        </p:txBody>
-      </p:sp>
-      <p:sp>
-        <p:nvSpPr>
-          <p:cNvPr id="3" name="Notes Placeholder 2">
-            <a:extLst>
-              <a:ext uri="{FF2B5EF4-FFF2-40B4-BE49-F238E27FC236}">
-                <a16:creationId xmlns:a16="http://schemas.microsoft.com/office/drawing/2014/main" id="{831326A5-3FFB-7341-842A-243943CE0784}"/>
-              </a:ext>
-            </a:extLst>
-          </p:cNvPr>
-          <p:cNvSpPr>
-            <a:spLocks noGrp="1"/>
-          </p:cNvSpPr>
-          <p:nvPr>
-            <p:ph type="body" idx="1"/>
-          </p:nvPr>
-        </p:nvSpPr>
-        <p:spPr/>
-        <p:txBody>
-          <a:bodyPr/>
-          <a:lstStyle/>
-          <a:p>
-            <a:endParaRPr lang="en-IL" dirty="0"/>
-          </a:p>
-        </p:txBody>
-      </p:sp>
-      <p:sp>
-        <p:nvSpPr>
-          <p:cNvPr id="4" name="Slide Number Placeholder 3">
-            <a:extLst>
-              <a:ext uri="{FF2B5EF4-FFF2-40B4-BE49-F238E27FC236}">
-                <a16:creationId xmlns:a16="http://schemas.microsoft.com/office/drawing/2014/main" id="{288EC46E-FC93-25C0-25F6-76A42270733B}"/>
-              </a:ext>
-            </a:extLst>
-          </p:cNvPr>
-          <p:cNvSpPr>
-            <a:spLocks noGrp="1"/>
-          </p:cNvSpPr>
-          <p:nvPr>
-            <p:ph type="sldNum" sz="quarter" idx="5"/>
-          </p:nvPr>
-        </p:nvSpPr>
-        <p:spPr/>
-        <p:txBody>
-          <a:bodyPr/>
-          <a:lstStyle/>
-          <a:p>
-            <a:fld id="{7F6CD5E7-A5BE-4430-AD67-E129D63AAC5C}" type="slidenum">
-              <a:rPr lang="he-IL" smtClean="0"/>
-              <a:t>21</a:t>
-            </a:fld>
-            <a:endParaRPr lang="he-IL"/>
-          </a:p>
-        </p:txBody>
-      </p:sp>
-    </p:spTree>
-    <p:extLst>
-      <p:ext uri="{BB962C8B-B14F-4D97-AF65-F5344CB8AC3E}">
-        <p14:creationId xmlns:p14="http://schemas.microsoft.com/office/powerpoint/2010/main" val="2140052368"/>
       </p:ext>
     </p:extLst>
   </p:cSld>
@@ -2113,7 +2222,7 @@
           <a:p>
             <a:fld id="{FC6B3A86-AB79-4388-8CA5-9FC4B834779B}" type="datetime8">
               <a:rPr lang="he-IL" smtClean="0"/>
-              <a:t>04 ינואר 26</a:t>
+              <a:t>05 ינואר 26</a:t>
             </a:fld>
             <a:endParaRPr lang="he-IL"/>
           </a:p>
@@ -2336,7 +2445,7 @@
           <a:p>
             <a:fld id="{18F56BC8-8E7D-4896-9980-77BC87FB8E3E}" type="datetime8">
               <a:rPr lang="he-IL" smtClean="0"/>
-              <a:t>04 ינואר 26</a:t>
+              <a:t>05 ינואר 26</a:t>
             </a:fld>
             <a:endParaRPr lang="he-IL"/>
           </a:p>
@@ -2569,7 +2678,7 @@
           <a:p>
             <a:fld id="{0FE327C8-CB36-417E-834B-544633ADCE63}" type="datetime8">
               <a:rPr lang="he-IL" smtClean="0"/>
-              <a:t>04 ינואר 26</a:t>
+              <a:t>05 ינואר 26</a:t>
             </a:fld>
             <a:endParaRPr lang="he-IL"/>
           </a:p>
@@ -2797,7 +2906,7 @@
           <a:p>
             <a:fld id="{7634CBFB-2532-48BA-BAE2-ADD925390740}" type="datetime8">
               <a:rPr lang="he-IL" smtClean="0"/>
-              <a:t>04 ינואר 26</a:t>
+              <a:t>05 ינואר 26</a:t>
             </a:fld>
             <a:endParaRPr lang="he-IL"/>
           </a:p>
@@ -3080,7 +3189,7 @@
           <a:p>
             <a:fld id="{8EAC1FDD-37C4-4A6B-BF31-779943CE32CF}" type="datetime8">
               <a:rPr lang="he-IL" smtClean="0"/>
-              <a:t>04 ינואר 26</a:t>
+              <a:t>05 ינואר 26</a:t>
             </a:fld>
             <a:endParaRPr lang="he-IL"/>
           </a:p>
@@ -3393,7 +3502,7 @@
           <a:p>
             <a:fld id="{C73C226C-A76A-4927-8F1D-1BD4AC033ABB}" type="datetime8">
               <a:rPr lang="he-IL" smtClean="0"/>
-              <a:t>04 ינואר 26</a:t>
+              <a:t>05 ינואר 26</a:t>
             </a:fld>
             <a:endParaRPr lang="he-IL"/>
           </a:p>
@@ -3896,7 +4005,7 @@
           <a:p>
             <a:fld id="{430DF2BF-D428-43E9-B36B-6DD16CF93579}" type="datetime8">
               <a:rPr lang="he-IL" smtClean="0"/>
-              <a:t>04 ינואר 26</a:t>
+              <a:t>05 ינואר 26</a:t>
             </a:fld>
             <a:endParaRPr lang="he-IL"/>
           </a:p>
@@ -4043,7 +4152,7 @@
           <a:p>
             <a:fld id="{390A9136-4922-4C74-B05C-12CD0951E601}" type="datetime8">
               <a:rPr lang="he-IL" smtClean="0"/>
-              <a:t>04 ינואר 26</a:t>
+              <a:t>05 ינואר 26</a:t>
             </a:fld>
             <a:endParaRPr lang="he-IL"/>
           </a:p>
@@ -4161,7 +4270,7 @@
           <a:p>
             <a:fld id="{C29F3CA8-2E63-412C-AA06-0D760EBE5965}" type="datetime8">
               <a:rPr lang="he-IL" smtClean="0"/>
-              <a:t>04 ינואר 26</a:t>
+              <a:t>05 ינואר 26</a:t>
             </a:fld>
             <a:endParaRPr lang="he-IL"/>
           </a:p>
@@ -4483,7 +4592,7 @@
           <a:p>
             <a:fld id="{7AC7B867-AA4A-4FF3-AD8B-0AD0F18EE595}" type="datetime8">
               <a:rPr lang="he-IL" smtClean="0"/>
-              <a:t>04 ינואר 26</a:t>
+              <a:t>05 ינואר 26</a:t>
             </a:fld>
             <a:endParaRPr lang="he-IL"/>
           </a:p>
@@ -4781,7 +4890,7 @@
           <a:p>
             <a:fld id="{F5E9EBD3-88E8-46DB-BD3B-F935B7013014}" type="datetime8">
               <a:rPr lang="he-IL" smtClean="0"/>
-              <a:t>04 ינואר 26</a:t>
+              <a:t>05 ינואר 26</a:t>
             </a:fld>
             <a:endParaRPr lang="he-IL"/>
           </a:p>
@@ -5065,7 +5174,7 @@
           <a:p>
             <a:fld id="{8E065D1C-C98B-44F5-AB2A-FEE3E85D0A94}" type="datetime8">
               <a:rPr lang="he-IL" smtClean="0"/>
-              <a:t>04 ינואר 26</a:t>
+              <a:t>05 ינואר 26</a:t>
             </a:fld>
             <a:endParaRPr lang="he-IL"/>
           </a:p>
@@ -6188,6 +6297,190 @@
         <p:cNvPr id="1" name="">
           <a:extLst>
             <a:ext uri="{FF2B5EF4-FFF2-40B4-BE49-F238E27FC236}">
+              <a16:creationId xmlns:a16="http://schemas.microsoft.com/office/drawing/2014/main" id="{2B500C0F-3996-85BD-0DC9-D5093CDDD03D}"/>
+            </a:ext>
+          </a:extLst>
+        </p:cNvPr>
+        <p:cNvGrpSpPr/>
+        <p:nvPr/>
+      </p:nvGrpSpPr>
+      <p:grpSpPr>
+        <a:xfrm>
+          <a:off x="0" y="0"/>
+          <a:ext cx="0" cy="0"/>
+          <a:chOff x="0" y="0"/>
+          <a:chExt cx="0" cy="0"/>
+        </a:xfrm>
+      </p:grpSpPr>
+      <p:sp>
+        <p:nvSpPr>
+          <p:cNvPr id="2" name="Title 1">
+            <a:extLst>
+              <a:ext uri="{FF2B5EF4-FFF2-40B4-BE49-F238E27FC236}">
+                <a16:creationId xmlns:a16="http://schemas.microsoft.com/office/drawing/2014/main" id="{9F03F8FD-3B90-9CF5-B873-C1A001615DFA}"/>
+              </a:ext>
+            </a:extLst>
+          </p:cNvPr>
+          <p:cNvSpPr>
+            <a:spLocks noGrp="1"/>
+          </p:cNvSpPr>
+          <p:nvPr>
+            <p:ph type="title"/>
+          </p:nvPr>
+        </p:nvSpPr>
+        <p:spPr/>
+        <p:txBody>
+          <a:bodyPr>
+            <a:normAutofit/>
+          </a:bodyPr>
+          <a:lstStyle/>
+          <a:p>
+            <a:r>
+              <a:rPr lang="en-GB" dirty="0"/>
+              <a:t>Workflow</a:t>
+            </a:r>
+            <a:endParaRPr lang="en-IL" dirty="0"/>
+          </a:p>
+        </p:txBody>
+      </p:sp>
+      <p:sp>
+        <p:nvSpPr>
+          <p:cNvPr id="4" name="Slide Number Placeholder 3">
+            <a:extLst>
+              <a:ext uri="{FF2B5EF4-FFF2-40B4-BE49-F238E27FC236}">
+                <a16:creationId xmlns:a16="http://schemas.microsoft.com/office/drawing/2014/main" id="{321FDFB4-095D-2E39-F873-D92B727A0390}"/>
+              </a:ext>
+            </a:extLst>
+          </p:cNvPr>
+          <p:cNvSpPr>
+            <a:spLocks noGrp="1"/>
+          </p:cNvSpPr>
+          <p:nvPr>
+            <p:ph type="sldNum" sz="quarter" idx="12"/>
+          </p:nvPr>
+        </p:nvSpPr>
+        <p:spPr/>
+        <p:txBody>
+          <a:bodyPr/>
+          <a:lstStyle/>
+          <a:p>
+            <a:fld id="{E6AB8EDD-9EF2-4633-A1C2-4D908C1019B4}" type="slidenum">
+              <a:rPr lang="he-IL" smtClean="0"/>
+              <a:t>10</a:t>
+            </a:fld>
+            <a:endParaRPr lang="he-IL"/>
+          </a:p>
+        </p:txBody>
+      </p:sp>
+      <p:pic>
+        <p:nvPicPr>
+          <p:cNvPr id="3" name="Picture 2" descr="A diagram of a system&#10;&#10;AI-generated content may be incorrect.">
+            <a:extLst>
+              <a:ext uri="{FF2B5EF4-FFF2-40B4-BE49-F238E27FC236}">
+                <a16:creationId xmlns:a16="http://schemas.microsoft.com/office/drawing/2014/main" id="{F97C2A5B-135E-8936-0AFC-AE8B6D835D74}"/>
+              </a:ext>
+            </a:extLst>
+          </p:cNvPr>
+          <p:cNvPicPr>
+            <a:picLocks noChangeAspect="1"/>
+          </p:cNvPicPr>
+          <p:nvPr/>
+        </p:nvPicPr>
+        <p:blipFill>
+          <a:blip r:embed="rId2">
+            <a:extLst>
+              <a:ext uri="{28A0092B-C50C-407E-A947-70E740481C1C}">
+                <a14:useLocalDpi xmlns:a14="http://schemas.microsoft.com/office/drawing/2010/main" val="0"/>
+              </a:ext>
+            </a:extLst>
+          </a:blip>
+          <a:stretch>
+            <a:fillRect/>
+          </a:stretch>
+        </p:blipFill>
+        <p:spPr>
+          <a:xfrm>
+            <a:off x="1109472" y="2297798"/>
+            <a:ext cx="9924288" cy="2350401"/>
+          </a:xfrm>
+          <a:prstGeom prst="rect">
+            <a:avLst/>
+          </a:prstGeom>
+        </p:spPr>
+      </p:pic>
+      <p:sp>
+        <p:nvSpPr>
+          <p:cNvPr id="6" name="Rectangle: Rounded Corners 5">
+            <a:extLst>
+              <a:ext uri="{FF2B5EF4-FFF2-40B4-BE49-F238E27FC236}">
+                <a16:creationId xmlns:a16="http://schemas.microsoft.com/office/drawing/2014/main" id="{2FFFF692-13BA-3886-D028-6ADCD4B08044}"/>
+              </a:ext>
+            </a:extLst>
+          </p:cNvPr>
+          <p:cNvSpPr/>
+          <p:nvPr/>
+        </p:nvSpPr>
+        <p:spPr>
+          <a:xfrm>
+            <a:off x="8959850" y="2190750"/>
+            <a:ext cx="2275078" cy="1016000"/>
+          </a:xfrm>
+          <a:prstGeom prst="roundRect">
+            <a:avLst/>
+          </a:prstGeom>
+          <a:noFill/>
+          <a:ln w="38100">
+            <a:solidFill>
+              <a:srgbClr val="FF4343"/>
+            </a:solidFill>
+          </a:ln>
+        </p:spPr>
+        <p:style>
+          <a:lnRef idx="2">
+            <a:schemeClr val="accent1">
+              <a:shade val="15000"/>
+            </a:schemeClr>
+          </a:lnRef>
+          <a:fillRef idx="1">
+            <a:schemeClr val="accent1"/>
+          </a:fillRef>
+          <a:effectRef idx="0">
+            <a:schemeClr val="accent1"/>
+          </a:effectRef>
+          <a:fontRef idx="minor">
+            <a:schemeClr val="lt1"/>
+          </a:fontRef>
+        </p:style>
+        <p:txBody>
+          <a:bodyPr rtlCol="0" anchor="ctr"/>
+          <a:lstStyle/>
+          <a:p>
+            <a:pPr algn="ctr"/>
+            <a:endParaRPr lang="en-IL" dirty="0"/>
+          </a:p>
+        </p:txBody>
+      </p:sp>
+    </p:spTree>
+    <p:extLst>
+      <p:ext uri="{BB962C8B-B14F-4D97-AF65-F5344CB8AC3E}">
+        <p14:creationId xmlns:p14="http://schemas.microsoft.com/office/powerpoint/2010/main" val="3429437932"/>
+      </p:ext>
+    </p:extLst>
+  </p:cSld>
+  <p:clrMapOvr>
+    <a:masterClrMapping/>
+  </p:clrMapOvr>
+</p:sld>
+</file>
+
+<file path=ppt/slides/slide11.xml><?xml version="1.0" encoding="utf-8"?>
+<p:sld xmlns:a="http://schemas.openxmlformats.org/drawingml/2006/main" xmlns:r="http://schemas.openxmlformats.org/officeDocument/2006/relationships" xmlns:p="http://schemas.openxmlformats.org/presentationml/2006/main">
+  <p:cSld>
+    <p:spTree>
+      <p:nvGrpSpPr>
+        <p:cNvPr id="1" name="">
+          <a:extLst>
+            <a:ext uri="{FF2B5EF4-FFF2-40B4-BE49-F238E27FC236}">
               <a16:creationId xmlns:a16="http://schemas.microsoft.com/office/drawing/2014/main" id="{51AF6EA1-FAAD-E397-A58E-4820223D23C7}"/>
             </a:ext>
           </a:extLst>
@@ -6331,7 +6624,7 @@
           <a:p>
             <a:fld id="{E6AB8EDD-9EF2-4633-A1C2-4D908C1019B4}" type="slidenum">
               <a:rPr lang="he-IL" smtClean="0"/>
-              <a:t>10</a:t>
+              <a:t>11</a:t>
             </a:fld>
             <a:endParaRPr lang="he-IL"/>
           </a:p>
@@ -6350,7 +6643,7 @@
 </p:sld>
 </file>
 
-<file path=ppt/slides/slide11.xml><?xml version="1.0" encoding="utf-8"?>
+<file path=ppt/slides/slide12.xml><?xml version="1.0" encoding="utf-8"?>
 <p:sld xmlns:a="http://schemas.openxmlformats.org/drawingml/2006/main" xmlns:r="http://schemas.openxmlformats.org/officeDocument/2006/relationships" xmlns:p="http://schemas.openxmlformats.org/presentationml/2006/main">
   <p:cSld>
     <p:spTree>
@@ -6522,7 +6815,7 @@
           <a:p>
             <a:fld id="{E6AB8EDD-9EF2-4633-A1C2-4D908C1019B4}" type="slidenum">
               <a:rPr lang="he-IL" smtClean="0"/>
-              <a:t>11</a:t>
+              <a:t>12</a:t>
             </a:fld>
             <a:endParaRPr lang="he-IL"/>
           </a:p>
@@ -6541,7 +6834,7 @@
 </p:sld>
 </file>
 
-<file path=ppt/slides/slide12.xml><?xml version="1.0" encoding="utf-8"?>
+<file path=ppt/slides/slide13.xml><?xml version="1.0" encoding="utf-8"?>
 <p:sld xmlns:a="http://schemas.openxmlformats.org/drawingml/2006/main" xmlns:r="http://schemas.openxmlformats.org/officeDocument/2006/relationships" xmlns:p="http://schemas.openxmlformats.org/presentationml/2006/main">
   <p:cSld>
     <p:spTree>
@@ -6618,7 +6911,7 @@
           <a:p>
             <a:fld id="{E6AB8EDD-9EF2-4633-A1C2-4D908C1019B4}" type="slidenum">
               <a:rPr lang="he-IL" smtClean="0"/>
-              <a:t>12</a:t>
+              <a:t>13</a:t>
             </a:fld>
             <a:endParaRPr lang="he-IL"/>
           </a:p>
@@ -6725,7 +7018,7 @@
 </p:sld>
 </file>
 
-<file path=ppt/slides/slide13.xml><?xml version="1.0" encoding="utf-8"?>
+<file path=ppt/slides/slide14.xml><?xml version="1.0" encoding="utf-8"?>
 <p:sld xmlns:a="http://schemas.openxmlformats.org/drawingml/2006/main" xmlns:r="http://schemas.openxmlformats.org/officeDocument/2006/relationships" xmlns:p="http://schemas.openxmlformats.org/presentationml/2006/main">
   <p:cSld>
     <p:spTree>
@@ -6900,7 +7193,7 @@
           <a:p>
             <a:fld id="{E6AB8EDD-9EF2-4633-A1C2-4D908C1019B4}" type="slidenum">
               <a:rPr lang="he-IL" smtClean="0"/>
-              <a:t>13</a:t>
+              <a:t>14</a:t>
             </a:fld>
             <a:endParaRPr lang="he-IL"/>
           </a:p>
@@ -6919,7 +7212,7 @@
 </p:sld>
 </file>
 
-<file path=ppt/slides/slide14.xml><?xml version="1.0" encoding="utf-8"?>
+<file path=ppt/slides/slide15.xml><?xml version="1.0" encoding="utf-8"?>
 <p:sld xmlns:a="http://schemas.openxmlformats.org/drawingml/2006/main" xmlns:r="http://schemas.openxmlformats.org/officeDocument/2006/relationships" xmlns:p="http://schemas.openxmlformats.org/presentationml/2006/main">
   <p:cSld>
     <p:spTree>
@@ -6996,7 +7289,7 @@
           <a:p>
             <a:fld id="{E6AB8EDD-9EF2-4633-A1C2-4D908C1019B4}" type="slidenum">
               <a:rPr lang="he-IL" smtClean="0"/>
-              <a:t>14</a:t>
+              <a:t>15</a:t>
             </a:fld>
             <a:endParaRPr lang="he-IL"/>
           </a:p>
@@ -7103,7 +7396,7 @@
 </p:sld>
 </file>
 
-<file path=ppt/slides/slide15.xml><?xml version="1.0" encoding="utf-8"?>
+<file path=ppt/slides/slide16.xml><?xml version="1.0" encoding="utf-8"?>
 <p:sld xmlns:a="http://schemas.openxmlformats.org/drawingml/2006/main" xmlns:r="http://schemas.openxmlformats.org/officeDocument/2006/relationships" xmlns:p="http://schemas.openxmlformats.org/presentationml/2006/main">
   <p:cSld>
     <p:spTree>
@@ -7233,7 +7526,7 @@
           <a:p>
             <a:fld id="{E6AB8EDD-9EF2-4633-A1C2-4D908C1019B4}" type="slidenum">
               <a:rPr lang="he-IL" smtClean="0"/>
-              <a:t>15</a:t>
+              <a:t>16</a:t>
             </a:fld>
             <a:endParaRPr lang="he-IL"/>
           </a:p>
@@ -7252,7 +7545,7 @@
 </p:sld>
 </file>
 
-<file path=ppt/slides/slide16.xml><?xml version="1.0" encoding="utf-8"?>
+<file path=ppt/slides/slide17.xml><?xml version="1.0" encoding="utf-8"?>
 <p:sld xmlns:a="http://schemas.openxmlformats.org/drawingml/2006/main" xmlns:r="http://schemas.openxmlformats.org/officeDocument/2006/relationships" xmlns:p="http://schemas.openxmlformats.org/presentationml/2006/main">
   <p:cSld>
     <p:spTree>
@@ -7329,7 +7622,7 @@
           <a:p>
             <a:fld id="{E6AB8EDD-9EF2-4633-A1C2-4D908C1019B4}" type="slidenum">
               <a:rPr lang="he-IL" smtClean="0"/>
-              <a:t>16</a:t>
+              <a:t>17</a:t>
             </a:fld>
             <a:endParaRPr lang="he-IL"/>
           </a:p>
@@ -7436,7 +7729,7 @@
 </p:sld>
 </file>
 
-<file path=ppt/slides/slide17.xml><?xml version="1.0" encoding="utf-8"?>
+<file path=ppt/slides/slide18.xml><?xml version="1.0" encoding="utf-8"?>
 <p:sld xmlns:a="http://schemas.openxmlformats.org/drawingml/2006/main" xmlns:r="http://schemas.openxmlformats.org/officeDocument/2006/relationships" xmlns:p="http://schemas.openxmlformats.org/presentationml/2006/main">
   <p:cSld>
     <p:spTree>
@@ -7610,7 +7903,7 @@
           <a:p>
             <a:fld id="{E6AB8EDD-9EF2-4633-A1C2-4D908C1019B4}" type="slidenum">
               <a:rPr lang="he-IL" smtClean="0"/>
-              <a:t>17</a:t>
+              <a:t>18</a:t>
             </a:fld>
             <a:endParaRPr lang="he-IL"/>
           </a:p>
@@ -7629,7 +7922,7 @@
 </p:sld>
 </file>
 
-<file path=ppt/slides/slide18.xml><?xml version="1.0" encoding="utf-8"?>
+<file path=ppt/slides/slide19.xml><?xml version="1.0" encoding="utf-8"?>
 <p:sld xmlns:a="http://schemas.openxmlformats.org/drawingml/2006/main" xmlns:r="http://schemas.openxmlformats.org/officeDocument/2006/relationships" xmlns:p="http://schemas.openxmlformats.org/presentationml/2006/main">
   <p:cSld>
     <p:spTree>
@@ -7711,7 +8004,7 @@
           <a:p>
             <a:fld id="{E6AB8EDD-9EF2-4633-A1C2-4D908C1019B4}" type="slidenum">
               <a:rPr lang="he-IL" smtClean="0"/>
-              <a:t>18</a:t>
+              <a:t>19</a:t>
             </a:fld>
             <a:endParaRPr lang="he-IL"/>
           </a:p>
@@ -7756,190 +8049,6 @@
     <p:extLst>
       <p:ext uri="{BB962C8B-B14F-4D97-AF65-F5344CB8AC3E}">
         <p14:creationId xmlns:p14="http://schemas.microsoft.com/office/powerpoint/2010/main" val="2067841345"/>
-      </p:ext>
-    </p:extLst>
-  </p:cSld>
-  <p:clrMapOvr>
-    <a:masterClrMapping/>
-  </p:clrMapOvr>
-</p:sld>
-</file>
-
-<file path=ppt/slides/slide19.xml><?xml version="1.0" encoding="utf-8"?>
-<p:sld xmlns:a="http://schemas.openxmlformats.org/drawingml/2006/main" xmlns:r="http://schemas.openxmlformats.org/officeDocument/2006/relationships" xmlns:p="http://schemas.openxmlformats.org/presentationml/2006/main">
-  <p:cSld>
-    <p:spTree>
-      <p:nvGrpSpPr>
-        <p:cNvPr id="1" name="">
-          <a:extLst>
-            <a:ext uri="{FF2B5EF4-FFF2-40B4-BE49-F238E27FC236}">
-              <a16:creationId xmlns:a16="http://schemas.microsoft.com/office/drawing/2014/main" id="{3051E4DB-33D4-3886-E9B4-2B5F43C86DBC}"/>
-            </a:ext>
-          </a:extLst>
-        </p:cNvPr>
-        <p:cNvGrpSpPr/>
-        <p:nvPr/>
-      </p:nvGrpSpPr>
-      <p:grpSpPr>
-        <a:xfrm>
-          <a:off x="0" y="0"/>
-          <a:ext cx="0" cy="0"/>
-          <a:chOff x="0" y="0"/>
-          <a:chExt cx="0" cy="0"/>
-        </a:xfrm>
-      </p:grpSpPr>
-      <p:sp>
-        <p:nvSpPr>
-          <p:cNvPr id="2" name="Title 1">
-            <a:extLst>
-              <a:ext uri="{FF2B5EF4-FFF2-40B4-BE49-F238E27FC236}">
-                <a16:creationId xmlns:a16="http://schemas.microsoft.com/office/drawing/2014/main" id="{34E28D8F-0758-9222-0A12-759FFCC51C04}"/>
-              </a:ext>
-            </a:extLst>
-          </p:cNvPr>
-          <p:cNvSpPr>
-            <a:spLocks noGrp="1"/>
-          </p:cNvSpPr>
-          <p:nvPr>
-            <p:ph type="title"/>
-          </p:nvPr>
-        </p:nvSpPr>
-        <p:spPr/>
-        <p:txBody>
-          <a:bodyPr>
-            <a:normAutofit/>
-          </a:bodyPr>
-          <a:lstStyle/>
-          <a:p>
-            <a:r>
-              <a:rPr lang="en-GB" dirty="0"/>
-              <a:t>Workflow</a:t>
-            </a:r>
-            <a:endParaRPr lang="en-IL" dirty="0"/>
-          </a:p>
-        </p:txBody>
-      </p:sp>
-      <p:sp>
-        <p:nvSpPr>
-          <p:cNvPr id="4" name="Slide Number Placeholder 3">
-            <a:extLst>
-              <a:ext uri="{FF2B5EF4-FFF2-40B4-BE49-F238E27FC236}">
-                <a16:creationId xmlns:a16="http://schemas.microsoft.com/office/drawing/2014/main" id="{02AB77B4-1130-22BF-E743-AEA412A7E7D7}"/>
-              </a:ext>
-            </a:extLst>
-          </p:cNvPr>
-          <p:cNvSpPr>
-            <a:spLocks noGrp="1"/>
-          </p:cNvSpPr>
-          <p:nvPr>
-            <p:ph type="sldNum" sz="quarter" idx="12"/>
-          </p:nvPr>
-        </p:nvSpPr>
-        <p:spPr/>
-        <p:txBody>
-          <a:bodyPr/>
-          <a:lstStyle/>
-          <a:p>
-            <a:fld id="{E6AB8EDD-9EF2-4633-A1C2-4D908C1019B4}" type="slidenum">
-              <a:rPr lang="he-IL" smtClean="0"/>
-              <a:t>19</a:t>
-            </a:fld>
-            <a:endParaRPr lang="he-IL"/>
-          </a:p>
-        </p:txBody>
-      </p:sp>
-      <p:pic>
-        <p:nvPicPr>
-          <p:cNvPr id="3" name="Picture 2" descr="A diagram of a system&#10;&#10;AI-generated content may be incorrect.">
-            <a:extLst>
-              <a:ext uri="{FF2B5EF4-FFF2-40B4-BE49-F238E27FC236}">
-                <a16:creationId xmlns:a16="http://schemas.microsoft.com/office/drawing/2014/main" id="{839BB112-0EFF-BAFA-E635-ECF2AD26369D}"/>
-              </a:ext>
-            </a:extLst>
-          </p:cNvPr>
-          <p:cNvPicPr>
-            <a:picLocks noChangeAspect="1"/>
-          </p:cNvPicPr>
-          <p:nvPr/>
-        </p:nvPicPr>
-        <p:blipFill>
-          <a:blip r:embed="rId2">
-            <a:extLst>
-              <a:ext uri="{28A0092B-C50C-407E-A947-70E740481C1C}">
-                <a14:useLocalDpi xmlns:a14="http://schemas.microsoft.com/office/drawing/2010/main" val="0"/>
-              </a:ext>
-            </a:extLst>
-          </a:blip>
-          <a:stretch>
-            <a:fillRect/>
-          </a:stretch>
-        </p:blipFill>
-        <p:spPr>
-          <a:xfrm>
-            <a:off x="1109472" y="2297798"/>
-            <a:ext cx="9924288" cy="2350401"/>
-          </a:xfrm>
-          <a:prstGeom prst="rect">
-            <a:avLst/>
-          </a:prstGeom>
-        </p:spPr>
-      </p:pic>
-      <p:sp>
-        <p:nvSpPr>
-          <p:cNvPr id="6" name="Rectangle: Rounded Corners 5">
-            <a:extLst>
-              <a:ext uri="{FF2B5EF4-FFF2-40B4-BE49-F238E27FC236}">
-                <a16:creationId xmlns:a16="http://schemas.microsoft.com/office/drawing/2014/main" id="{552E5A72-2538-7924-BCE4-577C751C5E8A}"/>
-              </a:ext>
-            </a:extLst>
-          </p:cNvPr>
-          <p:cNvSpPr/>
-          <p:nvPr/>
-        </p:nvSpPr>
-        <p:spPr>
-          <a:xfrm>
-            <a:off x="8943541" y="3721100"/>
-            <a:ext cx="2205228" cy="1016000"/>
-          </a:xfrm>
-          <a:prstGeom prst="roundRect">
-            <a:avLst/>
-          </a:prstGeom>
-          <a:noFill/>
-          <a:ln w="38100">
-            <a:solidFill>
-              <a:srgbClr val="FF4343"/>
-            </a:solidFill>
-          </a:ln>
-        </p:spPr>
-        <p:style>
-          <a:lnRef idx="2">
-            <a:schemeClr val="accent1">
-              <a:shade val="15000"/>
-            </a:schemeClr>
-          </a:lnRef>
-          <a:fillRef idx="1">
-            <a:schemeClr val="accent1"/>
-          </a:fillRef>
-          <a:effectRef idx="0">
-            <a:schemeClr val="accent1"/>
-          </a:effectRef>
-          <a:fontRef idx="minor">
-            <a:schemeClr val="lt1"/>
-          </a:fontRef>
-        </p:style>
-        <p:txBody>
-          <a:bodyPr rtlCol="0" anchor="ctr"/>
-          <a:lstStyle/>
-          <a:p>
-            <a:pPr algn="ctr"/>
-            <a:endParaRPr lang="en-IL" dirty="0"/>
-          </a:p>
-        </p:txBody>
-      </p:sp>
-    </p:spTree>
-    <p:extLst>
-      <p:ext uri="{BB962C8B-B14F-4D97-AF65-F5344CB8AC3E}">
-        <p14:creationId xmlns:p14="http://schemas.microsoft.com/office/powerpoint/2010/main" val="4087044995"/>
       </p:ext>
     </p:extLst>
   </p:cSld>
@@ -8039,26 +8148,70 @@
           <a:p>
             <a:r>
               <a:rPr lang="en-GB" sz="3900" dirty="0"/>
-              <a:t>Social media serves as the modern public square but is increasingly exploited by IOs.</a:t>
+              <a:t>Social media is the modern public square BUT increasingly exploited by IO.</a:t>
             </a:r>
           </a:p>
           <a:p>
             <a:r>
               <a:rPr lang="en-GB" sz="3900" dirty="0"/>
-              <a:t>IOs rely on Coordinated Inauthentic Behavior (CIB) to amplify narratives and distort public discourse.</a:t>
-            </a:r>
-          </a:p>
-          <a:p>
+              <a:t>The Problem:</a:t>
+            </a:r>
+          </a:p>
+          <a:p>
+            <a:pPr lvl="1">
+              <a:buFontTx/>
+              <a:buChar char="-"/>
+            </a:pPr>
             <a:r>
               <a:rPr lang="en-GB" sz="3900" dirty="0"/>
-              <a:t>Large language models (LLMs) can generate fluent, human-like content, limiting the discriminative power of semantic features alone.</a:t>
-            </a:r>
-          </a:p>
-          <a:p>
+              <a:t>LLMs make content detection harder.</a:t>
+            </a:r>
+          </a:p>
+          <a:p>
+            <a:pPr lvl="1">
+              <a:buFontTx/>
+              <a:buChar char="-"/>
+            </a:pPr>
             <a:r>
               <a:rPr lang="en-GB" sz="3900" dirty="0"/>
-              <a:t>We therefore aim to identify IO actors using structural features and coordination patterns in online discourse.</a:t>
-            </a:r>
+              <a:t>Traditional semantic features are no longer enough.</a:t>
+            </a:r>
+          </a:p>
+          <a:p>
+            <a:r>
+              <a:rPr lang="en-GB" sz="3900" dirty="0"/>
+              <a:t>Our Approach:</a:t>
+            </a:r>
+          </a:p>
+          <a:p>
+            <a:pPr lvl="1">
+              <a:buFontTx/>
+              <a:buChar char="-"/>
+            </a:pPr>
+            <a:r>
+              <a:rPr lang="en-GB" sz="3900" dirty="0"/>
+              <a:t>Focus on WHO acts, not WHAT they say</a:t>
+            </a:r>
+          </a:p>
+          <a:p>
+            <a:pPr lvl="1">
+              <a:buFontTx/>
+              <a:buChar char="-"/>
+            </a:pPr>
+            <a:r>
+              <a:rPr lang="en-GB" sz="3900" dirty="0"/>
+              <a:t>Structural features + coordination patterns</a:t>
+            </a:r>
+          </a:p>
+          <a:p>
+            <a:endParaRPr lang="en-US" sz="3900" dirty="0"/>
+          </a:p>
+          <a:p>
+            <a:pPr lvl="1">
+              <a:buFontTx/>
+              <a:buChar char="-"/>
+            </a:pPr>
+            <a:endParaRPr lang="en-GB" sz="3500" dirty="0"/>
           </a:p>
           <a:p>
             <a:endParaRPr lang="en-GB" sz="3600" dirty="0">
@@ -8118,6 +8271,190 @@
 </file>
 
 <file path=ppt/slides/slide20.xml><?xml version="1.0" encoding="utf-8"?>
+<p:sld xmlns:a="http://schemas.openxmlformats.org/drawingml/2006/main" xmlns:r="http://schemas.openxmlformats.org/officeDocument/2006/relationships" xmlns:p="http://schemas.openxmlformats.org/presentationml/2006/main">
+  <p:cSld>
+    <p:spTree>
+      <p:nvGrpSpPr>
+        <p:cNvPr id="1" name="">
+          <a:extLst>
+            <a:ext uri="{FF2B5EF4-FFF2-40B4-BE49-F238E27FC236}">
+              <a16:creationId xmlns:a16="http://schemas.microsoft.com/office/drawing/2014/main" id="{3051E4DB-33D4-3886-E9B4-2B5F43C86DBC}"/>
+            </a:ext>
+          </a:extLst>
+        </p:cNvPr>
+        <p:cNvGrpSpPr/>
+        <p:nvPr/>
+      </p:nvGrpSpPr>
+      <p:grpSpPr>
+        <a:xfrm>
+          <a:off x="0" y="0"/>
+          <a:ext cx="0" cy="0"/>
+          <a:chOff x="0" y="0"/>
+          <a:chExt cx="0" cy="0"/>
+        </a:xfrm>
+      </p:grpSpPr>
+      <p:sp>
+        <p:nvSpPr>
+          <p:cNvPr id="2" name="Title 1">
+            <a:extLst>
+              <a:ext uri="{FF2B5EF4-FFF2-40B4-BE49-F238E27FC236}">
+                <a16:creationId xmlns:a16="http://schemas.microsoft.com/office/drawing/2014/main" id="{34E28D8F-0758-9222-0A12-759FFCC51C04}"/>
+              </a:ext>
+            </a:extLst>
+          </p:cNvPr>
+          <p:cNvSpPr>
+            <a:spLocks noGrp="1"/>
+          </p:cNvSpPr>
+          <p:nvPr>
+            <p:ph type="title"/>
+          </p:nvPr>
+        </p:nvSpPr>
+        <p:spPr/>
+        <p:txBody>
+          <a:bodyPr>
+            <a:normAutofit/>
+          </a:bodyPr>
+          <a:lstStyle/>
+          <a:p>
+            <a:r>
+              <a:rPr lang="en-GB" dirty="0"/>
+              <a:t>Workflow</a:t>
+            </a:r>
+            <a:endParaRPr lang="en-IL" dirty="0"/>
+          </a:p>
+        </p:txBody>
+      </p:sp>
+      <p:sp>
+        <p:nvSpPr>
+          <p:cNvPr id="4" name="Slide Number Placeholder 3">
+            <a:extLst>
+              <a:ext uri="{FF2B5EF4-FFF2-40B4-BE49-F238E27FC236}">
+                <a16:creationId xmlns:a16="http://schemas.microsoft.com/office/drawing/2014/main" id="{02AB77B4-1130-22BF-E743-AEA412A7E7D7}"/>
+              </a:ext>
+            </a:extLst>
+          </p:cNvPr>
+          <p:cNvSpPr>
+            <a:spLocks noGrp="1"/>
+          </p:cNvSpPr>
+          <p:nvPr>
+            <p:ph type="sldNum" sz="quarter" idx="12"/>
+          </p:nvPr>
+        </p:nvSpPr>
+        <p:spPr/>
+        <p:txBody>
+          <a:bodyPr/>
+          <a:lstStyle/>
+          <a:p>
+            <a:fld id="{E6AB8EDD-9EF2-4633-A1C2-4D908C1019B4}" type="slidenum">
+              <a:rPr lang="he-IL" smtClean="0"/>
+              <a:t>20</a:t>
+            </a:fld>
+            <a:endParaRPr lang="he-IL"/>
+          </a:p>
+        </p:txBody>
+      </p:sp>
+      <p:pic>
+        <p:nvPicPr>
+          <p:cNvPr id="3" name="Picture 2" descr="A diagram of a system&#10;&#10;AI-generated content may be incorrect.">
+            <a:extLst>
+              <a:ext uri="{FF2B5EF4-FFF2-40B4-BE49-F238E27FC236}">
+                <a16:creationId xmlns:a16="http://schemas.microsoft.com/office/drawing/2014/main" id="{839BB112-0EFF-BAFA-E635-ECF2AD26369D}"/>
+              </a:ext>
+            </a:extLst>
+          </p:cNvPr>
+          <p:cNvPicPr>
+            <a:picLocks noChangeAspect="1"/>
+          </p:cNvPicPr>
+          <p:nvPr/>
+        </p:nvPicPr>
+        <p:blipFill>
+          <a:blip r:embed="rId2">
+            <a:extLst>
+              <a:ext uri="{28A0092B-C50C-407E-A947-70E740481C1C}">
+                <a14:useLocalDpi xmlns:a14="http://schemas.microsoft.com/office/drawing/2010/main" val="0"/>
+              </a:ext>
+            </a:extLst>
+          </a:blip>
+          <a:stretch>
+            <a:fillRect/>
+          </a:stretch>
+        </p:blipFill>
+        <p:spPr>
+          <a:xfrm>
+            <a:off x="1109472" y="2297798"/>
+            <a:ext cx="9924288" cy="2350401"/>
+          </a:xfrm>
+          <a:prstGeom prst="rect">
+            <a:avLst/>
+          </a:prstGeom>
+        </p:spPr>
+      </p:pic>
+      <p:sp>
+        <p:nvSpPr>
+          <p:cNvPr id="6" name="Rectangle: Rounded Corners 5">
+            <a:extLst>
+              <a:ext uri="{FF2B5EF4-FFF2-40B4-BE49-F238E27FC236}">
+                <a16:creationId xmlns:a16="http://schemas.microsoft.com/office/drawing/2014/main" id="{552E5A72-2538-7924-BCE4-577C751C5E8A}"/>
+              </a:ext>
+            </a:extLst>
+          </p:cNvPr>
+          <p:cNvSpPr/>
+          <p:nvPr/>
+        </p:nvSpPr>
+        <p:spPr>
+          <a:xfrm>
+            <a:off x="8943541" y="3721100"/>
+            <a:ext cx="2205228" cy="1016000"/>
+          </a:xfrm>
+          <a:prstGeom prst="roundRect">
+            <a:avLst/>
+          </a:prstGeom>
+          <a:noFill/>
+          <a:ln w="38100">
+            <a:solidFill>
+              <a:srgbClr val="FF4343"/>
+            </a:solidFill>
+          </a:ln>
+        </p:spPr>
+        <p:style>
+          <a:lnRef idx="2">
+            <a:schemeClr val="accent1">
+              <a:shade val="15000"/>
+            </a:schemeClr>
+          </a:lnRef>
+          <a:fillRef idx="1">
+            <a:schemeClr val="accent1"/>
+          </a:fillRef>
+          <a:effectRef idx="0">
+            <a:schemeClr val="accent1"/>
+          </a:effectRef>
+          <a:fontRef idx="minor">
+            <a:schemeClr val="lt1"/>
+          </a:fontRef>
+        </p:style>
+        <p:txBody>
+          <a:bodyPr rtlCol="0" anchor="ctr"/>
+          <a:lstStyle/>
+          <a:p>
+            <a:pPr algn="ctr"/>
+            <a:endParaRPr lang="en-IL" dirty="0"/>
+          </a:p>
+        </p:txBody>
+      </p:sp>
+    </p:spTree>
+    <p:extLst>
+      <p:ext uri="{BB962C8B-B14F-4D97-AF65-F5344CB8AC3E}">
+        <p14:creationId xmlns:p14="http://schemas.microsoft.com/office/powerpoint/2010/main" val="4087044995"/>
+      </p:ext>
+    </p:extLst>
+  </p:cSld>
+  <p:clrMapOvr>
+    <a:masterClrMapping/>
+  </p:clrMapOvr>
+</p:sld>
+</file>
+
+<file path=ppt/slides/slide21.xml><?xml version="1.0" encoding="utf-8"?>
 <p:sld xmlns:a="http://schemas.openxmlformats.org/drawingml/2006/main" xmlns:r="http://schemas.openxmlformats.org/officeDocument/2006/relationships" xmlns:p="http://schemas.openxmlformats.org/presentationml/2006/main">
   <p:cSld>
     <p:spTree>
@@ -8253,7 +8590,7 @@
           <a:p>
             <a:fld id="{E6AB8EDD-9EF2-4633-A1C2-4D908C1019B4}" type="slidenum">
               <a:rPr lang="he-IL" smtClean="0"/>
-              <a:t>20</a:t>
+              <a:t>21</a:t>
             </a:fld>
             <a:endParaRPr lang="he-IL"/>
           </a:p>
@@ -8272,7 +8609,7 @@
 </p:sld>
 </file>
 
-<file path=ppt/slides/slide21.xml><?xml version="1.0" encoding="utf-8"?>
+<file path=ppt/slides/slide22.xml><?xml version="1.0" encoding="utf-8"?>
 <p:sld xmlns:a="http://schemas.openxmlformats.org/drawingml/2006/main" xmlns:r="http://schemas.openxmlformats.org/officeDocument/2006/relationships" xmlns:p="http://schemas.openxmlformats.org/presentationml/2006/main">
   <p:cSld>
     <p:spTree>
@@ -8354,7 +8691,7 @@
           <a:p>
             <a:fld id="{E6AB8EDD-9EF2-4633-A1C2-4D908C1019B4}" type="slidenum">
               <a:rPr lang="he-IL" smtClean="0"/>
-              <a:t>21</a:t>
+              <a:t>22</a:t>
             </a:fld>
             <a:endParaRPr lang="he-IL"/>
           </a:p>
@@ -8409,11 +8746,17 @@
 </file>
 
 <file path=ppt/slides/slide3.xml><?xml version="1.0" encoding="utf-8"?>
-<p:sld xmlns:a="http://schemas.openxmlformats.org/drawingml/2006/main" xmlns:r="http://schemas.openxmlformats.org/officeDocument/2006/relationships" xmlns:p="http://schemas.openxmlformats.org/presentationml/2006/main">
+<p:sld xmlns:a="http://schemas.openxmlformats.org/drawingml/2006/main" xmlns:r="http://schemas.openxmlformats.org/officeDocument/2006/relationships" xmlns:p="http://schemas.openxmlformats.org/presentationml/2006/main" show="0">
   <p:cSld>
     <p:spTree>
       <p:nvGrpSpPr>
-        <p:cNvPr id="1" name=""/>
+        <p:cNvPr id="1" name="">
+          <a:extLst>
+            <a:ext uri="{FF2B5EF4-FFF2-40B4-BE49-F238E27FC236}">
+              <a16:creationId xmlns:a16="http://schemas.microsoft.com/office/drawing/2014/main" id="{883ADC35-446C-6244-68C0-AB19DC69C5F0}"/>
+            </a:ext>
+          </a:extLst>
+        </p:cNvPr>
         <p:cNvGrpSpPr/>
         <p:nvPr/>
       </p:nvGrpSpPr>
@@ -8430,7 +8773,7 @@
           <p:cNvPr id="2" name="Title 1">
             <a:extLst>
               <a:ext uri="{FF2B5EF4-FFF2-40B4-BE49-F238E27FC236}">
-                <a16:creationId xmlns:a16="http://schemas.microsoft.com/office/drawing/2014/main" id="{090E9894-1986-0EB3-10CB-47FFB17FD73D}"/>
+                <a16:creationId xmlns:a16="http://schemas.microsoft.com/office/drawing/2014/main" id="{CB3F7731-A5D6-A5D6-B947-8809B148BC37}"/>
               </a:ext>
             </a:extLst>
           </p:cNvPr>
@@ -8450,7 +8793,7 @@
           <a:p>
             <a:r>
               <a:rPr lang="en-GB" dirty="0"/>
-              <a:t>Main Ideas</a:t>
+              <a:t>Introduction</a:t>
             </a:r>
             <a:endParaRPr lang="en-IL" dirty="0"/>
           </a:p>
@@ -8461,7 +8804,7 @@
           <p:cNvPr id="3" name="Content Placeholder 2">
             <a:extLst>
               <a:ext uri="{FF2B5EF4-FFF2-40B4-BE49-F238E27FC236}">
-                <a16:creationId xmlns:a16="http://schemas.microsoft.com/office/drawing/2014/main" id="{EE5A14D0-C167-09F1-B20E-C7C9A17B6E53}"/>
+                <a16:creationId xmlns:a16="http://schemas.microsoft.com/office/drawing/2014/main" id="{FA84AA17-52A5-C4E4-4B3C-968711677CB3}"/>
               </a:ext>
             </a:extLst>
           </p:cNvPr>
@@ -8472,49 +8815,58 @@
             <p:ph idx="1"/>
           </p:nvPr>
         </p:nvSpPr>
-        <p:spPr/>
+        <p:spPr>
+          <a:xfrm>
+            <a:off x="1243087" y="1825625"/>
+            <a:ext cx="10582656" cy="4491356"/>
+          </a:xfrm>
+        </p:spPr>
         <p:txBody>
           <a:bodyPr>
-            <a:normAutofit fontScale="92500" lnSpcReduction="10000"/>
+            <a:normAutofit fontScale="77500" lnSpcReduction="20000"/>
           </a:bodyPr>
           <a:lstStyle/>
           <a:p>
             <a:r>
-              <a:rPr lang="en-GB" sz="3600" dirty="0"/>
-              <a:t>Aim to accurate identification of IO (information operation) authors.</a:t>
-            </a:r>
+              <a:rPr lang="en-GB" sz="3900" dirty="0"/>
+              <a:t>Information Operations (IOs) definition: A set of actors performing similar or complementary actions in pursuit of a common intent, while misleading others.</a:t>
+            </a:r>
+          </a:p>
+          <a:p>
+            <a:r>
+              <a:rPr lang="en-GB" sz="3900" dirty="0"/>
+              <a:t>Social media serves as the modern public square but is increasingly exploited by IOs.</a:t>
+            </a:r>
+          </a:p>
+          <a:p>
+            <a:r>
+              <a:rPr lang="en-GB" sz="3900" dirty="0"/>
+              <a:t>IOs rely on Coordinated Inauthentic Behavior (CIB) to amplify narratives and distort public discourse.</a:t>
+            </a:r>
+          </a:p>
+          <a:p>
+            <a:r>
+              <a:rPr lang="en-GB" sz="3900" dirty="0"/>
+              <a:t>Large language models (LLMs) can generate fluent, human-like content, limiting the discriminative power of semantic features alone.</a:t>
+            </a:r>
+          </a:p>
+          <a:p>
+            <a:r>
+              <a:rPr lang="en-GB" sz="3900" dirty="0"/>
+              <a:t>We therefore aim to identify IO actors using structural features and coordination patterns in online discourse.</a:t>
+            </a:r>
+          </a:p>
+          <a:p>
+            <a:endParaRPr lang="en-GB" sz="3600" dirty="0">
+              <a:solidFill>
+                <a:srgbClr val="FF0000"/>
+              </a:solidFill>
+            </a:endParaRPr>
           </a:p>
           <a:p>
             <a:endParaRPr lang="en-GB" sz="3600" dirty="0"/>
           </a:p>
           <a:p>
-            <a:r>
-              <a:rPr lang="en-GB" sz="3600" dirty="0"/>
-              <a:t>Focus on relationships and interactions between authors.</a:t>
-            </a:r>
-          </a:p>
-          <a:p>
-            <a:endParaRPr lang="en-GB" sz="3600" dirty="0"/>
-          </a:p>
-          <a:p>
-            <a:r>
-              <a:rPr lang="en-GB" sz="3600" dirty="0"/>
-              <a:t>Narrow analysis to key authors only.</a:t>
-            </a:r>
-          </a:p>
-          <a:p>
-            <a:endParaRPr lang="en-GB" sz="3600" dirty="0"/>
-          </a:p>
-          <a:p>
-            <a:r>
-              <a:rPr lang="en-GB" sz="3600" dirty="0"/>
-              <a:t>Identify abnormal coordinated behavioural patterns.</a:t>
-            </a:r>
-          </a:p>
-          <a:p>
-            <a:endParaRPr lang="en-GB" sz="3600" dirty="0"/>
-          </a:p>
-          <a:p>
             <a:endParaRPr lang="en-IL" dirty="0"/>
           </a:p>
         </p:txBody>
@@ -8524,7 +8876,7 @@
           <p:cNvPr id="4" name="Slide Number Placeholder 3">
             <a:extLst>
               <a:ext uri="{FF2B5EF4-FFF2-40B4-BE49-F238E27FC236}">
-                <a16:creationId xmlns:a16="http://schemas.microsoft.com/office/drawing/2014/main" id="{E7710356-1155-2E2F-361F-7F144C8D2099}"/>
+                <a16:creationId xmlns:a16="http://schemas.microsoft.com/office/drawing/2014/main" id="{E1EABADF-DC39-301C-4C98-5C58B72B250E}"/>
               </a:ext>
             </a:extLst>
           </p:cNvPr>
@@ -8551,7 +8903,7 @@
     </p:spTree>
     <p:extLst>
       <p:ext uri="{BB962C8B-B14F-4D97-AF65-F5344CB8AC3E}">
-        <p14:creationId xmlns:p14="http://schemas.microsoft.com/office/powerpoint/2010/main" val="1155559959"/>
+        <p14:creationId xmlns:p14="http://schemas.microsoft.com/office/powerpoint/2010/main" val="2375271482"/>
       </p:ext>
     </p:extLst>
   </p:cSld>
@@ -8583,6 +8935,159 @@
           <p:cNvPr id="2" name="Title 1">
             <a:extLst>
               <a:ext uri="{FF2B5EF4-FFF2-40B4-BE49-F238E27FC236}">
+                <a16:creationId xmlns:a16="http://schemas.microsoft.com/office/drawing/2014/main" id="{090E9894-1986-0EB3-10CB-47FFB17FD73D}"/>
+              </a:ext>
+            </a:extLst>
+          </p:cNvPr>
+          <p:cNvSpPr>
+            <a:spLocks noGrp="1"/>
+          </p:cNvSpPr>
+          <p:nvPr>
+            <p:ph type="title"/>
+          </p:nvPr>
+        </p:nvSpPr>
+        <p:spPr/>
+        <p:txBody>
+          <a:bodyPr>
+            <a:normAutofit/>
+          </a:bodyPr>
+          <a:lstStyle/>
+          <a:p>
+            <a:r>
+              <a:rPr lang="en-GB" dirty="0"/>
+              <a:t>Main Ideas</a:t>
+            </a:r>
+            <a:endParaRPr lang="en-IL" dirty="0"/>
+          </a:p>
+        </p:txBody>
+      </p:sp>
+      <p:sp>
+        <p:nvSpPr>
+          <p:cNvPr id="3" name="Content Placeholder 2">
+            <a:extLst>
+              <a:ext uri="{FF2B5EF4-FFF2-40B4-BE49-F238E27FC236}">
+                <a16:creationId xmlns:a16="http://schemas.microsoft.com/office/drawing/2014/main" id="{EE5A14D0-C167-09F1-B20E-C7C9A17B6E53}"/>
+              </a:ext>
+            </a:extLst>
+          </p:cNvPr>
+          <p:cNvSpPr>
+            <a:spLocks noGrp="1"/>
+          </p:cNvSpPr>
+          <p:nvPr>
+            <p:ph idx="1"/>
+          </p:nvPr>
+        </p:nvSpPr>
+        <p:spPr/>
+        <p:txBody>
+          <a:bodyPr>
+            <a:normAutofit fontScale="92500" lnSpcReduction="10000"/>
+          </a:bodyPr>
+          <a:lstStyle/>
+          <a:p>
+            <a:r>
+              <a:rPr lang="en-GB" sz="3600" dirty="0"/>
+              <a:t>Aim to accurate identification of IO (information operation) authors.</a:t>
+            </a:r>
+          </a:p>
+          <a:p>
+            <a:endParaRPr lang="en-GB" sz="3600" dirty="0"/>
+          </a:p>
+          <a:p>
+            <a:r>
+              <a:rPr lang="en-GB" sz="3600" dirty="0"/>
+              <a:t>Focus on relationships and interactions between authors.</a:t>
+            </a:r>
+          </a:p>
+          <a:p>
+            <a:endParaRPr lang="en-GB" sz="3600" dirty="0"/>
+          </a:p>
+          <a:p>
+            <a:r>
+              <a:rPr lang="en-GB" sz="3600" dirty="0"/>
+              <a:t>Narrow analysis to key authors only.</a:t>
+            </a:r>
+          </a:p>
+          <a:p>
+            <a:endParaRPr lang="en-GB" sz="3600" dirty="0"/>
+          </a:p>
+          <a:p>
+            <a:r>
+              <a:rPr lang="en-GB" sz="3600" dirty="0"/>
+              <a:t>Identify abnormal coordinated behavioural patterns.</a:t>
+            </a:r>
+          </a:p>
+          <a:p>
+            <a:endParaRPr lang="en-GB" sz="3600" dirty="0"/>
+          </a:p>
+          <a:p>
+            <a:endParaRPr lang="en-IL" dirty="0"/>
+          </a:p>
+        </p:txBody>
+      </p:sp>
+      <p:sp>
+        <p:nvSpPr>
+          <p:cNvPr id="4" name="Slide Number Placeholder 3">
+            <a:extLst>
+              <a:ext uri="{FF2B5EF4-FFF2-40B4-BE49-F238E27FC236}">
+                <a16:creationId xmlns:a16="http://schemas.microsoft.com/office/drawing/2014/main" id="{E7710356-1155-2E2F-361F-7F144C8D2099}"/>
+              </a:ext>
+            </a:extLst>
+          </p:cNvPr>
+          <p:cNvSpPr>
+            <a:spLocks noGrp="1"/>
+          </p:cNvSpPr>
+          <p:nvPr>
+            <p:ph type="sldNum" sz="quarter" idx="12"/>
+          </p:nvPr>
+        </p:nvSpPr>
+        <p:spPr/>
+        <p:txBody>
+          <a:bodyPr/>
+          <a:lstStyle/>
+          <a:p>
+            <a:fld id="{E6AB8EDD-9EF2-4633-A1C2-4D908C1019B4}" type="slidenum">
+              <a:rPr lang="he-IL" smtClean="0"/>
+              <a:t>4</a:t>
+            </a:fld>
+            <a:endParaRPr lang="he-IL"/>
+          </a:p>
+        </p:txBody>
+      </p:sp>
+    </p:spTree>
+    <p:extLst>
+      <p:ext uri="{BB962C8B-B14F-4D97-AF65-F5344CB8AC3E}">
+        <p14:creationId xmlns:p14="http://schemas.microsoft.com/office/powerpoint/2010/main" val="1155559959"/>
+      </p:ext>
+    </p:extLst>
+  </p:cSld>
+  <p:clrMapOvr>
+    <a:masterClrMapping/>
+  </p:clrMapOvr>
+</p:sld>
+</file>
+
+<file path=ppt/slides/slide5.xml><?xml version="1.0" encoding="utf-8"?>
+<p:sld xmlns:a="http://schemas.openxmlformats.org/drawingml/2006/main" xmlns:r="http://schemas.openxmlformats.org/officeDocument/2006/relationships" xmlns:p="http://schemas.openxmlformats.org/presentationml/2006/main">
+  <p:cSld>
+    <p:spTree>
+      <p:nvGrpSpPr>
+        <p:cNvPr id="1" name=""/>
+        <p:cNvGrpSpPr/>
+        <p:nvPr/>
+      </p:nvGrpSpPr>
+      <p:grpSpPr>
+        <a:xfrm>
+          <a:off x="0" y="0"/>
+          <a:ext cx="0" cy="0"/>
+          <a:chOff x="0" y="0"/>
+          <a:chExt cx="0" cy="0"/>
+        </a:xfrm>
+      </p:grpSpPr>
+      <p:sp>
+        <p:nvSpPr>
+          <p:cNvPr id="2" name="Title 1">
+            <a:extLst>
+              <a:ext uri="{FF2B5EF4-FFF2-40B4-BE49-F238E27FC236}">
                 <a16:creationId xmlns:a16="http://schemas.microsoft.com/office/drawing/2014/main" id="{81A51D72-4134-AB7E-1B0A-64CFD080E3B4}"/>
               </a:ext>
             </a:extLst>
@@ -8637,7 +9142,7 @@
           <a:p>
             <a:fld id="{E6AB8EDD-9EF2-4633-A1C2-4D908C1019B4}" type="slidenum">
               <a:rPr lang="he-IL" smtClean="0"/>
-              <a:t>4</a:t>
+              <a:t>5</a:t>
             </a:fld>
             <a:endParaRPr lang="he-IL"/>
           </a:p>
@@ -9057,7 +9562,7 @@
 </p:sld>
 </file>
 
-<file path=ppt/slides/slide5.xml><?xml version="1.0" encoding="utf-8"?>
+<file path=ppt/slides/slide6.xml><?xml version="1.0" encoding="utf-8"?>
 <p:sld xmlns:a="http://schemas.openxmlformats.org/drawingml/2006/main" xmlns:r="http://schemas.openxmlformats.org/officeDocument/2006/relationships" xmlns:p="http://schemas.openxmlformats.org/presentationml/2006/main">
   <p:cSld>
     <p:spTree>
@@ -9134,7 +9639,7 @@
           <a:p>
             <a:fld id="{E6AB8EDD-9EF2-4633-A1C2-4D908C1019B4}" type="slidenum">
               <a:rPr lang="he-IL" smtClean="0"/>
-              <a:t>5</a:t>
+              <a:t>6</a:t>
             </a:fld>
             <a:endParaRPr lang="he-IL"/>
           </a:p>
@@ -9189,7 +9694,7 @@
 </p:sld>
 </file>
 
-<file path=ppt/slides/slide6.xml><?xml version="1.0" encoding="utf-8"?>
+<file path=ppt/slides/slide7.xml><?xml version="1.0" encoding="utf-8"?>
 <p:sld xmlns:a="http://schemas.openxmlformats.org/drawingml/2006/main" xmlns:r="http://schemas.openxmlformats.org/officeDocument/2006/relationships" xmlns:p="http://schemas.openxmlformats.org/presentationml/2006/main">
   <p:cSld>
     <p:spTree>
@@ -9266,7 +9771,7 @@
           <a:p>
             <a:fld id="{E6AB8EDD-9EF2-4633-A1C2-4D908C1019B4}" type="slidenum">
               <a:rPr lang="he-IL" smtClean="0"/>
-              <a:t>6</a:t>
+              <a:t>7</a:t>
             </a:fld>
             <a:endParaRPr lang="he-IL"/>
           </a:p>
@@ -9373,7 +9878,7 @@
 </p:sld>
 </file>
 
-<file path=ppt/slides/slide7.xml><?xml version="1.0" encoding="utf-8"?>
+<file path=ppt/slides/slide8.xml><?xml version="1.0" encoding="utf-8"?>
 <p:sld xmlns:a="http://schemas.openxmlformats.org/drawingml/2006/main" xmlns:r="http://schemas.openxmlformats.org/officeDocument/2006/relationships" xmlns:p="http://schemas.openxmlformats.org/presentationml/2006/main">
   <p:cSld>
     <p:spTree>
@@ -9450,7 +9955,7 @@
           <a:p>
             <a:fld id="{E6AB8EDD-9EF2-4633-A1C2-4D908C1019B4}" type="slidenum">
               <a:rPr lang="he-IL" smtClean="0"/>
-              <a:t>7</a:t>
+              <a:t>8</a:t>
             </a:fld>
             <a:endParaRPr lang="he-IL"/>
           </a:p>
@@ -9557,7 +10062,7 @@
 </p:sld>
 </file>
 
-<file path=ppt/slides/slide8.xml><?xml version="1.0" encoding="utf-8"?>
+<file path=ppt/slides/slide9.xml><?xml version="1.0" encoding="utf-8"?>
 <p:sld xmlns:a="http://schemas.openxmlformats.org/drawingml/2006/main" xmlns:r="http://schemas.openxmlformats.org/officeDocument/2006/relationships" xmlns:p="http://schemas.openxmlformats.org/presentationml/2006/main">
   <p:cSld>
     <p:spTree>
@@ -9737,7 +10242,7 @@
           <a:p>
             <a:fld id="{E6AB8EDD-9EF2-4633-A1C2-4D908C1019B4}" type="slidenum">
               <a:rPr lang="he-IL" smtClean="0"/>
-              <a:t>8</a:t>
+              <a:t>9</a:t>
             </a:fld>
             <a:endParaRPr lang="he-IL"/>
           </a:p>
@@ -9747,190 +10252,6 @@
     <p:extLst>
       <p:ext uri="{BB962C8B-B14F-4D97-AF65-F5344CB8AC3E}">
         <p14:creationId xmlns:p14="http://schemas.microsoft.com/office/powerpoint/2010/main" val="2160734738"/>
-      </p:ext>
-    </p:extLst>
-  </p:cSld>
-  <p:clrMapOvr>
-    <a:masterClrMapping/>
-  </p:clrMapOvr>
-</p:sld>
-</file>
-
-<file path=ppt/slides/slide9.xml><?xml version="1.0" encoding="utf-8"?>
-<p:sld xmlns:a="http://schemas.openxmlformats.org/drawingml/2006/main" xmlns:r="http://schemas.openxmlformats.org/officeDocument/2006/relationships" xmlns:p="http://schemas.openxmlformats.org/presentationml/2006/main">
-  <p:cSld>
-    <p:spTree>
-      <p:nvGrpSpPr>
-        <p:cNvPr id="1" name="">
-          <a:extLst>
-            <a:ext uri="{FF2B5EF4-FFF2-40B4-BE49-F238E27FC236}">
-              <a16:creationId xmlns:a16="http://schemas.microsoft.com/office/drawing/2014/main" id="{2B500C0F-3996-85BD-0DC9-D5093CDDD03D}"/>
-            </a:ext>
-          </a:extLst>
-        </p:cNvPr>
-        <p:cNvGrpSpPr/>
-        <p:nvPr/>
-      </p:nvGrpSpPr>
-      <p:grpSpPr>
-        <a:xfrm>
-          <a:off x="0" y="0"/>
-          <a:ext cx="0" cy="0"/>
-          <a:chOff x="0" y="0"/>
-          <a:chExt cx="0" cy="0"/>
-        </a:xfrm>
-      </p:grpSpPr>
-      <p:sp>
-        <p:nvSpPr>
-          <p:cNvPr id="2" name="Title 1">
-            <a:extLst>
-              <a:ext uri="{FF2B5EF4-FFF2-40B4-BE49-F238E27FC236}">
-                <a16:creationId xmlns:a16="http://schemas.microsoft.com/office/drawing/2014/main" id="{9F03F8FD-3B90-9CF5-B873-C1A001615DFA}"/>
-              </a:ext>
-            </a:extLst>
-          </p:cNvPr>
-          <p:cNvSpPr>
-            <a:spLocks noGrp="1"/>
-          </p:cNvSpPr>
-          <p:nvPr>
-            <p:ph type="title"/>
-          </p:nvPr>
-        </p:nvSpPr>
-        <p:spPr/>
-        <p:txBody>
-          <a:bodyPr>
-            <a:normAutofit/>
-          </a:bodyPr>
-          <a:lstStyle/>
-          <a:p>
-            <a:r>
-              <a:rPr lang="en-GB" dirty="0"/>
-              <a:t>Workflow</a:t>
-            </a:r>
-            <a:endParaRPr lang="en-IL" dirty="0"/>
-          </a:p>
-        </p:txBody>
-      </p:sp>
-      <p:sp>
-        <p:nvSpPr>
-          <p:cNvPr id="4" name="Slide Number Placeholder 3">
-            <a:extLst>
-              <a:ext uri="{FF2B5EF4-FFF2-40B4-BE49-F238E27FC236}">
-                <a16:creationId xmlns:a16="http://schemas.microsoft.com/office/drawing/2014/main" id="{321FDFB4-095D-2E39-F873-D92B727A0390}"/>
-              </a:ext>
-            </a:extLst>
-          </p:cNvPr>
-          <p:cNvSpPr>
-            <a:spLocks noGrp="1"/>
-          </p:cNvSpPr>
-          <p:nvPr>
-            <p:ph type="sldNum" sz="quarter" idx="12"/>
-          </p:nvPr>
-        </p:nvSpPr>
-        <p:spPr/>
-        <p:txBody>
-          <a:bodyPr/>
-          <a:lstStyle/>
-          <a:p>
-            <a:fld id="{E6AB8EDD-9EF2-4633-A1C2-4D908C1019B4}" type="slidenum">
-              <a:rPr lang="he-IL" smtClean="0"/>
-              <a:t>9</a:t>
-            </a:fld>
-            <a:endParaRPr lang="he-IL"/>
-          </a:p>
-        </p:txBody>
-      </p:sp>
-      <p:pic>
-        <p:nvPicPr>
-          <p:cNvPr id="3" name="Picture 2" descr="A diagram of a system&#10;&#10;AI-generated content may be incorrect.">
-            <a:extLst>
-              <a:ext uri="{FF2B5EF4-FFF2-40B4-BE49-F238E27FC236}">
-                <a16:creationId xmlns:a16="http://schemas.microsoft.com/office/drawing/2014/main" id="{F97C2A5B-135E-8936-0AFC-AE8B6D835D74}"/>
-              </a:ext>
-            </a:extLst>
-          </p:cNvPr>
-          <p:cNvPicPr>
-            <a:picLocks noChangeAspect="1"/>
-          </p:cNvPicPr>
-          <p:nvPr/>
-        </p:nvPicPr>
-        <p:blipFill>
-          <a:blip r:embed="rId2">
-            <a:extLst>
-              <a:ext uri="{28A0092B-C50C-407E-A947-70E740481C1C}">
-                <a14:useLocalDpi xmlns:a14="http://schemas.microsoft.com/office/drawing/2010/main" val="0"/>
-              </a:ext>
-            </a:extLst>
-          </a:blip>
-          <a:stretch>
-            <a:fillRect/>
-          </a:stretch>
-        </p:blipFill>
-        <p:spPr>
-          <a:xfrm>
-            <a:off x="1109472" y="2297798"/>
-            <a:ext cx="9924288" cy="2350401"/>
-          </a:xfrm>
-          <a:prstGeom prst="rect">
-            <a:avLst/>
-          </a:prstGeom>
-        </p:spPr>
-      </p:pic>
-      <p:sp>
-        <p:nvSpPr>
-          <p:cNvPr id="6" name="Rectangle: Rounded Corners 5">
-            <a:extLst>
-              <a:ext uri="{FF2B5EF4-FFF2-40B4-BE49-F238E27FC236}">
-                <a16:creationId xmlns:a16="http://schemas.microsoft.com/office/drawing/2014/main" id="{2FFFF692-13BA-3886-D028-6ADCD4B08044}"/>
-              </a:ext>
-            </a:extLst>
-          </p:cNvPr>
-          <p:cNvSpPr/>
-          <p:nvPr/>
-        </p:nvSpPr>
-        <p:spPr>
-          <a:xfrm>
-            <a:off x="8959850" y="2190750"/>
-            <a:ext cx="2275078" cy="1016000"/>
-          </a:xfrm>
-          <a:prstGeom prst="roundRect">
-            <a:avLst/>
-          </a:prstGeom>
-          <a:noFill/>
-          <a:ln w="38100">
-            <a:solidFill>
-              <a:srgbClr val="FF4343"/>
-            </a:solidFill>
-          </a:ln>
-        </p:spPr>
-        <p:style>
-          <a:lnRef idx="2">
-            <a:schemeClr val="accent1">
-              <a:shade val="15000"/>
-            </a:schemeClr>
-          </a:lnRef>
-          <a:fillRef idx="1">
-            <a:schemeClr val="accent1"/>
-          </a:fillRef>
-          <a:effectRef idx="0">
-            <a:schemeClr val="accent1"/>
-          </a:effectRef>
-          <a:fontRef idx="minor">
-            <a:schemeClr val="lt1"/>
-          </a:fontRef>
-        </p:style>
-        <p:txBody>
-          <a:bodyPr rtlCol="0" anchor="ctr"/>
-          <a:lstStyle/>
-          <a:p>
-            <a:pPr algn="ctr"/>
-            <a:endParaRPr lang="en-IL" dirty="0"/>
-          </a:p>
-        </p:txBody>
-      </p:sp>
-    </p:spTree>
-    <p:extLst>
-      <p:ext uri="{BB962C8B-B14F-4D97-AF65-F5344CB8AC3E}">
-        <p14:creationId xmlns:p14="http://schemas.microsoft.com/office/powerpoint/2010/main" val="3429437932"/>
       </p:ext>
     </p:extLst>
   </p:cSld>

--- a/docs/cbg_saback.pptx
+++ b/docs/cbg_saback.pptx
@@ -5,7 +5,7 @@
     <p:sldMasterId id="2147483648" r:id="rId1"/>
   </p:sldMasterIdLst>
   <p:notesMasterIdLst>
-    <p:notesMasterId r:id="rId24"/>
+    <p:notesMasterId r:id="rId28"/>
   </p:notesMasterIdLst>
   <p:sldIdLst>
     <p:sldId id="1574" r:id="rId2"/>
@@ -13,23 +13,27 @@
     <p:sldId id="1598" r:id="rId4"/>
     <p:sldId id="1575" r:id="rId5"/>
     <p:sldId id="1596" r:id="rId6"/>
-    <p:sldId id="1579" r:id="rId7"/>
-    <p:sldId id="1580" r:id="rId8"/>
-    <p:sldId id="1582" r:id="rId9"/>
-    <p:sldId id="1581" r:id="rId10"/>
-    <p:sldId id="1583" r:id="rId11"/>
-    <p:sldId id="1584" r:id="rId12"/>
-    <p:sldId id="1585" r:id="rId13"/>
-    <p:sldId id="1586" r:id="rId14"/>
-    <p:sldId id="1587" r:id="rId15"/>
-    <p:sldId id="1588" r:id="rId16"/>
-    <p:sldId id="1589" r:id="rId17"/>
-    <p:sldId id="1590" r:id="rId18"/>
-    <p:sldId id="1591" r:id="rId19"/>
-    <p:sldId id="1594" r:id="rId20"/>
-    <p:sldId id="1592" r:id="rId21"/>
-    <p:sldId id="1593" r:id="rId22"/>
-    <p:sldId id="1595" r:id="rId23"/>
+    <p:sldId id="1611" r:id="rId7"/>
+    <p:sldId id="1608" r:id="rId8"/>
+    <p:sldId id="1601" r:id="rId9"/>
+    <p:sldId id="1604" r:id="rId10"/>
+    <p:sldId id="1603" r:id="rId11"/>
+    <p:sldId id="1581" r:id="rId12"/>
+    <p:sldId id="1605" r:id="rId13"/>
+    <p:sldId id="1584" r:id="rId14"/>
+    <p:sldId id="1585" r:id="rId15"/>
+    <p:sldId id="1606" r:id="rId16"/>
+    <p:sldId id="1587" r:id="rId17"/>
+    <p:sldId id="1607" r:id="rId18"/>
+    <p:sldId id="1589" r:id="rId19"/>
+    <p:sldId id="1609" r:id="rId20"/>
+    <p:sldId id="1591" r:id="rId21"/>
+    <p:sldId id="1594" r:id="rId22"/>
+    <p:sldId id="1610" r:id="rId23"/>
+    <p:sldId id="1593" r:id="rId24"/>
+    <p:sldId id="1612" r:id="rId25"/>
+    <p:sldId id="1613" r:id="rId26"/>
+    <p:sldId id="1595" r:id="rId27"/>
   </p:sldIdLst>
   <p:sldSz cx="12192000" cy="6858000"/>
   <p:notesSz cx="6858000" cy="9144000"/>
@@ -129,6 +133,40 @@
     </a:lvl9pPr>
   </p:defaultTextStyle>
   <p:extLst>
+    <p:ext uri="{521415D9-36F7-43E2-AB2F-B90AF26B5E84}">
+      <p14:sectionLst xmlns:p14="http://schemas.microsoft.com/office/powerpoint/2010/main">
+        <p14:section name="Default Section" id="{DA84E6CC-2EA2-4553-A6A4-DAF877036261}">
+          <p14:sldIdLst>
+            <p14:sldId id="1574"/>
+            <p14:sldId id="1597"/>
+            <p14:sldId id="1598"/>
+            <p14:sldId id="1575"/>
+            <p14:sldId id="1596"/>
+            <p14:sldId id="1611"/>
+            <p14:sldId id="1608"/>
+            <p14:sldId id="1601"/>
+            <p14:sldId id="1604"/>
+            <p14:sldId id="1603"/>
+            <p14:sldId id="1581"/>
+            <p14:sldId id="1605"/>
+            <p14:sldId id="1584"/>
+            <p14:sldId id="1585"/>
+            <p14:sldId id="1606"/>
+            <p14:sldId id="1587"/>
+            <p14:sldId id="1607"/>
+            <p14:sldId id="1589"/>
+            <p14:sldId id="1609"/>
+            <p14:sldId id="1591"/>
+            <p14:sldId id="1594"/>
+            <p14:sldId id="1610"/>
+            <p14:sldId id="1593"/>
+            <p14:sldId id="1612"/>
+            <p14:sldId id="1613"/>
+            <p14:sldId id="1595"/>
+          </p14:sldIdLst>
+        </p14:section>
+      </p14:sectionLst>
+    </p:ext>
     <p:ext uri="{EFAFB233-063F-42B5-8137-9DF3F51BA10A}">
       <p15:sldGuideLst xmlns:p15="http://schemas.microsoft.com/office/powerpoint/2012/main"/>
     </p:ext>
@@ -534,7 +572,7 @@
           <a:p>
             <a:fld id="{2915196C-CDBC-4DEE-A220-849C85FC22AC}" type="datetimeFigureOut">
               <a:rPr lang="he-IL" smtClean="0"/>
-              <a:t>ט"ז/טבת/תשפ"ו</a:t>
+              <a:t>י"ז/טבת/תשפ"ו</a:t>
             </a:fld>
             <a:endParaRPr lang="he-IL"/>
           </a:p>
@@ -894,6 +932,351 @@
         <p:cNvPr id="1" name="">
           <a:extLst>
             <a:ext uri="{FF2B5EF4-FFF2-40B4-BE49-F238E27FC236}">
+              <a16:creationId xmlns:a16="http://schemas.microsoft.com/office/drawing/2014/main" id="{89700E97-1269-7E2B-1581-D4E8D9FCCB3F}"/>
+            </a:ext>
+          </a:extLst>
+        </p:cNvPr>
+        <p:cNvGrpSpPr/>
+        <p:nvPr/>
+      </p:nvGrpSpPr>
+      <p:grpSpPr>
+        <a:xfrm>
+          <a:off x="0" y="0"/>
+          <a:ext cx="0" cy="0"/>
+          <a:chOff x="0" y="0"/>
+          <a:chExt cx="0" cy="0"/>
+        </a:xfrm>
+      </p:grpSpPr>
+      <p:sp>
+        <p:nvSpPr>
+          <p:cNvPr id="2" name="Slide Image Placeholder 1">
+            <a:extLst>
+              <a:ext uri="{FF2B5EF4-FFF2-40B4-BE49-F238E27FC236}">
+                <a16:creationId xmlns:a16="http://schemas.microsoft.com/office/drawing/2014/main" id="{58698FE1-3D66-BEFC-5A5B-388AD9A94A18}"/>
+              </a:ext>
+            </a:extLst>
+          </p:cNvPr>
+          <p:cNvSpPr>
+            <a:spLocks noGrp="1" noRot="1" noChangeAspect="1"/>
+          </p:cNvSpPr>
+          <p:nvPr>
+            <p:ph type="sldImg"/>
+          </p:nvPr>
+        </p:nvSpPr>
+        <p:spPr/>
+        <p:txBody>
+          <a:bodyPr/>
+          <a:lstStyle/>
+          <a:p>
+            <a:endParaRPr lang="en-IL"/>
+          </a:p>
+        </p:txBody>
+      </p:sp>
+      <p:sp>
+        <p:nvSpPr>
+          <p:cNvPr id="3" name="Notes Placeholder 2">
+            <a:extLst>
+              <a:ext uri="{FF2B5EF4-FFF2-40B4-BE49-F238E27FC236}">
+                <a16:creationId xmlns:a16="http://schemas.microsoft.com/office/drawing/2014/main" id="{8278256E-4859-C953-928D-D14453A1BBA5}"/>
+              </a:ext>
+            </a:extLst>
+          </p:cNvPr>
+          <p:cNvSpPr>
+            <a:spLocks noGrp="1"/>
+          </p:cNvSpPr>
+          <p:nvPr>
+            <p:ph type="body" idx="1"/>
+          </p:nvPr>
+        </p:nvSpPr>
+        <p:spPr/>
+        <p:txBody>
+          <a:bodyPr/>
+          <a:lstStyle/>
+          <a:p>
+            <a:endParaRPr lang="en-IL" dirty="0"/>
+          </a:p>
+        </p:txBody>
+      </p:sp>
+      <p:sp>
+        <p:nvSpPr>
+          <p:cNvPr id="4" name="Slide Number Placeholder 3">
+            <a:extLst>
+              <a:ext uri="{FF2B5EF4-FFF2-40B4-BE49-F238E27FC236}">
+                <a16:creationId xmlns:a16="http://schemas.microsoft.com/office/drawing/2014/main" id="{07E093A5-59A0-12E4-39B3-28ED44EF3E19}"/>
+              </a:ext>
+            </a:extLst>
+          </p:cNvPr>
+          <p:cNvSpPr>
+            <a:spLocks noGrp="1"/>
+          </p:cNvSpPr>
+          <p:nvPr>
+            <p:ph type="sldNum" sz="quarter" idx="5"/>
+          </p:nvPr>
+        </p:nvSpPr>
+        <p:spPr/>
+        <p:txBody>
+          <a:bodyPr/>
+          <a:lstStyle/>
+          <a:p>
+            <a:fld id="{7F6CD5E7-A5BE-4430-AD67-E129D63AAC5C}" type="slidenum">
+              <a:rPr lang="he-IL" smtClean="0"/>
+              <a:t>23</a:t>
+            </a:fld>
+            <a:endParaRPr lang="he-IL"/>
+          </a:p>
+        </p:txBody>
+      </p:sp>
+    </p:spTree>
+    <p:extLst>
+      <p:ext uri="{BB962C8B-B14F-4D97-AF65-F5344CB8AC3E}">
+        <p14:creationId xmlns:p14="http://schemas.microsoft.com/office/powerpoint/2010/main" val="1174506778"/>
+      </p:ext>
+    </p:extLst>
+  </p:cSld>
+  <p:clrMapOvr>
+    <a:masterClrMapping/>
+  </p:clrMapOvr>
+</p:notes>
+</file>
+
+<file path=ppt/notesSlides/notesSlide11.xml><?xml version="1.0" encoding="utf-8"?>
+<p:notes xmlns:a="http://schemas.openxmlformats.org/drawingml/2006/main" xmlns:r="http://schemas.openxmlformats.org/officeDocument/2006/relationships" xmlns:p="http://schemas.openxmlformats.org/presentationml/2006/main">
+  <p:cSld>
+    <p:spTree>
+      <p:nvGrpSpPr>
+        <p:cNvPr id="1" name="">
+          <a:extLst>
+            <a:ext uri="{FF2B5EF4-FFF2-40B4-BE49-F238E27FC236}">
+              <a16:creationId xmlns:a16="http://schemas.microsoft.com/office/drawing/2014/main" id="{EB2A86C7-359B-0C90-82C1-8AB423BEA416}"/>
+            </a:ext>
+          </a:extLst>
+        </p:cNvPr>
+        <p:cNvGrpSpPr/>
+        <p:nvPr/>
+      </p:nvGrpSpPr>
+      <p:grpSpPr>
+        <a:xfrm>
+          <a:off x="0" y="0"/>
+          <a:ext cx="0" cy="0"/>
+          <a:chOff x="0" y="0"/>
+          <a:chExt cx="0" cy="0"/>
+        </a:xfrm>
+      </p:grpSpPr>
+      <p:sp>
+        <p:nvSpPr>
+          <p:cNvPr id="2" name="Slide Image Placeholder 1">
+            <a:extLst>
+              <a:ext uri="{FF2B5EF4-FFF2-40B4-BE49-F238E27FC236}">
+                <a16:creationId xmlns:a16="http://schemas.microsoft.com/office/drawing/2014/main" id="{D062C748-8602-96EC-CFA4-B5B569646E45}"/>
+              </a:ext>
+            </a:extLst>
+          </p:cNvPr>
+          <p:cNvSpPr>
+            <a:spLocks noGrp="1" noRot="1" noChangeAspect="1"/>
+          </p:cNvSpPr>
+          <p:nvPr>
+            <p:ph type="sldImg"/>
+          </p:nvPr>
+        </p:nvSpPr>
+        <p:spPr/>
+        <p:txBody>
+          <a:bodyPr/>
+          <a:lstStyle/>
+          <a:p>
+            <a:endParaRPr lang="en-IL"/>
+          </a:p>
+        </p:txBody>
+      </p:sp>
+      <p:sp>
+        <p:nvSpPr>
+          <p:cNvPr id="3" name="Notes Placeholder 2">
+            <a:extLst>
+              <a:ext uri="{FF2B5EF4-FFF2-40B4-BE49-F238E27FC236}">
+                <a16:creationId xmlns:a16="http://schemas.microsoft.com/office/drawing/2014/main" id="{A22480F6-9022-F11E-4648-587D2970A8F8}"/>
+              </a:ext>
+            </a:extLst>
+          </p:cNvPr>
+          <p:cNvSpPr>
+            <a:spLocks noGrp="1"/>
+          </p:cNvSpPr>
+          <p:nvPr>
+            <p:ph type="body" idx="1"/>
+          </p:nvPr>
+        </p:nvSpPr>
+        <p:spPr/>
+        <p:txBody>
+          <a:bodyPr/>
+          <a:lstStyle/>
+          <a:p>
+            <a:endParaRPr lang="en-IL" dirty="0"/>
+          </a:p>
+        </p:txBody>
+      </p:sp>
+      <p:sp>
+        <p:nvSpPr>
+          <p:cNvPr id="4" name="Slide Number Placeholder 3">
+            <a:extLst>
+              <a:ext uri="{FF2B5EF4-FFF2-40B4-BE49-F238E27FC236}">
+                <a16:creationId xmlns:a16="http://schemas.microsoft.com/office/drawing/2014/main" id="{2EF01FB4-8FFD-3053-E198-DADF65116412}"/>
+              </a:ext>
+            </a:extLst>
+          </p:cNvPr>
+          <p:cNvSpPr>
+            <a:spLocks noGrp="1"/>
+          </p:cNvSpPr>
+          <p:nvPr>
+            <p:ph type="sldNum" sz="quarter" idx="5"/>
+          </p:nvPr>
+        </p:nvSpPr>
+        <p:spPr/>
+        <p:txBody>
+          <a:bodyPr/>
+          <a:lstStyle/>
+          <a:p>
+            <a:fld id="{7F6CD5E7-A5BE-4430-AD67-E129D63AAC5C}" type="slidenum">
+              <a:rPr lang="he-IL" smtClean="0"/>
+              <a:t>24</a:t>
+            </a:fld>
+            <a:endParaRPr lang="he-IL"/>
+          </a:p>
+        </p:txBody>
+      </p:sp>
+    </p:spTree>
+    <p:extLst>
+      <p:ext uri="{BB962C8B-B14F-4D97-AF65-F5344CB8AC3E}">
+        <p14:creationId xmlns:p14="http://schemas.microsoft.com/office/powerpoint/2010/main" val="1133327276"/>
+      </p:ext>
+    </p:extLst>
+  </p:cSld>
+  <p:clrMapOvr>
+    <a:masterClrMapping/>
+  </p:clrMapOvr>
+</p:notes>
+</file>
+
+<file path=ppt/notesSlides/notesSlide12.xml><?xml version="1.0" encoding="utf-8"?>
+<p:notes xmlns:a="http://schemas.openxmlformats.org/drawingml/2006/main" xmlns:r="http://schemas.openxmlformats.org/officeDocument/2006/relationships" xmlns:p="http://schemas.openxmlformats.org/presentationml/2006/main">
+  <p:cSld>
+    <p:spTree>
+      <p:nvGrpSpPr>
+        <p:cNvPr id="1" name="">
+          <a:extLst>
+            <a:ext uri="{FF2B5EF4-FFF2-40B4-BE49-F238E27FC236}">
+              <a16:creationId xmlns:a16="http://schemas.microsoft.com/office/drawing/2014/main" id="{F72473ED-A99E-1255-DF0A-F46C0A3F8A2E}"/>
+            </a:ext>
+          </a:extLst>
+        </p:cNvPr>
+        <p:cNvGrpSpPr/>
+        <p:nvPr/>
+      </p:nvGrpSpPr>
+      <p:grpSpPr>
+        <a:xfrm>
+          <a:off x="0" y="0"/>
+          <a:ext cx="0" cy="0"/>
+          <a:chOff x="0" y="0"/>
+          <a:chExt cx="0" cy="0"/>
+        </a:xfrm>
+      </p:grpSpPr>
+      <p:sp>
+        <p:nvSpPr>
+          <p:cNvPr id="2" name="Slide Image Placeholder 1">
+            <a:extLst>
+              <a:ext uri="{FF2B5EF4-FFF2-40B4-BE49-F238E27FC236}">
+                <a16:creationId xmlns:a16="http://schemas.microsoft.com/office/drawing/2014/main" id="{B138042E-74BF-F12B-EB05-B5A12A791608}"/>
+              </a:ext>
+            </a:extLst>
+          </p:cNvPr>
+          <p:cNvSpPr>
+            <a:spLocks noGrp="1" noRot="1" noChangeAspect="1"/>
+          </p:cNvSpPr>
+          <p:nvPr>
+            <p:ph type="sldImg"/>
+          </p:nvPr>
+        </p:nvSpPr>
+        <p:spPr/>
+        <p:txBody>
+          <a:bodyPr/>
+          <a:lstStyle/>
+          <a:p>
+            <a:endParaRPr lang="en-IL"/>
+          </a:p>
+        </p:txBody>
+      </p:sp>
+      <p:sp>
+        <p:nvSpPr>
+          <p:cNvPr id="3" name="Notes Placeholder 2">
+            <a:extLst>
+              <a:ext uri="{FF2B5EF4-FFF2-40B4-BE49-F238E27FC236}">
+                <a16:creationId xmlns:a16="http://schemas.microsoft.com/office/drawing/2014/main" id="{9FF9362C-8306-7A0F-CDF5-AFC8289AE917}"/>
+              </a:ext>
+            </a:extLst>
+          </p:cNvPr>
+          <p:cNvSpPr>
+            <a:spLocks noGrp="1"/>
+          </p:cNvSpPr>
+          <p:nvPr>
+            <p:ph type="body" idx="1"/>
+          </p:nvPr>
+        </p:nvSpPr>
+        <p:spPr/>
+        <p:txBody>
+          <a:bodyPr/>
+          <a:lstStyle/>
+          <a:p>
+            <a:endParaRPr lang="en-IL" dirty="0"/>
+          </a:p>
+        </p:txBody>
+      </p:sp>
+      <p:sp>
+        <p:nvSpPr>
+          <p:cNvPr id="4" name="Slide Number Placeholder 3">
+            <a:extLst>
+              <a:ext uri="{FF2B5EF4-FFF2-40B4-BE49-F238E27FC236}">
+                <a16:creationId xmlns:a16="http://schemas.microsoft.com/office/drawing/2014/main" id="{7C4EDC18-E9C8-4ECA-7039-35E23F9D9DA3}"/>
+              </a:ext>
+            </a:extLst>
+          </p:cNvPr>
+          <p:cNvSpPr>
+            <a:spLocks noGrp="1"/>
+          </p:cNvSpPr>
+          <p:nvPr>
+            <p:ph type="sldNum" sz="quarter" idx="5"/>
+          </p:nvPr>
+        </p:nvSpPr>
+        <p:spPr/>
+        <p:txBody>
+          <a:bodyPr/>
+          <a:lstStyle/>
+          <a:p>
+            <a:fld id="{7F6CD5E7-A5BE-4430-AD67-E129D63AAC5C}" type="slidenum">
+              <a:rPr lang="he-IL" smtClean="0"/>
+              <a:t>25</a:t>
+            </a:fld>
+            <a:endParaRPr lang="he-IL"/>
+          </a:p>
+        </p:txBody>
+      </p:sp>
+    </p:spTree>
+    <p:extLst>
+      <p:ext uri="{BB962C8B-B14F-4D97-AF65-F5344CB8AC3E}">
+        <p14:creationId xmlns:p14="http://schemas.microsoft.com/office/powerpoint/2010/main" val="2057236096"/>
+      </p:ext>
+    </p:extLst>
+  </p:cSld>
+  <p:clrMapOvr>
+    <a:masterClrMapping/>
+  </p:clrMapOvr>
+</p:notes>
+</file>
+
+<file path=ppt/notesSlides/notesSlide13.xml><?xml version="1.0" encoding="utf-8"?>
+<p:notes xmlns:a="http://schemas.openxmlformats.org/drawingml/2006/main" xmlns:r="http://schemas.openxmlformats.org/officeDocument/2006/relationships" xmlns:p="http://schemas.openxmlformats.org/presentationml/2006/main">
+  <p:cSld>
+    <p:spTree>
+      <p:nvGrpSpPr>
+        <p:cNvPr id="1" name="">
+          <a:extLst>
+            <a:ext uri="{FF2B5EF4-FFF2-40B4-BE49-F238E27FC236}">
               <a16:creationId xmlns:a16="http://schemas.microsoft.com/office/drawing/2014/main" id="{6B4DD219-5D86-EF6C-D07F-3B5EA548CC17}"/>
             </a:ext>
           </a:extLst>
@@ -982,7 +1365,7 @@
           <a:p>
             <a:fld id="{7F6CD5E7-A5BE-4430-AD67-E129D63AAC5C}" type="slidenum">
               <a:rPr lang="he-IL" smtClean="0"/>
-              <a:t>22</a:t>
+              <a:t>26</a:t>
             </a:fld>
             <a:endParaRPr lang="he-IL"/>
           </a:p>
@@ -1402,49 +1785,22 @@
           </p:nvPr>
         </p:nvSpPr>
         <p:spPr/>
+      </p:sp>
+      <p:sp>
+        <p:nvSpPr>
+          <p:cNvPr id="3" name="Notes Placeholder 2"/>
+          <p:cNvSpPr>
+            <a:spLocks noGrp="1"/>
+          </p:cNvSpPr>
+          <p:nvPr>
+            <p:ph type="body" idx="1"/>
+          </p:nvPr>
+        </p:nvSpPr>
+        <p:spPr/>
         <p:txBody>
           <a:bodyPr/>
           <a:lstStyle/>
           <a:p>
-            <a:endParaRPr lang="en-IL"/>
-          </a:p>
-        </p:txBody>
-      </p:sp>
-      <p:sp>
-        <p:nvSpPr>
-          <p:cNvPr id="3" name="Notes Placeholder 2"/>
-          <p:cNvSpPr>
-            <a:spLocks noGrp="1"/>
-          </p:cNvSpPr>
-          <p:nvPr>
-            <p:ph type="body" idx="1"/>
-          </p:nvPr>
-        </p:nvSpPr>
-        <p:spPr/>
-        <p:txBody>
-          <a:bodyPr/>
-          <a:lstStyle/>
-          <a:p>
-            <a:r>
-              <a:rPr lang="en-GB" sz="1200" dirty="0"/>
-              <a:t>used</a:t>
-            </a:r>
-            <a:r>
-              <a:rPr lang="en-GB" sz="1600" dirty="0"/>
-              <a:t> </a:t>
-            </a:r>
-            <a:r>
-              <a:rPr lang="en-GB" sz="1200" dirty="0"/>
-              <a:t>in</a:t>
-            </a:r>
-            <a:r>
-              <a:rPr lang="en-GB" sz="1600" dirty="0"/>
-              <a:t> </a:t>
-            </a:r>
-            <a:r>
-              <a:rPr lang="en-GB" sz="1200" dirty="0"/>
-              <a:t>natural language processing and information retrieval</a:t>
-            </a:r>
             <a:endParaRPr lang="en-IL" dirty="0"/>
           </a:p>
         </p:txBody>
@@ -1466,7 +1822,7 @@
           <a:p>
             <a:fld id="{7F6CD5E7-A5BE-4430-AD67-E129D63AAC5C}" type="slidenum">
               <a:rPr lang="he-IL" smtClean="0"/>
-              <a:t>11</a:t>
+              <a:t>6</a:t>
             </a:fld>
             <a:endParaRPr lang="he-IL"/>
           </a:p>
@@ -1475,7 +1831,7 @@
     </p:spTree>
     <p:extLst>
       <p:ext uri="{BB962C8B-B14F-4D97-AF65-F5344CB8AC3E}">
-        <p14:creationId xmlns:p14="http://schemas.microsoft.com/office/powerpoint/2010/main" val="2785503547"/>
+        <p14:creationId xmlns:p14="http://schemas.microsoft.com/office/powerpoint/2010/main" val="2479974388"/>
       </p:ext>
     </p:extLst>
   </p:cSld>
@@ -1536,6 +1892,26 @@
           <a:bodyPr/>
           <a:lstStyle/>
           <a:p>
+            <a:r>
+              <a:rPr lang="en-GB" sz="1200" dirty="0"/>
+              <a:t>used</a:t>
+            </a:r>
+            <a:r>
+              <a:rPr lang="en-GB" sz="1600" dirty="0"/>
+              <a:t> </a:t>
+            </a:r>
+            <a:r>
+              <a:rPr lang="en-GB" sz="1200" dirty="0"/>
+              <a:t>in</a:t>
+            </a:r>
+            <a:r>
+              <a:rPr lang="en-GB" sz="1600" dirty="0"/>
+              <a:t> </a:t>
+            </a:r>
+            <a:r>
+              <a:rPr lang="en-GB" sz="1200" dirty="0"/>
+              <a:t>natural language processing and information retrieval</a:t>
+            </a:r>
             <a:endParaRPr lang="en-IL" dirty="0"/>
           </a:p>
         </p:txBody>
@@ -1557,7 +1933,98 @@
           <a:p>
             <a:fld id="{7F6CD5E7-A5BE-4430-AD67-E129D63AAC5C}" type="slidenum">
               <a:rPr lang="he-IL" smtClean="0"/>
-              <a:t>14</a:t>
+              <a:t>13</a:t>
+            </a:fld>
+            <a:endParaRPr lang="he-IL"/>
+          </a:p>
+        </p:txBody>
+      </p:sp>
+    </p:spTree>
+    <p:extLst>
+      <p:ext uri="{BB962C8B-B14F-4D97-AF65-F5344CB8AC3E}">
+        <p14:creationId xmlns:p14="http://schemas.microsoft.com/office/powerpoint/2010/main" val="2785503547"/>
+      </p:ext>
+    </p:extLst>
+  </p:cSld>
+  <p:clrMapOvr>
+    <a:masterClrMapping/>
+  </p:clrMapOvr>
+</p:notes>
+</file>
+
+<file path=ppt/notesSlides/notesSlide6.xml><?xml version="1.0" encoding="utf-8"?>
+<p:notes xmlns:a="http://schemas.openxmlformats.org/drawingml/2006/main" xmlns:r="http://schemas.openxmlformats.org/officeDocument/2006/relationships" xmlns:p="http://schemas.openxmlformats.org/presentationml/2006/main">
+  <p:cSld>
+    <p:spTree>
+      <p:nvGrpSpPr>
+        <p:cNvPr id="1" name=""/>
+        <p:cNvGrpSpPr/>
+        <p:nvPr/>
+      </p:nvGrpSpPr>
+      <p:grpSpPr>
+        <a:xfrm>
+          <a:off x="0" y="0"/>
+          <a:ext cx="0" cy="0"/>
+          <a:chOff x="0" y="0"/>
+          <a:chExt cx="0" cy="0"/>
+        </a:xfrm>
+      </p:grpSpPr>
+      <p:sp>
+        <p:nvSpPr>
+          <p:cNvPr id="2" name="Slide Image Placeholder 1"/>
+          <p:cNvSpPr>
+            <a:spLocks noGrp="1" noRot="1" noChangeAspect="1"/>
+          </p:cNvSpPr>
+          <p:nvPr>
+            <p:ph type="sldImg"/>
+          </p:nvPr>
+        </p:nvSpPr>
+        <p:spPr/>
+        <p:txBody>
+          <a:bodyPr/>
+          <a:lstStyle/>
+          <a:p>
+            <a:endParaRPr lang="en-IL"/>
+          </a:p>
+        </p:txBody>
+      </p:sp>
+      <p:sp>
+        <p:nvSpPr>
+          <p:cNvPr id="3" name="Notes Placeholder 2"/>
+          <p:cNvSpPr>
+            <a:spLocks noGrp="1"/>
+          </p:cNvSpPr>
+          <p:nvPr>
+            <p:ph type="body" idx="1"/>
+          </p:nvPr>
+        </p:nvSpPr>
+        <p:spPr/>
+        <p:txBody>
+          <a:bodyPr/>
+          <a:lstStyle/>
+          <a:p>
+            <a:endParaRPr lang="en-IL" dirty="0"/>
+          </a:p>
+        </p:txBody>
+      </p:sp>
+      <p:sp>
+        <p:nvSpPr>
+          <p:cNvPr id="4" name="Slide Number Placeholder 3"/>
+          <p:cNvSpPr>
+            <a:spLocks noGrp="1"/>
+          </p:cNvSpPr>
+          <p:nvPr>
+            <p:ph type="sldNum" sz="quarter" idx="5"/>
+          </p:nvPr>
+        </p:nvSpPr>
+        <p:spPr/>
+        <p:txBody>
+          <a:bodyPr/>
+          <a:lstStyle/>
+          <a:p>
+            <a:fld id="{7F6CD5E7-A5BE-4430-AD67-E129D63AAC5C}" type="slidenum">
+              <a:rPr lang="he-IL" smtClean="0"/>
+              <a:t>16</a:t>
             </a:fld>
             <a:endParaRPr lang="he-IL"/>
           </a:p>
@@ -1576,7 +2043,7 @@
 </p:notes>
 </file>
 
-<file path=ppt/notesSlides/notesSlide6.xml><?xml version="1.0" encoding="utf-8"?>
+<file path=ppt/notesSlides/notesSlide7.xml><?xml version="1.0" encoding="utf-8"?>
 <p:notes xmlns:a="http://schemas.openxmlformats.org/drawingml/2006/main" xmlns:r="http://schemas.openxmlformats.org/officeDocument/2006/relationships" xmlns:p="http://schemas.openxmlformats.org/presentationml/2006/main">
   <p:cSld>
     <p:spTree>
@@ -1672,7 +2139,7 @@
           <a:p>
             <a:fld id="{7F6CD5E7-A5BE-4430-AD67-E129D63AAC5C}" type="slidenum">
               <a:rPr lang="he-IL" smtClean="0"/>
-              <a:t>16</a:t>
+              <a:t>18</a:t>
             </a:fld>
             <a:endParaRPr lang="he-IL"/>
           </a:p>
@@ -1691,7 +2158,7 @@
 </p:notes>
 </file>
 
-<file path=ppt/notesSlides/notesSlide7.xml><?xml version="1.0" encoding="utf-8"?>
+<file path=ppt/notesSlides/notesSlide8.xml><?xml version="1.0" encoding="utf-8"?>
 <p:notes xmlns:a="http://schemas.openxmlformats.org/drawingml/2006/main" xmlns:r="http://schemas.openxmlformats.org/officeDocument/2006/relationships" xmlns:p="http://schemas.openxmlformats.org/presentationml/2006/main">
   <p:cSld>
     <p:spTree>
@@ -1787,7 +2254,7 @@
           <a:p>
             <a:fld id="{7F6CD5E7-A5BE-4430-AD67-E129D63AAC5C}" type="slidenum">
               <a:rPr lang="he-IL" smtClean="0"/>
-              <a:t>18</a:t>
+              <a:t>20</a:t>
             </a:fld>
             <a:endParaRPr lang="he-IL"/>
           </a:p>
@@ -1806,7 +2273,7 @@
 </p:notes>
 </file>
 
-<file path=ppt/notesSlides/notesSlide8.xml><?xml version="1.0" encoding="utf-8"?>
+<file path=ppt/notesSlides/notesSlide9.xml><?xml version="1.0" encoding="utf-8"?>
 <p:notes xmlns:a="http://schemas.openxmlformats.org/drawingml/2006/main" xmlns:r="http://schemas.openxmlformats.org/officeDocument/2006/relationships" xmlns:p="http://schemas.openxmlformats.org/presentationml/2006/main">
   <p:cSld>
     <p:spTree>
@@ -1902,7 +2369,7 @@
           <a:p>
             <a:fld id="{7F6CD5E7-A5BE-4430-AD67-E129D63AAC5C}" type="slidenum">
               <a:rPr lang="he-IL" smtClean="0"/>
-              <a:t>19</a:t>
+              <a:t>21</a:t>
             </a:fld>
             <a:endParaRPr lang="he-IL"/>
           </a:p>
@@ -1912,121 +2379,6 @@
     <p:extLst>
       <p:ext uri="{BB962C8B-B14F-4D97-AF65-F5344CB8AC3E}">
         <p14:creationId xmlns:p14="http://schemas.microsoft.com/office/powerpoint/2010/main" val="770845484"/>
-      </p:ext>
-    </p:extLst>
-  </p:cSld>
-  <p:clrMapOvr>
-    <a:masterClrMapping/>
-  </p:clrMapOvr>
-</p:notes>
-</file>
-
-<file path=ppt/notesSlides/notesSlide9.xml><?xml version="1.0" encoding="utf-8"?>
-<p:notes xmlns:a="http://schemas.openxmlformats.org/drawingml/2006/main" xmlns:r="http://schemas.openxmlformats.org/officeDocument/2006/relationships" xmlns:p="http://schemas.openxmlformats.org/presentationml/2006/main">
-  <p:cSld>
-    <p:spTree>
-      <p:nvGrpSpPr>
-        <p:cNvPr id="1" name="">
-          <a:extLst>
-            <a:ext uri="{FF2B5EF4-FFF2-40B4-BE49-F238E27FC236}">
-              <a16:creationId xmlns:a16="http://schemas.microsoft.com/office/drawing/2014/main" id="{89700E97-1269-7E2B-1581-D4E8D9FCCB3F}"/>
-            </a:ext>
-          </a:extLst>
-        </p:cNvPr>
-        <p:cNvGrpSpPr/>
-        <p:nvPr/>
-      </p:nvGrpSpPr>
-      <p:grpSpPr>
-        <a:xfrm>
-          <a:off x="0" y="0"/>
-          <a:ext cx="0" cy="0"/>
-          <a:chOff x="0" y="0"/>
-          <a:chExt cx="0" cy="0"/>
-        </a:xfrm>
-      </p:grpSpPr>
-      <p:sp>
-        <p:nvSpPr>
-          <p:cNvPr id="2" name="Slide Image Placeholder 1">
-            <a:extLst>
-              <a:ext uri="{FF2B5EF4-FFF2-40B4-BE49-F238E27FC236}">
-                <a16:creationId xmlns:a16="http://schemas.microsoft.com/office/drawing/2014/main" id="{58698FE1-3D66-BEFC-5A5B-388AD9A94A18}"/>
-              </a:ext>
-            </a:extLst>
-          </p:cNvPr>
-          <p:cNvSpPr>
-            <a:spLocks noGrp="1" noRot="1" noChangeAspect="1"/>
-          </p:cNvSpPr>
-          <p:nvPr>
-            <p:ph type="sldImg"/>
-          </p:nvPr>
-        </p:nvSpPr>
-        <p:spPr/>
-        <p:txBody>
-          <a:bodyPr/>
-          <a:lstStyle/>
-          <a:p>
-            <a:endParaRPr lang="en-IL"/>
-          </a:p>
-        </p:txBody>
-      </p:sp>
-      <p:sp>
-        <p:nvSpPr>
-          <p:cNvPr id="3" name="Notes Placeholder 2">
-            <a:extLst>
-              <a:ext uri="{FF2B5EF4-FFF2-40B4-BE49-F238E27FC236}">
-                <a16:creationId xmlns:a16="http://schemas.microsoft.com/office/drawing/2014/main" id="{8278256E-4859-C953-928D-D14453A1BBA5}"/>
-              </a:ext>
-            </a:extLst>
-          </p:cNvPr>
-          <p:cNvSpPr>
-            <a:spLocks noGrp="1"/>
-          </p:cNvSpPr>
-          <p:nvPr>
-            <p:ph type="body" idx="1"/>
-          </p:nvPr>
-        </p:nvSpPr>
-        <p:spPr/>
-        <p:txBody>
-          <a:bodyPr/>
-          <a:lstStyle/>
-          <a:p>
-            <a:endParaRPr lang="en-IL" dirty="0"/>
-          </a:p>
-        </p:txBody>
-      </p:sp>
-      <p:sp>
-        <p:nvSpPr>
-          <p:cNvPr id="4" name="Slide Number Placeholder 3">
-            <a:extLst>
-              <a:ext uri="{FF2B5EF4-FFF2-40B4-BE49-F238E27FC236}">
-                <a16:creationId xmlns:a16="http://schemas.microsoft.com/office/drawing/2014/main" id="{07E093A5-59A0-12E4-39B3-28ED44EF3E19}"/>
-              </a:ext>
-            </a:extLst>
-          </p:cNvPr>
-          <p:cNvSpPr>
-            <a:spLocks noGrp="1"/>
-          </p:cNvSpPr>
-          <p:nvPr>
-            <p:ph type="sldNum" sz="quarter" idx="5"/>
-          </p:nvPr>
-        </p:nvSpPr>
-        <p:spPr/>
-        <p:txBody>
-          <a:bodyPr/>
-          <a:lstStyle/>
-          <a:p>
-            <a:fld id="{7F6CD5E7-A5BE-4430-AD67-E129D63AAC5C}" type="slidenum">
-              <a:rPr lang="he-IL" smtClean="0"/>
-              <a:t>21</a:t>
-            </a:fld>
-            <a:endParaRPr lang="he-IL"/>
-          </a:p>
-        </p:txBody>
-      </p:sp>
-    </p:spTree>
-    <p:extLst>
-      <p:ext uri="{BB962C8B-B14F-4D97-AF65-F5344CB8AC3E}">
-        <p14:creationId xmlns:p14="http://schemas.microsoft.com/office/powerpoint/2010/main" val="1174506778"/>
       </p:ext>
     </p:extLst>
   </p:cSld>
@@ -2222,7 +2574,7 @@
           <a:p>
             <a:fld id="{FC6B3A86-AB79-4388-8CA5-9FC4B834779B}" type="datetime8">
               <a:rPr lang="he-IL" smtClean="0"/>
-              <a:t>05 ינואר 26</a:t>
+              <a:t>06 ינואר 26</a:t>
             </a:fld>
             <a:endParaRPr lang="he-IL"/>
           </a:p>
@@ -2445,7 +2797,7 @@
           <a:p>
             <a:fld id="{18F56BC8-8E7D-4896-9980-77BC87FB8E3E}" type="datetime8">
               <a:rPr lang="he-IL" smtClean="0"/>
-              <a:t>05 ינואר 26</a:t>
+              <a:t>06 ינואר 26</a:t>
             </a:fld>
             <a:endParaRPr lang="he-IL"/>
           </a:p>
@@ -2678,7 +3030,7 @@
           <a:p>
             <a:fld id="{0FE327C8-CB36-417E-834B-544633ADCE63}" type="datetime8">
               <a:rPr lang="he-IL" smtClean="0"/>
-              <a:t>05 ינואר 26</a:t>
+              <a:t>06 ינואר 26</a:t>
             </a:fld>
             <a:endParaRPr lang="he-IL"/>
           </a:p>
@@ -2747,6 +3099,207 @@
     <p:extLst>
       <p:ext uri="{BB962C8B-B14F-4D97-AF65-F5344CB8AC3E}">
         <p14:creationId xmlns:p14="http://schemas.microsoft.com/office/powerpoint/2010/main" val="2615556631"/>
+      </p:ext>
+    </p:extLst>
+  </p:cSld>
+  <p:clrMapOvr>
+    <a:masterClrMapping/>
+  </p:clrMapOvr>
+</p:sldLayout>
+</file>
+
+<file path=ppt/slideLayouts/slideLayout12.xml><?xml version="1.0" encoding="utf-8"?>
+<p:sldLayout xmlns:a="http://schemas.openxmlformats.org/drawingml/2006/main" xmlns:r="http://schemas.openxmlformats.org/officeDocument/2006/relationships" xmlns:p="http://schemas.openxmlformats.org/presentationml/2006/main" preserve="1" userDrawn="1">
+  <p:cSld name="Workflow">
+    <p:spTree>
+      <p:nvGrpSpPr>
+        <p:cNvPr id="1" name=""/>
+        <p:cNvGrpSpPr/>
+        <p:nvPr/>
+      </p:nvGrpSpPr>
+      <p:grpSpPr>
+        <a:xfrm>
+          <a:off x="0" y="0"/>
+          <a:ext cx="0" cy="0"/>
+          <a:chOff x="0" y="0"/>
+          <a:chExt cx="0" cy="0"/>
+        </a:xfrm>
+      </p:grpSpPr>
+      <p:sp>
+        <p:nvSpPr>
+          <p:cNvPr id="3" name="Date Placeholder 2">
+            <a:extLst>
+              <a:ext uri="{FF2B5EF4-FFF2-40B4-BE49-F238E27FC236}">
+                <a16:creationId xmlns:a16="http://schemas.microsoft.com/office/drawing/2014/main" id="{9072684E-6693-F58C-BC24-150353E83C70}"/>
+              </a:ext>
+            </a:extLst>
+          </p:cNvPr>
+          <p:cNvSpPr>
+            <a:spLocks noGrp="1"/>
+          </p:cNvSpPr>
+          <p:nvPr>
+            <p:ph type="dt" sz="half" idx="10"/>
+          </p:nvPr>
+        </p:nvSpPr>
+        <p:spPr/>
+        <p:txBody>
+          <a:bodyPr/>
+          <a:lstStyle/>
+          <a:p>
+            <a:fld id="{8E065D1C-C98B-44F5-AB2A-FEE3E85D0A94}" type="datetime8">
+              <a:rPr lang="he-IL" smtClean="0"/>
+              <a:t>06 ינואר 26</a:t>
+            </a:fld>
+            <a:endParaRPr lang="he-IL"/>
+          </a:p>
+        </p:txBody>
+      </p:sp>
+      <p:sp>
+        <p:nvSpPr>
+          <p:cNvPr id="4" name="Footer Placeholder 3">
+            <a:extLst>
+              <a:ext uri="{FF2B5EF4-FFF2-40B4-BE49-F238E27FC236}">
+                <a16:creationId xmlns:a16="http://schemas.microsoft.com/office/drawing/2014/main" id="{212C0620-C9BE-4C99-2D6C-A02A9A6778BE}"/>
+              </a:ext>
+            </a:extLst>
+          </p:cNvPr>
+          <p:cNvSpPr>
+            <a:spLocks noGrp="1"/>
+          </p:cNvSpPr>
+          <p:nvPr>
+            <p:ph type="ftr" sz="quarter" idx="11"/>
+          </p:nvPr>
+        </p:nvSpPr>
+        <p:spPr/>
+        <p:txBody>
+          <a:bodyPr/>
+          <a:lstStyle/>
+          <a:p>
+            <a:endParaRPr lang="he-IL" dirty="0"/>
+          </a:p>
+        </p:txBody>
+      </p:sp>
+      <p:sp>
+        <p:nvSpPr>
+          <p:cNvPr id="5" name="Slide Number Placeholder 4">
+            <a:extLst>
+              <a:ext uri="{FF2B5EF4-FFF2-40B4-BE49-F238E27FC236}">
+                <a16:creationId xmlns:a16="http://schemas.microsoft.com/office/drawing/2014/main" id="{8748F728-5692-0756-E6BD-FFB67E1A33CD}"/>
+              </a:ext>
+            </a:extLst>
+          </p:cNvPr>
+          <p:cNvSpPr>
+            <a:spLocks noGrp="1"/>
+          </p:cNvSpPr>
+          <p:nvPr>
+            <p:ph type="sldNum" sz="quarter" idx="12"/>
+          </p:nvPr>
+        </p:nvSpPr>
+        <p:spPr/>
+        <p:txBody>
+          <a:bodyPr/>
+          <a:lstStyle/>
+          <a:p>
+            <a:fld id="{E6AB8EDD-9EF2-4633-A1C2-4D908C1019B4}" type="slidenum">
+              <a:rPr lang="he-IL" smtClean="0"/>
+              <a:pPr/>
+              <a:t>‹#›</a:t>
+            </a:fld>
+            <a:endParaRPr lang="he-IL" dirty="0"/>
+          </a:p>
+        </p:txBody>
+      </p:sp>
+      <p:pic>
+        <p:nvPicPr>
+          <p:cNvPr id="9" name="Picture 8" descr="A document with text on it&#10;&#10;AI-generated content may be incorrect.">
+            <a:extLst>
+              <a:ext uri="{FF2B5EF4-FFF2-40B4-BE49-F238E27FC236}">
+                <a16:creationId xmlns:a16="http://schemas.microsoft.com/office/drawing/2014/main" id="{4A6D55D5-DFBA-E0B3-0219-6E4D255B0CDD}"/>
+              </a:ext>
+            </a:extLst>
+          </p:cNvPr>
+          <p:cNvPicPr>
+            <a:picLocks noChangeAspect="1"/>
+          </p:cNvPicPr>
+          <p:nvPr userDrawn="1"/>
+        </p:nvPicPr>
+        <p:blipFill>
+          <a:blip r:embed="rId2">
+            <a:extLst>
+              <a:ext uri="{28A0092B-C50C-407E-A947-70E740481C1C}">
+                <a14:useLocalDpi xmlns:a14="http://schemas.microsoft.com/office/drawing/2010/main" val="0"/>
+              </a:ext>
+            </a:extLst>
+          </a:blip>
+          <a:srcRect l="11677" t="8796" r="8571" b="78403"/>
+          <a:stretch>
+            <a:fillRect/>
+          </a:stretch>
+        </p:blipFill>
+        <p:spPr>
+          <a:xfrm>
+            <a:off x="1072186" y="2463071"/>
+            <a:ext cx="10753557" cy="2233697"/>
+          </a:xfrm>
+          <a:prstGeom prst="rect">
+            <a:avLst/>
+          </a:prstGeom>
+        </p:spPr>
+      </p:pic>
+      <p:sp>
+        <p:nvSpPr>
+          <p:cNvPr id="11" name="TextBox 10">
+            <a:extLst>
+              <a:ext uri="{FF2B5EF4-FFF2-40B4-BE49-F238E27FC236}">
+                <a16:creationId xmlns:a16="http://schemas.microsoft.com/office/drawing/2014/main" id="{3DFF33BC-21D6-16B0-C505-3CEE5CDF6D13}"/>
+              </a:ext>
+            </a:extLst>
+          </p:cNvPr>
+          <p:cNvSpPr txBox="1"/>
+          <p:nvPr userDrawn="1"/>
+        </p:nvSpPr>
+        <p:spPr>
+          <a:xfrm>
+            <a:off x="3072268" y="679697"/>
+            <a:ext cx="8753475" cy="769441"/>
+          </a:xfrm>
+          <a:prstGeom prst="rect">
+            <a:avLst/>
+          </a:prstGeom>
+          <a:noFill/>
+        </p:spPr>
+        <p:txBody>
+          <a:bodyPr wrap="square" rtlCol="0">
+            <a:spAutoFit/>
+          </a:bodyPr>
+          <a:lstStyle/>
+          <a:p>
+            <a:r>
+              <a:rPr lang="en-GB" sz="4400" b="0" kern="1200" dirty="0">
+                <a:solidFill>
+                  <a:srgbClr val="009DBB"/>
+                </a:solidFill>
+                <a:latin typeface="+mj-lt"/>
+                <a:ea typeface="+mj-ea"/>
+                <a:cs typeface="+mj-cs"/>
+              </a:rPr>
+              <a:t>Workflow</a:t>
+            </a:r>
+            <a:endParaRPr lang="en-IL" sz="4400" b="0" kern="1200" dirty="0">
+              <a:solidFill>
+                <a:srgbClr val="009DBB"/>
+              </a:solidFill>
+              <a:latin typeface="+mj-lt"/>
+              <a:ea typeface="+mj-ea"/>
+              <a:cs typeface="+mj-cs"/>
+            </a:endParaRPr>
+          </a:p>
+        </p:txBody>
+      </p:sp>
+    </p:spTree>
+    <p:extLst>
+      <p:ext uri="{BB962C8B-B14F-4D97-AF65-F5344CB8AC3E}">
+        <p14:creationId xmlns:p14="http://schemas.microsoft.com/office/powerpoint/2010/main" val="1912383567"/>
       </p:ext>
     </p:extLst>
   </p:cSld>
@@ -2906,7 +3459,7 @@
           <a:p>
             <a:fld id="{7634CBFB-2532-48BA-BAE2-ADD925390740}" type="datetime8">
               <a:rPr lang="he-IL" smtClean="0"/>
-              <a:t>05 ינואר 26</a:t>
+              <a:t>06 ינואר 26</a:t>
             </a:fld>
             <a:endParaRPr lang="he-IL"/>
           </a:p>
@@ -3189,7 +3742,7 @@
           <a:p>
             <a:fld id="{8EAC1FDD-37C4-4A6B-BF31-779943CE32CF}" type="datetime8">
               <a:rPr lang="he-IL" smtClean="0"/>
-              <a:t>05 ינואר 26</a:t>
+              <a:t>06 ינואר 26</a:t>
             </a:fld>
             <a:endParaRPr lang="he-IL"/>
           </a:p>
@@ -3502,7 +4055,7 @@
           <a:p>
             <a:fld id="{C73C226C-A76A-4927-8F1D-1BD4AC033ABB}" type="datetime8">
               <a:rPr lang="he-IL" smtClean="0"/>
-              <a:t>05 ינואר 26</a:t>
+              <a:t>06 ינואר 26</a:t>
             </a:fld>
             <a:endParaRPr lang="he-IL"/>
           </a:p>
@@ -4005,7 +4558,7 @@
           <a:p>
             <a:fld id="{430DF2BF-D428-43E9-B36B-6DD16CF93579}" type="datetime8">
               <a:rPr lang="he-IL" smtClean="0"/>
-              <a:t>05 ינואר 26</a:t>
+              <a:t>06 ינואר 26</a:t>
             </a:fld>
             <a:endParaRPr lang="he-IL"/>
           </a:p>
@@ -4152,7 +4705,7 @@
           <a:p>
             <a:fld id="{390A9136-4922-4C74-B05C-12CD0951E601}" type="datetime8">
               <a:rPr lang="he-IL" smtClean="0"/>
-              <a:t>05 ינואר 26</a:t>
+              <a:t>06 ינואר 26</a:t>
             </a:fld>
             <a:endParaRPr lang="he-IL"/>
           </a:p>
@@ -4270,7 +4823,7 @@
           <a:p>
             <a:fld id="{C29F3CA8-2E63-412C-AA06-0D760EBE5965}" type="datetime8">
               <a:rPr lang="he-IL" smtClean="0"/>
-              <a:t>05 ינואר 26</a:t>
+              <a:t>06 ינואר 26</a:t>
             </a:fld>
             <a:endParaRPr lang="he-IL"/>
           </a:p>
@@ -4592,7 +5145,7 @@
           <a:p>
             <a:fld id="{7AC7B867-AA4A-4FF3-AD8B-0AD0F18EE595}" type="datetime8">
               <a:rPr lang="he-IL" smtClean="0"/>
-              <a:t>05 ינואר 26</a:t>
+              <a:t>06 ינואר 26</a:t>
             </a:fld>
             <a:endParaRPr lang="he-IL"/>
           </a:p>
@@ -4890,7 +5443,7 @@
           <a:p>
             <a:fld id="{F5E9EBD3-88E8-46DB-BD3B-F935B7013014}" type="datetime8">
               <a:rPr lang="he-IL" smtClean="0"/>
-              <a:t>05 ינואר 26</a:t>
+              <a:t>06 ינואר 26</a:t>
             </a:fld>
             <a:endParaRPr lang="he-IL"/>
           </a:p>
@@ -5005,7 +5558,7 @@
           <p:nvPr userDrawn="1"/>
         </p:nvPicPr>
         <p:blipFill>
-          <a:blip r:embed="rId13">
+          <a:blip r:embed="rId14">
             <a:extLst>
               <a:ext uri="{28A0092B-C50C-407E-A947-70E740481C1C}">
                 <a14:useLocalDpi xmlns:a14="http://schemas.microsoft.com/office/drawing/2010/main" val="0"/>
@@ -5174,7 +5727,7 @@
           <a:p>
             <a:fld id="{8E065D1C-C98B-44F5-AB2A-FEE3E85D0A94}" type="datetime8">
               <a:rPr lang="he-IL" smtClean="0"/>
-              <a:t>05 ינואר 26</a:t>
+              <a:t>06 ינואר 26</a:t>
             </a:fld>
             <a:endParaRPr lang="he-IL"/>
           </a:p>
@@ -5286,7 +5839,7 @@
           <p:nvPr userDrawn="1"/>
         </p:nvPicPr>
         <p:blipFill>
-          <a:blip r:embed="rId14">
+          <a:blip r:embed="rId15">
             <a:extLst>
               <a:ext uri="{28A0092B-C50C-407E-A947-70E740481C1C}">
                 <a14:useLocalDpi xmlns:a14="http://schemas.microsoft.com/office/drawing/2010/main" val="0"/>
@@ -5327,6 +5880,7 @@
     <p:sldLayoutId id="2147483657" r:id="rId9"/>
     <p:sldLayoutId id="2147483658" r:id="rId10"/>
     <p:sldLayoutId id="2147483659" r:id="rId11"/>
+    <p:sldLayoutId id="2147483660" r:id="rId12"/>
   </p:sldLayoutIdLst>
   <p:hf hdr="0" ftr="0" dt="0"/>
   <p:txStyles>
@@ -6297,7 +6851,7 @@
         <p:cNvPr id="1" name="">
           <a:extLst>
             <a:ext uri="{FF2B5EF4-FFF2-40B4-BE49-F238E27FC236}">
-              <a16:creationId xmlns:a16="http://schemas.microsoft.com/office/drawing/2014/main" id="{2B500C0F-3996-85BD-0DC9-D5093CDDD03D}"/>
+              <a16:creationId xmlns:a16="http://schemas.microsoft.com/office/drawing/2014/main" id="{DC8E0CD0-A559-1E21-6735-647E6E23279F}"/>
             </a:ext>
           </a:extLst>
         </p:cNvPr>
@@ -6314,41 +6868,10 @@
       </p:grpSpPr>
       <p:sp>
         <p:nvSpPr>
-          <p:cNvPr id="2" name="Title 1">
-            <a:extLst>
-              <a:ext uri="{FF2B5EF4-FFF2-40B4-BE49-F238E27FC236}">
-                <a16:creationId xmlns:a16="http://schemas.microsoft.com/office/drawing/2014/main" id="{9F03F8FD-3B90-9CF5-B873-C1A001615DFA}"/>
-              </a:ext>
-            </a:extLst>
-          </p:cNvPr>
-          <p:cNvSpPr>
-            <a:spLocks noGrp="1"/>
-          </p:cNvSpPr>
-          <p:nvPr>
-            <p:ph type="title"/>
-          </p:nvPr>
-        </p:nvSpPr>
-        <p:spPr/>
-        <p:txBody>
-          <a:bodyPr>
-            <a:normAutofit/>
-          </a:bodyPr>
-          <a:lstStyle/>
-          <a:p>
-            <a:r>
-              <a:rPr lang="en-GB" dirty="0"/>
-              <a:t>Workflow</a:t>
-            </a:r>
-            <a:endParaRPr lang="en-IL" dirty="0"/>
-          </a:p>
-        </p:txBody>
-      </p:sp>
-      <p:sp>
-        <p:nvSpPr>
-          <p:cNvPr id="4" name="Slide Number Placeholder 3">
-            <a:extLst>
-              <a:ext uri="{FF2B5EF4-FFF2-40B4-BE49-F238E27FC236}">
-                <a16:creationId xmlns:a16="http://schemas.microsoft.com/office/drawing/2014/main" id="{321FDFB4-095D-2E39-F873-D92B727A0390}"/>
+          <p:cNvPr id="2" name="Slide Number Placeholder 1">
+            <a:extLst>
+              <a:ext uri="{FF2B5EF4-FFF2-40B4-BE49-F238E27FC236}">
+                <a16:creationId xmlns:a16="http://schemas.microsoft.com/office/drawing/2014/main" id="{3E9EF5BE-5D1F-DF4A-0CDF-D920902E3AC5}"/>
               </a:ext>
             </a:extLst>
           </p:cNvPr>
@@ -6366,64 +6889,29 @@
           <a:p>
             <a:fld id="{E6AB8EDD-9EF2-4633-A1C2-4D908C1019B4}" type="slidenum">
               <a:rPr lang="he-IL" smtClean="0"/>
+              <a:pPr/>
               <a:t>10</a:t>
             </a:fld>
-            <a:endParaRPr lang="he-IL"/>
-          </a:p>
-        </p:txBody>
-      </p:sp>
-      <p:pic>
-        <p:nvPicPr>
-          <p:cNvPr id="3" name="Picture 2" descr="A diagram of a system&#10;&#10;AI-generated content may be incorrect.">
-            <a:extLst>
-              <a:ext uri="{FF2B5EF4-FFF2-40B4-BE49-F238E27FC236}">
-                <a16:creationId xmlns:a16="http://schemas.microsoft.com/office/drawing/2014/main" id="{F97C2A5B-135E-8936-0AFC-AE8B6D835D74}"/>
-              </a:ext>
-            </a:extLst>
-          </p:cNvPr>
-          <p:cNvPicPr>
-            <a:picLocks noChangeAspect="1"/>
-          </p:cNvPicPr>
+            <a:endParaRPr lang="he-IL" dirty="0"/>
+          </a:p>
+        </p:txBody>
+      </p:sp>
+      <p:sp>
+        <p:nvSpPr>
+          <p:cNvPr id="4" name="Rectangle: Rounded Corners 3">
+            <a:extLst>
+              <a:ext uri="{FF2B5EF4-FFF2-40B4-BE49-F238E27FC236}">
+                <a16:creationId xmlns:a16="http://schemas.microsoft.com/office/drawing/2014/main" id="{89BADA0D-6E73-6B2F-17D9-4719BDE1B7FC}"/>
+              </a:ext>
+            </a:extLst>
+          </p:cNvPr>
+          <p:cNvSpPr/>
           <p:nvPr/>
-        </p:nvPicPr>
-        <p:blipFill>
-          <a:blip r:embed="rId2">
-            <a:extLst>
-              <a:ext uri="{28A0092B-C50C-407E-A947-70E740481C1C}">
-                <a14:useLocalDpi xmlns:a14="http://schemas.microsoft.com/office/drawing/2010/main" val="0"/>
-              </a:ext>
-            </a:extLst>
-          </a:blip>
-          <a:stretch>
-            <a:fillRect/>
-          </a:stretch>
-        </p:blipFill>
+        </p:nvSpPr>
         <p:spPr>
           <a:xfrm>
-            <a:off x="1109472" y="2297798"/>
-            <a:ext cx="9924288" cy="2350401"/>
-          </a:xfrm>
-          <a:prstGeom prst="rect">
-            <a:avLst/>
-          </a:prstGeom>
-        </p:spPr>
-      </p:pic>
-      <p:sp>
-        <p:nvSpPr>
-          <p:cNvPr id="6" name="Rectangle: Rounded Corners 5">
-            <a:extLst>
-              <a:ext uri="{FF2B5EF4-FFF2-40B4-BE49-F238E27FC236}">
-                <a16:creationId xmlns:a16="http://schemas.microsoft.com/office/drawing/2014/main" id="{2FFFF692-13BA-3886-D028-6ADCD4B08044}"/>
-              </a:ext>
-            </a:extLst>
-          </p:cNvPr>
-          <p:cNvSpPr/>
-          <p:nvPr/>
-        </p:nvSpPr>
-        <p:spPr>
-          <a:xfrm>
-            <a:off x="8959850" y="2190750"/>
-            <a:ext cx="2275078" cy="1016000"/>
+            <a:off x="3713356" y="2364057"/>
+            <a:ext cx="5460083" cy="959005"/>
           </a:xfrm>
           <a:prstGeom prst="roundRect">
             <a:avLst/>
@@ -6463,7 +6951,7 @@
     </p:spTree>
     <p:extLst>
       <p:ext uri="{BB962C8B-B14F-4D97-AF65-F5344CB8AC3E}">
-        <p14:creationId xmlns:p14="http://schemas.microsoft.com/office/powerpoint/2010/main" val="3429437932"/>
+        <p14:creationId xmlns:p14="http://schemas.microsoft.com/office/powerpoint/2010/main" val="954000904"/>
       </p:ext>
     </p:extLst>
   </p:cSld>
@@ -6481,7 +6969,7 @@
         <p:cNvPr id="1" name="">
           <a:extLst>
             <a:ext uri="{FF2B5EF4-FFF2-40B4-BE49-F238E27FC236}">
-              <a16:creationId xmlns:a16="http://schemas.microsoft.com/office/drawing/2014/main" id="{51AF6EA1-FAAD-E397-A58E-4820223D23C7}"/>
+              <a16:creationId xmlns:a16="http://schemas.microsoft.com/office/drawing/2014/main" id="{F9A3E1CF-F501-BA78-A405-8F9FE55ADE04}"/>
             </a:ext>
           </a:extLst>
         </p:cNvPr>
@@ -6501,7 +6989,7 @@
           <p:cNvPr id="2" name="Title 1">
             <a:extLst>
               <a:ext uri="{FF2B5EF4-FFF2-40B4-BE49-F238E27FC236}">
-                <a16:creationId xmlns:a16="http://schemas.microsoft.com/office/drawing/2014/main" id="{C108A148-31C4-BE5B-2786-3D9132CB8F3C}"/>
+                <a16:creationId xmlns:a16="http://schemas.microsoft.com/office/drawing/2014/main" id="{989DA07F-726D-5309-24B1-8D8FD8B57881}"/>
               </a:ext>
             </a:extLst>
           </p:cNvPr>
@@ -6526,7 +7014,14 @@
           <a:p>
             <a:r>
               <a:rPr lang="en-GB" dirty="0"/>
-              <a:t>Entities Topic TF-IDF Score</a:t>
+              <a:t>Narratives Clustering &amp; </a:t>
+            </a:r>
+            <a:br>
+              <a:rPr lang="en-GB" dirty="0"/>
+            </a:br>
+            <a:r>
+              <a:rPr lang="en-GB" dirty="0"/>
+              <a:t>Entities Recognition</a:t>
             </a:r>
             <a:endParaRPr lang="en-IL" dirty="0"/>
           </a:p>
@@ -6537,7 +7032,7 @@
           <p:cNvPr id="3" name="Content Placeholder 2">
             <a:extLst>
               <a:ext uri="{FF2B5EF4-FFF2-40B4-BE49-F238E27FC236}">
-                <a16:creationId xmlns:a16="http://schemas.microsoft.com/office/drawing/2014/main" id="{D3FC0E13-7FF1-6DB2-4802-A385B1200759}"/>
+                <a16:creationId xmlns:a16="http://schemas.microsoft.com/office/drawing/2014/main" id="{5EFDBB99-E333-E814-DFD8-B2A30F11C75B}"/>
               </a:ext>
             </a:extLst>
           </p:cNvPr>
@@ -6556,36 +7051,69 @@
           <a:lstStyle/>
           <a:p>
             <a:r>
-              <a:rPr lang="en-US" sz="4000" dirty="0"/>
-              <a:t> TF-IDF: </a:t>
-            </a:r>
-            <a:r>
-              <a:rPr lang="en-GB" sz="4000" dirty="0"/>
-              <a:t>Term Frequency - Inverse Document Frequency</a:t>
-            </a:r>
-          </a:p>
-          <a:p>
-            <a:endParaRPr lang="en-US" sz="4000" dirty="0"/>
-          </a:p>
-          <a:p>
-            <a:r>
-              <a:rPr lang="en-US" sz="4000" dirty="0"/>
-              <a:t>TF-IDF … </a:t>
-            </a:r>
-            <a:r>
-              <a:rPr lang="en-GB" sz="4000" dirty="0"/>
-              <a:t>is a statistical method … to evaluate how important a word is to a document in relation to a larger collection of documents </a:t>
-            </a:r>
-            <a:r>
-              <a:rPr lang="en-GB" sz="3200" dirty="0"/>
-              <a:t>(geeks for geeks).</a:t>
-            </a:r>
-          </a:p>
-          <a:p>
+              <a:rPr lang="en-GB" sz="3600" b="1" dirty="0"/>
+              <a:t>Narratives</a:t>
+            </a:r>
+            <a:r>
+              <a:rPr lang="en-GB" sz="3300" b="1" dirty="0"/>
+              <a:t> Clustering: </a:t>
+            </a:r>
+            <a:r>
+              <a:rPr lang="en-GB" sz="3300" dirty="0"/>
+              <a:t>group semantically similar posts.</a:t>
+            </a:r>
+          </a:p>
+          <a:p>
+            <a:pPr lvl="1">
+              <a:buFontTx/>
+              <a:buChar char="-"/>
+            </a:pPr>
+            <a:r>
+              <a:rPr lang="en-GB" sz="3300" dirty="0"/>
+              <a:t>Will be used for </a:t>
+            </a:r>
+            <a:r>
+              <a:rPr lang="en-GB" sz="3300" dirty="0" err="1"/>
+              <a:t>tf-idf</a:t>
+            </a:r>
+            <a:r>
+              <a:rPr lang="en-GB" sz="3300" dirty="0"/>
+              <a:t> </a:t>
+            </a:r>
+            <a:r>
+              <a:rPr lang="en-US" sz="3300" dirty="0"/>
+              <a:t>score calculation</a:t>
+            </a:r>
+            <a:r>
+              <a:rPr lang="en-GB" sz="3300" dirty="0"/>
+              <a:t>.</a:t>
+            </a:r>
+          </a:p>
+          <a:p>
+            <a:pPr lvl="1">
+              <a:buFontTx/>
+              <a:buChar char="-"/>
+            </a:pPr>
             <a:endParaRPr lang="en-GB" sz="3300" dirty="0"/>
           </a:p>
           <a:p>
-            <a:endParaRPr lang="en-GB" sz="3300" dirty="0"/>
+            <a:r>
+              <a:rPr lang="en-GB" sz="3300" b="1" dirty="0"/>
+              <a:t>Entity Recognition: </a:t>
+            </a:r>
+            <a:r>
+              <a:rPr lang="en-GB" sz="3300" dirty="0"/>
+              <a:t>name entities recognition (NER).</a:t>
+            </a:r>
+          </a:p>
+          <a:p>
+            <a:pPr marL="457200" lvl="1" indent="0">
+              <a:buNone/>
+            </a:pPr>
+            <a:r>
+              <a:rPr lang="en-GB" sz="3300" dirty="0"/>
+              <a:t>- Will be use for behavioural similarity.</a:t>
+            </a:r>
           </a:p>
           <a:p>
             <a:pPr marL="457200" lvl="1" indent="0">
@@ -6606,7 +7134,7 @@
           <p:cNvPr id="4" name="Slide Number Placeholder 3">
             <a:extLst>
               <a:ext uri="{FF2B5EF4-FFF2-40B4-BE49-F238E27FC236}">
-                <a16:creationId xmlns:a16="http://schemas.microsoft.com/office/drawing/2014/main" id="{A8032366-0482-6B07-AE65-F1A1E26BF42E}"/>
+                <a16:creationId xmlns:a16="http://schemas.microsoft.com/office/drawing/2014/main" id="{20A95D79-0EC6-4542-6F92-46E4F5A6A4D2}"/>
               </a:ext>
             </a:extLst>
           </p:cNvPr>
@@ -6633,7 +7161,7 @@
     </p:spTree>
     <p:extLst>
       <p:ext uri="{BB962C8B-B14F-4D97-AF65-F5344CB8AC3E}">
-        <p14:creationId xmlns:p14="http://schemas.microsoft.com/office/powerpoint/2010/main" val="1177306775"/>
+        <p14:creationId xmlns:p14="http://schemas.microsoft.com/office/powerpoint/2010/main" val="2160734738"/>
       </p:ext>
     </p:extLst>
   </p:cSld>
@@ -6651,7 +7179,7 @@
         <p:cNvPr id="1" name="">
           <a:extLst>
             <a:ext uri="{FF2B5EF4-FFF2-40B4-BE49-F238E27FC236}">
-              <a16:creationId xmlns:a16="http://schemas.microsoft.com/office/drawing/2014/main" id="{EB209712-7E39-C7BB-CC6C-21FDC6927BC2}"/>
+              <a16:creationId xmlns:a16="http://schemas.microsoft.com/office/drawing/2014/main" id="{A114C3AE-6EB8-8D4D-3523-DAE8AF6B716F}"/>
             </a:ext>
           </a:extLst>
         </p:cNvPr>
@@ -6668,307 +7196,50 @@
       </p:grpSpPr>
       <p:sp>
         <p:nvSpPr>
-          <p:cNvPr id="2" name="Title 1">
-            <a:extLst>
-              <a:ext uri="{FF2B5EF4-FFF2-40B4-BE49-F238E27FC236}">
-                <a16:creationId xmlns:a16="http://schemas.microsoft.com/office/drawing/2014/main" id="{B5C95C0B-1A5F-D364-3525-3A3FDBDA5407}"/>
-              </a:ext>
-            </a:extLst>
-          </p:cNvPr>
-          <p:cNvSpPr>
-            <a:spLocks noGrp="1"/>
-          </p:cNvSpPr>
-          <p:nvPr>
-            <p:ph type="title"/>
-          </p:nvPr>
+          <p:cNvPr id="2" name="Slide Number Placeholder 1">
+            <a:extLst>
+              <a:ext uri="{FF2B5EF4-FFF2-40B4-BE49-F238E27FC236}">
+                <a16:creationId xmlns:a16="http://schemas.microsoft.com/office/drawing/2014/main" id="{2E82AB87-77D7-01AC-E3C7-8719A0DC0B24}"/>
+              </a:ext>
+            </a:extLst>
+          </p:cNvPr>
+          <p:cNvSpPr>
+            <a:spLocks noGrp="1"/>
+          </p:cNvSpPr>
+          <p:nvPr>
+            <p:ph type="sldNum" sz="quarter" idx="12"/>
+          </p:nvPr>
+        </p:nvSpPr>
+        <p:spPr/>
+        <p:txBody>
+          <a:bodyPr/>
+          <a:lstStyle/>
+          <a:p>
+            <a:fld id="{E6AB8EDD-9EF2-4633-A1C2-4D908C1019B4}" type="slidenum">
+              <a:rPr lang="he-IL" smtClean="0"/>
+              <a:pPr/>
+              <a:t>12</a:t>
+            </a:fld>
+            <a:endParaRPr lang="he-IL" dirty="0"/>
+          </a:p>
+        </p:txBody>
+      </p:sp>
+      <p:sp>
+        <p:nvSpPr>
+          <p:cNvPr id="5" name="Rectangle: Rounded Corners 4">
+            <a:extLst>
+              <a:ext uri="{FF2B5EF4-FFF2-40B4-BE49-F238E27FC236}">
+                <a16:creationId xmlns:a16="http://schemas.microsoft.com/office/drawing/2014/main" id="{8DC5B635-A416-D1E7-A3C8-91720E1AB60A}"/>
+              </a:ext>
+            </a:extLst>
+          </p:cNvPr>
+          <p:cNvSpPr/>
+          <p:nvPr/>
         </p:nvSpPr>
         <p:spPr>
           <a:xfrm>
-            <a:off x="3072268" y="401637"/>
-            <a:ext cx="8949044" cy="1325563"/>
-          </a:xfrm>
-        </p:spPr>
-        <p:txBody>
-          <a:bodyPr>
-            <a:normAutofit/>
-          </a:bodyPr>
-          <a:lstStyle/>
-          <a:p>
-            <a:r>
-              <a:rPr lang="en-GB" dirty="0"/>
-              <a:t>Entities Topic TF-IDF Score</a:t>
-            </a:r>
-            <a:endParaRPr lang="en-IL" dirty="0"/>
-          </a:p>
-        </p:txBody>
-      </p:sp>
-      <p:sp>
-        <p:nvSpPr>
-          <p:cNvPr id="3" name="Content Placeholder 2">
-            <a:extLst>
-              <a:ext uri="{FF2B5EF4-FFF2-40B4-BE49-F238E27FC236}">
-                <a16:creationId xmlns:a16="http://schemas.microsoft.com/office/drawing/2014/main" id="{4CA2899F-703D-332C-417F-E2319058A485}"/>
-              </a:ext>
-            </a:extLst>
-          </p:cNvPr>
-          <p:cNvSpPr>
-            <a:spLocks noGrp="1"/>
-          </p:cNvSpPr>
-          <p:nvPr>
-            <p:ph idx="1"/>
-          </p:nvPr>
-        </p:nvSpPr>
-        <p:spPr>
-          <a:xfrm>
-            <a:off x="1243087" y="1825624"/>
-            <a:ext cx="10582656" cy="4441825"/>
-          </a:xfrm>
-        </p:spPr>
-        <p:txBody>
-          <a:bodyPr>
-            <a:normAutofit/>
-          </a:bodyPr>
-          <a:lstStyle/>
-          <a:p>
-            <a:r>
-              <a:rPr lang="en-GB" sz="3300" dirty="0"/>
-              <a:t>In this project:</a:t>
-            </a:r>
-          </a:p>
-          <a:p>
-            <a:pPr lvl="1">
-              <a:buFontTx/>
-              <a:buChar char="-"/>
-            </a:pPr>
-            <a:r>
-              <a:rPr lang="en-GB" sz="2900" dirty="0"/>
-              <a:t>Documents are topics derived from topic clustering. </a:t>
-            </a:r>
-          </a:p>
-          <a:p>
-            <a:pPr lvl="1">
-              <a:buFontTx/>
-              <a:buChar char="-"/>
-            </a:pPr>
-            <a:r>
-              <a:rPr lang="en-GB" sz="3200" dirty="0"/>
-              <a:t>Entities are social markers in social media discourse (e.g., hashtags, URLs, mentions, named actors).</a:t>
-            </a:r>
-          </a:p>
-          <a:p>
-            <a:pPr marL="457200" lvl="1" indent="0">
-              <a:buNone/>
-            </a:pPr>
-            <a:endParaRPr lang="en-GB" sz="3200" dirty="0"/>
-          </a:p>
-          <a:p>
-            <a:r>
-              <a:rPr lang="en-GB" sz="3300" dirty="0"/>
-              <a:t>Quantify the importance of entities within each topic.</a:t>
-            </a:r>
-          </a:p>
-          <a:p>
-            <a:endParaRPr lang="en-GB" sz="3300" dirty="0"/>
-          </a:p>
-          <a:p>
-            <a:r>
-              <a:rPr lang="en-GB" sz="3300" dirty="0"/>
-              <a:t>Highlight entities that are distinctive rather than common.</a:t>
-            </a:r>
-          </a:p>
-          <a:p>
-            <a:pPr marL="457200" lvl="1" indent="0">
-              <a:buNone/>
-            </a:pPr>
-            <a:endParaRPr lang="en-GB" sz="3200" dirty="0"/>
-          </a:p>
-          <a:p>
-            <a:pPr lvl="1"/>
-            <a:endParaRPr lang="en-GB" sz="3300" dirty="0"/>
-          </a:p>
-          <a:p>
-            <a:pPr lvl="1"/>
-            <a:endParaRPr lang="en-GB" sz="3300" dirty="0"/>
-          </a:p>
-        </p:txBody>
-      </p:sp>
-      <p:sp>
-        <p:nvSpPr>
-          <p:cNvPr id="4" name="Slide Number Placeholder 3">
-            <a:extLst>
-              <a:ext uri="{FF2B5EF4-FFF2-40B4-BE49-F238E27FC236}">
-                <a16:creationId xmlns:a16="http://schemas.microsoft.com/office/drawing/2014/main" id="{CC2438A4-2E34-7B04-EDC0-D62241F1AD5B}"/>
-              </a:ext>
-            </a:extLst>
-          </p:cNvPr>
-          <p:cNvSpPr>
-            <a:spLocks noGrp="1"/>
-          </p:cNvSpPr>
-          <p:nvPr>
-            <p:ph type="sldNum" sz="quarter" idx="12"/>
-          </p:nvPr>
-        </p:nvSpPr>
-        <p:spPr/>
-        <p:txBody>
-          <a:bodyPr/>
-          <a:lstStyle/>
-          <a:p>
-            <a:fld id="{E6AB8EDD-9EF2-4633-A1C2-4D908C1019B4}" type="slidenum">
-              <a:rPr lang="he-IL" smtClean="0"/>
-              <a:t>12</a:t>
-            </a:fld>
-            <a:endParaRPr lang="he-IL"/>
-          </a:p>
-        </p:txBody>
-      </p:sp>
-    </p:spTree>
-    <p:extLst>
-      <p:ext uri="{BB962C8B-B14F-4D97-AF65-F5344CB8AC3E}">
-        <p14:creationId xmlns:p14="http://schemas.microsoft.com/office/powerpoint/2010/main" val="3412836721"/>
-      </p:ext>
-    </p:extLst>
-  </p:cSld>
-  <p:clrMapOvr>
-    <a:masterClrMapping/>
-  </p:clrMapOvr>
-</p:sld>
-</file>
-
-<file path=ppt/slides/slide13.xml><?xml version="1.0" encoding="utf-8"?>
-<p:sld xmlns:a="http://schemas.openxmlformats.org/drawingml/2006/main" xmlns:r="http://schemas.openxmlformats.org/officeDocument/2006/relationships" xmlns:p="http://schemas.openxmlformats.org/presentationml/2006/main">
-  <p:cSld>
-    <p:spTree>
-      <p:nvGrpSpPr>
-        <p:cNvPr id="1" name="">
-          <a:extLst>
-            <a:ext uri="{FF2B5EF4-FFF2-40B4-BE49-F238E27FC236}">
-              <a16:creationId xmlns:a16="http://schemas.microsoft.com/office/drawing/2014/main" id="{33D2DF23-5B54-AE9B-E41D-2F5B8864F894}"/>
-            </a:ext>
-          </a:extLst>
-        </p:cNvPr>
-        <p:cNvGrpSpPr/>
-        <p:nvPr/>
-      </p:nvGrpSpPr>
-      <p:grpSpPr>
-        <a:xfrm>
-          <a:off x="0" y="0"/>
-          <a:ext cx="0" cy="0"/>
-          <a:chOff x="0" y="0"/>
-          <a:chExt cx="0" cy="0"/>
-        </a:xfrm>
-      </p:grpSpPr>
-      <p:sp>
-        <p:nvSpPr>
-          <p:cNvPr id="2" name="Title 1">
-            <a:extLst>
-              <a:ext uri="{FF2B5EF4-FFF2-40B4-BE49-F238E27FC236}">
-                <a16:creationId xmlns:a16="http://schemas.microsoft.com/office/drawing/2014/main" id="{50C71D6D-AC8D-8B89-9985-DF4C7970DFEA}"/>
-              </a:ext>
-            </a:extLst>
-          </p:cNvPr>
-          <p:cNvSpPr>
-            <a:spLocks noGrp="1"/>
-          </p:cNvSpPr>
-          <p:nvPr>
-            <p:ph type="title"/>
-          </p:nvPr>
-        </p:nvSpPr>
-        <p:spPr/>
-        <p:txBody>
-          <a:bodyPr>
-            <a:normAutofit/>
-          </a:bodyPr>
-          <a:lstStyle/>
-          <a:p>
-            <a:r>
-              <a:rPr lang="en-GB" dirty="0"/>
-              <a:t>Workflow</a:t>
-            </a:r>
-            <a:endParaRPr lang="en-IL" dirty="0"/>
-          </a:p>
-        </p:txBody>
-      </p:sp>
-      <p:sp>
-        <p:nvSpPr>
-          <p:cNvPr id="4" name="Slide Number Placeholder 3">
-            <a:extLst>
-              <a:ext uri="{FF2B5EF4-FFF2-40B4-BE49-F238E27FC236}">
-                <a16:creationId xmlns:a16="http://schemas.microsoft.com/office/drawing/2014/main" id="{E29536BF-072E-6EFA-73FF-B5215F4BE112}"/>
-              </a:ext>
-            </a:extLst>
-          </p:cNvPr>
-          <p:cNvSpPr>
-            <a:spLocks noGrp="1"/>
-          </p:cNvSpPr>
-          <p:nvPr>
-            <p:ph type="sldNum" sz="quarter" idx="12"/>
-          </p:nvPr>
-        </p:nvSpPr>
-        <p:spPr/>
-        <p:txBody>
-          <a:bodyPr/>
-          <a:lstStyle/>
-          <a:p>
-            <a:fld id="{E6AB8EDD-9EF2-4633-A1C2-4D908C1019B4}" type="slidenum">
-              <a:rPr lang="he-IL" smtClean="0"/>
-              <a:t>13</a:t>
-            </a:fld>
-            <a:endParaRPr lang="he-IL"/>
-          </a:p>
-        </p:txBody>
-      </p:sp>
-      <p:pic>
-        <p:nvPicPr>
-          <p:cNvPr id="3" name="Picture 2" descr="A diagram of a system&#10;&#10;AI-generated content may be incorrect.">
-            <a:extLst>
-              <a:ext uri="{FF2B5EF4-FFF2-40B4-BE49-F238E27FC236}">
-                <a16:creationId xmlns:a16="http://schemas.microsoft.com/office/drawing/2014/main" id="{6CBEB942-5E4E-DA43-A21A-CBFF60654EBC}"/>
-              </a:ext>
-            </a:extLst>
-          </p:cNvPr>
-          <p:cNvPicPr>
-            <a:picLocks noChangeAspect="1"/>
-          </p:cNvPicPr>
-          <p:nvPr/>
-        </p:nvPicPr>
-        <p:blipFill>
-          <a:blip r:embed="rId2">
-            <a:extLst>
-              <a:ext uri="{28A0092B-C50C-407E-A947-70E740481C1C}">
-                <a14:useLocalDpi xmlns:a14="http://schemas.microsoft.com/office/drawing/2010/main" val="0"/>
-              </a:ext>
-            </a:extLst>
-          </a:blip>
-          <a:stretch>
-            <a:fillRect/>
-          </a:stretch>
-        </p:blipFill>
-        <p:spPr>
-          <a:xfrm>
-            <a:off x="1109472" y="2297798"/>
-            <a:ext cx="9924288" cy="2350401"/>
-          </a:xfrm>
-          <a:prstGeom prst="rect">
-            <a:avLst/>
-          </a:prstGeom>
-        </p:spPr>
-      </p:pic>
-      <p:sp>
-        <p:nvSpPr>
-          <p:cNvPr id="6" name="Rectangle: Rounded Corners 5">
-            <a:extLst>
-              <a:ext uri="{FF2B5EF4-FFF2-40B4-BE49-F238E27FC236}">
-                <a16:creationId xmlns:a16="http://schemas.microsoft.com/office/drawing/2014/main" id="{38364ABA-1D13-C06E-B355-685EC86AD38E}"/>
-              </a:ext>
-            </a:extLst>
-          </p:cNvPr>
-          <p:cNvSpPr/>
-          <p:nvPr/>
-        </p:nvSpPr>
-        <p:spPr>
-          <a:xfrm>
-            <a:off x="1109472" y="3721100"/>
-            <a:ext cx="2141728" cy="1016000"/>
+            <a:off x="9634654" y="2364056"/>
+            <a:ext cx="2320165" cy="959005"/>
           </a:xfrm>
           <a:prstGeom prst="roundRect">
             <a:avLst/>
@@ -7008,7 +7279,177 @@
     </p:spTree>
     <p:extLst>
       <p:ext uri="{BB962C8B-B14F-4D97-AF65-F5344CB8AC3E}">
-        <p14:creationId xmlns:p14="http://schemas.microsoft.com/office/powerpoint/2010/main" val="1362646300"/>
+        <p14:creationId xmlns:p14="http://schemas.microsoft.com/office/powerpoint/2010/main" val="3213978720"/>
+      </p:ext>
+    </p:extLst>
+  </p:cSld>
+  <p:clrMapOvr>
+    <a:masterClrMapping/>
+  </p:clrMapOvr>
+</p:sld>
+</file>
+
+<file path=ppt/slides/slide13.xml><?xml version="1.0" encoding="utf-8"?>
+<p:sld xmlns:a="http://schemas.openxmlformats.org/drawingml/2006/main" xmlns:r="http://schemas.openxmlformats.org/officeDocument/2006/relationships" xmlns:p="http://schemas.openxmlformats.org/presentationml/2006/main">
+  <p:cSld>
+    <p:spTree>
+      <p:nvGrpSpPr>
+        <p:cNvPr id="1" name="">
+          <a:extLst>
+            <a:ext uri="{FF2B5EF4-FFF2-40B4-BE49-F238E27FC236}">
+              <a16:creationId xmlns:a16="http://schemas.microsoft.com/office/drawing/2014/main" id="{51AF6EA1-FAAD-E397-A58E-4820223D23C7}"/>
+            </a:ext>
+          </a:extLst>
+        </p:cNvPr>
+        <p:cNvGrpSpPr/>
+        <p:nvPr/>
+      </p:nvGrpSpPr>
+      <p:grpSpPr>
+        <a:xfrm>
+          <a:off x="0" y="0"/>
+          <a:ext cx="0" cy="0"/>
+          <a:chOff x="0" y="0"/>
+          <a:chExt cx="0" cy="0"/>
+        </a:xfrm>
+      </p:grpSpPr>
+      <p:sp>
+        <p:nvSpPr>
+          <p:cNvPr id="2" name="Title 1">
+            <a:extLst>
+              <a:ext uri="{FF2B5EF4-FFF2-40B4-BE49-F238E27FC236}">
+                <a16:creationId xmlns:a16="http://schemas.microsoft.com/office/drawing/2014/main" id="{C108A148-31C4-BE5B-2786-3D9132CB8F3C}"/>
+              </a:ext>
+            </a:extLst>
+          </p:cNvPr>
+          <p:cNvSpPr>
+            <a:spLocks noGrp="1"/>
+          </p:cNvSpPr>
+          <p:nvPr>
+            <p:ph type="title"/>
+          </p:nvPr>
+        </p:nvSpPr>
+        <p:spPr>
+          <a:xfrm>
+            <a:off x="3072268" y="401637"/>
+            <a:ext cx="8949044" cy="1325563"/>
+          </a:xfrm>
+        </p:spPr>
+        <p:txBody>
+          <a:bodyPr>
+            <a:normAutofit/>
+          </a:bodyPr>
+          <a:lstStyle/>
+          <a:p>
+            <a:r>
+              <a:rPr lang="en-GB" dirty="0"/>
+              <a:t>Entity-Topic TF-IDF Score</a:t>
+            </a:r>
+            <a:endParaRPr lang="en-IL" dirty="0"/>
+          </a:p>
+        </p:txBody>
+      </p:sp>
+      <p:sp>
+        <p:nvSpPr>
+          <p:cNvPr id="3" name="Content Placeholder 2">
+            <a:extLst>
+              <a:ext uri="{FF2B5EF4-FFF2-40B4-BE49-F238E27FC236}">
+                <a16:creationId xmlns:a16="http://schemas.microsoft.com/office/drawing/2014/main" id="{D3FC0E13-7FF1-6DB2-4802-A385B1200759}"/>
+              </a:ext>
+            </a:extLst>
+          </p:cNvPr>
+          <p:cNvSpPr>
+            <a:spLocks noGrp="1"/>
+          </p:cNvSpPr>
+          <p:nvPr>
+            <p:ph idx="1"/>
+          </p:nvPr>
+        </p:nvSpPr>
+        <p:spPr/>
+        <p:txBody>
+          <a:bodyPr>
+            <a:normAutofit/>
+          </a:bodyPr>
+          <a:lstStyle/>
+          <a:p>
+            <a:r>
+              <a:rPr lang="en-US" sz="4000" dirty="0"/>
+              <a:t> TF-IDF: </a:t>
+            </a:r>
+            <a:r>
+              <a:rPr lang="en-GB" sz="4000" dirty="0"/>
+              <a:t>Term Frequency - Inverse Document Frequency</a:t>
+            </a:r>
+          </a:p>
+          <a:p>
+            <a:endParaRPr lang="en-US" sz="4000" dirty="0"/>
+          </a:p>
+          <a:p>
+            <a:r>
+              <a:rPr lang="en-US" sz="4000" dirty="0"/>
+              <a:t>TF-IDF … </a:t>
+            </a:r>
+            <a:r>
+              <a:rPr lang="en-GB" sz="4000" dirty="0"/>
+              <a:t>is a statistical method … to evaluate how important a word is to a document in relation to a larger collection of documents </a:t>
+            </a:r>
+            <a:r>
+              <a:rPr lang="en-GB" sz="3200" dirty="0"/>
+              <a:t>(geeks for geeks).</a:t>
+            </a:r>
+          </a:p>
+          <a:p>
+            <a:endParaRPr lang="en-GB" sz="3300" dirty="0"/>
+          </a:p>
+          <a:p>
+            <a:endParaRPr lang="en-GB" sz="3300" dirty="0"/>
+          </a:p>
+          <a:p>
+            <a:pPr marL="457200" lvl="1" indent="0">
+              <a:buNone/>
+            </a:pPr>
+            <a:endParaRPr lang="en-GB" sz="3200" dirty="0"/>
+          </a:p>
+          <a:p>
+            <a:endParaRPr lang="en-GB" sz="3600" dirty="0"/>
+          </a:p>
+          <a:p>
+            <a:endParaRPr lang="en-IL" dirty="0"/>
+          </a:p>
+        </p:txBody>
+      </p:sp>
+      <p:sp>
+        <p:nvSpPr>
+          <p:cNvPr id="4" name="Slide Number Placeholder 3">
+            <a:extLst>
+              <a:ext uri="{FF2B5EF4-FFF2-40B4-BE49-F238E27FC236}">
+                <a16:creationId xmlns:a16="http://schemas.microsoft.com/office/drawing/2014/main" id="{A8032366-0482-6B07-AE65-F1A1E26BF42E}"/>
+              </a:ext>
+            </a:extLst>
+          </p:cNvPr>
+          <p:cNvSpPr>
+            <a:spLocks noGrp="1"/>
+          </p:cNvSpPr>
+          <p:nvPr>
+            <p:ph type="sldNum" sz="quarter" idx="12"/>
+          </p:nvPr>
+        </p:nvSpPr>
+        <p:spPr/>
+        <p:txBody>
+          <a:bodyPr/>
+          <a:lstStyle/>
+          <a:p>
+            <a:fld id="{E6AB8EDD-9EF2-4633-A1C2-4D908C1019B4}" type="slidenum">
+              <a:rPr lang="he-IL" smtClean="0"/>
+              <a:t>13</a:t>
+            </a:fld>
+            <a:endParaRPr lang="he-IL"/>
+          </a:p>
+        </p:txBody>
+      </p:sp>
+    </p:spTree>
+    <p:extLst>
+      <p:ext uri="{BB962C8B-B14F-4D97-AF65-F5344CB8AC3E}">
+        <p14:creationId xmlns:p14="http://schemas.microsoft.com/office/powerpoint/2010/main" val="1177306775"/>
       </p:ext>
     </p:extLst>
   </p:cSld>
@@ -7026,7 +7467,7 @@
         <p:cNvPr id="1" name="">
           <a:extLst>
             <a:ext uri="{FF2B5EF4-FFF2-40B4-BE49-F238E27FC236}">
-              <a16:creationId xmlns:a16="http://schemas.microsoft.com/office/drawing/2014/main" id="{32D87CBA-0392-B7B9-3106-F4750BDB5147}"/>
+              <a16:creationId xmlns:a16="http://schemas.microsoft.com/office/drawing/2014/main" id="{EB209712-7E39-C7BB-CC6C-21FDC6927BC2}"/>
             </a:ext>
           </a:extLst>
         </p:cNvPr>
@@ -7046,7 +7487,7 @@
           <p:cNvPr id="2" name="Title 1">
             <a:extLst>
               <a:ext uri="{FF2B5EF4-FFF2-40B4-BE49-F238E27FC236}">
-                <a16:creationId xmlns:a16="http://schemas.microsoft.com/office/drawing/2014/main" id="{31F5FC2B-8178-02A3-4647-34A8996D3137}"/>
+                <a16:creationId xmlns:a16="http://schemas.microsoft.com/office/drawing/2014/main" id="{B5C95C0B-1A5F-D364-3525-3A3FDBDA5407}"/>
               </a:ext>
             </a:extLst>
           </p:cNvPr>
@@ -7071,7 +7512,7 @@
           <a:p>
             <a:r>
               <a:rPr lang="en-GB" dirty="0"/>
-              <a:t>Post &amp; Author Scoring</a:t>
+              <a:t>Entity-Topic TF-IDF Score</a:t>
             </a:r>
             <a:endParaRPr lang="en-IL" dirty="0"/>
           </a:p>
@@ -7082,7 +7523,7 @@
           <p:cNvPr id="3" name="Content Placeholder 2">
             <a:extLst>
               <a:ext uri="{FF2B5EF4-FFF2-40B4-BE49-F238E27FC236}">
-                <a16:creationId xmlns:a16="http://schemas.microsoft.com/office/drawing/2014/main" id="{216FE2D2-EED4-764A-2240-7AD9E02547C7}"/>
+                <a16:creationId xmlns:a16="http://schemas.microsoft.com/office/drawing/2014/main" id="{4CA2899F-703D-332C-417F-E2319058A485}"/>
               </a:ext>
             </a:extLst>
           </p:cNvPr>
@@ -7101,33 +7542,13 @@
         </p:spPr>
         <p:txBody>
           <a:bodyPr>
-            <a:normAutofit lnSpcReduction="10000"/>
+            <a:normAutofit/>
           </a:bodyPr>
           <a:lstStyle/>
           <a:p>
             <a:r>
-              <a:rPr lang="en-GB" sz="3600" dirty="0"/>
-              <a:t>The TF-IDF score of a post for a topic is computed as the </a:t>
-            </a:r>
-            <a:r>
-              <a:rPr lang="en-GB" sz="3600" b="1" dirty="0"/>
-              <a:t>sum of the TF-IDF scores of all entities </a:t>
-            </a:r>
-            <a:r>
-              <a:rPr lang="en-GB" sz="3600" dirty="0"/>
-              <a:t>appearing in that post. </a:t>
-            </a:r>
-          </a:p>
-          <a:p>
-            <a:pPr marL="0" indent="0">
-              <a:buNone/>
-            </a:pPr>
-            <a:endParaRPr lang="en-GB" sz="3600" dirty="0"/>
-          </a:p>
-          <a:p>
-            <a:r>
-              <a:rPr lang="en-GB" sz="3600" dirty="0"/>
-              <a:t>Author score for a topic is:</a:t>
+              <a:rPr lang="en-GB" sz="3300" dirty="0"/>
+              <a:t>In this project:</a:t>
             </a:r>
           </a:p>
           <a:p>
@@ -7136,8 +7557,8 @@
               <a:buChar char="-"/>
             </a:pPr>
             <a:r>
-              <a:rPr lang="en-GB" sz="3200" dirty="0"/>
-              <a:t>TF is the sum of his/her posts’ TF-IDF score.</a:t>
+              <a:rPr lang="en-GB" sz="2900" dirty="0"/>
+              <a:t>Documents are topics derived from topic clustering. </a:t>
             </a:r>
           </a:p>
           <a:p>
@@ -7147,18 +7568,35 @@
             </a:pPr>
             <a:r>
               <a:rPr lang="en-GB" sz="3200" dirty="0"/>
-              <a:t>IDF is the total number of the topics divide by the topics the author participate in.</a:t>
-            </a:r>
-          </a:p>
-          <a:p>
-            <a:pPr lvl="1">
-              <a:buFontTx/>
-              <a:buChar char="-"/>
+              <a:t>Entities are social markers in social media discourse (e.g., hashtags, URLs, mentions, named actors).</a:t>
+            </a:r>
+          </a:p>
+          <a:p>
+            <a:pPr marL="457200" lvl="1" indent="0">
+              <a:buNone/>
             </a:pPr>
-            <a:r>
-              <a:rPr lang="en-GB" sz="3200" dirty="0"/>
-              <a:t>TF-IDF = TF * IDF.</a:t>
-            </a:r>
+            <a:endParaRPr lang="en-GB" sz="3200" dirty="0"/>
+          </a:p>
+          <a:p>
+            <a:r>
+              <a:rPr lang="en-GB" sz="3300" dirty="0"/>
+              <a:t>Quantify the importance of entities within each topic.</a:t>
+            </a:r>
+          </a:p>
+          <a:p>
+            <a:endParaRPr lang="en-GB" sz="3300" dirty="0"/>
+          </a:p>
+          <a:p>
+            <a:r>
+              <a:rPr lang="en-GB" sz="3300" dirty="0"/>
+              <a:t>Highlight entities that are distinctive rather than common.</a:t>
+            </a:r>
+          </a:p>
+          <a:p>
+            <a:pPr marL="457200" lvl="1" indent="0">
+              <a:buNone/>
+            </a:pPr>
+            <a:endParaRPr lang="en-GB" sz="3200" dirty="0"/>
           </a:p>
           <a:p>
             <a:pPr lvl="1"/>
@@ -7175,7 +7613,7 @@
           <p:cNvPr id="4" name="Slide Number Placeholder 3">
             <a:extLst>
               <a:ext uri="{FF2B5EF4-FFF2-40B4-BE49-F238E27FC236}">
-                <a16:creationId xmlns:a16="http://schemas.microsoft.com/office/drawing/2014/main" id="{7F20CB5A-AEB6-7F2A-1B1D-3D95E77851D5}"/>
+                <a16:creationId xmlns:a16="http://schemas.microsoft.com/office/drawing/2014/main" id="{CC2438A4-2E34-7B04-EDC0-D62241F1AD5B}"/>
               </a:ext>
             </a:extLst>
           </p:cNvPr>
@@ -7202,7 +7640,7 @@
     </p:spTree>
     <p:extLst>
       <p:ext uri="{BB962C8B-B14F-4D97-AF65-F5344CB8AC3E}">
-        <p14:creationId xmlns:p14="http://schemas.microsoft.com/office/powerpoint/2010/main" val="4069705997"/>
+        <p14:creationId xmlns:p14="http://schemas.microsoft.com/office/powerpoint/2010/main" val="3412836721"/>
       </p:ext>
     </p:extLst>
   </p:cSld>
@@ -7220,7 +7658,7 @@
         <p:cNvPr id="1" name="">
           <a:extLst>
             <a:ext uri="{FF2B5EF4-FFF2-40B4-BE49-F238E27FC236}">
-              <a16:creationId xmlns:a16="http://schemas.microsoft.com/office/drawing/2014/main" id="{3B3264C1-7740-C6A3-A41C-65A19232BE97}"/>
+              <a16:creationId xmlns:a16="http://schemas.microsoft.com/office/drawing/2014/main" id="{C2EBFF92-8E2A-3590-77B3-60599282F6DC}"/>
             </a:ext>
           </a:extLst>
         </p:cNvPr>
@@ -7237,41 +7675,10 @@
       </p:grpSpPr>
       <p:sp>
         <p:nvSpPr>
-          <p:cNvPr id="2" name="Title 1">
-            <a:extLst>
-              <a:ext uri="{FF2B5EF4-FFF2-40B4-BE49-F238E27FC236}">
-                <a16:creationId xmlns:a16="http://schemas.microsoft.com/office/drawing/2014/main" id="{6EC35446-15F7-557E-B6BE-628D639B51AE}"/>
-              </a:ext>
-            </a:extLst>
-          </p:cNvPr>
-          <p:cNvSpPr>
-            <a:spLocks noGrp="1"/>
-          </p:cNvSpPr>
-          <p:nvPr>
-            <p:ph type="title"/>
-          </p:nvPr>
-        </p:nvSpPr>
-        <p:spPr/>
-        <p:txBody>
-          <a:bodyPr>
-            <a:normAutofit/>
-          </a:bodyPr>
-          <a:lstStyle/>
-          <a:p>
-            <a:r>
-              <a:rPr lang="en-GB" dirty="0"/>
-              <a:t>Workflow</a:t>
-            </a:r>
-            <a:endParaRPr lang="en-IL" dirty="0"/>
-          </a:p>
-        </p:txBody>
-      </p:sp>
-      <p:sp>
-        <p:nvSpPr>
-          <p:cNvPr id="4" name="Slide Number Placeholder 3">
-            <a:extLst>
-              <a:ext uri="{FF2B5EF4-FFF2-40B4-BE49-F238E27FC236}">
-                <a16:creationId xmlns:a16="http://schemas.microsoft.com/office/drawing/2014/main" id="{B21DCB9E-6F40-2FD9-C7CD-A336AB75B0A0}"/>
+          <p:cNvPr id="2" name="Slide Number Placeholder 1">
+            <a:extLst>
+              <a:ext uri="{FF2B5EF4-FFF2-40B4-BE49-F238E27FC236}">
+                <a16:creationId xmlns:a16="http://schemas.microsoft.com/office/drawing/2014/main" id="{DA02F392-4F9F-A1CC-4243-5916118D3637}"/>
               </a:ext>
             </a:extLst>
           </p:cNvPr>
@@ -7289,64 +7696,29 @@
           <a:p>
             <a:fld id="{E6AB8EDD-9EF2-4633-A1C2-4D908C1019B4}" type="slidenum">
               <a:rPr lang="he-IL" smtClean="0"/>
+              <a:pPr/>
               <a:t>15</a:t>
             </a:fld>
-            <a:endParaRPr lang="he-IL"/>
-          </a:p>
-        </p:txBody>
-      </p:sp>
-      <p:pic>
-        <p:nvPicPr>
-          <p:cNvPr id="3" name="Picture 2" descr="A diagram of a system&#10;&#10;AI-generated content may be incorrect.">
-            <a:extLst>
-              <a:ext uri="{FF2B5EF4-FFF2-40B4-BE49-F238E27FC236}">
-                <a16:creationId xmlns:a16="http://schemas.microsoft.com/office/drawing/2014/main" id="{C769BB7A-5E47-02F8-878C-6AFB31EDDDD9}"/>
-              </a:ext>
-            </a:extLst>
-          </p:cNvPr>
-          <p:cNvPicPr>
-            <a:picLocks noChangeAspect="1"/>
-          </p:cNvPicPr>
+            <a:endParaRPr lang="he-IL" dirty="0"/>
+          </a:p>
+        </p:txBody>
+      </p:sp>
+      <p:sp>
+        <p:nvSpPr>
+          <p:cNvPr id="7" name="Rectangle: Rounded Corners 6">
+            <a:extLst>
+              <a:ext uri="{FF2B5EF4-FFF2-40B4-BE49-F238E27FC236}">
+                <a16:creationId xmlns:a16="http://schemas.microsoft.com/office/drawing/2014/main" id="{F2C5A494-92EA-9110-F8E8-85926E758575}"/>
+              </a:ext>
+            </a:extLst>
+          </p:cNvPr>
+          <p:cNvSpPr/>
           <p:nvPr/>
-        </p:nvPicPr>
-        <p:blipFill>
-          <a:blip r:embed="rId2">
-            <a:extLst>
-              <a:ext uri="{28A0092B-C50C-407E-A947-70E740481C1C}">
-                <a14:useLocalDpi xmlns:a14="http://schemas.microsoft.com/office/drawing/2010/main" val="0"/>
-              </a:ext>
-            </a:extLst>
-          </a:blip>
-          <a:stretch>
-            <a:fillRect/>
-          </a:stretch>
-        </p:blipFill>
+        </p:nvSpPr>
         <p:spPr>
           <a:xfrm>
-            <a:off x="1109472" y="2297798"/>
-            <a:ext cx="9924288" cy="2350401"/>
-          </a:xfrm>
-          <a:prstGeom prst="rect">
-            <a:avLst/>
-          </a:prstGeom>
-        </p:spPr>
-      </p:pic>
-      <p:sp>
-        <p:nvSpPr>
-          <p:cNvPr id="6" name="Rectangle: Rounded Corners 5">
-            <a:extLst>
-              <a:ext uri="{FF2B5EF4-FFF2-40B4-BE49-F238E27FC236}">
-                <a16:creationId xmlns:a16="http://schemas.microsoft.com/office/drawing/2014/main" id="{B4474D5D-F240-A473-DDAB-545D8AD986EC}"/>
-              </a:ext>
-            </a:extLst>
-          </p:cNvPr>
-          <p:cNvSpPr/>
-          <p:nvPr/>
-        </p:nvSpPr>
-        <p:spPr>
-          <a:xfrm>
-            <a:off x="3668522" y="3708400"/>
-            <a:ext cx="2205228" cy="1016000"/>
+            <a:off x="1019074" y="3876907"/>
+            <a:ext cx="2259386" cy="959005"/>
           </a:xfrm>
           <a:prstGeom prst="roundRect">
             <a:avLst/>
@@ -7386,7 +7758,7 @@
     </p:spTree>
     <p:extLst>
       <p:ext uri="{BB962C8B-B14F-4D97-AF65-F5344CB8AC3E}">
-        <p14:creationId xmlns:p14="http://schemas.microsoft.com/office/powerpoint/2010/main" val="2683843440"/>
+        <p14:creationId xmlns:p14="http://schemas.microsoft.com/office/powerpoint/2010/main" val="3408000838"/>
       </p:ext>
     </p:extLst>
   </p:cSld>
@@ -7404,7 +7776,7 @@
         <p:cNvPr id="1" name="">
           <a:extLst>
             <a:ext uri="{FF2B5EF4-FFF2-40B4-BE49-F238E27FC236}">
-              <a16:creationId xmlns:a16="http://schemas.microsoft.com/office/drawing/2014/main" id="{F730286F-EFC0-C5F8-ACEA-552EA4E057B2}"/>
+              <a16:creationId xmlns:a16="http://schemas.microsoft.com/office/drawing/2014/main" id="{32D87CBA-0392-B7B9-3106-F4750BDB5147}"/>
             </a:ext>
           </a:extLst>
         </p:cNvPr>
@@ -7424,7 +7796,7 @@
           <p:cNvPr id="2" name="Title 1">
             <a:extLst>
               <a:ext uri="{FF2B5EF4-FFF2-40B4-BE49-F238E27FC236}">
-                <a16:creationId xmlns:a16="http://schemas.microsoft.com/office/drawing/2014/main" id="{AB3A8F5F-929A-8AD8-9DF2-2F5C819FDA92}"/>
+                <a16:creationId xmlns:a16="http://schemas.microsoft.com/office/drawing/2014/main" id="{31F5FC2B-8178-02A3-4647-34A8996D3137}"/>
               </a:ext>
             </a:extLst>
           </p:cNvPr>
@@ -7449,7 +7821,7 @@
           <a:p>
             <a:r>
               <a:rPr lang="en-GB" dirty="0"/>
-              <a:t>Key Authors Selection</a:t>
+              <a:t>Post &amp; Author Scoring</a:t>
             </a:r>
             <a:endParaRPr lang="en-IL" dirty="0"/>
           </a:p>
@@ -7460,7 +7832,7 @@
           <p:cNvPr id="3" name="Content Placeholder 2">
             <a:extLst>
               <a:ext uri="{FF2B5EF4-FFF2-40B4-BE49-F238E27FC236}">
-                <a16:creationId xmlns:a16="http://schemas.microsoft.com/office/drawing/2014/main" id="{76C7C2B8-A25A-3122-0C1F-4BBDC5F57626}"/>
+                <a16:creationId xmlns:a16="http://schemas.microsoft.com/office/drawing/2014/main" id="{216FE2D2-EED4-764A-2240-7AD9E02547C7}"/>
               </a:ext>
             </a:extLst>
           </p:cNvPr>
@@ -7479,28 +7851,73 @@
         </p:spPr>
         <p:txBody>
           <a:bodyPr>
-            <a:normAutofit/>
+            <a:normAutofit lnSpcReduction="10000"/>
           </a:bodyPr>
           <a:lstStyle/>
           <a:p>
             <a:r>
               <a:rPr lang="en-GB" sz="3600" dirty="0"/>
-              <a:t>An author is considered a key author independently within each topic and may be a key author in one topic but not in others.</a:t>
-            </a:r>
-          </a:p>
-          <a:p>
+              <a:t>The TF-IDF score of a post for a topic is computed as the </a:t>
+            </a:r>
+            <a:r>
+              <a:rPr lang="en-GB" sz="3600" b="1" dirty="0"/>
+              <a:t>sum of the TF-IDF scores of all entities </a:t>
+            </a:r>
             <a:r>
               <a:rPr lang="en-GB" sz="3600" dirty="0"/>
-              <a:t>Key authors are defined as authors ranked in the top-N (by TF-IDF score) for at least one topic.</a:t>
-            </a:r>
+              <a:t>appearing in that post. </a:t>
+            </a:r>
+          </a:p>
+          <a:p>
+            <a:pPr marL="0" indent="0">
+              <a:buNone/>
+            </a:pPr>
+            <a:endParaRPr lang="en-GB" sz="3600" dirty="0"/>
           </a:p>
           <a:p>
             <a:r>
               <a:rPr lang="en-GB" sz="3600" dirty="0"/>
-              <a:t>In the graph, all key authors are treated equally, regardless of whether they appear in one or multiple topics.</a:t>
-            </a:r>
+              <a:t>Author score for a topic is:</a:t>
+            </a:r>
+          </a:p>
+          <a:p>
+            <a:pPr lvl="1">
+              <a:buFontTx/>
+              <a:buChar char="-"/>
+            </a:pPr>
+            <a:r>
+              <a:rPr lang="en-GB" sz="3200" dirty="0"/>
+              <a:t>TF is the sum of his/her posts’ TF-IDF score.</a:t>
+            </a:r>
+          </a:p>
+          <a:p>
+            <a:pPr lvl="1">
+              <a:buFontTx/>
+              <a:buChar char="-"/>
+            </a:pPr>
+            <a:r>
+              <a:rPr lang="en-GB" sz="3200" dirty="0"/>
+              <a:t>IDF is the total number of the topics divide by the topics the author participate in.</a:t>
+            </a:r>
+          </a:p>
+          <a:p>
+            <a:pPr lvl="1">
+              <a:buFontTx/>
+              <a:buChar char="-"/>
+            </a:pPr>
+            <a:r>
+              <a:rPr lang="en-GB" sz="3200" dirty="0"/>
+              <a:t>TF-IDF = TF * IDF.</a:t>
+            </a:r>
+          </a:p>
+          <a:p>
+            <a:pPr lvl="1"/>
             <a:endParaRPr lang="en-GB" sz="3300" dirty="0"/>
           </a:p>
+          <a:p>
+            <a:pPr lvl="1"/>
+            <a:endParaRPr lang="en-GB" sz="3300" dirty="0"/>
+          </a:p>
         </p:txBody>
       </p:sp>
       <p:sp>
@@ -7508,7 +7925,7 @@
           <p:cNvPr id="4" name="Slide Number Placeholder 3">
             <a:extLst>
               <a:ext uri="{FF2B5EF4-FFF2-40B4-BE49-F238E27FC236}">
-                <a16:creationId xmlns:a16="http://schemas.microsoft.com/office/drawing/2014/main" id="{6C663BC0-8C91-1F8E-0045-0251DD3B7DFD}"/>
+                <a16:creationId xmlns:a16="http://schemas.microsoft.com/office/drawing/2014/main" id="{7F20CB5A-AEB6-7F2A-1B1D-3D95E77851D5}"/>
               </a:ext>
             </a:extLst>
           </p:cNvPr>
@@ -7535,7 +7952,7 @@
     </p:spTree>
     <p:extLst>
       <p:ext uri="{BB962C8B-B14F-4D97-AF65-F5344CB8AC3E}">
-        <p14:creationId xmlns:p14="http://schemas.microsoft.com/office/powerpoint/2010/main" val="4294966915"/>
+        <p14:creationId xmlns:p14="http://schemas.microsoft.com/office/powerpoint/2010/main" val="4069705997"/>
       </p:ext>
     </p:extLst>
   </p:cSld>
@@ -7553,7 +7970,7 @@
         <p:cNvPr id="1" name="">
           <a:extLst>
             <a:ext uri="{FF2B5EF4-FFF2-40B4-BE49-F238E27FC236}">
-              <a16:creationId xmlns:a16="http://schemas.microsoft.com/office/drawing/2014/main" id="{7DC75F24-04B8-7779-AD14-EE95C37A9B82}"/>
+              <a16:creationId xmlns:a16="http://schemas.microsoft.com/office/drawing/2014/main" id="{E1905B64-DF27-8FD5-4F2E-1CA188163D6B}"/>
             </a:ext>
           </a:extLst>
         </p:cNvPr>
@@ -7570,41 +7987,10 @@
       </p:grpSpPr>
       <p:sp>
         <p:nvSpPr>
-          <p:cNvPr id="2" name="Title 1">
-            <a:extLst>
-              <a:ext uri="{FF2B5EF4-FFF2-40B4-BE49-F238E27FC236}">
-                <a16:creationId xmlns:a16="http://schemas.microsoft.com/office/drawing/2014/main" id="{CC7A3FDE-1C62-A512-71EE-CFE734EDAE3F}"/>
-              </a:ext>
-            </a:extLst>
-          </p:cNvPr>
-          <p:cNvSpPr>
-            <a:spLocks noGrp="1"/>
-          </p:cNvSpPr>
-          <p:nvPr>
-            <p:ph type="title"/>
-          </p:nvPr>
-        </p:nvSpPr>
-        <p:spPr/>
-        <p:txBody>
-          <a:bodyPr>
-            <a:normAutofit/>
-          </a:bodyPr>
-          <a:lstStyle/>
-          <a:p>
-            <a:r>
-              <a:rPr lang="en-GB" dirty="0"/>
-              <a:t>Workflow</a:t>
-            </a:r>
-            <a:endParaRPr lang="en-IL" dirty="0"/>
-          </a:p>
-        </p:txBody>
-      </p:sp>
-      <p:sp>
-        <p:nvSpPr>
-          <p:cNvPr id="4" name="Slide Number Placeholder 3">
-            <a:extLst>
-              <a:ext uri="{FF2B5EF4-FFF2-40B4-BE49-F238E27FC236}">
-                <a16:creationId xmlns:a16="http://schemas.microsoft.com/office/drawing/2014/main" id="{56025DF0-B7DA-8989-6D5F-83CD874807B9}"/>
+          <p:cNvPr id="2" name="Slide Number Placeholder 1">
+            <a:extLst>
+              <a:ext uri="{FF2B5EF4-FFF2-40B4-BE49-F238E27FC236}">
+                <a16:creationId xmlns:a16="http://schemas.microsoft.com/office/drawing/2014/main" id="{D813D47E-4052-A1D7-140B-202ED0FFA1ED}"/>
               </a:ext>
             </a:extLst>
           </p:cNvPr>
@@ -7622,64 +8008,29 @@
           <a:p>
             <a:fld id="{E6AB8EDD-9EF2-4633-A1C2-4D908C1019B4}" type="slidenum">
               <a:rPr lang="he-IL" smtClean="0"/>
+              <a:pPr/>
               <a:t>17</a:t>
             </a:fld>
-            <a:endParaRPr lang="he-IL"/>
-          </a:p>
-        </p:txBody>
-      </p:sp>
-      <p:pic>
-        <p:nvPicPr>
-          <p:cNvPr id="3" name="Picture 2" descr="A diagram of a system&#10;&#10;AI-generated content may be incorrect.">
-            <a:extLst>
-              <a:ext uri="{FF2B5EF4-FFF2-40B4-BE49-F238E27FC236}">
-                <a16:creationId xmlns:a16="http://schemas.microsoft.com/office/drawing/2014/main" id="{D206718D-6AFE-F19A-4776-3632F096E7BC}"/>
-              </a:ext>
-            </a:extLst>
-          </p:cNvPr>
-          <p:cNvPicPr>
-            <a:picLocks noChangeAspect="1"/>
-          </p:cNvPicPr>
+            <a:endParaRPr lang="he-IL" dirty="0"/>
+          </a:p>
+        </p:txBody>
+      </p:sp>
+      <p:sp>
+        <p:nvSpPr>
+          <p:cNvPr id="8" name="Rectangle: Rounded Corners 7">
+            <a:extLst>
+              <a:ext uri="{FF2B5EF4-FFF2-40B4-BE49-F238E27FC236}">
+                <a16:creationId xmlns:a16="http://schemas.microsoft.com/office/drawing/2014/main" id="{545009BC-3A6D-0B4E-2636-2808E1DA4AC6}"/>
+              </a:ext>
+            </a:extLst>
+          </p:cNvPr>
+          <p:cNvSpPr/>
           <p:nvPr/>
-        </p:nvPicPr>
-        <p:blipFill>
-          <a:blip r:embed="rId2">
-            <a:extLst>
-              <a:ext uri="{28A0092B-C50C-407E-A947-70E740481C1C}">
-                <a14:useLocalDpi xmlns:a14="http://schemas.microsoft.com/office/drawing/2010/main" val="0"/>
-              </a:ext>
-            </a:extLst>
-          </a:blip>
-          <a:stretch>
-            <a:fillRect/>
-          </a:stretch>
-        </p:blipFill>
+        </p:nvSpPr>
         <p:spPr>
           <a:xfrm>
-            <a:off x="1109472" y="2297798"/>
-            <a:ext cx="9924288" cy="2350401"/>
-          </a:xfrm>
-          <a:prstGeom prst="rect">
-            <a:avLst/>
-          </a:prstGeom>
-        </p:spPr>
-      </p:pic>
-      <p:sp>
-        <p:nvSpPr>
-          <p:cNvPr id="6" name="Rectangle: Rounded Corners 5">
-            <a:extLst>
-              <a:ext uri="{FF2B5EF4-FFF2-40B4-BE49-F238E27FC236}">
-                <a16:creationId xmlns:a16="http://schemas.microsoft.com/office/drawing/2014/main" id="{63570A6B-B61D-1809-E512-D9687E79D202}"/>
-              </a:ext>
-            </a:extLst>
-          </p:cNvPr>
-          <p:cNvSpPr/>
-          <p:nvPr/>
-        </p:nvSpPr>
-        <p:spPr>
-          <a:xfrm>
-            <a:off x="6346391" y="3740150"/>
-            <a:ext cx="2205228" cy="1016000"/>
+            <a:off x="3713356" y="3876907"/>
+            <a:ext cx="2631688" cy="959005"/>
           </a:xfrm>
           <a:prstGeom prst="roundRect">
             <a:avLst/>
@@ -7719,7 +8070,7 @@
     </p:spTree>
     <p:extLst>
       <p:ext uri="{BB962C8B-B14F-4D97-AF65-F5344CB8AC3E}">
-        <p14:creationId xmlns:p14="http://schemas.microsoft.com/office/powerpoint/2010/main" val="3799570126"/>
+        <p14:creationId xmlns:p14="http://schemas.microsoft.com/office/powerpoint/2010/main" val="1618375460"/>
       </p:ext>
     </p:extLst>
   </p:cSld>
@@ -7737,7 +8088,7 @@
         <p:cNvPr id="1" name="">
           <a:extLst>
             <a:ext uri="{FF2B5EF4-FFF2-40B4-BE49-F238E27FC236}">
-              <a16:creationId xmlns:a16="http://schemas.microsoft.com/office/drawing/2014/main" id="{858E27CD-C8FF-B185-45D8-666A78A68D92}"/>
+              <a16:creationId xmlns:a16="http://schemas.microsoft.com/office/drawing/2014/main" id="{F730286F-EFC0-C5F8-ACEA-552EA4E057B2}"/>
             </a:ext>
           </a:extLst>
         </p:cNvPr>
@@ -7757,7 +8108,7 @@
           <p:cNvPr id="2" name="Title 1">
             <a:extLst>
               <a:ext uri="{FF2B5EF4-FFF2-40B4-BE49-F238E27FC236}">
-                <a16:creationId xmlns:a16="http://schemas.microsoft.com/office/drawing/2014/main" id="{A5798079-07AB-1011-721B-DDEB468739BA}"/>
+                <a16:creationId xmlns:a16="http://schemas.microsoft.com/office/drawing/2014/main" id="{AB3A8F5F-929A-8AD8-9DF2-2F5C819FDA92}"/>
               </a:ext>
             </a:extLst>
           </p:cNvPr>
@@ -7782,7 +8133,7 @@
           <a:p>
             <a:r>
               <a:rPr lang="en-GB" dirty="0"/>
-              <a:t>Backbone Graph</a:t>
+              <a:t>Key Authors Selection</a:t>
             </a:r>
             <a:endParaRPr lang="en-IL" dirty="0"/>
           </a:p>
@@ -7793,7 +8144,7 @@
           <p:cNvPr id="3" name="Content Placeholder 2">
             <a:extLst>
               <a:ext uri="{FF2B5EF4-FFF2-40B4-BE49-F238E27FC236}">
-                <a16:creationId xmlns:a16="http://schemas.microsoft.com/office/drawing/2014/main" id="{5FBFF6C3-80E1-C75C-69F0-3A7FFA1D100D}"/>
+                <a16:creationId xmlns:a16="http://schemas.microsoft.com/office/drawing/2014/main" id="{76C7C2B8-A25A-3122-0C1F-4BBDC5F57626}"/>
               </a:ext>
             </a:extLst>
           </p:cNvPr>
@@ -7817,65 +8168,21 @@
           <a:lstStyle/>
           <a:p>
             <a:r>
-              <a:rPr lang="en-GB" sz="2800" b="1" dirty="0"/>
-              <a:t>Nodes:</a:t>
-            </a:r>
-            <a:r>
-              <a:rPr lang="en-GB" sz="2800" dirty="0"/>
-              <a:t> authors in the discourse.</a:t>
-            </a:r>
-          </a:p>
-          <a:p>
-            <a:r>
-              <a:rPr lang="en-GB" sz="2800" b="1" dirty="0"/>
-              <a:t>Edges: </a:t>
-            </a:r>
-            <a:r>
-              <a:rPr lang="en-GB" sz="2800" dirty="0"/>
-              <a:t>co-action relations between author pairs (e.g., co-mention, co-entity, co-topic).</a:t>
-            </a:r>
-            <a:endParaRPr lang="he-IL" sz="2800" dirty="0"/>
-          </a:p>
-          <a:p>
-            <a:r>
-              <a:rPr lang="en-GB" sz="2800" b="1" dirty="0"/>
-              <a:t>Weights:</a:t>
-            </a:r>
-            <a:r>
-              <a:rPr lang="en-GB" sz="2800" dirty="0"/>
-              <a:t> number of co-occurrences.</a:t>
-            </a:r>
-          </a:p>
-          <a:p>
-            <a:r>
-              <a:rPr lang="en-GB" sz="2800" b="1" dirty="0"/>
-              <a:t>Filtering:</a:t>
-            </a:r>
-            <a:r>
-              <a:rPr lang="en-GB" sz="2800" dirty="0"/>
-              <a:t> only key authors.</a:t>
-            </a:r>
-          </a:p>
-          <a:p>
-            <a:r>
-              <a:rPr lang="en-GB" sz="2800" b="1" dirty="0"/>
-              <a:t>Purpose</a:t>
-            </a:r>
-            <a:r>
-              <a:rPr lang="en-GB" sz="2800" dirty="0"/>
-              <a:t>: expose coordinated behaviour and structural signals for IO detection.</a:t>
-            </a:r>
-          </a:p>
-          <a:p>
-            <a:endParaRPr lang="en-GB" dirty="0"/>
-          </a:p>
-          <a:p>
-            <a:endParaRPr lang="en-GB" dirty="0"/>
-          </a:p>
-          <a:p>
-            <a:pPr marL="457200" lvl="1" indent="0">
-              <a:buNone/>
-            </a:pPr>
+              <a:rPr lang="en-GB" sz="3600" dirty="0"/>
+              <a:t>An author is considered a key author independently within each topic and may be a key author in one topic but not in others.</a:t>
+            </a:r>
+          </a:p>
+          <a:p>
+            <a:r>
+              <a:rPr lang="en-GB" sz="3600" dirty="0"/>
+              <a:t>Key authors are defined as authors ranked in the top-N (by TF-IDF score) for at least one topic.</a:t>
+            </a:r>
+          </a:p>
+          <a:p>
+            <a:r>
+              <a:rPr lang="en-GB" sz="3600" dirty="0"/>
+              <a:t>In the graph, all key authors are treated equally, regardless of whether they appear in one or multiple topics.</a:t>
+            </a:r>
             <a:endParaRPr lang="en-GB" sz="3300" dirty="0"/>
           </a:p>
         </p:txBody>
@@ -7885,7 +8192,7 @@
           <p:cNvPr id="4" name="Slide Number Placeholder 3">
             <a:extLst>
               <a:ext uri="{FF2B5EF4-FFF2-40B4-BE49-F238E27FC236}">
-                <a16:creationId xmlns:a16="http://schemas.microsoft.com/office/drawing/2014/main" id="{705E3158-F388-D9C9-D303-42FD2F68D2FC}"/>
+                <a16:creationId xmlns:a16="http://schemas.microsoft.com/office/drawing/2014/main" id="{6C663BC0-8C91-1F8E-0045-0251DD3B7DFD}"/>
               </a:ext>
             </a:extLst>
           </p:cNvPr>
@@ -7912,7 +8219,7 @@
     </p:spTree>
     <p:extLst>
       <p:ext uri="{BB962C8B-B14F-4D97-AF65-F5344CB8AC3E}">
-        <p14:creationId xmlns:p14="http://schemas.microsoft.com/office/powerpoint/2010/main" val="3011122290"/>
+        <p14:creationId xmlns:p14="http://schemas.microsoft.com/office/powerpoint/2010/main" val="4294966915"/>
       </p:ext>
     </p:extLst>
   </p:cSld>
@@ -7930,7 +8237,7 @@
         <p:cNvPr id="1" name="">
           <a:extLst>
             <a:ext uri="{FF2B5EF4-FFF2-40B4-BE49-F238E27FC236}">
-              <a16:creationId xmlns:a16="http://schemas.microsoft.com/office/drawing/2014/main" id="{5CF57D72-3769-4162-3F92-A05CCDC8D462}"/>
+              <a16:creationId xmlns:a16="http://schemas.microsoft.com/office/drawing/2014/main" id="{B1355F20-3769-8063-49C1-4D33BDCEF843}"/>
             </a:ext>
           </a:extLst>
         </p:cNvPr>
@@ -7947,108 +8254,90 @@
       </p:grpSpPr>
       <p:sp>
         <p:nvSpPr>
-          <p:cNvPr id="2" name="Title 1">
-            <a:extLst>
-              <a:ext uri="{FF2B5EF4-FFF2-40B4-BE49-F238E27FC236}">
-                <a16:creationId xmlns:a16="http://schemas.microsoft.com/office/drawing/2014/main" id="{40C6FA3E-B022-B204-FB8C-1BC2E024462C}"/>
-              </a:ext>
-            </a:extLst>
-          </p:cNvPr>
-          <p:cNvSpPr>
-            <a:spLocks noGrp="1"/>
-          </p:cNvSpPr>
-          <p:nvPr>
-            <p:ph type="title"/>
-          </p:nvPr>
+          <p:cNvPr id="2" name="Slide Number Placeholder 1">
+            <a:extLst>
+              <a:ext uri="{FF2B5EF4-FFF2-40B4-BE49-F238E27FC236}">
+                <a16:creationId xmlns:a16="http://schemas.microsoft.com/office/drawing/2014/main" id="{C678F141-5A91-3D76-0E83-86E67DAF0E63}"/>
+              </a:ext>
+            </a:extLst>
+          </p:cNvPr>
+          <p:cNvSpPr>
+            <a:spLocks noGrp="1"/>
+          </p:cNvSpPr>
+          <p:nvPr>
+            <p:ph type="sldNum" sz="quarter" idx="12"/>
+          </p:nvPr>
+        </p:nvSpPr>
+        <p:spPr/>
+        <p:txBody>
+          <a:bodyPr/>
+          <a:lstStyle/>
+          <a:p>
+            <a:fld id="{E6AB8EDD-9EF2-4633-A1C2-4D908C1019B4}" type="slidenum">
+              <a:rPr lang="he-IL" smtClean="0"/>
+              <a:pPr/>
+              <a:t>19</a:t>
+            </a:fld>
+            <a:endParaRPr lang="he-IL" dirty="0"/>
+          </a:p>
+        </p:txBody>
+      </p:sp>
+      <p:sp>
+        <p:nvSpPr>
+          <p:cNvPr id="6" name="Rectangle: Rounded Corners 5">
+            <a:extLst>
+              <a:ext uri="{FF2B5EF4-FFF2-40B4-BE49-F238E27FC236}">
+                <a16:creationId xmlns:a16="http://schemas.microsoft.com/office/drawing/2014/main" id="{A8B4057E-2496-168A-678C-2939AA01B135}"/>
+              </a:ext>
+            </a:extLst>
+          </p:cNvPr>
+          <p:cNvSpPr/>
+          <p:nvPr/>
         </p:nvSpPr>
         <p:spPr>
           <a:xfrm>
-            <a:off x="3072268" y="401637"/>
-            <a:ext cx="8949044" cy="1325563"/>
+            <a:off x="6674005" y="3876906"/>
+            <a:ext cx="2631688" cy="959005"/>
           </a:xfrm>
+          <a:prstGeom prst="roundRect">
+            <a:avLst/>
+          </a:prstGeom>
+          <a:noFill/>
+          <a:ln w="38100">
+            <a:solidFill>
+              <a:srgbClr val="FF4343"/>
+            </a:solidFill>
+          </a:ln>
         </p:spPr>
-        <p:txBody>
-          <a:bodyPr>
-            <a:normAutofit/>
-          </a:bodyPr>
-          <a:lstStyle/>
-          <a:p>
-            <a:r>
-              <a:rPr lang="en-GB" dirty="0"/>
-              <a:t>Backbone Graph</a:t>
-            </a:r>
+        <p:style>
+          <a:lnRef idx="2">
+            <a:schemeClr val="accent1">
+              <a:shade val="15000"/>
+            </a:schemeClr>
+          </a:lnRef>
+          <a:fillRef idx="1">
+            <a:schemeClr val="accent1"/>
+          </a:fillRef>
+          <a:effectRef idx="0">
+            <a:schemeClr val="accent1"/>
+          </a:effectRef>
+          <a:fontRef idx="minor">
+            <a:schemeClr val="lt1"/>
+          </a:fontRef>
+        </p:style>
+        <p:txBody>
+          <a:bodyPr rtlCol="0" anchor="ctr"/>
+          <a:lstStyle/>
+          <a:p>
+            <a:pPr algn="ctr"/>
             <a:endParaRPr lang="en-IL" dirty="0"/>
           </a:p>
         </p:txBody>
       </p:sp>
-      <p:sp>
-        <p:nvSpPr>
-          <p:cNvPr id="4" name="Slide Number Placeholder 3">
-            <a:extLst>
-              <a:ext uri="{FF2B5EF4-FFF2-40B4-BE49-F238E27FC236}">
-                <a16:creationId xmlns:a16="http://schemas.microsoft.com/office/drawing/2014/main" id="{C46C0AEB-C01F-B3A5-B6BE-FCD102F6F8AE}"/>
-              </a:ext>
-            </a:extLst>
-          </p:cNvPr>
-          <p:cNvSpPr>
-            <a:spLocks noGrp="1"/>
-          </p:cNvSpPr>
-          <p:nvPr>
-            <p:ph type="sldNum" sz="quarter" idx="12"/>
-          </p:nvPr>
-        </p:nvSpPr>
-        <p:spPr/>
-        <p:txBody>
-          <a:bodyPr/>
-          <a:lstStyle/>
-          <a:p>
-            <a:fld id="{E6AB8EDD-9EF2-4633-A1C2-4D908C1019B4}" type="slidenum">
-              <a:rPr lang="he-IL" smtClean="0"/>
-              <a:t>19</a:t>
-            </a:fld>
-            <a:endParaRPr lang="he-IL"/>
-          </a:p>
-        </p:txBody>
-      </p:sp>
-      <p:pic>
-        <p:nvPicPr>
-          <p:cNvPr id="8" name="Content Placeholder 7" descr="A network of dots and lines&#10;&#10;AI-generated content may be incorrect.">
-            <a:extLst>
-              <a:ext uri="{FF2B5EF4-FFF2-40B4-BE49-F238E27FC236}">
-                <a16:creationId xmlns:a16="http://schemas.microsoft.com/office/drawing/2014/main" id="{F8CEB6B9-7309-277B-AAAC-68DA1C261F0D}"/>
-              </a:ext>
-            </a:extLst>
-          </p:cNvPr>
-          <p:cNvPicPr>
-            <a:picLocks noGrp="1" noChangeAspect="1"/>
-          </p:cNvPicPr>
-          <p:nvPr>
-            <p:ph idx="1"/>
-          </p:nvPr>
-        </p:nvPicPr>
-        <p:blipFill>
-          <a:blip r:embed="rId3">
-            <a:extLst>
-              <a:ext uri="{28A0092B-C50C-407E-A947-70E740481C1C}">
-                <a14:useLocalDpi xmlns:a14="http://schemas.microsoft.com/office/drawing/2010/main" val="0"/>
-              </a:ext>
-            </a:extLst>
-          </a:blip>
-          <a:stretch>
-            <a:fillRect/>
-          </a:stretch>
-        </p:blipFill>
-        <p:spPr>
-          <a:xfrm>
-            <a:off x="3072268" y="1385094"/>
-            <a:ext cx="4747419" cy="4747419"/>
-          </a:xfrm>
-        </p:spPr>
-      </p:pic>
     </p:spTree>
     <p:extLst>
       <p:ext uri="{BB962C8B-B14F-4D97-AF65-F5344CB8AC3E}">
-        <p14:creationId xmlns:p14="http://schemas.microsoft.com/office/powerpoint/2010/main" val="2067841345"/>
+        <p14:creationId xmlns:p14="http://schemas.microsoft.com/office/powerpoint/2010/main" val="1445114060"/>
       </p:ext>
     </p:extLst>
   </p:cSld>
@@ -8278,7 +8567,7 @@
         <p:cNvPr id="1" name="">
           <a:extLst>
             <a:ext uri="{FF2B5EF4-FFF2-40B4-BE49-F238E27FC236}">
-              <a16:creationId xmlns:a16="http://schemas.microsoft.com/office/drawing/2014/main" id="{3051E4DB-33D4-3886-E9B4-2B5F43C86DBC}"/>
+              <a16:creationId xmlns:a16="http://schemas.microsoft.com/office/drawing/2014/main" id="{858E27CD-C8FF-B185-45D8-666A78A68D92}"/>
             </a:ext>
           </a:extLst>
         </p:cNvPr>
@@ -8298,7 +8587,7 @@
           <p:cNvPr id="2" name="Title 1">
             <a:extLst>
               <a:ext uri="{FF2B5EF4-FFF2-40B4-BE49-F238E27FC236}">
-                <a16:creationId xmlns:a16="http://schemas.microsoft.com/office/drawing/2014/main" id="{34E28D8F-0758-9222-0A12-759FFCC51C04}"/>
+                <a16:creationId xmlns:a16="http://schemas.microsoft.com/office/drawing/2014/main" id="{A5798079-07AB-1011-721B-DDEB468739BA}"/>
               </a:ext>
             </a:extLst>
           </p:cNvPr>
@@ -8309,7 +8598,12 @@
             <p:ph type="title"/>
           </p:nvPr>
         </p:nvSpPr>
-        <p:spPr/>
+        <p:spPr>
+          <a:xfrm>
+            <a:off x="3072268" y="401637"/>
+            <a:ext cx="8949044" cy="1325563"/>
+          </a:xfrm>
+        </p:spPr>
         <p:txBody>
           <a:bodyPr>
             <a:normAutofit/>
@@ -8318,7 +8612,7 @@
           <a:p>
             <a:r>
               <a:rPr lang="en-GB" dirty="0"/>
-              <a:t>Workflow</a:t>
+              <a:t>Backbone Graph Building</a:t>
             </a:r>
             <a:endParaRPr lang="en-IL" dirty="0"/>
           </a:p>
@@ -8326,10 +8620,102 @@
       </p:sp>
       <p:sp>
         <p:nvSpPr>
+          <p:cNvPr id="3" name="Content Placeholder 2">
+            <a:extLst>
+              <a:ext uri="{FF2B5EF4-FFF2-40B4-BE49-F238E27FC236}">
+                <a16:creationId xmlns:a16="http://schemas.microsoft.com/office/drawing/2014/main" id="{5FBFF6C3-80E1-C75C-69F0-3A7FFA1D100D}"/>
+              </a:ext>
+            </a:extLst>
+          </p:cNvPr>
+          <p:cNvSpPr>
+            <a:spLocks noGrp="1"/>
+          </p:cNvSpPr>
+          <p:nvPr>
+            <p:ph idx="1"/>
+          </p:nvPr>
+        </p:nvSpPr>
+        <p:spPr>
+          <a:xfrm>
+            <a:off x="1243087" y="1825624"/>
+            <a:ext cx="10582656" cy="4441825"/>
+          </a:xfrm>
+        </p:spPr>
+        <p:txBody>
+          <a:bodyPr>
+            <a:normAutofit/>
+          </a:bodyPr>
+          <a:lstStyle/>
+          <a:p>
+            <a:r>
+              <a:rPr lang="en-GB" sz="2800" b="1" dirty="0"/>
+              <a:t>Nodes:</a:t>
+            </a:r>
+            <a:r>
+              <a:rPr lang="en-GB" sz="2800" dirty="0"/>
+              <a:t> authors in the discourse.</a:t>
+            </a:r>
+          </a:p>
+          <a:p>
+            <a:r>
+              <a:rPr lang="en-GB" sz="2800" b="1" dirty="0"/>
+              <a:t>Edges: </a:t>
+            </a:r>
+            <a:r>
+              <a:rPr lang="en-GB" sz="2800" dirty="0"/>
+              <a:t>co-action relations between author pairs (e.g., co-mention, co-entity, co-topic).</a:t>
+            </a:r>
+            <a:endParaRPr lang="he-IL" sz="2800" dirty="0"/>
+          </a:p>
+          <a:p>
+            <a:r>
+              <a:rPr lang="en-GB" sz="2800" b="1" dirty="0"/>
+              <a:t>Weights:</a:t>
+            </a:r>
+            <a:r>
+              <a:rPr lang="en-GB" sz="2800" dirty="0"/>
+              <a:t> number of co-occurrences.</a:t>
+            </a:r>
+          </a:p>
+          <a:p>
+            <a:r>
+              <a:rPr lang="en-GB" sz="2800" b="1" dirty="0"/>
+              <a:t>Filtering:</a:t>
+            </a:r>
+            <a:r>
+              <a:rPr lang="en-GB" sz="2800" dirty="0"/>
+              <a:t> only key authors.</a:t>
+            </a:r>
+          </a:p>
+          <a:p>
+            <a:r>
+              <a:rPr lang="en-GB" sz="2800" b="1" dirty="0"/>
+              <a:t>Purpose</a:t>
+            </a:r>
+            <a:r>
+              <a:rPr lang="en-GB" sz="2800" dirty="0"/>
+              <a:t>: expose coordinated behaviour and structural signals for IO detection.</a:t>
+            </a:r>
+          </a:p>
+          <a:p>
+            <a:endParaRPr lang="en-GB" dirty="0"/>
+          </a:p>
+          <a:p>
+            <a:endParaRPr lang="en-GB" dirty="0"/>
+          </a:p>
+          <a:p>
+            <a:pPr marL="457200" lvl="1" indent="0">
+              <a:buNone/>
+            </a:pPr>
+            <a:endParaRPr lang="en-GB" sz="3300" dirty="0"/>
+          </a:p>
+        </p:txBody>
+      </p:sp>
+      <p:sp>
+        <p:nvSpPr>
           <p:cNvPr id="4" name="Slide Number Placeholder 3">
             <a:extLst>
               <a:ext uri="{FF2B5EF4-FFF2-40B4-BE49-F238E27FC236}">
-                <a16:creationId xmlns:a16="http://schemas.microsoft.com/office/drawing/2014/main" id="{02AB77B4-1130-22BF-E743-AEA412A7E7D7}"/>
+                <a16:creationId xmlns:a16="http://schemas.microsoft.com/office/drawing/2014/main" id="{705E3158-F388-D9C9-D303-42FD2F68D2FC}"/>
               </a:ext>
             </a:extLst>
           </p:cNvPr>
@@ -8353,22 +8739,125 @@
           </a:p>
         </p:txBody>
       </p:sp>
+    </p:spTree>
+    <p:extLst>
+      <p:ext uri="{BB962C8B-B14F-4D97-AF65-F5344CB8AC3E}">
+        <p14:creationId xmlns:p14="http://schemas.microsoft.com/office/powerpoint/2010/main" val="3011122290"/>
+      </p:ext>
+    </p:extLst>
+  </p:cSld>
+  <p:clrMapOvr>
+    <a:masterClrMapping/>
+  </p:clrMapOvr>
+</p:sld>
+</file>
+
+<file path=ppt/slides/slide21.xml><?xml version="1.0" encoding="utf-8"?>
+<p:sld xmlns:a="http://schemas.openxmlformats.org/drawingml/2006/main" xmlns:r="http://schemas.openxmlformats.org/officeDocument/2006/relationships" xmlns:p="http://schemas.openxmlformats.org/presentationml/2006/main">
+  <p:cSld>
+    <p:spTree>
+      <p:nvGrpSpPr>
+        <p:cNvPr id="1" name="">
+          <a:extLst>
+            <a:ext uri="{FF2B5EF4-FFF2-40B4-BE49-F238E27FC236}">
+              <a16:creationId xmlns:a16="http://schemas.microsoft.com/office/drawing/2014/main" id="{5CF57D72-3769-4162-3F92-A05CCDC8D462}"/>
+            </a:ext>
+          </a:extLst>
+        </p:cNvPr>
+        <p:cNvGrpSpPr/>
+        <p:nvPr/>
+      </p:nvGrpSpPr>
+      <p:grpSpPr>
+        <a:xfrm>
+          <a:off x="0" y="0"/>
+          <a:ext cx="0" cy="0"/>
+          <a:chOff x="0" y="0"/>
+          <a:chExt cx="0" cy="0"/>
+        </a:xfrm>
+      </p:grpSpPr>
+      <p:sp>
+        <p:nvSpPr>
+          <p:cNvPr id="2" name="Title 1">
+            <a:extLst>
+              <a:ext uri="{FF2B5EF4-FFF2-40B4-BE49-F238E27FC236}">
+                <a16:creationId xmlns:a16="http://schemas.microsoft.com/office/drawing/2014/main" id="{40C6FA3E-B022-B204-FB8C-1BC2E024462C}"/>
+              </a:ext>
+            </a:extLst>
+          </p:cNvPr>
+          <p:cNvSpPr>
+            <a:spLocks noGrp="1"/>
+          </p:cNvSpPr>
+          <p:nvPr>
+            <p:ph type="title"/>
+          </p:nvPr>
+        </p:nvSpPr>
+        <p:spPr>
+          <a:xfrm>
+            <a:off x="3072268" y="401637"/>
+            <a:ext cx="8949044" cy="1325563"/>
+          </a:xfrm>
+        </p:spPr>
+        <p:txBody>
+          <a:bodyPr>
+            <a:normAutofit/>
+          </a:bodyPr>
+          <a:lstStyle/>
+          <a:p>
+            <a:r>
+              <a:rPr lang="en-GB" dirty="0"/>
+              <a:t>Backbone Graph</a:t>
+            </a:r>
+            <a:endParaRPr lang="en-IL" dirty="0"/>
+          </a:p>
+        </p:txBody>
+      </p:sp>
+      <p:sp>
+        <p:nvSpPr>
+          <p:cNvPr id="4" name="Slide Number Placeholder 3">
+            <a:extLst>
+              <a:ext uri="{FF2B5EF4-FFF2-40B4-BE49-F238E27FC236}">
+                <a16:creationId xmlns:a16="http://schemas.microsoft.com/office/drawing/2014/main" id="{C46C0AEB-C01F-B3A5-B6BE-FCD102F6F8AE}"/>
+              </a:ext>
+            </a:extLst>
+          </p:cNvPr>
+          <p:cNvSpPr>
+            <a:spLocks noGrp="1"/>
+          </p:cNvSpPr>
+          <p:nvPr>
+            <p:ph type="sldNum" sz="quarter" idx="12"/>
+          </p:nvPr>
+        </p:nvSpPr>
+        <p:spPr/>
+        <p:txBody>
+          <a:bodyPr/>
+          <a:lstStyle/>
+          <a:p>
+            <a:fld id="{E6AB8EDD-9EF2-4633-A1C2-4D908C1019B4}" type="slidenum">
+              <a:rPr lang="he-IL" smtClean="0"/>
+              <a:t>21</a:t>
+            </a:fld>
+            <a:endParaRPr lang="he-IL"/>
+          </a:p>
+        </p:txBody>
+      </p:sp>
       <p:pic>
         <p:nvPicPr>
-          <p:cNvPr id="3" name="Picture 2" descr="A diagram of a system&#10;&#10;AI-generated content may be incorrect.">
-            <a:extLst>
-              <a:ext uri="{FF2B5EF4-FFF2-40B4-BE49-F238E27FC236}">
-                <a16:creationId xmlns:a16="http://schemas.microsoft.com/office/drawing/2014/main" id="{839BB112-0EFF-BAFA-E635-ECF2AD26369D}"/>
+          <p:cNvPr id="8" name="Content Placeholder 7" descr="A network of dots and lines&#10;&#10;AI-generated content may be incorrect.">
+            <a:extLst>
+              <a:ext uri="{FF2B5EF4-FFF2-40B4-BE49-F238E27FC236}">
+                <a16:creationId xmlns:a16="http://schemas.microsoft.com/office/drawing/2014/main" id="{F8CEB6B9-7309-277B-AAAC-68DA1C261F0D}"/>
               </a:ext>
             </a:extLst>
           </p:cNvPr>
           <p:cNvPicPr>
-            <a:picLocks noChangeAspect="1"/>
+            <a:picLocks noGrp="1" noChangeAspect="1"/>
           </p:cNvPicPr>
-          <p:nvPr/>
+          <p:nvPr>
+            <p:ph idx="1"/>
+          </p:nvPr>
         </p:nvPicPr>
         <p:blipFill>
-          <a:blip r:embed="rId2">
+          <a:blip r:embed="rId3">
             <a:extLst>
               <a:ext uri="{28A0092B-C50C-407E-A947-70E740481C1C}">
                 <a14:useLocalDpi xmlns:a14="http://schemas.microsoft.com/office/drawing/2010/main" val="0"/>
@@ -8381,20 +8870,83 @@
         </p:blipFill>
         <p:spPr>
           <a:xfrm>
-            <a:off x="1109472" y="2297798"/>
-            <a:ext cx="9924288" cy="2350401"/>
+            <a:off x="3072268" y="1385094"/>
+            <a:ext cx="4747419" cy="4747419"/>
           </a:xfrm>
-          <a:prstGeom prst="rect">
-            <a:avLst/>
-          </a:prstGeom>
         </p:spPr>
       </p:pic>
-      <p:sp>
-        <p:nvSpPr>
-          <p:cNvPr id="6" name="Rectangle: Rounded Corners 5">
-            <a:extLst>
-              <a:ext uri="{FF2B5EF4-FFF2-40B4-BE49-F238E27FC236}">
-                <a16:creationId xmlns:a16="http://schemas.microsoft.com/office/drawing/2014/main" id="{552E5A72-2538-7924-BCE4-577C751C5E8A}"/>
+    </p:spTree>
+    <p:extLst>
+      <p:ext uri="{BB962C8B-B14F-4D97-AF65-F5344CB8AC3E}">
+        <p14:creationId xmlns:p14="http://schemas.microsoft.com/office/powerpoint/2010/main" val="2067841345"/>
+      </p:ext>
+    </p:extLst>
+  </p:cSld>
+  <p:clrMapOvr>
+    <a:masterClrMapping/>
+  </p:clrMapOvr>
+</p:sld>
+</file>
+
+<file path=ppt/slides/slide22.xml><?xml version="1.0" encoding="utf-8"?>
+<p:sld xmlns:a="http://schemas.openxmlformats.org/drawingml/2006/main" xmlns:r="http://schemas.openxmlformats.org/officeDocument/2006/relationships" xmlns:p="http://schemas.openxmlformats.org/presentationml/2006/main">
+  <p:cSld>
+    <p:spTree>
+      <p:nvGrpSpPr>
+        <p:cNvPr id="1" name="">
+          <a:extLst>
+            <a:ext uri="{FF2B5EF4-FFF2-40B4-BE49-F238E27FC236}">
+              <a16:creationId xmlns:a16="http://schemas.microsoft.com/office/drawing/2014/main" id="{82719B8A-8A3D-B468-AB5B-90809A272DBD}"/>
+            </a:ext>
+          </a:extLst>
+        </p:cNvPr>
+        <p:cNvGrpSpPr/>
+        <p:nvPr/>
+      </p:nvGrpSpPr>
+      <p:grpSpPr>
+        <a:xfrm>
+          <a:off x="0" y="0"/>
+          <a:ext cx="0" cy="0"/>
+          <a:chOff x="0" y="0"/>
+          <a:chExt cx="0" cy="0"/>
+        </a:xfrm>
+      </p:grpSpPr>
+      <p:sp>
+        <p:nvSpPr>
+          <p:cNvPr id="2" name="Slide Number Placeholder 1">
+            <a:extLst>
+              <a:ext uri="{FF2B5EF4-FFF2-40B4-BE49-F238E27FC236}">
+                <a16:creationId xmlns:a16="http://schemas.microsoft.com/office/drawing/2014/main" id="{86F1795A-D216-579E-59D4-858A0FD7D2DA}"/>
+              </a:ext>
+            </a:extLst>
+          </p:cNvPr>
+          <p:cNvSpPr>
+            <a:spLocks noGrp="1"/>
+          </p:cNvSpPr>
+          <p:nvPr>
+            <p:ph type="sldNum" sz="quarter" idx="12"/>
+          </p:nvPr>
+        </p:nvSpPr>
+        <p:spPr/>
+        <p:txBody>
+          <a:bodyPr/>
+          <a:lstStyle/>
+          <a:p>
+            <a:fld id="{E6AB8EDD-9EF2-4633-A1C2-4D908C1019B4}" type="slidenum">
+              <a:rPr lang="he-IL" smtClean="0"/>
+              <a:pPr/>
+              <a:t>22</a:t>
+            </a:fld>
+            <a:endParaRPr lang="he-IL" dirty="0"/>
+          </a:p>
+        </p:txBody>
+      </p:sp>
+      <p:sp>
+        <p:nvSpPr>
+          <p:cNvPr id="9" name="Rectangle: Rounded Corners 8">
+            <a:extLst>
+              <a:ext uri="{FF2B5EF4-FFF2-40B4-BE49-F238E27FC236}">
+                <a16:creationId xmlns:a16="http://schemas.microsoft.com/office/drawing/2014/main" id="{F063BEF0-7782-E658-3D6B-AAE6627156E9}"/>
               </a:ext>
             </a:extLst>
           </p:cNvPr>
@@ -8403,8 +8955,8 @@
         </p:nvSpPr>
         <p:spPr>
           <a:xfrm>
-            <a:off x="8943541" y="3721100"/>
-            <a:ext cx="2205228" cy="1016000"/>
+            <a:off x="9634654" y="3876906"/>
+            <a:ext cx="2320165" cy="959005"/>
           </a:xfrm>
           <a:prstGeom prst="roundRect">
             <a:avLst/>
@@ -8444,7 +8996,7 @@
     </p:spTree>
     <p:extLst>
       <p:ext uri="{BB962C8B-B14F-4D97-AF65-F5344CB8AC3E}">
-        <p14:creationId xmlns:p14="http://schemas.microsoft.com/office/powerpoint/2010/main" val="4087044995"/>
+        <p14:creationId xmlns:p14="http://schemas.microsoft.com/office/powerpoint/2010/main" val="3491016007"/>
       </p:ext>
     </p:extLst>
   </p:cSld>
@@ -8454,7 +9006,7 @@
 </p:sld>
 </file>
 
-<file path=ppt/slides/slide21.xml><?xml version="1.0" encoding="utf-8"?>
+<file path=ppt/slides/slide23.xml><?xml version="1.0" encoding="utf-8"?>
 <p:sld xmlns:a="http://schemas.openxmlformats.org/drawingml/2006/main" xmlns:r="http://schemas.openxmlformats.org/officeDocument/2006/relationships" xmlns:p="http://schemas.openxmlformats.org/presentationml/2006/main">
   <p:cSld>
     <p:spTree>
@@ -8558,13 +9110,6 @@
               <a:t>Rationale: community identifiers and centralities are measures quantify how embedded, influential, or connective an actor is within the network. </a:t>
             </a:r>
           </a:p>
-          <a:p>
-            <a:r>
-              <a:rPr lang="en-GB" sz="2800" dirty="0"/>
-              <a:t>Indicator examples: k-Core, degree centrality, betweenness centrality.</a:t>
-            </a:r>
-            <a:endParaRPr lang="en-GB" sz="3300" dirty="0"/>
-          </a:p>
         </p:txBody>
       </p:sp>
       <p:sp>
@@ -8590,7 +9135,7 @@
           <a:p>
             <a:fld id="{E6AB8EDD-9EF2-4633-A1C2-4D908C1019B4}" type="slidenum">
               <a:rPr lang="he-IL" smtClean="0"/>
-              <a:t>21</a:t>
+              <a:t>23</a:t>
             </a:fld>
             <a:endParaRPr lang="he-IL"/>
           </a:p>
@@ -8609,7 +9154,878 @@
 </p:sld>
 </file>
 
-<file path=ppt/slides/slide22.xml><?xml version="1.0" encoding="utf-8"?>
+<file path=ppt/slides/slide24.xml><?xml version="1.0" encoding="utf-8"?>
+<p:sld xmlns:a="http://schemas.openxmlformats.org/drawingml/2006/main" xmlns:r="http://schemas.openxmlformats.org/officeDocument/2006/relationships" xmlns:p="http://schemas.openxmlformats.org/presentationml/2006/main">
+  <p:cSld>
+    <p:spTree>
+      <p:nvGrpSpPr>
+        <p:cNvPr id="1" name="">
+          <a:extLst>
+            <a:ext uri="{FF2B5EF4-FFF2-40B4-BE49-F238E27FC236}">
+              <a16:creationId xmlns:a16="http://schemas.microsoft.com/office/drawing/2014/main" id="{4562C2BE-2494-BA68-E431-47326FA2C735}"/>
+            </a:ext>
+          </a:extLst>
+        </p:cNvPr>
+        <p:cNvGrpSpPr/>
+        <p:nvPr/>
+      </p:nvGrpSpPr>
+      <p:grpSpPr>
+        <a:xfrm>
+          <a:off x="0" y="0"/>
+          <a:ext cx="0" cy="0"/>
+          <a:chOff x="0" y="0"/>
+          <a:chExt cx="0" cy="0"/>
+        </a:xfrm>
+      </p:grpSpPr>
+      <p:sp>
+        <p:nvSpPr>
+          <p:cNvPr id="2" name="Title 1">
+            <a:extLst>
+              <a:ext uri="{FF2B5EF4-FFF2-40B4-BE49-F238E27FC236}">
+                <a16:creationId xmlns:a16="http://schemas.microsoft.com/office/drawing/2014/main" id="{19B6281F-A0E2-7F0F-877A-FFD8BAABC628}"/>
+              </a:ext>
+            </a:extLst>
+          </p:cNvPr>
+          <p:cNvSpPr>
+            <a:spLocks noGrp="1"/>
+          </p:cNvSpPr>
+          <p:nvPr>
+            <p:ph type="title"/>
+          </p:nvPr>
+        </p:nvSpPr>
+        <p:spPr>
+          <a:xfrm>
+            <a:off x="3072268" y="401637"/>
+            <a:ext cx="8949044" cy="1325563"/>
+          </a:xfrm>
+        </p:spPr>
+        <p:txBody>
+          <a:bodyPr>
+            <a:normAutofit/>
+          </a:bodyPr>
+          <a:lstStyle/>
+          <a:p>
+            <a:r>
+              <a:rPr lang="en-GB" dirty="0"/>
+              <a:t>IO Indicators - Examples</a:t>
+            </a:r>
+            <a:endParaRPr lang="en-IL" dirty="0"/>
+          </a:p>
+        </p:txBody>
+      </p:sp>
+      <p:sp>
+        <p:nvSpPr>
+          <p:cNvPr id="3" name="Content Placeholder 2">
+            <a:extLst>
+              <a:ext uri="{FF2B5EF4-FFF2-40B4-BE49-F238E27FC236}">
+                <a16:creationId xmlns:a16="http://schemas.microsoft.com/office/drawing/2014/main" id="{EEAC4676-3CA1-600D-3921-D92526888C26}"/>
+              </a:ext>
+            </a:extLst>
+          </p:cNvPr>
+          <p:cNvSpPr>
+            <a:spLocks noGrp="1"/>
+          </p:cNvSpPr>
+          <p:nvPr>
+            <p:ph idx="1"/>
+          </p:nvPr>
+        </p:nvSpPr>
+        <p:spPr>
+          <a:xfrm>
+            <a:off x="1243087" y="1825624"/>
+            <a:ext cx="10582656" cy="4441825"/>
+          </a:xfrm>
+        </p:spPr>
+        <p:txBody>
+          <a:bodyPr>
+            <a:normAutofit/>
+          </a:bodyPr>
+          <a:lstStyle/>
+          <a:p>
+            <a:r>
+              <a:rPr lang="en-GB" sz="2800" dirty="0"/>
+              <a:t>Centralities: Measure how structurally important a node is in a network. </a:t>
+            </a:r>
+          </a:p>
+          <a:p>
+            <a:pPr lvl="1">
+              <a:buFontTx/>
+              <a:buChar char="-"/>
+            </a:pPr>
+            <a:r>
+              <a:rPr lang="en-GB" sz="2800" dirty="0"/>
+              <a:t>Degree centrality (node): Counts the number of direct connections a node has. Reflects local connectivity.</a:t>
+            </a:r>
+          </a:p>
+          <a:p>
+            <a:pPr lvl="1">
+              <a:buFontTx/>
+              <a:buChar char="-"/>
+            </a:pPr>
+            <a:r>
+              <a:rPr lang="en-GB" sz="2800" dirty="0"/>
+              <a:t>Eigenvector centrality (node): the sum of the scores of the node’s neighbours. Reflect connectivity to highly connected nodes.</a:t>
+            </a:r>
+          </a:p>
+          <a:p>
+            <a:r>
+              <a:rPr lang="en-GB" sz="2800" dirty="0"/>
+              <a:t>k-core (node): The largest 𝑘 such that the node belongs to a subgraph where every node has at least 𝑘 neighbours. Reflects embeddedness in dense, mutually connected groups.</a:t>
+            </a:r>
+          </a:p>
+        </p:txBody>
+      </p:sp>
+      <p:sp>
+        <p:nvSpPr>
+          <p:cNvPr id="4" name="Slide Number Placeholder 3">
+            <a:extLst>
+              <a:ext uri="{FF2B5EF4-FFF2-40B4-BE49-F238E27FC236}">
+                <a16:creationId xmlns:a16="http://schemas.microsoft.com/office/drawing/2014/main" id="{91F08EF7-7ABA-0FF1-49F5-C1F900E00B53}"/>
+              </a:ext>
+            </a:extLst>
+          </p:cNvPr>
+          <p:cNvSpPr>
+            <a:spLocks noGrp="1"/>
+          </p:cNvSpPr>
+          <p:nvPr>
+            <p:ph type="sldNum" sz="quarter" idx="12"/>
+          </p:nvPr>
+        </p:nvSpPr>
+        <p:spPr/>
+        <p:txBody>
+          <a:bodyPr/>
+          <a:lstStyle/>
+          <a:p>
+            <a:fld id="{E6AB8EDD-9EF2-4633-A1C2-4D908C1019B4}" type="slidenum">
+              <a:rPr lang="he-IL" smtClean="0"/>
+              <a:t>24</a:t>
+            </a:fld>
+            <a:endParaRPr lang="he-IL"/>
+          </a:p>
+        </p:txBody>
+      </p:sp>
+    </p:spTree>
+    <p:extLst>
+      <p:ext uri="{BB962C8B-B14F-4D97-AF65-F5344CB8AC3E}">
+        <p14:creationId xmlns:p14="http://schemas.microsoft.com/office/powerpoint/2010/main" val="768807542"/>
+      </p:ext>
+    </p:extLst>
+  </p:cSld>
+  <p:clrMapOvr>
+    <a:masterClrMapping/>
+  </p:clrMapOvr>
+</p:sld>
+</file>
+
+<file path=ppt/slides/slide25.xml><?xml version="1.0" encoding="utf-8"?>
+<p:sld xmlns:a="http://schemas.openxmlformats.org/drawingml/2006/main" xmlns:r="http://schemas.openxmlformats.org/officeDocument/2006/relationships" xmlns:p="http://schemas.openxmlformats.org/presentationml/2006/main">
+  <p:cSld>
+    <p:spTree>
+      <p:nvGrpSpPr>
+        <p:cNvPr id="1" name="">
+          <a:extLst>
+            <a:ext uri="{FF2B5EF4-FFF2-40B4-BE49-F238E27FC236}">
+              <a16:creationId xmlns:a16="http://schemas.microsoft.com/office/drawing/2014/main" id="{4F0BEF17-A85B-69A7-4947-96097D1A5F5B}"/>
+            </a:ext>
+          </a:extLst>
+        </p:cNvPr>
+        <p:cNvGrpSpPr/>
+        <p:nvPr/>
+      </p:nvGrpSpPr>
+      <p:grpSpPr>
+        <a:xfrm>
+          <a:off x="0" y="0"/>
+          <a:ext cx="0" cy="0"/>
+          <a:chOff x="0" y="0"/>
+          <a:chExt cx="0" cy="0"/>
+        </a:xfrm>
+      </p:grpSpPr>
+      <p:sp>
+        <p:nvSpPr>
+          <p:cNvPr id="2" name="Title 1">
+            <a:extLst>
+              <a:ext uri="{FF2B5EF4-FFF2-40B4-BE49-F238E27FC236}">
+                <a16:creationId xmlns:a16="http://schemas.microsoft.com/office/drawing/2014/main" id="{F80E2D88-5AB1-052E-FB13-E091040FA2F1}"/>
+              </a:ext>
+            </a:extLst>
+          </p:cNvPr>
+          <p:cNvSpPr>
+            <a:spLocks noGrp="1"/>
+          </p:cNvSpPr>
+          <p:nvPr>
+            <p:ph type="title"/>
+          </p:nvPr>
+        </p:nvSpPr>
+        <p:spPr>
+          <a:xfrm>
+            <a:off x="3072268" y="401637"/>
+            <a:ext cx="8949044" cy="1325563"/>
+          </a:xfrm>
+        </p:spPr>
+        <p:txBody>
+          <a:bodyPr>
+            <a:normAutofit/>
+          </a:bodyPr>
+          <a:lstStyle/>
+          <a:p>
+            <a:r>
+              <a:rPr lang="en-GB" dirty="0"/>
+              <a:t>Backbone Graph</a:t>
+            </a:r>
+            <a:endParaRPr lang="en-IL" dirty="0"/>
+          </a:p>
+        </p:txBody>
+      </p:sp>
+      <p:sp>
+        <p:nvSpPr>
+          <p:cNvPr id="4" name="Slide Number Placeholder 3">
+            <a:extLst>
+              <a:ext uri="{FF2B5EF4-FFF2-40B4-BE49-F238E27FC236}">
+                <a16:creationId xmlns:a16="http://schemas.microsoft.com/office/drawing/2014/main" id="{9A45DFBC-E283-482F-07BA-A333B9108357}"/>
+              </a:ext>
+            </a:extLst>
+          </p:cNvPr>
+          <p:cNvSpPr>
+            <a:spLocks noGrp="1"/>
+          </p:cNvSpPr>
+          <p:nvPr>
+            <p:ph type="sldNum" sz="quarter" idx="12"/>
+          </p:nvPr>
+        </p:nvSpPr>
+        <p:spPr/>
+        <p:txBody>
+          <a:bodyPr/>
+          <a:lstStyle/>
+          <a:p>
+            <a:fld id="{E6AB8EDD-9EF2-4633-A1C2-4D908C1019B4}" type="slidenum">
+              <a:rPr lang="he-IL" smtClean="0"/>
+              <a:t>25</a:t>
+            </a:fld>
+            <a:endParaRPr lang="he-IL"/>
+          </a:p>
+        </p:txBody>
+      </p:sp>
+      <p:pic>
+        <p:nvPicPr>
+          <p:cNvPr id="8" name="Content Placeholder 7" descr="A network of dots and lines&#10;&#10;AI-generated content may be incorrect.">
+            <a:extLst>
+              <a:ext uri="{FF2B5EF4-FFF2-40B4-BE49-F238E27FC236}">
+                <a16:creationId xmlns:a16="http://schemas.microsoft.com/office/drawing/2014/main" id="{66A4053E-AB18-5F2F-D1F0-F2B2E5298473}"/>
+              </a:ext>
+            </a:extLst>
+          </p:cNvPr>
+          <p:cNvPicPr>
+            <a:picLocks noGrp="1" noChangeAspect="1"/>
+          </p:cNvPicPr>
+          <p:nvPr>
+            <p:ph idx="1"/>
+          </p:nvPr>
+        </p:nvPicPr>
+        <p:blipFill>
+          <a:blip r:embed="rId3">
+            <a:extLst>
+              <a:ext uri="{28A0092B-C50C-407E-A947-70E740481C1C}">
+                <a14:useLocalDpi xmlns:a14="http://schemas.microsoft.com/office/drawing/2010/main" val="0"/>
+              </a:ext>
+            </a:extLst>
+          </a:blip>
+          <a:srcRect l="3852" t="3063" r="4355"/>
+          <a:stretch>
+            <a:fillRect/>
+          </a:stretch>
+        </p:blipFill>
+        <p:spPr>
+          <a:xfrm>
+            <a:off x="1616927" y="1630362"/>
+            <a:ext cx="6362773" cy="5176361"/>
+          </a:xfrm>
+        </p:spPr>
+      </p:pic>
+      <p:sp>
+        <p:nvSpPr>
+          <p:cNvPr id="5" name="Flowchart: Connector 4">
+            <a:extLst>
+              <a:ext uri="{FF2B5EF4-FFF2-40B4-BE49-F238E27FC236}">
+                <a16:creationId xmlns:a16="http://schemas.microsoft.com/office/drawing/2014/main" id="{94C0EF37-C21E-64B9-190B-12A5FFAC380E}"/>
+              </a:ext>
+            </a:extLst>
+          </p:cNvPr>
+          <p:cNvSpPr/>
+          <p:nvPr/>
+        </p:nvSpPr>
+        <p:spPr>
+          <a:xfrm>
+            <a:off x="6840109" y="4305300"/>
+            <a:ext cx="558911" cy="559646"/>
+          </a:xfrm>
+          <a:prstGeom prst="flowChartConnector">
+            <a:avLst/>
+          </a:prstGeom>
+          <a:noFill/>
+          <a:ln w="57150">
+            <a:solidFill>
+              <a:schemeClr val="accent1"/>
+            </a:solidFill>
+          </a:ln>
+        </p:spPr>
+        <p:style>
+          <a:lnRef idx="2">
+            <a:schemeClr val="accent1">
+              <a:shade val="15000"/>
+            </a:schemeClr>
+          </a:lnRef>
+          <a:fillRef idx="1">
+            <a:schemeClr val="accent1"/>
+          </a:fillRef>
+          <a:effectRef idx="0">
+            <a:schemeClr val="accent1"/>
+          </a:effectRef>
+          <a:fontRef idx="minor">
+            <a:schemeClr val="lt1"/>
+          </a:fontRef>
+        </p:style>
+        <p:txBody>
+          <a:bodyPr rtlCol="0" anchor="ctr"/>
+          <a:lstStyle/>
+          <a:p>
+            <a:pPr algn="ctr"/>
+            <a:endParaRPr lang="en-IL"/>
+          </a:p>
+        </p:txBody>
+      </p:sp>
+      <p:sp>
+        <p:nvSpPr>
+          <p:cNvPr id="6" name="Flowchart: Connector 5">
+            <a:extLst>
+              <a:ext uri="{FF2B5EF4-FFF2-40B4-BE49-F238E27FC236}">
+                <a16:creationId xmlns:a16="http://schemas.microsoft.com/office/drawing/2014/main" id="{D78D894D-6702-3125-2BFF-3DB2ECBA4904}"/>
+              </a:ext>
+            </a:extLst>
+          </p:cNvPr>
+          <p:cNvSpPr/>
+          <p:nvPr/>
+        </p:nvSpPr>
+        <p:spPr>
+          <a:xfrm>
+            <a:off x="8256994" y="1630362"/>
+            <a:ext cx="360000" cy="360000"/>
+          </a:xfrm>
+          <a:prstGeom prst="flowChartConnector">
+            <a:avLst/>
+          </a:prstGeom>
+          <a:noFill/>
+          <a:ln w="57150">
+            <a:solidFill>
+              <a:schemeClr val="accent1"/>
+            </a:solidFill>
+          </a:ln>
+        </p:spPr>
+        <p:style>
+          <a:lnRef idx="2">
+            <a:schemeClr val="accent1">
+              <a:shade val="15000"/>
+            </a:schemeClr>
+          </a:lnRef>
+          <a:fillRef idx="1">
+            <a:schemeClr val="accent1"/>
+          </a:fillRef>
+          <a:effectRef idx="0">
+            <a:schemeClr val="accent1"/>
+          </a:effectRef>
+          <a:fontRef idx="minor">
+            <a:schemeClr val="lt1"/>
+          </a:fontRef>
+        </p:style>
+        <p:txBody>
+          <a:bodyPr rtlCol="0" anchor="ctr"/>
+          <a:lstStyle/>
+          <a:p>
+            <a:pPr algn="ctr"/>
+            <a:endParaRPr lang="en-IL"/>
+          </a:p>
+        </p:txBody>
+      </p:sp>
+      <p:sp>
+        <p:nvSpPr>
+          <p:cNvPr id="7" name="TextBox 6">
+            <a:extLst>
+              <a:ext uri="{FF2B5EF4-FFF2-40B4-BE49-F238E27FC236}">
+                <a16:creationId xmlns:a16="http://schemas.microsoft.com/office/drawing/2014/main" id="{0199B6F5-B9F8-08F7-1704-81E9386024CC}"/>
+              </a:ext>
+            </a:extLst>
+          </p:cNvPr>
+          <p:cNvSpPr txBox="1"/>
+          <p:nvPr/>
+        </p:nvSpPr>
+        <p:spPr>
+          <a:xfrm>
+            <a:off x="8824162" y="1605472"/>
+            <a:ext cx="2630126" cy="369332"/>
+          </a:xfrm>
+          <a:prstGeom prst="rect">
+            <a:avLst/>
+          </a:prstGeom>
+          <a:noFill/>
+        </p:spPr>
+        <p:txBody>
+          <a:bodyPr wrap="square" rtlCol="0">
+            <a:spAutoFit/>
+          </a:bodyPr>
+          <a:lstStyle/>
+          <a:p>
+            <a:r>
+              <a:rPr lang="en-US" dirty="0"/>
+              <a:t>high </a:t>
+            </a:r>
+            <a:r>
+              <a:rPr lang="en-GB" dirty="0"/>
+              <a:t>degree centrality </a:t>
+            </a:r>
+            <a:endParaRPr lang="en-IL" dirty="0"/>
+          </a:p>
+        </p:txBody>
+      </p:sp>
+      <p:sp>
+        <p:nvSpPr>
+          <p:cNvPr id="9" name="Flowchart: Connector 8">
+            <a:extLst>
+              <a:ext uri="{FF2B5EF4-FFF2-40B4-BE49-F238E27FC236}">
+                <a16:creationId xmlns:a16="http://schemas.microsoft.com/office/drawing/2014/main" id="{755C2BB5-5CCD-8048-0623-B56A7107E499}"/>
+              </a:ext>
+            </a:extLst>
+          </p:cNvPr>
+          <p:cNvSpPr/>
+          <p:nvPr/>
+        </p:nvSpPr>
+        <p:spPr>
+          <a:xfrm>
+            <a:off x="1738768" y="3086616"/>
+            <a:ext cx="1057772" cy="891024"/>
+          </a:xfrm>
+          <a:prstGeom prst="flowChartConnector">
+            <a:avLst/>
+          </a:prstGeom>
+          <a:noFill/>
+          <a:ln w="57150">
+            <a:solidFill>
+              <a:srgbClr val="F59120"/>
+            </a:solidFill>
+          </a:ln>
+        </p:spPr>
+        <p:style>
+          <a:lnRef idx="2">
+            <a:schemeClr val="accent1">
+              <a:shade val="15000"/>
+            </a:schemeClr>
+          </a:lnRef>
+          <a:fillRef idx="1">
+            <a:schemeClr val="accent1"/>
+          </a:fillRef>
+          <a:effectRef idx="0">
+            <a:schemeClr val="accent1"/>
+          </a:effectRef>
+          <a:fontRef idx="minor">
+            <a:schemeClr val="lt1"/>
+          </a:fontRef>
+        </p:style>
+        <p:txBody>
+          <a:bodyPr rtlCol="0" anchor="ctr"/>
+          <a:lstStyle/>
+          <a:p>
+            <a:pPr algn="ctr"/>
+            <a:endParaRPr lang="en-IL"/>
+          </a:p>
+        </p:txBody>
+      </p:sp>
+      <p:sp>
+        <p:nvSpPr>
+          <p:cNvPr id="10" name="Flowchart: Connector 9">
+            <a:extLst>
+              <a:ext uri="{FF2B5EF4-FFF2-40B4-BE49-F238E27FC236}">
+                <a16:creationId xmlns:a16="http://schemas.microsoft.com/office/drawing/2014/main" id="{28978A85-2029-EA91-65C8-D4836607FD42}"/>
+              </a:ext>
+            </a:extLst>
+          </p:cNvPr>
+          <p:cNvSpPr/>
+          <p:nvPr/>
+        </p:nvSpPr>
+        <p:spPr>
+          <a:xfrm>
+            <a:off x="8256994" y="2738446"/>
+            <a:ext cx="360000" cy="360000"/>
+          </a:xfrm>
+          <a:prstGeom prst="flowChartConnector">
+            <a:avLst/>
+          </a:prstGeom>
+          <a:noFill/>
+          <a:ln w="57150">
+            <a:solidFill>
+              <a:srgbClr val="F59120"/>
+            </a:solidFill>
+          </a:ln>
+        </p:spPr>
+        <p:style>
+          <a:lnRef idx="2">
+            <a:schemeClr val="accent1">
+              <a:shade val="15000"/>
+            </a:schemeClr>
+          </a:lnRef>
+          <a:fillRef idx="1">
+            <a:schemeClr val="accent1"/>
+          </a:fillRef>
+          <a:effectRef idx="0">
+            <a:schemeClr val="accent1"/>
+          </a:effectRef>
+          <a:fontRef idx="minor">
+            <a:schemeClr val="lt1"/>
+          </a:fontRef>
+        </p:style>
+        <p:txBody>
+          <a:bodyPr rtlCol="0" anchor="ctr"/>
+          <a:lstStyle/>
+          <a:p>
+            <a:pPr algn="ctr"/>
+            <a:endParaRPr lang="en-IL"/>
+          </a:p>
+        </p:txBody>
+      </p:sp>
+      <p:sp>
+        <p:nvSpPr>
+          <p:cNvPr id="11" name="TextBox 10">
+            <a:extLst>
+              <a:ext uri="{FF2B5EF4-FFF2-40B4-BE49-F238E27FC236}">
+                <a16:creationId xmlns:a16="http://schemas.microsoft.com/office/drawing/2014/main" id="{F3425336-454F-FE31-1422-436892C703EC}"/>
+              </a:ext>
+            </a:extLst>
+          </p:cNvPr>
+          <p:cNvSpPr txBox="1"/>
+          <p:nvPr/>
+        </p:nvSpPr>
+        <p:spPr>
+          <a:xfrm>
+            <a:off x="8824162" y="2717284"/>
+            <a:ext cx="2630126" cy="369332"/>
+          </a:xfrm>
+          <a:prstGeom prst="rect">
+            <a:avLst/>
+          </a:prstGeom>
+          <a:noFill/>
+        </p:spPr>
+        <p:txBody>
+          <a:bodyPr wrap="square" rtlCol="0">
+            <a:spAutoFit/>
+          </a:bodyPr>
+          <a:lstStyle/>
+          <a:p>
+            <a:r>
+              <a:rPr lang="en-US" dirty="0"/>
+              <a:t>high </a:t>
+            </a:r>
+            <a:r>
+              <a:rPr lang="en-GB" dirty="0"/>
+              <a:t>k-core</a:t>
+            </a:r>
+            <a:endParaRPr lang="en-IL" dirty="0"/>
+          </a:p>
+        </p:txBody>
+      </p:sp>
+      <p:sp>
+        <p:nvSpPr>
+          <p:cNvPr id="12" name="Flowchart: Connector 11">
+            <a:extLst>
+              <a:ext uri="{FF2B5EF4-FFF2-40B4-BE49-F238E27FC236}">
+                <a16:creationId xmlns:a16="http://schemas.microsoft.com/office/drawing/2014/main" id="{871B8A36-FB76-083A-5FA0-EA7EA872E11A}"/>
+              </a:ext>
+            </a:extLst>
+          </p:cNvPr>
+          <p:cNvSpPr/>
+          <p:nvPr/>
+        </p:nvSpPr>
+        <p:spPr>
+          <a:xfrm>
+            <a:off x="8256994" y="3292488"/>
+            <a:ext cx="360000" cy="360000"/>
+          </a:xfrm>
+          <a:prstGeom prst="flowChartConnector">
+            <a:avLst/>
+          </a:prstGeom>
+          <a:noFill/>
+          <a:ln w="57150">
+            <a:solidFill>
+              <a:srgbClr val="F58377"/>
+            </a:solidFill>
+          </a:ln>
+        </p:spPr>
+        <p:style>
+          <a:lnRef idx="2">
+            <a:schemeClr val="accent1">
+              <a:shade val="15000"/>
+            </a:schemeClr>
+          </a:lnRef>
+          <a:fillRef idx="1">
+            <a:schemeClr val="accent1"/>
+          </a:fillRef>
+          <a:effectRef idx="0">
+            <a:schemeClr val="accent1"/>
+          </a:effectRef>
+          <a:fontRef idx="minor">
+            <a:schemeClr val="lt1"/>
+          </a:fontRef>
+        </p:style>
+        <p:txBody>
+          <a:bodyPr rtlCol="0" anchor="ctr"/>
+          <a:lstStyle/>
+          <a:p>
+            <a:pPr algn="ctr"/>
+            <a:endParaRPr lang="en-IL"/>
+          </a:p>
+        </p:txBody>
+      </p:sp>
+      <p:sp>
+        <p:nvSpPr>
+          <p:cNvPr id="13" name="Flowchart: Connector 12">
+            <a:extLst>
+              <a:ext uri="{FF2B5EF4-FFF2-40B4-BE49-F238E27FC236}">
+                <a16:creationId xmlns:a16="http://schemas.microsoft.com/office/drawing/2014/main" id="{BCE1F5E2-96CB-66E7-B575-B51DA37B4E37}"/>
+              </a:ext>
+            </a:extLst>
+          </p:cNvPr>
+          <p:cNvSpPr/>
+          <p:nvPr/>
+        </p:nvSpPr>
+        <p:spPr>
+          <a:xfrm>
+            <a:off x="3481782" y="3449324"/>
+            <a:ext cx="2251102" cy="1539240"/>
+          </a:xfrm>
+          <a:prstGeom prst="flowChartConnector">
+            <a:avLst/>
+          </a:prstGeom>
+          <a:noFill/>
+          <a:ln w="57150">
+            <a:solidFill>
+              <a:srgbClr val="F58377"/>
+            </a:solidFill>
+          </a:ln>
+        </p:spPr>
+        <p:style>
+          <a:lnRef idx="2">
+            <a:schemeClr val="accent1">
+              <a:shade val="15000"/>
+            </a:schemeClr>
+          </a:lnRef>
+          <a:fillRef idx="1">
+            <a:schemeClr val="accent1"/>
+          </a:fillRef>
+          <a:effectRef idx="0">
+            <a:schemeClr val="accent1"/>
+          </a:effectRef>
+          <a:fontRef idx="minor">
+            <a:schemeClr val="lt1"/>
+          </a:fontRef>
+        </p:style>
+        <p:txBody>
+          <a:bodyPr rtlCol="0" anchor="ctr"/>
+          <a:lstStyle/>
+          <a:p>
+            <a:pPr algn="ctr"/>
+            <a:endParaRPr lang="en-IL"/>
+          </a:p>
+        </p:txBody>
+      </p:sp>
+      <p:sp>
+        <p:nvSpPr>
+          <p:cNvPr id="14" name="TextBox 13">
+            <a:extLst>
+              <a:ext uri="{FF2B5EF4-FFF2-40B4-BE49-F238E27FC236}">
+                <a16:creationId xmlns:a16="http://schemas.microsoft.com/office/drawing/2014/main" id="{78B54FF2-3B58-D836-F1A2-897465C04679}"/>
+              </a:ext>
+            </a:extLst>
+          </p:cNvPr>
+          <p:cNvSpPr txBox="1"/>
+          <p:nvPr/>
+        </p:nvSpPr>
+        <p:spPr>
+          <a:xfrm>
+            <a:off x="8824162" y="3320534"/>
+            <a:ext cx="2630126" cy="369332"/>
+          </a:xfrm>
+          <a:prstGeom prst="rect">
+            <a:avLst/>
+          </a:prstGeom>
+          <a:noFill/>
+        </p:spPr>
+        <p:txBody>
+          <a:bodyPr wrap="square" rtlCol="0">
+            <a:spAutoFit/>
+          </a:bodyPr>
+          <a:lstStyle/>
+          <a:p>
+            <a:r>
+              <a:rPr lang="en-US" dirty="0"/>
+              <a:t>all high</a:t>
+            </a:r>
+            <a:endParaRPr lang="en-IL" dirty="0"/>
+          </a:p>
+        </p:txBody>
+      </p:sp>
+      <p:sp>
+        <p:nvSpPr>
+          <p:cNvPr id="15" name="Flowchart: Connector 14">
+            <a:extLst>
+              <a:ext uri="{FF2B5EF4-FFF2-40B4-BE49-F238E27FC236}">
+                <a16:creationId xmlns:a16="http://schemas.microsoft.com/office/drawing/2014/main" id="{BCFD6D60-027A-1FE4-805D-AC0BDD584F9A}"/>
+              </a:ext>
+            </a:extLst>
+          </p:cNvPr>
+          <p:cNvSpPr/>
+          <p:nvPr/>
+        </p:nvSpPr>
+        <p:spPr>
+          <a:xfrm>
+            <a:off x="8256994" y="2184404"/>
+            <a:ext cx="360000" cy="360000"/>
+          </a:xfrm>
+          <a:prstGeom prst="flowChartConnector">
+            <a:avLst/>
+          </a:prstGeom>
+          <a:noFill/>
+          <a:ln w="57150">
+            <a:solidFill>
+              <a:srgbClr val="7030A0"/>
+            </a:solidFill>
+          </a:ln>
+        </p:spPr>
+        <p:style>
+          <a:lnRef idx="2">
+            <a:schemeClr val="accent1">
+              <a:shade val="15000"/>
+            </a:schemeClr>
+          </a:lnRef>
+          <a:fillRef idx="1">
+            <a:schemeClr val="accent1"/>
+          </a:fillRef>
+          <a:effectRef idx="0">
+            <a:schemeClr val="accent1"/>
+          </a:effectRef>
+          <a:fontRef idx="minor">
+            <a:schemeClr val="lt1"/>
+          </a:fontRef>
+        </p:style>
+        <p:txBody>
+          <a:bodyPr rtlCol="0" anchor="ctr"/>
+          <a:lstStyle/>
+          <a:p>
+            <a:pPr algn="ctr"/>
+            <a:endParaRPr lang="en-IL"/>
+          </a:p>
+        </p:txBody>
+      </p:sp>
+      <p:sp>
+        <p:nvSpPr>
+          <p:cNvPr id="16" name="TextBox 15">
+            <a:extLst>
+              <a:ext uri="{FF2B5EF4-FFF2-40B4-BE49-F238E27FC236}">
+                <a16:creationId xmlns:a16="http://schemas.microsoft.com/office/drawing/2014/main" id="{99FBBC2B-DFD1-CC39-847A-385C36AC7347}"/>
+              </a:ext>
+            </a:extLst>
+          </p:cNvPr>
+          <p:cNvSpPr txBox="1"/>
+          <p:nvPr/>
+        </p:nvSpPr>
+        <p:spPr>
+          <a:xfrm>
+            <a:off x="8824162" y="2175072"/>
+            <a:ext cx="2837294" cy="369332"/>
+          </a:xfrm>
+          <a:prstGeom prst="rect">
+            <a:avLst/>
+          </a:prstGeom>
+          <a:noFill/>
+        </p:spPr>
+        <p:txBody>
+          <a:bodyPr wrap="square" rtlCol="0">
+            <a:spAutoFit/>
+          </a:bodyPr>
+          <a:lstStyle/>
+          <a:p>
+            <a:r>
+              <a:rPr lang="en-US" dirty="0"/>
+              <a:t>high </a:t>
+            </a:r>
+            <a:r>
+              <a:rPr lang="en-GB" dirty="0"/>
+              <a:t>eigenvector centrality </a:t>
+            </a:r>
+            <a:endParaRPr lang="en-IL" dirty="0"/>
+          </a:p>
+        </p:txBody>
+      </p:sp>
+      <p:sp>
+        <p:nvSpPr>
+          <p:cNvPr id="17" name="Flowchart: Connector 16">
+            <a:extLst>
+              <a:ext uri="{FF2B5EF4-FFF2-40B4-BE49-F238E27FC236}">
+                <a16:creationId xmlns:a16="http://schemas.microsoft.com/office/drawing/2014/main" id="{87C4792C-A2E7-5B20-B256-55095FB999CA}"/>
+              </a:ext>
+            </a:extLst>
+          </p:cNvPr>
+          <p:cNvSpPr/>
+          <p:nvPr/>
+        </p:nvSpPr>
+        <p:spPr>
+          <a:xfrm>
+            <a:off x="4708538" y="2184404"/>
+            <a:ext cx="966331" cy="825496"/>
+          </a:xfrm>
+          <a:prstGeom prst="flowChartConnector">
+            <a:avLst/>
+          </a:prstGeom>
+          <a:noFill/>
+          <a:ln w="57150">
+            <a:solidFill>
+              <a:srgbClr val="7030A0"/>
+            </a:solidFill>
+          </a:ln>
+        </p:spPr>
+        <p:style>
+          <a:lnRef idx="2">
+            <a:schemeClr val="accent1">
+              <a:shade val="15000"/>
+            </a:schemeClr>
+          </a:lnRef>
+          <a:fillRef idx="1">
+            <a:schemeClr val="accent1"/>
+          </a:fillRef>
+          <a:effectRef idx="0">
+            <a:schemeClr val="accent1"/>
+          </a:effectRef>
+          <a:fontRef idx="minor">
+            <a:schemeClr val="lt1"/>
+          </a:fontRef>
+        </p:style>
+        <p:txBody>
+          <a:bodyPr rtlCol="0" anchor="ctr"/>
+          <a:lstStyle/>
+          <a:p>
+            <a:pPr algn="ctr"/>
+            <a:endParaRPr lang="en-IL"/>
+          </a:p>
+        </p:txBody>
+      </p:sp>
+    </p:spTree>
+    <p:extLst>
+      <p:ext uri="{BB962C8B-B14F-4D97-AF65-F5344CB8AC3E}">
+        <p14:creationId xmlns:p14="http://schemas.microsoft.com/office/powerpoint/2010/main" val="1680593382"/>
+      </p:ext>
+    </p:extLst>
+  </p:cSld>
+  <p:clrMapOvr>
+    <a:masterClrMapping/>
+  </p:clrMapOvr>
+</p:sld>
+</file>
+
+<file path=ppt/slides/slide26.xml><?xml version="1.0" encoding="utf-8"?>
 <p:sld xmlns:a="http://schemas.openxmlformats.org/drawingml/2006/main" xmlns:r="http://schemas.openxmlformats.org/officeDocument/2006/relationships" xmlns:p="http://schemas.openxmlformats.org/presentationml/2006/main">
   <p:cSld>
     <p:spTree>
@@ -8691,7 +10107,7 @@
           <a:p>
             <a:fld id="{E6AB8EDD-9EF2-4633-A1C2-4D908C1019B4}" type="slidenum">
               <a:rPr lang="he-IL" smtClean="0"/>
-              <a:t>22</a:t>
+              <a:t>26</a:t>
             </a:fld>
             <a:endParaRPr lang="he-IL"/>
           </a:p>
@@ -9101,7 +10517,7 @@
         </p:nvSpPr>
         <p:spPr>
           <a:xfrm>
-            <a:off x="2975229" y="109251"/>
+            <a:off x="3075590" y="398183"/>
             <a:ext cx="8753475" cy="1325563"/>
           </a:xfrm>
         </p:spPr>
@@ -9112,10 +10528,9 @@
           <a:lstStyle/>
           <a:p>
             <a:r>
-              <a:rPr lang="en-US" sz="2800" b="1" dirty="0"/>
-              <a:t>Datasets: Labelled IO Corpus &amp; US 2024 Election Data</a:t>
-            </a:r>
-            <a:endParaRPr lang="en-US" sz="2800" dirty="0"/>
+              <a:rPr lang="en-US" dirty="0"/>
+              <a:t>Datasets</a:t>
+            </a:r>
           </a:p>
         </p:txBody>
       </p:sp>
@@ -9163,7 +10578,7 @@
           <p:nvPr>
             <p:extLst>
               <p:ext uri="{D42A27DB-BD31-4B8C-83A1-F6EECF244321}">
-                <p14:modId xmlns:p14="http://schemas.microsoft.com/office/powerpoint/2010/main" val="2007616612"/>
+                <p14:modId xmlns:p14="http://schemas.microsoft.com/office/powerpoint/2010/main" val="176423838"/>
               </p:ext>
             </p:extLst>
           </p:nvPr>
@@ -9200,6 +10615,23 @@
                     <a:bodyPr/>
                     <a:lstStyle/>
                     <a:p>
+                      <a:pPr marL="0" marR="0" lvl="0" indent="0" algn="l" defTabSz="914400" rtl="0" eaLnBrk="1" fontAlgn="auto" latinLnBrk="0" hangingPunct="1">
+                        <a:lnSpc>
+                          <a:spcPct val="100000"/>
+                        </a:lnSpc>
+                        <a:spcBef>
+                          <a:spcPts val="0"/>
+                        </a:spcBef>
+                        <a:spcAft>
+                          <a:spcPts val="0"/>
+                        </a:spcAft>
+                        <a:buClrTx/>
+                        <a:buSzTx/>
+                        <a:buFontTx/>
+                        <a:buNone/>
+                        <a:tabLst/>
+                        <a:defRPr/>
+                      </a:pPr>
                       <a:r>
                         <a:rPr lang="en-IL" sz="2400" b="0" dirty="0">
                           <a:solidFill>
@@ -9209,12 +10641,26 @@
                         <a:t> </a:t>
                       </a:r>
                       <a:r>
-                        <a:rPr lang="en-US" sz="2400" b="0" dirty="0">
+                        <a:rPr lang="en-GB" sz="2400" b="0" kern="1200" dirty="0">
                           <a:solidFill>
                             <a:schemeClr val="tx1"/>
                           </a:solidFill>
+                          <a:latin typeface="+mn-lt"/>
+                          <a:ea typeface="+mn-ea"/>
+                          <a:cs typeface="+mn-cs"/>
                         </a:rPr>
-                        <a:t>Labelled IO Corpus [1]</a:t>
+                        <a:t>Labeled </a:t>
+                      </a:r>
+                      <a:r>
+                        <a:rPr lang="en-US" sz="2400" b="0" kern="1200" dirty="0">
+                          <a:solidFill>
+                            <a:schemeClr val="tx1"/>
+                          </a:solidFill>
+                          <a:latin typeface="+mn-lt"/>
+                          <a:ea typeface="+mn-ea"/>
+                          <a:cs typeface="+mn-cs"/>
+                        </a:rPr>
+                        <a:t>IO Corpus [1]</a:t>
                       </a:r>
                     </a:p>
                     <a:p>
@@ -9257,6 +10703,29 @@
                         </a:rPr>
                         <a:t>Each campaign fully labeled (IO vs. Control accounts)</a:t>
                       </a:r>
+                    </a:p>
+                    <a:p>
+                      <a:pPr marL="285750" indent="-285750">
+                        <a:lnSpc>
+                          <a:spcPct val="150000"/>
+                        </a:lnSpc>
+                        <a:buFont typeface="Arial" panose="020B0604020202020204" pitchFamily="34" charset="0"/>
+                        <a:buChar char="•"/>
+                      </a:pPr>
+                      <a:r>
+                        <a:rPr lang="en-US" b="0" dirty="0">
+                          <a:solidFill>
+                            <a:schemeClr val="tx1"/>
+                          </a:solidFill>
+                          <a:hlinkClick r:id="rId3"/>
+                        </a:rPr>
+                        <a:t>https://zenodo.org/records/14189193</a:t>
+                      </a:r>
+                      <a:endParaRPr lang="en-US" b="0" dirty="0">
+                        <a:solidFill>
+                          <a:schemeClr val="tx1"/>
+                        </a:solidFill>
+                      </a:endParaRPr>
                     </a:p>
                     <a:p>
                       <a:pPr>
@@ -9567,10 +11036,277 @@
   <p:cSld>
     <p:spTree>
       <p:nvGrpSpPr>
+        <p:cNvPr id="1" name=""/>
+        <p:cNvGrpSpPr/>
+        <p:nvPr/>
+      </p:nvGrpSpPr>
+      <p:grpSpPr>
+        <a:xfrm>
+          <a:off x="0" y="0"/>
+          <a:ext cx="0" cy="0"/>
+          <a:chOff x="0" y="0"/>
+          <a:chExt cx="0" cy="0"/>
+        </a:xfrm>
+      </p:grpSpPr>
+      <p:sp>
+        <p:nvSpPr>
+          <p:cNvPr id="2" name="Title 1">
+            <a:extLst>
+              <a:ext uri="{FF2B5EF4-FFF2-40B4-BE49-F238E27FC236}">
+                <a16:creationId xmlns:a16="http://schemas.microsoft.com/office/drawing/2014/main" id="{492EDA26-C1A5-76D7-1BB2-7A8D2A2397A3}"/>
+              </a:ext>
+            </a:extLst>
+          </p:cNvPr>
+          <p:cNvSpPr>
+            <a:spLocks noGrp="1"/>
+          </p:cNvSpPr>
+          <p:nvPr>
+            <p:ph type="title"/>
+          </p:nvPr>
+        </p:nvSpPr>
+        <p:spPr/>
+        <p:txBody>
+          <a:bodyPr/>
+          <a:lstStyle/>
+          <a:p>
+            <a:r>
+              <a:rPr lang="en-IL" dirty="0">
+                <a:solidFill>
+                  <a:schemeClr val="tx1"/>
+                </a:solidFill>
+              </a:rPr>
+              <a:t> </a:t>
+            </a:r>
+            <a:r>
+              <a:rPr lang="en-GB" dirty="0"/>
+              <a:t>Labeled </a:t>
+            </a:r>
+            <a:r>
+              <a:rPr lang="en-US" dirty="0"/>
+              <a:t>IO Corpus</a:t>
+            </a:r>
+            <a:endParaRPr lang="en-IL" dirty="0"/>
+          </a:p>
+        </p:txBody>
+      </p:sp>
+      <p:sp>
+        <p:nvSpPr>
+          <p:cNvPr id="3" name="Content Placeholder 2">
+            <a:extLst>
+              <a:ext uri="{FF2B5EF4-FFF2-40B4-BE49-F238E27FC236}">
+                <a16:creationId xmlns:a16="http://schemas.microsoft.com/office/drawing/2014/main" id="{65707C64-6902-608D-B34D-32FB06F2D749}"/>
+              </a:ext>
+            </a:extLst>
+          </p:cNvPr>
+          <p:cNvSpPr>
+            <a:spLocks noGrp="1"/>
+          </p:cNvSpPr>
+          <p:nvPr>
+            <p:ph idx="1"/>
+          </p:nvPr>
+        </p:nvSpPr>
+        <p:spPr>
+          <a:xfrm>
+            <a:off x="1243087" y="1825625"/>
+            <a:ext cx="10582656" cy="4630738"/>
+          </a:xfrm>
+        </p:spPr>
+        <p:txBody>
+          <a:bodyPr>
+            <a:normAutofit fontScale="92500" lnSpcReduction="20000"/>
+          </a:bodyPr>
+          <a:lstStyle/>
+          <a:p>
+            <a:r>
+              <a:rPr lang="en-GB" dirty="0"/>
+              <a:t>Each campaign is a </a:t>
+            </a:r>
+            <a:r>
+              <a:rPr lang="en-GB" b="1" dirty="0"/>
+              <a:t>separate dataset.</a:t>
+            </a:r>
+            <a:endParaRPr lang="en-GB" dirty="0"/>
+          </a:p>
+          <a:p>
+            <a:r>
+              <a:rPr lang="en-GB" dirty="0"/>
+              <a:t>Contains posts related to the </a:t>
+            </a:r>
+            <a:r>
+              <a:rPr lang="en-GB" b="1" dirty="0"/>
+              <a:t>general subject of the campaign.</a:t>
+            </a:r>
+            <a:endParaRPr lang="en-GB" dirty="0"/>
+          </a:p>
+          <a:p>
+            <a:r>
+              <a:rPr lang="en-GB" dirty="0"/>
+              <a:t>Includes:</a:t>
+            </a:r>
+          </a:p>
+          <a:p>
+            <a:pPr marL="457200" lvl="1" indent="0">
+              <a:buNone/>
+            </a:pPr>
+            <a:r>
+              <a:rPr lang="en-GB" dirty="0"/>
+              <a:t>- Post text</a:t>
+            </a:r>
+          </a:p>
+          <a:p>
+            <a:pPr marL="457200" lvl="1" indent="0">
+              <a:buNone/>
+            </a:pPr>
+            <a:r>
+              <a:rPr lang="en-GB" dirty="0"/>
+              <a:t>- Entities: hashtags, URLs (anonymized), account mentions (anonymized)</a:t>
+            </a:r>
+          </a:p>
+          <a:p>
+            <a:pPr marL="457200" lvl="1" indent="0">
+              <a:buNone/>
+            </a:pPr>
+            <a:r>
+              <a:rPr lang="en-GB" dirty="0"/>
+              <a:t>- Timestamp</a:t>
+            </a:r>
+          </a:p>
+          <a:p>
+            <a:pPr marL="457200" lvl="1" indent="0">
+              <a:buNone/>
+            </a:pPr>
+            <a:r>
+              <a:rPr lang="en-GB" dirty="0"/>
+              <a:t>- Post metadata: account ID, reply-to account ID (anonymized)</a:t>
+            </a:r>
+          </a:p>
+          <a:p>
+            <a:pPr marL="457200" lvl="1" indent="0">
+              <a:buNone/>
+            </a:pPr>
+            <a:r>
+              <a:rPr lang="en-GB" dirty="0"/>
+              <a:t>- Account metadata: creation date, follower count</a:t>
+            </a:r>
+          </a:p>
+          <a:p>
+            <a:r>
+              <a:rPr lang="en-GB" dirty="0"/>
+              <a:t>Dataset construction:</a:t>
+            </a:r>
+          </a:p>
+          <a:p>
+            <a:pPr marL="457200" lvl="1" indent="0">
+              <a:buNone/>
+            </a:pPr>
+            <a:r>
+              <a:rPr lang="en-GB" dirty="0"/>
+              <a:t>- IO accounts identified and released by the social media platform.</a:t>
+            </a:r>
+          </a:p>
+          <a:p>
+            <a:pPr marL="457200" lvl="1" indent="0">
+              <a:buNone/>
+            </a:pPr>
+            <a:r>
+              <a:rPr lang="en-GB" dirty="0"/>
+              <a:t>- Control accounts collected from users posting on campaign-related topics and in the same period.</a:t>
+            </a:r>
+          </a:p>
+          <a:p>
+            <a:r>
+              <a:rPr lang="en-GB" dirty="0"/>
+              <a:t>Labels:</a:t>
+            </a:r>
+          </a:p>
+          <a:p>
+            <a:pPr marL="457200" lvl="1" indent="0">
+              <a:buNone/>
+            </a:pPr>
+            <a:r>
+              <a:rPr lang="en-GB" sz="2100" dirty="0"/>
+              <a:t>- Labels are provided by the social media platform.</a:t>
+            </a:r>
+          </a:p>
+          <a:p>
+            <a:pPr marL="457200" lvl="1" indent="0">
+              <a:buNone/>
+            </a:pPr>
+            <a:r>
+              <a:rPr lang="en-GB" sz="2100" dirty="0"/>
+              <a:t>- </a:t>
+            </a:r>
+            <a:r>
+              <a:rPr lang="en-GB" sz="2100" b="1" dirty="0"/>
+              <a:t>Labels are used only for validation</a:t>
+            </a:r>
+            <a:r>
+              <a:rPr lang="en-GB" b="1" dirty="0"/>
+              <a:t>.</a:t>
+            </a:r>
+          </a:p>
+          <a:p>
+            <a:pPr marL="457200" lvl="1" indent="0">
+              <a:buNone/>
+            </a:pPr>
+            <a:r>
+              <a:rPr lang="en-GB" sz="2100" dirty="0"/>
+              <a:t>- No labels are used in graph construction or classification.</a:t>
+            </a:r>
+          </a:p>
+        </p:txBody>
+      </p:sp>
+      <p:sp>
+        <p:nvSpPr>
+          <p:cNvPr id="4" name="Slide Number Placeholder 3">
+            <a:extLst>
+              <a:ext uri="{FF2B5EF4-FFF2-40B4-BE49-F238E27FC236}">
+                <a16:creationId xmlns:a16="http://schemas.microsoft.com/office/drawing/2014/main" id="{21F6DC1B-727A-A30C-346A-DAE32F121140}"/>
+              </a:ext>
+            </a:extLst>
+          </p:cNvPr>
+          <p:cNvSpPr>
+            <a:spLocks noGrp="1"/>
+          </p:cNvSpPr>
+          <p:nvPr>
+            <p:ph type="sldNum" sz="quarter" idx="12"/>
+          </p:nvPr>
+        </p:nvSpPr>
+        <p:spPr/>
+        <p:txBody>
+          <a:bodyPr/>
+          <a:lstStyle/>
+          <a:p>
+            <a:fld id="{E6AB8EDD-9EF2-4633-A1C2-4D908C1019B4}" type="slidenum">
+              <a:rPr lang="he-IL" smtClean="0"/>
+              <a:t>6</a:t>
+            </a:fld>
+            <a:endParaRPr lang="he-IL"/>
+          </a:p>
+        </p:txBody>
+      </p:sp>
+    </p:spTree>
+    <p:extLst>
+      <p:ext uri="{BB962C8B-B14F-4D97-AF65-F5344CB8AC3E}">
+        <p14:creationId xmlns:p14="http://schemas.microsoft.com/office/powerpoint/2010/main" val="757915150"/>
+      </p:ext>
+    </p:extLst>
+  </p:cSld>
+  <p:clrMapOvr>
+    <a:masterClrMapping/>
+  </p:clrMapOvr>
+</p:sld>
+</file>
+
+<file path=ppt/slides/slide7.xml><?xml version="1.0" encoding="utf-8"?>
+<p:sld xmlns:a="http://schemas.openxmlformats.org/drawingml/2006/main" xmlns:r="http://schemas.openxmlformats.org/officeDocument/2006/relationships" xmlns:p="http://schemas.openxmlformats.org/presentationml/2006/main" show="0">
+  <p:cSld>
+    <p:spTree>
+      <p:nvGrpSpPr>
         <p:cNvPr id="1" name="">
           <a:extLst>
             <a:ext uri="{FF2B5EF4-FFF2-40B4-BE49-F238E27FC236}">
-              <a16:creationId xmlns:a16="http://schemas.microsoft.com/office/drawing/2014/main" id="{4E09A211-38F6-3004-1851-3595FBDFD8D7}"/>
+              <a16:creationId xmlns:a16="http://schemas.microsoft.com/office/drawing/2014/main" id="{03EE809C-DDEA-9B91-B68F-F8FE70815212}"/>
             </a:ext>
           </a:extLst>
         </p:cNvPr>
@@ -9587,41 +11323,10 @@
       </p:grpSpPr>
       <p:sp>
         <p:nvSpPr>
-          <p:cNvPr id="2" name="Title 1">
-            <a:extLst>
-              <a:ext uri="{FF2B5EF4-FFF2-40B4-BE49-F238E27FC236}">
-                <a16:creationId xmlns:a16="http://schemas.microsoft.com/office/drawing/2014/main" id="{9C964B4A-621B-EF3B-EE14-D59EE33EFACA}"/>
-              </a:ext>
-            </a:extLst>
-          </p:cNvPr>
-          <p:cNvSpPr>
-            <a:spLocks noGrp="1"/>
-          </p:cNvSpPr>
-          <p:nvPr>
-            <p:ph type="title"/>
-          </p:nvPr>
-        </p:nvSpPr>
-        <p:spPr/>
-        <p:txBody>
-          <a:bodyPr>
-            <a:normAutofit/>
-          </a:bodyPr>
-          <a:lstStyle/>
-          <a:p>
-            <a:r>
-              <a:rPr lang="en-GB" dirty="0"/>
-              <a:t>Workflow</a:t>
-            </a:r>
-            <a:endParaRPr lang="en-IL" dirty="0"/>
-          </a:p>
-        </p:txBody>
-      </p:sp>
-      <p:sp>
-        <p:nvSpPr>
-          <p:cNvPr id="4" name="Slide Number Placeholder 3">
-            <a:extLst>
-              <a:ext uri="{FF2B5EF4-FFF2-40B4-BE49-F238E27FC236}">
-                <a16:creationId xmlns:a16="http://schemas.microsoft.com/office/drawing/2014/main" id="{315712F5-E20A-DE3D-54D2-B2D6544A02A2}"/>
+          <p:cNvPr id="2" name="Slide Number Placeholder 1">
+            <a:extLst>
+              <a:ext uri="{FF2B5EF4-FFF2-40B4-BE49-F238E27FC236}">
+                <a16:creationId xmlns:a16="http://schemas.microsoft.com/office/drawing/2014/main" id="{2ADDC573-9D2A-2AB2-C786-5C17788F5968}"/>
               </a:ext>
             </a:extLst>
           </p:cNvPr>
@@ -9639,196 +11344,29 @@
           <a:p>
             <a:fld id="{E6AB8EDD-9EF2-4633-A1C2-4D908C1019B4}" type="slidenum">
               <a:rPr lang="he-IL" smtClean="0"/>
-              <a:t>6</a:t>
+              <a:pPr/>
+              <a:t>7</a:t>
             </a:fld>
-            <a:endParaRPr lang="he-IL"/>
-          </a:p>
-        </p:txBody>
-      </p:sp>
-      <p:pic>
-        <p:nvPicPr>
-          <p:cNvPr id="3" name="Picture 2" descr="A diagram of a system&#10;&#10;AI-generated content may be incorrect.">
-            <a:extLst>
-              <a:ext uri="{FF2B5EF4-FFF2-40B4-BE49-F238E27FC236}">
-                <a16:creationId xmlns:a16="http://schemas.microsoft.com/office/drawing/2014/main" id="{381B395B-F819-6EED-AE13-0A1FE99EE7B2}"/>
-              </a:ext>
-            </a:extLst>
-          </p:cNvPr>
-          <p:cNvPicPr>
-            <a:picLocks noChangeAspect="1"/>
-          </p:cNvPicPr>
+            <a:endParaRPr lang="he-IL" dirty="0"/>
+          </a:p>
+        </p:txBody>
+      </p:sp>
+      <p:sp>
+        <p:nvSpPr>
+          <p:cNvPr id="3" name="Rectangle: Rounded Corners 2">
+            <a:extLst>
+              <a:ext uri="{FF2B5EF4-FFF2-40B4-BE49-F238E27FC236}">
+                <a16:creationId xmlns:a16="http://schemas.microsoft.com/office/drawing/2014/main" id="{DFDC29EB-6C7C-970E-155C-41DC54BA50D0}"/>
+              </a:ext>
+            </a:extLst>
+          </p:cNvPr>
+          <p:cNvSpPr/>
           <p:nvPr/>
-        </p:nvPicPr>
-        <p:blipFill>
-          <a:blip r:embed="rId2">
-            <a:extLst>
-              <a:ext uri="{28A0092B-C50C-407E-A947-70E740481C1C}">
-                <a14:useLocalDpi xmlns:a14="http://schemas.microsoft.com/office/drawing/2010/main" val="0"/>
-              </a:ext>
-            </a:extLst>
-          </a:blip>
-          <a:stretch>
-            <a:fillRect/>
-          </a:stretch>
-        </p:blipFill>
+        </p:nvSpPr>
         <p:spPr>
           <a:xfrm>
-            <a:off x="1109472" y="2297798"/>
-            <a:ext cx="9924288" cy="2350401"/>
-          </a:xfrm>
-          <a:prstGeom prst="rect">
-            <a:avLst/>
-          </a:prstGeom>
-        </p:spPr>
-      </p:pic>
-    </p:spTree>
-    <p:extLst>
-      <p:ext uri="{BB962C8B-B14F-4D97-AF65-F5344CB8AC3E}">
-        <p14:creationId xmlns:p14="http://schemas.microsoft.com/office/powerpoint/2010/main" val="3257399690"/>
-      </p:ext>
-    </p:extLst>
-  </p:cSld>
-  <p:clrMapOvr>
-    <a:masterClrMapping/>
-  </p:clrMapOvr>
-</p:sld>
-</file>
-
-<file path=ppt/slides/slide7.xml><?xml version="1.0" encoding="utf-8"?>
-<p:sld xmlns:a="http://schemas.openxmlformats.org/drawingml/2006/main" xmlns:r="http://schemas.openxmlformats.org/officeDocument/2006/relationships" xmlns:p="http://schemas.openxmlformats.org/presentationml/2006/main">
-  <p:cSld>
-    <p:spTree>
-      <p:nvGrpSpPr>
-        <p:cNvPr id="1" name="">
-          <a:extLst>
-            <a:ext uri="{FF2B5EF4-FFF2-40B4-BE49-F238E27FC236}">
-              <a16:creationId xmlns:a16="http://schemas.microsoft.com/office/drawing/2014/main" id="{7A1F7433-9644-65F0-FB3A-6026340BF2CF}"/>
-            </a:ext>
-          </a:extLst>
-        </p:cNvPr>
-        <p:cNvGrpSpPr/>
-        <p:nvPr/>
-      </p:nvGrpSpPr>
-      <p:grpSpPr>
-        <a:xfrm>
-          <a:off x="0" y="0"/>
-          <a:ext cx="0" cy="0"/>
-          <a:chOff x="0" y="0"/>
-          <a:chExt cx="0" cy="0"/>
-        </a:xfrm>
-      </p:grpSpPr>
-      <p:sp>
-        <p:nvSpPr>
-          <p:cNvPr id="2" name="Title 1">
-            <a:extLst>
-              <a:ext uri="{FF2B5EF4-FFF2-40B4-BE49-F238E27FC236}">
-                <a16:creationId xmlns:a16="http://schemas.microsoft.com/office/drawing/2014/main" id="{940D8E1A-658F-3A2B-5BEC-6908BB89ED56}"/>
-              </a:ext>
-            </a:extLst>
-          </p:cNvPr>
-          <p:cNvSpPr>
-            <a:spLocks noGrp="1"/>
-          </p:cNvSpPr>
-          <p:nvPr>
-            <p:ph type="title"/>
-          </p:nvPr>
-        </p:nvSpPr>
-        <p:spPr/>
-        <p:txBody>
-          <a:bodyPr>
-            <a:normAutofit/>
-          </a:bodyPr>
-          <a:lstStyle/>
-          <a:p>
-            <a:r>
-              <a:rPr lang="en-GB" dirty="0"/>
-              <a:t>Workflow</a:t>
-            </a:r>
-            <a:endParaRPr lang="en-IL" dirty="0"/>
-          </a:p>
-        </p:txBody>
-      </p:sp>
-      <p:sp>
-        <p:nvSpPr>
-          <p:cNvPr id="4" name="Slide Number Placeholder 3">
-            <a:extLst>
-              <a:ext uri="{FF2B5EF4-FFF2-40B4-BE49-F238E27FC236}">
-                <a16:creationId xmlns:a16="http://schemas.microsoft.com/office/drawing/2014/main" id="{05DE20CF-5091-745F-F115-F06B89AD0760}"/>
-              </a:ext>
-            </a:extLst>
-          </p:cNvPr>
-          <p:cNvSpPr>
-            <a:spLocks noGrp="1"/>
-          </p:cNvSpPr>
-          <p:nvPr>
-            <p:ph type="sldNum" sz="quarter" idx="12"/>
-          </p:nvPr>
-        </p:nvSpPr>
-        <p:spPr/>
-        <p:txBody>
-          <a:bodyPr/>
-          <a:lstStyle/>
-          <a:p>
-            <a:fld id="{E6AB8EDD-9EF2-4633-A1C2-4D908C1019B4}" type="slidenum">
-              <a:rPr lang="he-IL" smtClean="0"/>
-              <a:t>7</a:t>
-            </a:fld>
-            <a:endParaRPr lang="he-IL"/>
-          </a:p>
-        </p:txBody>
-      </p:sp>
-      <p:pic>
-        <p:nvPicPr>
-          <p:cNvPr id="6" name="Picture 5" descr="A diagram of a system&#10;&#10;AI-generated content may be incorrect.">
-            <a:extLst>
-              <a:ext uri="{FF2B5EF4-FFF2-40B4-BE49-F238E27FC236}">
-                <a16:creationId xmlns:a16="http://schemas.microsoft.com/office/drawing/2014/main" id="{A5E1720A-7B3F-25E5-8FC1-F5886058F8B8}"/>
-              </a:ext>
-            </a:extLst>
-          </p:cNvPr>
-          <p:cNvPicPr>
-            <a:picLocks noChangeAspect="1"/>
-          </p:cNvPicPr>
-          <p:nvPr/>
-        </p:nvPicPr>
-        <p:blipFill>
-          <a:blip r:embed="rId2">
-            <a:extLst>
-              <a:ext uri="{28A0092B-C50C-407E-A947-70E740481C1C}">
-                <a14:useLocalDpi xmlns:a14="http://schemas.microsoft.com/office/drawing/2010/main" val="0"/>
-              </a:ext>
-            </a:extLst>
-          </a:blip>
-          <a:stretch>
-            <a:fillRect/>
-          </a:stretch>
-        </p:blipFill>
-        <p:spPr>
-          <a:xfrm>
-            <a:off x="1109472" y="2297798"/>
-            <a:ext cx="9924288" cy="2350401"/>
-          </a:xfrm>
-          <a:prstGeom prst="rect">
-            <a:avLst/>
-          </a:prstGeom>
-        </p:spPr>
-      </p:pic>
-      <p:sp>
-        <p:nvSpPr>
-          <p:cNvPr id="5" name="Rectangle: Rounded Corners 4">
-            <a:extLst>
-              <a:ext uri="{FF2B5EF4-FFF2-40B4-BE49-F238E27FC236}">
-                <a16:creationId xmlns:a16="http://schemas.microsoft.com/office/drawing/2014/main" id="{2B98F8B0-0521-F71D-2B71-F32D5408B951}"/>
-              </a:ext>
-            </a:extLst>
-          </p:cNvPr>
-          <p:cNvSpPr/>
-          <p:nvPr/>
-        </p:nvSpPr>
-        <p:spPr>
-          <a:xfrm>
-            <a:off x="877824" y="2228850"/>
-            <a:ext cx="2596896" cy="1022350"/>
+            <a:off x="877824" y="2364058"/>
+            <a:ext cx="2434089" cy="959005"/>
           </a:xfrm>
           <a:prstGeom prst="roundRect">
             <a:avLst/>
@@ -9865,154 +11403,22 @@
           </a:p>
         </p:txBody>
       </p:sp>
-    </p:spTree>
-    <p:extLst>
-      <p:ext uri="{BB962C8B-B14F-4D97-AF65-F5344CB8AC3E}">
-        <p14:creationId xmlns:p14="http://schemas.microsoft.com/office/powerpoint/2010/main" val="689078222"/>
-      </p:ext>
-    </p:extLst>
-  </p:cSld>
-  <p:clrMapOvr>
-    <a:masterClrMapping/>
-  </p:clrMapOvr>
-</p:sld>
-</file>
-
-<file path=ppt/slides/slide8.xml><?xml version="1.0" encoding="utf-8"?>
-<p:sld xmlns:a="http://schemas.openxmlformats.org/drawingml/2006/main" xmlns:r="http://schemas.openxmlformats.org/officeDocument/2006/relationships" xmlns:p="http://schemas.openxmlformats.org/presentationml/2006/main">
-  <p:cSld>
-    <p:spTree>
-      <p:nvGrpSpPr>
-        <p:cNvPr id="1" name="">
-          <a:extLst>
-            <a:ext uri="{FF2B5EF4-FFF2-40B4-BE49-F238E27FC236}">
-              <a16:creationId xmlns:a16="http://schemas.microsoft.com/office/drawing/2014/main" id="{8568D8D8-4B22-6991-BB3D-3C03C504163F}"/>
-            </a:ext>
-          </a:extLst>
-        </p:cNvPr>
-        <p:cNvGrpSpPr/>
-        <p:nvPr/>
-      </p:nvGrpSpPr>
-      <p:grpSpPr>
-        <a:xfrm>
-          <a:off x="0" y="0"/>
-          <a:ext cx="0" cy="0"/>
-          <a:chOff x="0" y="0"/>
-          <a:chExt cx="0" cy="0"/>
-        </a:xfrm>
-      </p:grpSpPr>
-      <p:sp>
-        <p:nvSpPr>
-          <p:cNvPr id="2" name="Title 1">
-            <a:extLst>
-              <a:ext uri="{FF2B5EF4-FFF2-40B4-BE49-F238E27FC236}">
-                <a16:creationId xmlns:a16="http://schemas.microsoft.com/office/drawing/2014/main" id="{0489BC16-E497-67C4-50BA-25A2402E3ED8}"/>
-              </a:ext>
-            </a:extLst>
-          </p:cNvPr>
-          <p:cNvSpPr>
-            <a:spLocks noGrp="1"/>
-          </p:cNvSpPr>
-          <p:nvPr>
-            <p:ph type="title"/>
-          </p:nvPr>
-        </p:nvSpPr>
-        <p:spPr/>
-        <p:txBody>
-          <a:bodyPr>
-            <a:normAutofit/>
-          </a:bodyPr>
-          <a:lstStyle/>
-          <a:p>
-            <a:r>
-              <a:rPr lang="en-GB" dirty="0"/>
-              <a:t>Workflow</a:t>
-            </a:r>
-            <a:endParaRPr lang="en-IL" dirty="0"/>
-          </a:p>
-        </p:txBody>
-      </p:sp>
-      <p:sp>
-        <p:nvSpPr>
-          <p:cNvPr id="4" name="Slide Number Placeholder 3">
-            <a:extLst>
-              <a:ext uri="{FF2B5EF4-FFF2-40B4-BE49-F238E27FC236}">
-                <a16:creationId xmlns:a16="http://schemas.microsoft.com/office/drawing/2014/main" id="{93942BEF-7FD1-31CF-1E85-102CA9193562}"/>
-              </a:ext>
-            </a:extLst>
-          </p:cNvPr>
-          <p:cNvSpPr>
-            <a:spLocks noGrp="1"/>
-          </p:cNvSpPr>
-          <p:nvPr>
-            <p:ph type="sldNum" sz="quarter" idx="12"/>
-          </p:nvPr>
-        </p:nvSpPr>
-        <p:spPr/>
-        <p:txBody>
-          <a:bodyPr/>
-          <a:lstStyle/>
-          <a:p>
-            <a:fld id="{E6AB8EDD-9EF2-4633-A1C2-4D908C1019B4}" type="slidenum">
-              <a:rPr lang="he-IL" smtClean="0"/>
-              <a:t>8</a:t>
-            </a:fld>
-            <a:endParaRPr lang="he-IL"/>
-          </a:p>
-        </p:txBody>
-      </p:sp>
-      <p:pic>
-        <p:nvPicPr>
-          <p:cNvPr id="3" name="Picture 2" descr="A diagram of a system&#10;&#10;AI-generated content may be incorrect.">
-            <a:extLst>
-              <a:ext uri="{FF2B5EF4-FFF2-40B4-BE49-F238E27FC236}">
-                <a16:creationId xmlns:a16="http://schemas.microsoft.com/office/drawing/2014/main" id="{939A0E39-997B-522E-B4B0-36E06AAE1B01}"/>
-              </a:ext>
-            </a:extLst>
-          </p:cNvPr>
-          <p:cNvPicPr>
-            <a:picLocks noChangeAspect="1"/>
-          </p:cNvPicPr>
+      <p:sp>
+        <p:nvSpPr>
+          <p:cNvPr id="4" name="Rectangle: Rounded Corners 3">
+            <a:extLst>
+              <a:ext uri="{FF2B5EF4-FFF2-40B4-BE49-F238E27FC236}">
+                <a16:creationId xmlns:a16="http://schemas.microsoft.com/office/drawing/2014/main" id="{66147462-4BEB-A86A-3C8E-47CC47928453}"/>
+              </a:ext>
+            </a:extLst>
+          </p:cNvPr>
+          <p:cNvSpPr/>
           <p:nvPr/>
-        </p:nvPicPr>
-        <p:blipFill>
-          <a:blip r:embed="rId2">
-            <a:extLst>
-              <a:ext uri="{28A0092B-C50C-407E-A947-70E740481C1C}">
-                <a14:useLocalDpi xmlns:a14="http://schemas.microsoft.com/office/drawing/2010/main" val="0"/>
-              </a:ext>
-            </a:extLst>
-          </a:blip>
-          <a:stretch>
-            <a:fillRect/>
-          </a:stretch>
-        </p:blipFill>
+        </p:nvSpPr>
         <p:spPr>
           <a:xfrm>
-            <a:off x="1109472" y="2297798"/>
-            <a:ext cx="9924288" cy="2350401"/>
-          </a:xfrm>
-          <a:prstGeom prst="rect">
-            <a:avLst/>
-          </a:prstGeom>
-        </p:spPr>
-      </p:pic>
-      <p:sp>
-        <p:nvSpPr>
-          <p:cNvPr id="5" name="Rectangle: Rounded Corners 4">
-            <a:extLst>
-              <a:ext uri="{FF2B5EF4-FFF2-40B4-BE49-F238E27FC236}">
-                <a16:creationId xmlns:a16="http://schemas.microsoft.com/office/drawing/2014/main" id="{29E57A49-60DE-A63B-5538-52923D026952}"/>
-              </a:ext>
-            </a:extLst>
-          </p:cNvPr>
-          <p:cNvSpPr/>
-          <p:nvPr/>
-        </p:nvSpPr>
-        <p:spPr>
-          <a:xfrm>
-            <a:off x="3566160" y="2228850"/>
-            <a:ext cx="5138928" cy="1016000"/>
+            <a:off x="3713356" y="2364057"/>
+            <a:ext cx="5460083" cy="959005"/>
           </a:xfrm>
           <a:prstGeom prst="roundRect">
             <a:avLst/>
@@ -10049,10 +11455,330 @@
           </a:p>
         </p:txBody>
       </p:sp>
+      <p:sp>
+        <p:nvSpPr>
+          <p:cNvPr id="5" name="Rectangle: Rounded Corners 4">
+            <a:extLst>
+              <a:ext uri="{FF2B5EF4-FFF2-40B4-BE49-F238E27FC236}">
+                <a16:creationId xmlns:a16="http://schemas.microsoft.com/office/drawing/2014/main" id="{4F3D83FC-1680-C16C-0791-74BC6CEEE296}"/>
+              </a:ext>
+            </a:extLst>
+          </p:cNvPr>
+          <p:cNvSpPr/>
+          <p:nvPr/>
+        </p:nvSpPr>
+        <p:spPr>
+          <a:xfrm>
+            <a:off x="9634654" y="2364056"/>
+            <a:ext cx="2320165" cy="959005"/>
+          </a:xfrm>
+          <a:prstGeom prst="roundRect">
+            <a:avLst/>
+          </a:prstGeom>
+          <a:noFill/>
+          <a:ln w="38100">
+            <a:solidFill>
+              <a:srgbClr val="FF4343"/>
+            </a:solidFill>
+          </a:ln>
+        </p:spPr>
+        <p:style>
+          <a:lnRef idx="2">
+            <a:schemeClr val="accent1">
+              <a:shade val="15000"/>
+            </a:schemeClr>
+          </a:lnRef>
+          <a:fillRef idx="1">
+            <a:schemeClr val="accent1"/>
+          </a:fillRef>
+          <a:effectRef idx="0">
+            <a:schemeClr val="accent1"/>
+          </a:effectRef>
+          <a:fontRef idx="minor">
+            <a:schemeClr val="lt1"/>
+          </a:fontRef>
+        </p:style>
+        <p:txBody>
+          <a:bodyPr rtlCol="0" anchor="ctr"/>
+          <a:lstStyle/>
+          <a:p>
+            <a:pPr algn="ctr"/>
+            <a:endParaRPr lang="en-IL" dirty="0"/>
+          </a:p>
+        </p:txBody>
+      </p:sp>
+      <p:sp>
+        <p:nvSpPr>
+          <p:cNvPr id="7" name="Rectangle: Rounded Corners 6">
+            <a:extLst>
+              <a:ext uri="{FF2B5EF4-FFF2-40B4-BE49-F238E27FC236}">
+                <a16:creationId xmlns:a16="http://schemas.microsoft.com/office/drawing/2014/main" id="{D46511BC-4713-830A-45E5-0A374F82B4C8}"/>
+              </a:ext>
+            </a:extLst>
+          </p:cNvPr>
+          <p:cNvSpPr/>
+          <p:nvPr/>
+        </p:nvSpPr>
+        <p:spPr>
+          <a:xfrm>
+            <a:off x="1019074" y="3876907"/>
+            <a:ext cx="2259386" cy="959005"/>
+          </a:xfrm>
+          <a:prstGeom prst="roundRect">
+            <a:avLst/>
+          </a:prstGeom>
+          <a:noFill/>
+          <a:ln w="38100">
+            <a:solidFill>
+              <a:srgbClr val="FF4343"/>
+            </a:solidFill>
+          </a:ln>
+        </p:spPr>
+        <p:style>
+          <a:lnRef idx="2">
+            <a:schemeClr val="accent1">
+              <a:shade val="15000"/>
+            </a:schemeClr>
+          </a:lnRef>
+          <a:fillRef idx="1">
+            <a:schemeClr val="accent1"/>
+          </a:fillRef>
+          <a:effectRef idx="0">
+            <a:schemeClr val="accent1"/>
+          </a:effectRef>
+          <a:fontRef idx="minor">
+            <a:schemeClr val="lt1"/>
+          </a:fontRef>
+        </p:style>
+        <p:txBody>
+          <a:bodyPr rtlCol="0" anchor="ctr"/>
+          <a:lstStyle/>
+          <a:p>
+            <a:pPr algn="ctr"/>
+            <a:endParaRPr lang="en-IL" dirty="0"/>
+          </a:p>
+        </p:txBody>
+      </p:sp>
+      <p:sp>
+        <p:nvSpPr>
+          <p:cNvPr id="8" name="Rectangle: Rounded Corners 7">
+            <a:extLst>
+              <a:ext uri="{FF2B5EF4-FFF2-40B4-BE49-F238E27FC236}">
+                <a16:creationId xmlns:a16="http://schemas.microsoft.com/office/drawing/2014/main" id="{3AC4CAAC-9F29-A858-619F-F4D628EB2743}"/>
+              </a:ext>
+            </a:extLst>
+          </p:cNvPr>
+          <p:cNvSpPr/>
+          <p:nvPr/>
+        </p:nvSpPr>
+        <p:spPr>
+          <a:xfrm>
+            <a:off x="3713356" y="3876907"/>
+            <a:ext cx="2631688" cy="959005"/>
+          </a:xfrm>
+          <a:prstGeom prst="roundRect">
+            <a:avLst/>
+          </a:prstGeom>
+          <a:noFill/>
+          <a:ln w="38100">
+            <a:solidFill>
+              <a:srgbClr val="FF4343"/>
+            </a:solidFill>
+          </a:ln>
+        </p:spPr>
+        <p:style>
+          <a:lnRef idx="2">
+            <a:schemeClr val="accent1">
+              <a:shade val="15000"/>
+            </a:schemeClr>
+          </a:lnRef>
+          <a:fillRef idx="1">
+            <a:schemeClr val="accent1"/>
+          </a:fillRef>
+          <a:effectRef idx="0">
+            <a:schemeClr val="accent1"/>
+          </a:effectRef>
+          <a:fontRef idx="minor">
+            <a:schemeClr val="lt1"/>
+          </a:fontRef>
+        </p:style>
+        <p:txBody>
+          <a:bodyPr rtlCol="0" anchor="ctr"/>
+          <a:lstStyle/>
+          <a:p>
+            <a:pPr algn="ctr"/>
+            <a:endParaRPr lang="en-IL" dirty="0"/>
+          </a:p>
+        </p:txBody>
+      </p:sp>
+      <p:sp>
+        <p:nvSpPr>
+          <p:cNvPr id="9" name="Rectangle: Rounded Corners 8">
+            <a:extLst>
+              <a:ext uri="{FF2B5EF4-FFF2-40B4-BE49-F238E27FC236}">
+                <a16:creationId xmlns:a16="http://schemas.microsoft.com/office/drawing/2014/main" id="{4D0A0C56-DC94-ABB9-24DC-82E6579678B3}"/>
+              </a:ext>
+            </a:extLst>
+          </p:cNvPr>
+          <p:cNvSpPr/>
+          <p:nvPr/>
+        </p:nvSpPr>
+        <p:spPr>
+          <a:xfrm>
+            <a:off x="9634654" y="3876906"/>
+            <a:ext cx="2320165" cy="959005"/>
+          </a:xfrm>
+          <a:prstGeom prst="roundRect">
+            <a:avLst/>
+          </a:prstGeom>
+          <a:noFill/>
+          <a:ln w="38100">
+            <a:solidFill>
+              <a:srgbClr val="FF4343"/>
+            </a:solidFill>
+          </a:ln>
+        </p:spPr>
+        <p:style>
+          <a:lnRef idx="2">
+            <a:schemeClr val="accent1">
+              <a:shade val="15000"/>
+            </a:schemeClr>
+          </a:lnRef>
+          <a:fillRef idx="1">
+            <a:schemeClr val="accent1"/>
+          </a:fillRef>
+          <a:effectRef idx="0">
+            <a:schemeClr val="accent1"/>
+          </a:effectRef>
+          <a:fontRef idx="minor">
+            <a:schemeClr val="lt1"/>
+          </a:fontRef>
+        </p:style>
+        <p:txBody>
+          <a:bodyPr rtlCol="0" anchor="ctr"/>
+          <a:lstStyle/>
+          <a:p>
+            <a:pPr algn="ctr"/>
+            <a:endParaRPr lang="en-IL" dirty="0"/>
+          </a:p>
+        </p:txBody>
+      </p:sp>
+      <p:sp>
+        <p:nvSpPr>
+          <p:cNvPr id="6" name="Rectangle: Rounded Corners 5">
+            <a:extLst>
+              <a:ext uri="{FF2B5EF4-FFF2-40B4-BE49-F238E27FC236}">
+                <a16:creationId xmlns:a16="http://schemas.microsoft.com/office/drawing/2014/main" id="{3B648400-6FB5-0C21-CE6E-F34FC276CB97}"/>
+              </a:ext>
+            </a:extLst>
+          </p:cNvPr>
+          <p:cNvSpPr/>
+          <p:nvPr/>
+        </p:nvSpPr>
+        <p:spPr>
+          <a:xfrm>
+            <a:off x="6674005" y="3876906"/>
+            <a:ext cx="2631688" cy="959005"/>
+          </a:xfrm>
+          <a:prstGeom prst="roundRect">
+            <a:avLst/>
+          </a:prstGeom>
+          <a:noFill/>
+          <a:ln w="38100">
+            <a:solidFill>
+              <a:srgbClr val="FF4343"/>
+            </a:solidFill>
+          </a:ln>
+        </p:spPr>
+        <p:style>
+          <a:lnRef idx="2">
+            <a:schemeClr val="accent1">
+              <a:shade val="15000"/>
+            </a:schemeClr>
+          </a:lnRef>
+          <a:fillRef idx="1">
+            <a:schemeClr val="accent1"/>
+          </a:fillRef>
+          <a:effectRef idx="0">
+            <a:schemeClr val="accent1"/>
+          </a:effectRef>
+          <a:fontRef idx="minor">
+            <a:schemeClr val="lt1"/>
+          </a:fontRef>
+        </p:style>
+        <p:txBody>
+          <a:bodyPr rtlCol="0" anchor="ctr"/>
+          <a:lstStyle/>
+          <a:p>
+            <a:pPr algn="ctr"/>
+            <a:endParaRPr lang="en-IL" dirty="0"/>
+          </a:p>
+        </p:txBody>
+      </p:sp>
     </p:spTree>
     <p:extLst>
       <p:ext uri="{BB962C8B-B14F-4D97-AF65-F5344CB8AC3E}">
-        <p14:creationId xmlns:p14="http://schemas.microsoft.com/office/powerpoint/2010/main" val="4186535052"/>
+        <p14:creationId xmlns:p14="http://schemas.microsoft.com/office/powerpoint/2010/main" val="1469968120"/>
+      </p:ext>
+    </p:extLst>
+  </p:cSld>
+  <p:clrMapOvr>
+    <a:masterClrMapping/>
+  </p:clrMapOvr>
+</p:sld>
+</file>
+
+<file path=ppt/slides/slide8.xml><?xml version="1.0" encoding="utf-8"?>
+<p:sld xmlns:a="http://schemas.openxmlformats.org/drawingml/2006/main" xmlns:r="http://schemas.openxmlformats.org/officeDocument/2006/relationships" xmlns:p="http://schemas.openxmlformats.org/presentationml/2006/main">
+  <p:cSld>
+    <p:spTree>
+      <p:nvGrpSpPr>
+        <p:cNvPr id="1" name=""/>
+        <p:cNvGrpSpPr/>
+        <p:nvPr/>
+      </p:nvGrpSpPr>
+      <p:grpSpPr>
+        <a:xfrm>
+          <a:off x="0" y="0"/>
+          <a:ext cx="0" cy="0"/>
+          <a:chOff x="0" y="0"/>
+          <a:chExt cx="0" cy="0"/>
+        </a:xfrm>
+      </p:grpSpPr>
+      <p:sp>
+        <p:nvSpPr>
+          <p:cNvPr id="2" name="Slide Number Placeholder 1">
+            <a:extLst>
+              <a:ext uri="{FF2B5EF4-FFF2-40B4-BE49-F238E27FC236}">
+                <a16:creationId xmlns:a16="http://schemas.microsoft.com/office/drawing/2014/main" id="{42C7965B-885F-67B3-F8C6-58FA0A832E28}"/>
+              </a:ext>
+            </a:extLst>
+          </p:cNvPr>
+          <p:cNvSpPr>
+            <a:spLocks noGrp="1"/>
+          </p:cNvSpPr>
+          <p:nvPr>
+            <p:ph type="sldNum" sz="quarter" idx="12"/>
+          </p:nvPr>
+        </p:nvSpPr>
+        <p:spPr/>
+        <p:txBody>
+          <a:bodyPr/>
+          <a:lstStyle/>
+          <a:p>
+            <a:fld id="{E6AB8EDD-9EF2-4633-A1C2-4D908C1019B4}" type="slidenum">
+              <a:rPr lang="he-IL" smtClean="0"/>
+              <a:pPr/>
+              <a:t>8</a:t>
+            </a:fld>
+            <a:endParaRPr lang="he-IL" dirty="0"/>
+          </a:p>
+        </p:txBody>
+      </p:sp>
+    </p:spTree>
+    <p:extLst>
+      <p:ext uri="{BB962C8B-B14F-4D97-AF65-F5344CB8AC3E}">
+        <p14:creationId xmlns:p14="http://schemas.microsoft.com/office/powerpoint/2010/main" val="1613618911"/>
       </p:ext>
     </p:extLst>
   </p:cSld>
@@ -10070,7 +11796,7 @@
         <p:cNvPr id="1" name="">
           <a:extLst>
             <a:ext uri="{FF2B5EF4-FFF2-40B4-BE49-F238E27FC236}">
-              <a16:creationId xmlns:a16="http://schemas.microsoft.com/office/drawing/2014/main" id="{F9A3E1CF-F501-BA78-A405-8F9FE55ADE04}"/>
+              <a16:creationId xmlns:a16="http://schemas.microsoft.com/office/drawing/2014/main" id="{C7E8398B-F7AB-19EE-5B85-9AC3E8C31BB0}"/>
             </a:ext>
           </a:extLst>
         </p:cNvPr>
@@ -10087,171 +11813,90 @@
       </p:grpSpPr>
       <p:sp>
         <p:nvSpPr>
-          <p:cNvPr id="2" name="Title 1">
-            <a:extLst>
-              <a:ext uri="{FF2B5EF4-FFF2-40B4-BE49-F238E27FC236}">
-                <a16:creationId xmlns:a16="http://schemas.microsoft.com/office/drawing/2014/main" id="{989DA07F-726D-5309-24B1-8D8FD8B57881}"/>
-              </a:ext>
-            </a:extLst>
-          </p:cNvPr>
-          <p:cNvSpPr>
-            <a:spLocks noGrp="1"/>
-          </p:cNvSpPr>
-          <p:nvPr>
-            <p:ph type="title"/>
-          </p:nvPr>
+          <p:cNvPr id="2" name="Slide Number Placeholder 1">
+            <a:extLst>
+              <a:ext uri="{FF2B5EF4-FFF2-40B4-BE49-F238E27FC236}">
+                <a16:creationId xmlns:a16="http://schemas.microsoft.com/office/drawing/2014/main" id="{98329E4F-8D65-CC0A-06D5-07F7C6FA1A50}"/>
+              </a:ext>
+            </a:extLst>
+          </p:cNvPr>
+          <p:cNvSpPr>
+            <a:spLocks noGrp="1"/>
+          </p:cNvSpPr>
+          <p:nvPr>
+            <p:ph type="sldNum" sz="quarter" idx="12"/>
+          </p:nvPr>
+        </p:nvSpPr>
+        <p:spPr/>
+        <p:txBody>
+          <a:bodyPr/>
+          <a:lstStyle/>
+          <a:p>
+            <a:fld id="{E6AB8EDD-9EF2-4633-A1C2-4D908C1019B4}" type="slidenum">
+              <a:rPr lang="he-IL" smtClean="0"/>
+              <a:pPr/>
+              <a:t>9</a:t>
+            </a:fld>
+            <a:endParaRPr lang="he-IL" dirty="0"/>
+          </a:p>
+        </p:txBody>
+      </p:sp>
+      <p:sp>
+        <p:nvSpPr>
+          <p:cNvPr id="3" name="Rectangle: Rounded Corners 2">
+            <a:extLst>
+              <a:ext uri="{FF2B5EF4-FFF2-40B4-BE49-F238E27FC236}">
+                <a16:creationId xmlns:a16="http://schemas.microsoft.com/office/drawing/2014/main" id="{D19E09B3-19C0-459B-DBB7-700C7A72C84F}"/>
+              </a:ext>
+            </a:extLst>
+          </p:cNvPr>
+          <p:cNvSpPr/>
+          <p:nvPr/>
         </p:nvSpPr>
         <p:spPr>
           <a:xfrm>
-            <a:off x="3072268" y="401637"/>
-            <a:ext cx="8949044" cy="1325563"/>
+            <a:off x="877824" y="2364058"/>
+            <a:ext cx="2434089" cy="959005"/>
           </a:xfrm>
+          <a:prstGeom prst="roundRect">
+            <a:avLst/>
+          </a:prstGeom>
+          <a:noFill/>
+          <a:ln w="38100">
+            <a:solidFill>
+              <a:srgbClr val="FF4343"/>
+            </a:solidFill>
+          </a:ln>
         </p:spPr>
-        <p:txBody>
-          <a:bodyPr>
-            <a:normAutofit/>
-          </a:bodyPr>
-          <a:lstStyle/>
-          <a:p>
-            <a:r>
-              <a:rPr lang="en-GB" dirty="0"/>
-              <a:t>Topic Clustering &amp; Entities Recognition</a:t>
-            </a:r>
+        <p:style>
+          <a:lnRef idx="2">
+            <a:schemeClr val="accent1">
+              <a:shade val="15000"/>
+            </a:schemeClr>
+          </a:lnRef>
+          <a:fillRef idx="1">
+            <a:schemeClr val="accent1"/>
+          </a:fillRef>
+          <a:effectRef idx="0">
+            <a:schemeClr val="accent1"/>
+          </a:effectRef>
+          <a:fontRef idx="minor">
+            <a:schemeClr val="lt1"/>
+          </a:fontRef>
+        </p:style>
+        <p:txBody>
+          <a:bodyPr rtlCol="0" anchor="ctr"/>
+          <a:lstStyle/>
+          <a:p>
+            <a:pPr algn="ctr"/>
             <a:endParaRPr lang="en-IL" dirty="0"/>
-          </a:p>
-        </p:txBody>
-      </p:sp>
-      <p:sp>
-        <p:nvSpPr>
-          <p:cNvPr id="3" name="Content Placeholder 2">
-            <a:extLst>
-              <a:ext uri="{FF2B5EF4-FFF2-40B4-BE49-F238E27FC236}">
-                <a16:creationId xmlns:a16="http://schemas.microsoft.com/office/drawing/2014/main" id="{5EFDBB99-E333-E814-DFD8-B2A30F11C75B}"/>
-              </a:ext>
-            </a:extLst>
-          </p:cNvPr>
-          <p:cNvSpPr>
-            <a:spLocks noGrp="1"/>
-          </p:cNvSpPr>
-          <p:nvPr>
-            <p:ph idx="1"/>
-          </p:nvPr>
-        </p:nvSpPr>
-        <p:spPr/>
-        <p:txBody>
-          <a:bodyPr>
-            <a:normAutofit/>
-          </a:bodyPr>
-          <a:lstStyle/>
-          <a:p>
-            <a:r>
-              <a:rPr lang="en-GB" sz="3300" b="1" dirty="0"/>
-              <a:t>Topic Clustering: </a:t>
-            </a:r>
-            <a:r>
-              <a:rPr lang="en-GB" sz="3300" dirty="0"/>
-              <a:t>group semantically similar posts.</a:t>
-            </a:r>
-          </a:p>
-          <a:p>
-            <a:pPr lvl="1">
-              <a:buFontTx/>
-              <a:buChar char="-"/>
-            </a:pPr>
-            <a:r>
-              <a:rPr lang="en-GB" sz="3300" dirty="0"/>
-              <a:t>Will be used for </a:t>
-            </a:r>
-            <a:r>
-              <a:rPr lang="en-GB" sz="3300" dirty="0" err="1"/>
-              <a:t>tf-idf</a:t>
-            </a:r>
-            <a:r>
-              <a:rPr lang="en-GB" sz="3300" dirty="0"/>
-              <a:t> </a:t>
-            </a:r>
-            <a:r>
-              <a:rPr lang="en-US" sz="3300" dirty="0"/>
-              <a:t>score calculation</a:t>
-            </a:r>
-            <a:r>
-              <a:rPr lang="en-GB" sz="3300" dirty="0"/>
-              <a:t>.</a:t>
-            </a:r>
-          </a:p>
-          <a:p>
-            <a:pPr lvl="1">
-              <a:buFontTx/>
-              <a:buChar char="-"/>
-            </a:pPr>
-            <a:endParaRPr lang="en-GB" sz="3300" dirty="0"/>
-          </a:p>
-          <a:p>
-            <a:r>
-              <a:rPr lang="en-GB" sz="3300" b="1" dirty="0"/>
-              <a:t>Entity Recognition: </a:t>
-            </a:r>
-            <a:r>
-              <a:rPr lang="en-GB" sz="3300" dirty="0"/>
-              <a:t>name entities recognition (NER).</a:t>
-            </a:r>
-          </a:p>
-          <a:p>
-            <a:pPr marL="457200" lvl="1" indent="0">
-              <a:buNone/>
-            </a:pPr>
-            <a:r>
-              <a:rPr lang="en-GB" sz="3300" dirty="0"/>
-              <a:t>- Will be use for behavioural similarity.</a:t>
-            </a:r>
-          </a:p>
-          <a:p>
-            <a:pPr marL="457200" lvl="1" indent="0">
-              <a:buNone/>
-            </a:pPr>
-            <a:endParaRPr lang="en-GB" sz="3200" dirty="0"/>
-          </a:p>
-          <a:p>
-            <a:endParaRPr lang="en-GB" sz="3600" dirty="0"/>
-          </a:p>
-          <a:p>
-            <a:endParaRPr lang="en-IL" dirty="0"/>
-          </a:p>
-        </p:txBody>
-      </p:sp>
-      <p:sp>
-        <p:nvSpPr>
-          <p:cNvPr id="4" name="Slide Number Placeholder 3">
-            <a:extLst>
-              <a:ext uri="{FF2B5EF4-FFF2-40B4-BE49-F238E27FC236}">
-                <a16:creationId xmlns:a16="http://schemas.microsoft.com/office/drawing/2014/main" id="{20A95D79-0EC6-4542-6F92-46E4F5A6A4D2}"/>
-              </a:ext>
-            </a:extLst>
-          </p:cNvPr>
-          <p:cNvSpPr>
-            <a:spLocks noGrp="1"/>
-          </p:cNvSpPr>
-          <p:nvPr>
-            <p:ph type="sldNum" sz="quarter" idx="12"/>
-          </p:nvPr>
-        </p:nvSpPr>
-        <p:spPr/>
-        <p:txBody>
-          <a:bodyPr/>
-          <a:lstStyle/>
-          <a:p>
-            <a:fld id="{E6AB8EDD-9EF2-4633-A1C2-4D908C1019B4}" type="slidenum">
-              <a:rPr lang="he-IL" smtClean="0"/>
-              <a:t>9</a:t>
-            </a:fld>
-            <a:endParaRPr lang="he-IL"/>
           </a:p>
         </p:txBody>
       </p:sp>
     </p:spTree>
     <p:extLst>
       <p:ext uri="{BB962C8B-B14F-4D97-AF65-F5344CB8AC3E}">
-        <p14:creationId xmlns:p14="http://schemas.microsoft.com/office/powerpoint/2010/main" val="2160734738"/>
+        <p14:creationId xmlns:p14="http://schemas.microsoft.com/office/powerpoint/2010/main" val="2074207589"/>
       </p:ext>
     </p:extLst>
   </p:cSld>

--- a/docs/cbg_saback.pptx
+++ b/docs/cbg_saback.pptx
@@ -5,7 +5,7 @@
     <p:sldMasterId id="2147483648" r:id="rId1"/>
   </p:sldMasterIdLst>
   <p:notesMasterIdLst>
-    <p:notesMasterId r:id="rId28"/>
+    <p:notesMasterId r:id="rId29"/>
   </p:notesMasterIdLst>
   <p:sldIdLst>
     <p:sldId id="1574" r:id="rId2"/>
@@ -14,26 +14,27 @@
     <p:sldId id="1575" r:id="rId5"/>
     <p:sldId id="1596" r:id="rId6"/>
     <p:sldId id="1611" r:id="rId7"/>
-    <p:sldId id="1608" r:id="rId8"/>
-    <p:sldId id="1601" r:id="rId9"/>
-    <p:sldId id="1604" r:id="rId10"/>
-    <p:sldId id="1603" r:id="rId11"/>
-    <p:sldId id="1581" r:id="rId12"/>
-    <p:sldId id="1605" r:id="rId13"/>
-    <p:sldId id="1584" r:id="rId14"/>
-    <p:sldId id="1585" r:id="rId15"/>
-    <p:sldId id="1606" r:id="rId16"/>
-    <p:sldId id="1587" r:id="rId17"/>
-    <p:sldId id="1607" r:id="rId18"/>
-    <p:sldId id="1589" r:id="rId19"/>
-    <p:sldId id="1609" r:id="rId20"/>
-    <p:sldId id="1591" r:id="rId21"/>
-    <p:sldId id="1594" r:id="rId22"/>
-    <p:sldId id="1610" r:id="rId23"/>
-    <p:sldId id="1593" r:id="rId24"/>
-    <p:sldId id="1612" r:id="rId25"/>
-    <p:sldId id="1613" r:id="rId26"/>
-    <p:sldId id="1595" r:id="rId27"/>
+    <p:sldId id="1614" r:id="rId8"/>
+    <p:sldId id="1608" r:id="rId9"/>
+    <p:sldId id="1601" r:id="rId10"/>
+    <p:sldId id="1604" r:id="rId11"/>
+    <p:sldId id="1603" r:id="rId12"/>
+    <p:sldId id="1581" r:id="rId13"/>
+    <p:sldId id="1605" r:id="rId14"/>
+    <p:sldId id="1584" r:id="rId15"/>
+    <p:sldId id="1585" r:id="rId16"/>
+    <p:sldId id="1606" r:id="rId17"/>
+    <p:sldId id="1587" r:id="rId18"/>
+    <p:sldId id="1607" r:id="rId19"/>
+    <p:sldId id="1589" r:id="rId20"/>
+    <p:sldId id="1609" r:id="rId21"/>
+    <p:sldId id="1591" r:id="rId22"/>
+    <p:sldId id="1594" r:id="rId23"/>
+    <p:sldId id="1610" r:id="rId24"/>
+    <p:sldId id="1593" r:id="rId25"/>
+    <p:sldId id="1612" r:id="rId26"/>
+    <p:sldId id="1613" r:id="rId27"/>
+    <p:sldId id="1595" r:id="rId28"/>
   </p:sldIdLst>
   <p:sldSz cx="12192000" cy="6858000"/>
   <p:notesSz cx="6858000" cy="9144000"/>
@@ -143,6 +144,7 @@
             <p14:sldId id="1575"/>
             <p14:sldId id="1596"/>
             <p14:sldId id="1611"/>
+            <p14:sldId id="1614"/>
             <p14:sldId id="1608"/>
             <p14:sldId id="1601"/>
             <p14:sldId id="1604"/>
@@ -572,7 +574,7 @@
           <a:p>
             <a:fld id="{2915196C-CDBC-4DEE-A220-849C85FC22AC}" type="datetimeFigureOut">
               <a:rPr lang="he-IL" smtClean="0"/>
-              <a:t>י"ז/טבת/תשפ"ו</a:t>
+              <a:t>י"ח/טבת/תשפ"ו</a:t>
             </a:fld>
             <a:endParaRPr lang="he-IL"/>
           </a:p>
@@ -932,6 +934,121 @@
         <p:cNvPr id="1" name="">
           <a:extLst>
             <a:ext uri="{FF2B5EF4-FFF2-40B4-BE49-F238E27FC236}">
+              <a16:creationId xmlns:a16="http://schemas.microsoft.com/office/drawing/2014/main" id="{11C771D0-3498-9926-3D45-CB19D6CC56A1}"/>
+            </a:ext>
+          </a:extLst>
+        </p:cNvPr>
+        <p:cNvGrpSpPr/>
+        <p:nvPr/>
+      </p:nvGrpSpPr>
+      <p:grpSpPr>
+        <a:xfrm>
+          <a:off x="0" y="0"/>
+          <a:ext cx="0" cy="0"/>
+          <a:chOff x="0" y="0"/>
+          <a:chExt cx="0" cy="0"/>
+        </a:xfrm>
+      </p:grpSpPr>
+      <p:sp>
+        <p:nvSpPr>
+          <p:cNvPr id="2" name="Slide Image Placeholder 1">
+            <a:extLst>
+              <a:ext uri="{FF2B5EF4-FFF2-40B4-BE49-F238E27FC236}">
+                <a16:creationId xmlns:a16="http://schemas.microsoft.com/office/drawing/2014/main" id="{0B6BF001-388A-A507-838D-898BCD246DA4}"/>
+              </a:ext>
+            </a:extLst>
+          </p:cNvPr>
+          <p:cNvSpPr>
+            <a:spLocks noGrp="1" noRot="1" noChangeAspect="1"/>
+          </p:cNvSpPr>
+          <p:nvPr>
+            <p:ph type="sldImg"/>
+          </p:nvPr>
+        </p:nvSpPr>
+        <p:spPr/>
+        <p:txBody>
+          <a:bodyPr/>
+          <a:lstStyle/>
+          <a:p>
+            <a:endParaRPr lang="en-IL"/>
+          </a:p>
+        </p:txBody>
+      </p:sp>
+      <p:sp>
+        <p:nvSpPr>
+          <p:cNvPr id="3" name="Notes Placeholder 2">
+            <a:extLst>
+              <a:ext uri="{FF2B5EF4-FFF2-40B4-BE49-F238E27FC236}">
+                <a16:creationId xmlns:a16="http://schemas.microsoft.com/office/drawing/2014/main" id="{01115DA1-B271-710E-C2A1-878433E689C8}"/>
+              </a:ext>
+            </a:extLst>
+          </p:cNvPr>
+          <p:cNvSpPr>
+            <a:spLocks noGrp="1"/>
+          </p:cNvSpPr>
+          <p:nvPr>
+            <p:ph type="body" idx="1"/>
+          </p:nvPr>
+        </p:nvSpPr>
+        <p:spPr/>
+        <p:txBody>
+          <a:bodyPr/>
+          <a:lstStyle/>
+          <a:p>
+            <a:endParaRPr lang="en-IL" dirty="0"/>
+          </a:p>
+        </p:txBody>
+      </p:sp>
+      <p:sp>
+        <p:nvSpPr>
+          <p:cNvPr id="4" name="Slide Number Placeholder 3">
+            <a:extLst>
+              <a:ext uri="{FF2B5EF4-FFF2-40B4-BE49-F238E27FC236}">
+                <a16:creationId xmlns:a16="http://schemas.microsoft.com/office/drawing/2014/main" id="{055D3A0D-62CA-6939-E846-9ED9CB4E944A}"/>
+              </a:ext>
+            </a:extLst>
+          </p:cNvPr>
+          <p:cNvSpPr>
+            <a:spLocks noGrp="1"/>
+          </p:cNvSpPr>
+          <p:nvPr>
+            <p:ph type="sldNum" sz="quarter" idx="5"/>
+          </p:nvPr>
+        </p:nvSpPr>
+        <p:spPr/>
+        <p:txBody>
+          <a:bodyPr/>
+          <a:lstStyle/>
+          <a:p>
+            <a:fld id="{7F6CD5E7-A5BE-4430-AD67-E129D63AAC5C}" type="slidenum">
+              <a:rPr lang="he-IL" smtClean="0"/>
+              <a:t>22</a:t>
+            </a:fld>
+            <a:endParaRPr lang="he-IL"/>
+          </a:p>
+        </p:txBody>
+      </p:sp>
+    </p:spTree>
+    <p:extLst>
+      <p:ext uri="{BB962C8B-B14F-4D97-AF65-F5344CB8AC3E}">
+        <p14:creationId xmlns:p14="http://schemas.microsoft.com/office/powerpoint/2010/main" val="770845484"/>
+      </p:ext>
+    </p:extLst>
+  </p:cSld>
+  <p:clrMapOvr>
+    <a:masterClrMapping/>
+  </p:clrMapOvr>
+</p:notes>
+</file>
+
+<file path=ppt/notesSlides/notesSlide11.xml><?xml version="1.0" encoding="utf-8"?>
+<p:notes xmlns:a="http://schemas.openxmlformats.org/drawingml/2006/main" xmlns:r="http://schemas.openxmlformats.org/officeDocument/2006/relationships" xmlns:p="http://schemas.openxmlformats.org/presentationml/2006/main">
+  <p:cSld>
+    <p:spTree>
+      <p:nvGrpSpPr>
+        <p:cNvPr id="1" name="">
+          <a:extLst>
+            <a:ext uri="{FF2B5EF4-FFF2-40B4-BE49-F238E27FC236}">
               <a16:creationId xmlns:a16="http://schemas.microsoft.com/office/drawing/2014/main" id="{89700E97-1269-7E2B-1581-D4E8D9FCCB3F}"/>
             </a:ext>
           </a:extLst>
@@ -1020,7 +1137,7 @@
           <a:p>
             <a:fld id="{7F6CD5E7-A5BE-4430-AD67-E129D63AAC5C}" type="slidenum">
               <a:rPr lang="he-IL" smtClean="0"/>
-              <a:t>23</a:t>
+              <a:t>24</a:t>
             </a:fld>
             <a:endParaRPr lang="he-IL"/>
           </a:p>
@@ -1039,7 +1156,7 @@
 </p:notes>
 </file>
 
-<file path=ppt/notesSlides/notesSlide11.xml><?xml version="1.0" encoding="utf-8"?>
+<file path=ppt/notesSlides/notesSlide12.xml><?xml version="1.0" encoding="utf-8"?>
 <p:notes xmlns:a="http://schemas.openxmlformats.org/drawingml/2006/main" xmlns:r="http://schemas.openxmlformats.org/officeDocument/2006/relationships" xmlns:p="http://schemas.openxmlformats.org/presentationml/2006/main">
   <p:cSld>
     <p:spTree>
@@ -1135,7 +1252,7 @@
           <a:p>
             <a:fld id="{7F6CD5E7-A5BE-4430-AD67-E129D63AAC5C}" type="slidenum">
               <a:rPr lang="he-IL" smtClean="0"/>
-              <a:t>24</a:t>
+              <a:t>25</a:t>
             </a:fld>
             <a:endParaRPr lang="he-IL"/>
           </a:p>
@@ -1154,7 +1271,7 @@
 </p:notes>
 </file>
 
-<file path=ppt/notesSlides/notesSlide12.xml><?xml version="1.0" encoding="utf-8"?>
+<file path=ppt/notesSlides/notesSlide13.xml><?xml version="1.0" encoding="utf-8"?>
 <p:notes xmlns:a="http://schemas.openxmlformats.org/drawingml/2006/main" xmlns:r="http://schemas.openxmlformats.org/officeDocument/2006/relationships" xmlns:p="http://schemas.openxmlformats.org/presentationml/2006/main">
   <p:cSld>
     <p:spTree>
@@ -1250,7 +1367,7 @@
           <a:p>
             <a:fld id="{7F6CD5E7-A5BE-4430-AD67-E129D63AAC5C}" type="slidenum">
               <a:rPr lang="he-IL" smtClean="0"/>
-              <a:t>25</a:t>
+              <a:t>26</a:t>
             </a:fld>
             <a:endParaRPr lang="he-IL"/>
           </a:p>
@@ -1269,7 +1386,7 @@
 </p:notes>
 </file>
 
-<file path=ppt/notesSlides/notesSlide13.xml><?xml version="1.0" encoding="utf-8"?>
+<file path=ppt/notesSlides/notesSlide14.xml><?xml version="1.0" encoding="utf-8"?>
 <p:notes xmlns:a="http://schemas.openxmlformats.org/drawingml/2006/main" xmlns:r="http://schemas.openxmlformats.org/officeDocument/2006/relationships" xmlns:p="http://schemas.openxmlformats.org/presentationml/2006/main">
   <p:cSld>
     <p:spTree>
@@ -1365,7 +1482,7 @@
           <a:p>
             <a:fld id="{7F6CD5E7-A5BE-4430-AD67-E129D63AAC5C}" type="slidenum">
               <a:rPr lang="he-IL" smtClean="0"/>
-              <a:t>26</a:t>
+              <a:t>27</a:t>
             </a:fld>
             <a:endParaRPr lang="he-IL"/>
           </a:p>
@@ -1846,7 +1963,13 @@
   <p:cSld>
     <p:spTree>
       <p:nvGrpSpPr>
-        <p:cNvPr id="1" name=""/>
+        <p:cNvPr id="1" name="">
+          <a:extLst>
+            <a:ext uri="{FF2B5EF4-FFF2-40B4-BE49-F238E27FC236}">
+              <a16:creationId xmlns:a16="http://schemas.microsoft.com/office/drawing/2014/main" id="{8A5A06B5-5402-C7B4-3B41-BE0B07377404}"/>
+            </a:ext>
+          </a:extLst>
+        </p:cNvPr>
         <p:cNvGrpSpPr/>
         <p:nvPr/>
       </p:nvGrpSpPr>
@@ -1860,7 +1983,13 @@
       </p:grpSpPr>
       <p:sp>
         <p:nvSpPr>
-          <p:cNvPr id="2" name="Slide Image Placeholder 1"/>
+          <p:cNvPr id="2" name="Slide Image Placeholder 1">
+            <a:extLst>
+              <a:ext uri="{FF2B5EF4-FFF2-40B4-BE49-F238E27FC236}">
+                <a16:creationId xmlns:a16="http://schemas.microsoft.com/office/drawing/2014/main" id="{3C4F3EDF-ABBB-2BC3-3013-B6011BA869AF}"/>
+              </a:ext>
+            </a:extLst>
+          </p:cNvPr>
           <p:cNvSpPr>
             <a:spLocks noGrp="1" noRot="1" noChangeAspect="1"/>
           </p:cNvSpPr>
@@ -1869,56 +1998,41 @@
           </p:nvPr>
         </p:nvSpPr>
         <p:spPr/>
+      </p:sp>
+      <p:sp>
+        <p:nvSpPr>
+          <p:cNvPr id="3" name="Notes Placeholder 2">
+            <a:extLst>
+              <a:ext uri="{FF2B5EF4-FFF2-40B4-BE49-F238E27FC236}">
+                <a16:creationId xmlns:a16="http://schemas.microsoft.com/office/drawing/2014/main" id="{5FF4E362-55D4-7479-4EA3-71D9ABBB5616}"/>
+              </a:ext>
+            </a:extLst>
+          </p:cNvPr>
+          <p:cNvSpPr>
+            <a:spLocks noGrp="1"/>
+          </p:cNvSpPr>
+          <p:nvPr>
+            <p:ph type="body" idx="1"/>
+          </p:nvPr>
+        </p:nvSpPr>
+        <p:spPr/>
         <p:txBody>
           <a:bodyPr/>
           <a:lstStyle/>
           <a:p>
-            <a:endParaRPr lang="en-IL"/>
-          </a:p>
-        </p:txBody>
-      </p:sp>
-      <p:sp>
-        <p:nvSpPr>
-          <p:cNvPr id="3" name="Notes Placeholder 2"/>
-          <p:cNvSpPr>
-            <a:spLocks noGrp="1"/>
-          </p:cNvSpPr>
-          <p:nvPr>
-            <p:ph type="body" idx="1"/>
-          </p:nvPr>
-        </p:nvSpPr>
-        <p:spPr/>
-        <p:txBody>
-          <a:bodyPr/>
-          <a:lstStyle/>
-          <a:p>
-            <a:r>
-              <a:rPr lang="en-GB" sz="1200" dirty="0"/>
-              <a:t>used</a:t>
-            </a:r>
-            <a:r>
-              <a:rPr lang="en-GB" sz="1600" dirty="0"/>
-              <a:t> </a:t>
-            </a:r>
-            <a:r>
-              <a:rPr lang="en-GB" sz="1200" dirty="0"/>
-              <a:t>in</a:t>
-            </a:r>
-            <a:r>
-              <a:rPr lang="en-GB" sz="1600" dirty="0"/>
-              <a:t> </a:t>
-            </a:r>
-            <a:r>
-              <a:rPr lang="en-GB" sz="1200" dirty="0"/>
-              <a:t>natural language processing and information retrieval</a:t>
-            </a:r>
             <a:endParaRPr lang="en-IL" dirty="0"/>
           </a:p>
         </p:txBody>
       </p:sp>
       <p:sp>
         <p:nvSpPr>
-          <p:cNvPr id="4" name="Slide Number Placeholder 3"/>
+          <p:cNvPr id="4" name="Slide Number Placeholder 3">
+            <a:extLst>
+              <a:ext uri="{FF2B5EF4-FFF2-40B4-BE49-F238E27FC236}">
+                <a16:creationId xmlns:a16="http://schemas.microsoft.com/office/drawing/2014/main" id="{DAC3B89D-E825-20E3-7E2A-8A3D43B9DCB4}"/>
+              </a:ext>
+            </a:extLst>
+          </p:cNvPr>
           <p:cNvSpPr>
             <a:spLocks noGrp="1"/>
           </p:cNvSpPr>
@@ -1933,7 +2047,7 @@
           <a:p>
             <a:fld id="{7F6CD5E7-A5BE-4430-AD67-E129D63AAC5C}" type="slidenum">
               <a:rPr lang="he-IL" smtClean="0"/>
-              <a:t>13</a:t>
+              <a:t>7</a:t>
             </a:fld>
             <a:endParaRPr lang="he-IL"/>
           </a:p>
@@ -1942,7 +2056,7 @@
     </p:spTree>
     <p:extLst>
       <p:ext uri="{BB962C8B-B14F-4D97-AF65-F5344CB8AC3E}">
-        <p14:creationId xmlns:p14="http://schemas.microsoft.com/office/powerpoint/2010/main" val="2785503547"/>
+        <p14:creationId xmlns:p14="http://schemas.microsoft.com/office/powerpoint/2010/main" val="1313792295"/>
       </p:ext>
     </p:extLst>
   </p:cSld>
@@ -2003,6 +2117,26 @@
           <a:bodyPr/>
           <a:lstStyle/>
           <a:p>
+            <a:r>
+              <a:rPr lang="en-GB" sz="1200" dirty="0"/>
+              <a:t>used</a:t>
+            </a:r>
+            <a:r>
+              <a:rPr lang="en-GB" sz="1600" dirty="0"/>
+              <a:t> </a:t>
+            </a:r>
+            <a:r>
+              <a:rPr lang="en-GB" sz="1200" dirty="0"/>
+              <a:t>in</a:t>
+            </a:r>
+            <a:r>
+              <a:rPr lang="en-GB" sz="1600" dirty="0"/>
+              <a:t> </a:t>
+            </a:r>
+            <a:r>
+              <a:rPr lang="en-GB" sz="1200" dirty="0"/>
+              <a:t>natural language processing and information retrieval</a:t>
+            </a:r>
             <a:endParaRPr lang="en-IL" dirty="0"/>
           </a:p>
         </p:txBody>
@@ -2024,7 +2158,98 @@
           <a:p>
             <a:fld id="{7F6CD5E7-A5BE-4430-AD67-E129D63AAC5C}" type="slidenum">
               <a:rPr lang="he-IL" smtClean="0"/>
-              <a:t>16</a:t>
+              <a:t>14</a:t>
+            </a:fld>
+            <a:endParaRPr lang="he-IL"/>
+          </a:p>
+        </p:txBody>
+      </p:sp>
+    </p:spTree>
+    <p:extLst>
+      <p:ext uri="{BB962C8B-B14F-4D97-AF65-F5344CB8AC3E}">
+        <p14:creationId xmlns:p14="http://schemas.microsoft.com/office/powerpoint/2010/main" val="2785503547"/>
+      </p:ext>
+    </p:extLst>
+  </p:cSld>
+  <p:clrMapOvr>
+    <a:masterClrMapping/>
+  </p:clrMapOvr>
+</p:notes>
+</file>
+
+<file path=ppt/notesSlides/notesSlide7.xml><?xml version="1.0" encoding="utf-8"?>
+<p:notes xmlns:a="http://schemas.openxmlformats.org/drawingml/2006/main" xmlns:r="http://schemas.openxmlformats.org/officeDocument/2006/relationships" xmlns:p="http://schemas.openxmlformats.org/presentationml/2006/main">
+  <p:cSld>
+    <p:spTree>
+      <p:nvGrpSpPr>
+        <p:cNvPr id="1" name=""/>
+        <p:cNvGrpSpPr/>
+        <p:nvPr/>
+      </p:nvGrpSpPr>
+      <p:grpSpPr>
+        <a:xfrm>
+          <a:off x="0" y="0"/>
+          <a:ext cx="0" cy="0"/>
+          <a:chOff x="0" y="0"/>
+          <a:chExt cx="0" cy="0"/>
+        </a:xfrm>
+      </p:grpSpPr>
+      <p:sp>
+        <p:nvSpPr>
+          <p:cNvPr id="2" name="Slide Image Placeholder 1"/>
+          <p:cNvSpPr>
+            <a:spLocks noGrp="1" noRot="1" noChangeAspect="1"/>
+          </p:cNvSpPr>
+          <p:nvPr>
+            <p:ph type="sldImg"/>
+          </p:nvPr>
+        </p:nvSpPr>
+        <p:spPr/>
+        <p:txBody>
+          <a:bodyPr/>
+          <a:lstStyle/>
+          <a:p>
+            <a:endParaRPr lang="en-IL"/>
+          </a:p>
+        </p:txBody>
+      </p:sp>
+      <p:sp>
+        <p:nvSpPr>
+          <p:cNvPr id="3" name="Notes Placeholder 2"/>
+          <p:cNvSpPr>
+            <a:spLocks noGrp="1"/>
+          </p:cNvSpPr>
+          <p:nvPr>
+            <p:ph type="body" idx="1"/>
+          </p:nvPr>
+        </p:nvSpPr>
+        <p:spPr/>
+        <p:txBody>
+          <a:bodyPr/>
+          <a:lstStyle/>
+          <a:p>
+            <a:endParaRPr lang="en-IL" dirty="0"/>
+          </a:p>
+        </p:txBody>
+      </p:sp>
+      <p:sp>
+        <p:nvSpPr>
+          <p:cNvPr id="4" name="Slide Number Placeholder 3"/>
+          <p:cNvSpPr>
+            <a:spLocks noGrp="1"/>
+          </p:cNvSpPr>
+          <p:nvPr>
+            <p:ph type="sldNum" sz="quarter" idx="5"/>
+          </p:nvPr>
+        </p:nvSpPr>
+        <p:spPr/>
+        <p:txBody>
+          <a:bodyPr/>
+          <a:lstStyle/>
+          <a:p>
+            <a:fld id="{7F6CD5E7-A5BE-4430-AD67-E129D63AAC5C}" type="slidenum">
+              <a:rPr lang="he-IL" smtClean="0"/>
+              <a:t>17</a:t>
             </a:fld>
             <a:endParaRPr lang="he-IL"/>
           </a:p>
@@ -2043,7 +2268,7 @@
 </p:notes>
 </file>
 
-<file path=ppt/notesSlides/notesSlide7.xml><?xml version="1.0" encoding="utf-8"?>
+<file path=ppt/notesSlides/notesSlide8.xml><?xml version="1.0" encoding="utf-8"?>
 <p:notes xmlns:a="http://schemas.openxmlformats.org/drawingml/2006/main" xmlns:r="http://schemas.openxmlformats.org/officeDocument/2006/relationships" xmlns:p="http://schemas.openxmlformats.org/presentationml/2006/main">
   <p:cSld>
     <p:spTree>
@@ -2139,7 +2364,7 @@
           <a:p>
             <a:fld id="{7F6CD5E7-A5BE-4430-AD67-E129D63AAC5C}" type="slidenum">
               <a:rPr lang="he-IL" smtClean="0"/>
-              <a:t>18</a:t>
+              <a:t>19</a:t>
             </a:fld>
             <a:endParaRPr lang="he-IL"/>
           </a:p>
@@ -2158,7 +2383,7 @@
 </p:notes>
 </file>
 
-<file path=ppt/notesSlides/notesSlide8.xml><?xml version="1.0" encoding="utf-8"?>
+<file path=ppt/notesSlides/notesSlide9.xml><?xml version="1.0" encoding="utf-8"?>
 <p:notes xmlns:a="http://schemas.openxmlformats.org/drawingml/2006/main" xmlns:r="http://schemas.openxmlformats.org/officeDocument/2006/relationships" xmlns:p="http://schemas.openxmlformats.org/presentationml/2006/main">
   <p:cSld>
     <p:spTree>
@@ -2254,7 +2479,7 @@
           <a:p>
             <a:fld id="{7F6CD5E7-A5BE-4430-AD67-E129D63AAC5C}" type="slidenum">
               <a:rPr lang="he-IL" smtClean="0"/>
-              <a:t>20</a:t>
+              <a:t>21</a:t>
             </a:fld>
             <a:endParaRPr lang="he-IL"/>
           </a:p>
@@ -2264,121 +2489,6 @@
     <p:extLst>
       <p:ext uri="{BB962C8B-B14F-4D97-AF65-F5344CB8AC3E}">
         <p14:creationId xmlns:p14="http://schemas.microsoft.com/office/powerpoint/2010/main" val="1668725800"/>
-      </p:ext>
-    </p:extLst>
-  </p:cSld>
-  <p:clrMapOvr>
-    <a:masterClrMapping/>
-  </p:clrMapOvr>
-</p:notes>
-</file>
-
-<file path=ppt/notesSlides/notesSlide9.xml><?xml version="1.0" encoding="utf-8"?>
-<p:notes xmlns:a="http://schemas.openxmlformats.org/drawingml/2006/main" xmlns:r="http://schemas.openxmlformats.org/officeDocument/2006/relationships" xmlns:p="http://schemas.openxmlformats.org/presentationml/2006/main">
-  <p:cSld>
-    <p:spTree>
-      <p:nvGrpSpPr>
-        <p:cNvPr id="1" name="">
-          <a:extLst>
-            <a:ext uri="{FF2B5EF4-FFF2-40B4-BE49-F238E27FC236}">
-              <a16:creationId xmlns:a16="http://schemas.microsoft.com/office/drawing/2014/main" id="{11C771D0-3498-9926-3D45-CB19D6CC56A1}"/>
-            </a:ext>
-          </a:extLst>
-        </p:cNvPr>
-        <p:cNvGrpSpPr/>
-        <p:nvPr/>
-      </p:nvGrpSpPr>
-      <p:grpSpPr>
-        <a:xfrm>
-          <a:off x="0" y="0"/>
-          <a:ext cx="0" cy="0"/>
-          <a:chOff x="0" y="0"/>
-          <a:chExt cx="0" cy="0"/>
-        </a:xfrm>
-      </p:grpSpPr>
-      <p:sp>
-        <p:nvSpPr>
-          <p:cNvPr id="2" name="Slide Image Placeholder 1">
-            <a:extLst>
-              <a:ext uri="{FF2B5EF4-FFF2-40B4-BE49-F238E27FC236}">
-                <a16:creationId xmlns:a16="http://schemas.microsoft.com/office/drawing/2014/main" id="{0B6BF001-388A-A507-838D-898BCD246DA4}"/>
-              </a:ext>
-            </a:extLst>
-          </p:cNvPr>
-          <p:cNvSpPr>
-            <a:spLocks noGrp="1" noRot="1" noChangeAspect="1"/>
-          </p:cNvSpPr>
-          <p:nvPr>
-            <p:ph type="sldImg"/>
-          </p:nvPr>
-        </p:nvSpPr>
-        <p:spPr/>
-        <p:txBody>
-          <a:bodyPr/>
-          <a:lstStyle/>
-          <a:p>
-            <a:endParaRPr lang="en-IL"/>
-          </a:p>
-        </p:txBody>
-      </p:sp>
-      <p:sp>
-        <p:nvSpPr>
-          <p:cNvPr id="3" name="Notes Placeholder 2">
-            <a:extLst>
-              <a:ext uri="{FF2B5EF4-FFF2-40B4-BE49-F238E27FC236}">
-                <a16:creationId xmlns:a16="http://schemas.microsoft.com/office/drawing/2014/main" id="{01115DA1-B271-710E-C2A1-878433E689C8}"/>
-              </a:ext>
-            </a:extLst>
-          </p:cNvPr>
-          <p:cNvSpPr>
-            <a:spLocks noGrp="1"/>
-          </p:cNvSpPr>
-          <p:nvPr>
-            <p:ph type="body" idx="1"/>
-          </p:nvPr>
-        </p:nvSpPr>
-        <p:spPr/>
-        <p:txBody>
-          <a:bodyPr/>
-          <a:lstStyle/>
-          <a:p>
-            <a:endParaRPr lang="en-IL" dirty="0"/>
-          </a:p>
-        </p:txBody>
-      </p:sp>
-      <p:sp>
-        <p:nvSpPr>
-          <p:cNvPr id="4" name="Slide Number Placeholder 3">
-            <a:extLst>
-              <a:ext uri="{FF2B5EF4-FFF2-40B4-BE49-F238E27FC236}">
-                <a16:creationId xmlns:a16="http://schemas.microsoft.com/office/drawing/2014/main" id="{055D3A0D-62CA-6939-E846-9ED9CB4E944A}"/>
-              </a:ext>
-            </a:extLst>
-          </p:cNvPr>
-          <p:cNvSpPr>
-            <a:spLocks noGrp="1"/>
-          </p:cNvSpPr>
-          <p:nvPr>
-            <p:ph type="sldNum" sz="quarter" idx="5"/>
-          </p:nvPr>
-        </p:nvSpPr>
-        <p:spPr/>
-        <p:txBody>
-          <a:bodyPr/>
-          <a:lstStyle/>
-          <a:p>
-            <a:fld id="{7F6CD5E7-A5BE-4430-AD67-E129D63AAC5C}" type="slidenum">
-              <a:rPr lang="he-IL" smtClean="0"/>
-              <a:t>21</a:t>
-            </a:fld>
-            <a:endParaRPr lang="he-IL"/>
-          </a:p>
-        </p:txBody>
-      </p:sp>
-    </p:spTree>
-    <p:extLst>
-      <p:ext uri="{BB962C8B-B14F-4D97-AF65-F5344CB8AC3E}">
-        <p14:creationId xmlns:p14="http://schemas.microsoft.com/office/powerpoint/2010/main" val="770845484"/>
       </p:ext>
     </p:extLst>
   </p:cSld>
@@ -2574,7 +2684,7 @@
           <a:p>
             <a:fld id="{FC6B3A86-AB79-4388-8CA5-9FC4B834779B}" type="datetime8">
               <a:rPr lang="he-IL" smtClean="0"/>
-              <a:t>06 ינואר 26</a:t>
+              <a:t>07 ינואר 26</a:t>
             </a:fld>
             <a:endParaRPr lang="he-IL"/>
           </a:p>
@@ -2797,7 +2907,7 @@
           <a:p>
             <a:fld id="{18F56BC8-8E7D-4896-9980-77BC87FB8E3E}" type="datetime8">
               <a:rPr lang="he-IL" smtClean="0"/>
-              <a:t>06 ינואר 26</a:t>
+              <a:t>07 ינואר 26</a:t>
             </a:fld>
             <a:endParaRPr lang="he-IL"/>
           </a:p>
@@ -3030,7 +3140,7 @@
           <a:p>
             <a:fld id="{0FE327C8-CB36-417E-834B-544633ADCE63}" type="datetime8">
               <a:rPr lang="he-IL" smtClean="0"/>
-              <a:t>06 ינואר 26</a:t>
+              <a:t>07 ינואר 26</a:t>
             </a:fld>
             <a:endParaRPr lang="he-IL"/>
           </a:p>
@@ -3148,7 +3258,7 @@
           <a:p>
             <a:fld id="{8E065D1C-C98B-44F5-AB2A-FEE3E85D0A94}" type="datetime8">
               <a:rPr lang="he-IL" smtClean="0"/>
-              <a:t>06 ינואר 26</a:t>
+              <a:t>07 ינואר 26</a:t>
             </a:fld>
             <a:endParaRPr lang="he-IL"/>
           </a:p>
@@ -3459,7 +3569,7 @@
           <a:p>
             <a:fld id="{7634CBFB-2532-48BA-BAE2-ADD925390740}" type="datetime8">
               <a:rPr lang="he-IL" smtClean="0"/>
-              <a:t>06 ינואר 26</a:t>
+              <a:t>07 ינואר 26</a:t>
             </a:fld>
             <a:endParaRPr lang="he-IL"/>
           </a:p>
@@ -3742,7 +3852,7 @@
           <a:p>
             <a:fld id="{8EAC1FDD-37C4-4A6B-BF31-779943CE32CF}" type="datetime8">
               <a:rPr lang="he-IL" smtClean="0"/>
-              <a:t>06 ינואר 26</a:t>
+              <a:t>07 ינואר 26</a:t>
             </a:fld>
             <a:endParaRPr lang="he-IL"/>
           </a:p>
@@ -4055,7 +4165,7 @@
           <a:p>
             <a:fld id="{C73C226C-A76A-4927-8F1D-1BD4AC033ABB}" type="datetime8">
               <a:rPr lang="he-IL" smtClean="0"/>
-              <a:t>06 ינואר 26</a:t>
+              <a:t>07 ינואר 26</a:t>
             </a:fld>
             <a:endParaRPr lang="he-IL"/>
           </a:p>
@@ -4558,7 +4668,7 @@
           <a:p>
             <a:fld id="{430DF2BF-D428-43E9-B36B-6DD16CF93579}" type="datetime8">
               <a:rPr lang="he-IL" smtClean="0"/>
-              <a:t>06 ינואר 26</a:t>
+              <a:t>07 ינואר 26</a:t>
             </a:fld>
             <a:endParaRPr lang="he-IL"/>
           </a:p>
@@ -4705,7 +4815,7 @@
           <a:p>
             <a:fld id="{390A9136-4922-4C74-B05C-12CD0951E601}" type="datetime8">
               <a:rPr lang="he-IL" smtClean="0"/>
-              <a:t>06 ינואר 26</a:t>
+              <a:t>07 ינואר 26</a:t>
             </a:fld>
             <a:endParaRPr lang="he-IL"/>
           </a:p>
@@ -4823,7 +4933,7 @@
           <a:p>
             <a:fld id="{C29F3CA8-2E63-412C-AA06-0D760EBE5965}" type="datetime8">
               <a:rPr lang="he-IL" smtClean="0"/>
-              <a:t>06 ינואר 26</a:t>
+              <a:t>07 ינואר 26</a:t>
             </a:fld>
             <a:endParaRPr lang="he-IL"/>
           </a:p>
@@ -5145,7 +5255,7 @@
           <a:p>
             <a:fld id="{7AC7B867-AA4A-4FF3-AD8B-0AD0F18EE595}" type="datetime8">
               <a:rPr lang="he-IL" smtClean="0"/>
-              <a:t>06 ינואר 26</a:t>
+              <a:t>07 ינואר 26</a:t>
             </a:fld>
             <a:endParaRPr lang="he-IL"/>
           </a:p>
@@ -5443,7 +5553,7 @@
           <a:p>
             <a:fld id="{F5E9EBD3-88E8-46DB-BD3B-F935B7013014}" type="datetime8">
               <a:rPr lang="he-IL" smtClean="0"/>
-              <a:t>06 ינואר 26</a:t>
+              <a:t>07 ינואר 26</a:t>
             </a:fld>
             <a:endParaRPr lang="he-IL"/>
           </a:p>
@@ -5727,7 +5837,7 @@
           <a:p>
             <a:fld id="{8E065D1C-C98B-44F5-AB2A-FEE3E85D0A94}" type="datetime8">
               <a:rPr lang="he-IL" smtClean="0"/>
-              <a:t>06 ינואר 26</a:t>
+              <a:t>07 ינואר 26</a:t>
             </a:fld>
             <a:endParaRPr lang="he-IL"/>
           </a:p>
@@ -6851,6 +6961,124 @@
         <p:cNvPr id="1" name="">
           <a:extLst>
             <a:ext uri="{FF2B5EF4-FFF2-40B4-BE49-F238E27FC236}">
+              <a16:creationId xmlns:a16="http://schemas.microsoft.com/office/drawing/2014/main" id="{C7E8398B-F7AB-19EE-5B85-9AC3E8C31BB0}"/>
+            </a:ext>
+          </a:extLst>
+        </p:cNvPr>
+        <p:cNvGrpSpPr/>
+        <p:nvPr/>
+      </p:nvGrpSpPr>
+      <p:grpSpPr>
+        <a:xfrm>
+          <a:off x="0" y="0"/>
+          <a:ext cx="0" cy="0"/>
+          <a:chOff x="0" y="0"/>
+          <a:chExt cx="0" cy="0"/>
+        </a:xfrm>
+      </p:grpSpPr>
+      <p:sp>
+        <p:nvSpPr>
+          <p:cNvPr id="2" name="Slide Number Placeholder 1">
+            <a:extLst>
+              <a:ext uri="{FF2B5EF4-FFF2-40B4-BE49-F238E27FC236}">
+                <a16:creationId xmlns:a16="http://schemas.microsoft.com/office/drawing/2014/main" id="{98329E4F-8D65-CC0A-06D5-07F7C6FA1A50}"/>
+              </a:ext>
+            </a:extLst>
+          </p:cNvPr>
+          <p:cNvSpPr>
+            <a:spLocks noGrp="1"/>
+          </p:cNvSpPr>
+          <p:nvPr>
+            <p:ph type="sldNum" sz="quarter" idx="12"/>
+          </p:nvPr>
+        </p:nvSpPr>
+        <p:spPr/>
+        <p:txBody>
+          <a:bodyPr/>
+          <a:lstStyle/>
+          <a:p>
+            <a:fld id="{E6AB8EDD-9EF2-4633-A1C2-4D908C1019B4}" type="slidenum">
+              <a:rPr lang="he-IL" smtClean="0"/>
+              <a:pPr/>
+              <a:t>10</a:t>
+            </a:fld>
+            <a:endParaRPr lang="he-IL" dirty="0"/>
+          </a:p>
+        </p:txBody>
+      </p:sp>
+      <p:sp>
+        <p:nvSpPr>
+          <p:cNvPr id="3" name="Rectangle: Rounded Corners 2">
+            <a:extLst>
+              <a:ext uri="{FF2B5EF4-FFF2-40B4-BE49-F238E27FC236}">
+                <a16:creationId xmlns:a16="http://schemas.microsoft.com/office/drawing/2014/main" id="{D19E09B3-19C0-459B-DBB7-700C7A72C84F}"/>
+              </a:ext>
+            </a:extLst>
+          </p:cNvPr>
+          <p:cNvSpPr/>
+          <p:nvPr/>
+        </p:nvSpPr>
+        <p:spPr>
+          <a:xfrm>
+            <a:off x="877824" y="2364058"/>
+            <a:ext cx="2434089" cy="959005"/>
+          </a:xfrm>
+          <a:prstGeom prst="roundRect">
+            <a:avLst/>
+          </a:prstGeom>
+          <a:noFill/>
+          <a:ln w="38100">
+            <a:solidFill>
+              <a:srgbClr val="FF4343"/>
+            </a:solidFill>
+          </a:ln>
+        </p:spPr>
+        <p:style>
+          <a:lnRef idx="2">
+            <a:schemeClr val="accent1">
+              <a:shade val="15000"/>
+            </a:schemeClr>
+          </a:lnRef>
+          <a:fillRef idx="1">
+            <a:schemeClr val="accent1"/>
+          </a:fillRef>
+          <a:effectRef idx="0">
+            <a:schemeClr val="accent1"/>
+          </a:effectRef>
+          <a:fontRef idx="minor">
+            <a:schemeClr val="lt1"/>
+          </a:fontRef>
+        </p:style>
+        <p:txBody>
+          <a:bodyPr rtlCol="0" anchor="ctr"/>
+          <a:lstStyle/>
+          <a:p>
+            <a:pPr algn="ctr"/>
+            <a:endParaRPr lang="en-IL" dirty="0"/>
+          </a:p>
+        </p:txBody>
+      </p:sp>
+    </p:spTree>
+    <p:extLst>
+      <p:ext uri="{BB962C8B-B14F-4D97-AF65-F5344CB8AC3E}">
+        <p14:creationId xmlns:p14="http://schemas.microsoft.com/office/powerpoint/2010/main" val="2074207589"/>
+      </p:ext>
+    </p:extLst>
+  </p:cSld>
+  <p:clrMapOvr>
+    <a:masterClrMapping/>
+  </p:clrMapOvr>
+</p:sld>
+</file>
+
+<file path=ppt/slides/slide11.xml><?xml version="1.0" encoding="utf-8"?>
+<p:sld xmlns:a="http://schemas.openxmlformats.org/drawingml/2006/main" xmlns:r="http://schemas.openxmlformats.org/officeDocument/2006/relationships" xmlns:p="http://schemas.openxmlformats.org/presentationml/2006/main">
+  <p:cSld>
+    <p:spTree>
+      <p:nvGrpSpPr>
+        <p:cNvPr id="1" name="">
+          <a:extLst>
+            <a:ext uri="{FF2B5EF4-FFF2-40B4-BE49-F238E27FC236}">
               <a16:creationId xmlns:a16="http://schemas.microsoft.com/office/drawing/2014/main" id="{DC8E0CD0-A559-1E21-6735-647E6E23279F}"/>
             </a:ext>
           </a:extLst>
@@ -6890,7 +7118,7 @@
             <a:fld id="{E6AB8EDD-9EF2-4633-A1C2-4D908C1019B4}" type="slidenum">
               <a:rPr lang="he-IL" smtClean="0"/>
               <a:pPr/>
-              <a:t>10</a:t>
+              <a:t>11</a:t>
             </a:fld>
             <a:endParaRPr lang="he-IL" dirty="0"/>
           </a:p>
@@ -6961,7 +7189,7 @@
 </p:sld>
 </file>
 
-<file path=ppt/slides/slide11.xml><?xml version="1.0" encoding="utf-8"?>
+<file path=ppt/slides/slide12.xml><?xml version="1.0" encoding="utf-8"?>
 <p:sld xmlns:a="http://schemas.openxmlformats.org/drawingml/2006/main" xmlns:r="http://schemas.openxmlformats.org/officeDocument/2006/relationships" xmlns:p="http://schemas.openxmlformats.org/presentationml/2006/main">
   <p:cSld>
     <p:spTree>
@@ -7152,7 +7380,7 @@
           <a:p>
             <a:fld id="{E6AB8EDD-9EF2-4633-A1C2-4D908C1019B4}" type="slidenum">
               <a:rPr lang="he-IL" smtClean="0"/>
-              <a:t>11</a:t>
+              <a:t>12</a:t>
             </a:fld>
             <a:endParaRPr lang="he-IL"/>
           </a:p>
@@ -7171,7 +7399,7 @@
 </p:sld>
 </file>
 
-<file path=ppt/slides/slide12.xml><?xml version="1.0" encoding="utf-8"?>
+<file path=ppt/slides/slide13.xml><?xml version="1.0" encoding="utf-8"?>
 <p:sld xmlns:a="http://schemas.openxmlformats.org/drawingml/2006/main" xmlns:r="http://schemas.openxmlformats.org/officeDocument/2006/relationships" xmlns:p="http://schemas.openxmlformats.org/presentationml/2006/main">
   <p:cSld>
     <p:spTree>
@@ -7218,7 +7446,7 @@
             <a:fld id="{E6AB8EDD-9EF2-4633-A1C2-4D908C1019B4}" type="slidenum">
               <a:rPr lang="he-IL" smtClean="0"/>
               <a:pPr/>
-              <a:t>12</a:t>
+              <a:t>13</a:t>
             </a:fld>
             <a:endParaRPr lang="he-IL" dirty="0"/>
           </a:p>
@@ -7289,7 +7517,7 @@
 </p:sld>
 </file>
 
-<file path=ppt/slides/slide13.xml><?xml version="1.0" encoding="utf-8"?>
+<file path=ppt/slides/slide14.xml><?xml version="1.0" encoding="utf-8"?>
 <p:sld xmlns:a="http://schemas.openxmlformats.org/drawingml/2006/main" xmlns:r="http://schemas.openxmlformats.org/officeDocument/2006/relationships" xmlns:p="http://schemas.openxmlformats.org/presentationml/2006/main">
   <p:cSld>
     <p:spTree>
@@ -7440,7 +7668,7 @@
           <a:p>
             <a:fld id="{E6AB8EDD-9EF2-4633-A1C2-4D908C1019B4}" type="slidenum">
               <a:rPr lang="he-IL" smtClean="0"/>
-              <a:t>13</a:t>
+              <a:t>14</a:t>
             </a:fld>
             <a:endParaRPr lang="he-IL"/>
           </a:p>
@@ -7459,7 +7687,7 @@
 </p:sld>
 </file>
 
-<file path=ppt/slides/slide14.xml><?xml version="1.0" encoding="utf-8"?>
+<file path=ppt/slides/slide15.xml><?xml version="1.0" encoding="utf-8"?>
 <p:sld xmlns:a="http://schemas.openxmlformats.org/drawingml/2006/main" xmlns:r="http://schemas.openxmlformats.org/officeDocument/2006/relationships" xmlns:p="http://schemas.openxmlformats.org/presentationml/2006/main">
   <p:cSld>
     <p:spTree>
@@ -7631,7 +7859,7 @@
           <a:p>
             <a:fld id="{E6AB8EDD-9EF2-4633-A1C2-4D908C1019B4}" type="slidenum">
               <a:rPr lang="he-IL" smtClean="0"/>
-              <a:t>14</a:t>
+              <a:t>15</a:t>
             </a:fld>
             <a:endParaRPr lang="he-IL"/>
           </a:p>
@@ -7650,7 +7878,7 @@
 </p:sld>
 </file>
 
-<file path=ppt/slides/slide15.xml><?xml version="1.0" encoding="utf-8"?>
+<file path=ppt/slides/slide16.xml><?xml version="1.0" encoding="utf-8"?>
 <p:sld xmlns:a="http://schemas.openxmlformats.org/drawingml/2006/main" xmlns:r="http://schemas.openxmlformats.org/officeDocument/2006/relationships" xmlns:p="http://schemas.openxmlformats.org/presentationml/2006/main">
   <p:cSld>
     <p:spTree>
@@ -7697,7 +7925,7 @@
             <a:fld id="{E6AB8EDD-9EF2-4633-A1C2-4D908C1019B4}" type="slidenum">
               <a:rPr lang="he-IL" smtClean="0"/>
               <a:pPr/>
-              <a:t>15</a:t>
+              <a:t>16</a:t>
             </a:fld>
             <a:endParaRPr lang="he-IL" dirty="0"/>
           </a:p>
@@ -7768,7 +7996,7 @@
 </p:sld>
 </file>
 
-<file path=ppt/slides/slide16.xml><?xml version="1.0" encoding="utf-8"?>
+<file path=ppt/slides/slide17.xml><?xml version="1.0" encoding="utf-8"?>
 <p:sld xmlns:a="http://schemas.openxmlformats.org/drawingml/2006/main" xmlns:r="http://schemas.openxmlformats.org/officeDocument/2006/relationships" xmlns:p="http://schemas.openxmlformats.org/presentationml/2006/main">
   <p:cSld>
     <p:spTree>
@@ -7943,7 +8171,7 @@
           <a:p>
             <a:fld id="{E6AB8EDD-9EF2-4633-A1C2-4D908C1019B4}" type="slidenum">
               <a:rPr lang="he-IL" smtClean="0"/>
-              <a:t>16</a:t>
+              <a:t>17</a:t>
             </a:fld>
             <a:endParaRPr lang="he-IL"/>
           </a:p>
@@ -7962,7 +8190,7 @@
 </p:sld>
 </file>
 
-<file path=ppt/slides/slide17.xml><?xml version="1.0" encoding="utf-8"?>
+<file path=ppt/slides/slide18.xml><?xml version="1.0" encoding="utf-8"?>
 <p:sld xmlns:a="http://schemas.openxmlformats.org/drawingml/2006/main" xmlns:r="http://schemas.openxmlformats.org/officeDocument/2006/relationships" xmlns:p="http://schemas.openxmlformats.org/presentationml/2006/main">
   <p:cSld>
     <p:spTree>
@@ -8009,7 +8237,7 @@
             <a:fld id="{E6AB8EDD-9EF2-4633-A1C2-4D908C1019B4}" type="slidenum">
               <a:rPr lang="he-IL" smtClean="0"/>
               <a:pPr/>
-              <a:t>17</a:t>
+              <a:t>18</a:t>
             </a:fld>
             <a:endParaRPr lang="he-IL" dirty="0"/>
           </a:p>
@@ -8080,7 +8308,7 @@
 </p:sld>
 </file>
 
-<file path=ppt/slides/slide18.xml><?xml version="1.0" encoding="utf-8"?>
+<file path=ppt/slides/slide19.xml><?xml version="1.0" encoding="utf-8"?>
 <p:sld xmlns:a="http://schemas.openxmlformats.org/drawingml/2006/main" xmlns:r="http://schemas.openxmlformats.org/officeDocument/2006/relationships" xmlns:p="http://schemas.openxmlformats.org/presentationml/2006/main">
   <p:cSld>
     <p:spTree>
@@ -8210,7 +8438,7 @@
           <a:p>
             <a:fld id="{E6AB8EDD-9EF2-4633-A1C2-4D908C1019B4}" type="slidenum">
               <a:rPr lang="he-IL" smtClean="0"/>
-              <a:t>18</a:t>
+              <a:t>19</a:t>
             </a:fld>
             <a:endParaRPr lang="he-IL"/>
           </a:p>
@@ -8220,124 +8448,6 @@
     <p:extLst>
       <p:ext uri="{BB962C8B-B14F-4D97-AF65-F5344CB8AC3E}">
         <p14:creationId xmlns:p14="http://schemas.microsoft.com/office/powerpoint/2010/main" val="4294966915"/>
-      </p:ext>
-    </p:extLst>
-  </p:cSld>
-  <p:clrMapOvr>
-    <a:masterClrMapping/>
-  </p:clrMapOvr>
-</p:sld>
-</file>
-
-<file path=ppt/slides/slide19.xml><?xml version="1.0" encoding="utf-8"?>
-<p:sld xmlns:a="http://schemas.openxmlformats.org/drawingml/2006/main" xmlns:r="http://schemas.openxmlformats.org/officeDocument/2006/relationships" xmlns:p="http://schemas.openxmlformats.org/presentationml/2006/main">
-  <p:cSld>
-    <p:spTree>
-      <p:nvGrpSpPr>
-        <p:cNvPr id="1" name="">
-          <a:extLst>
-            <a:ext uri="{FF2B5EF4-FFF2-40B4-BE49-F238E27FC236}">
-              <a16:creationId xmlns:a16="http://schemas.microsoft.com/office/drawing/2014/main" id="{B1355F20-3769-8063-49C1-4D33BDCEF843}"/>
-            </a:ext>
-          </a:extLst>
-        </p:cNvPr>
-        <p:cNvGrpSpPr/>
-        <p:nvPr/>
-      </p:nvGrpSpPr>
-      <p:grpSpPr>
-        <a:xfrm>
-          <a:off x="0" y="0"/>
-          <a:ext cx="0" cy="0"/>
-          <a:chOff x="0" y="0"/>
-          <a:chExt cx="0" cy="0"/>
-        </a:xfrm>
-      </p:grpSpPr>
-      <p:sp>
-        <p:nvSpPr>
-          <p:cNvPr id="2" name="Slide Number Placeholder 1">
-            <a:extLst>
-              <a:ext uri="{FF2B5EF4-FFF2-40B4-BE49-F238E27FC236}">
-                <a16:creationId xmlns:a16="http://schemas.microsoft.com/office/drawing/2014/main" id="{C678F141-5A91-3D76-0E83-86E67DAF0E63}"/>
-              </a:ext>
-            </a:extLst>
-          </p:cNvPr>
-          <p:cNvSpPr>
-            <a:spLocks noGrp="1"/>
-          </p:cNvSpPr>
-          <p:nvPr>
-            <p:ph type="sldNum" sz="quarter" idx="12"/>
-          </p:nvPr>
-        </p:nvSpPr>
-        <p:spPr/>
-        <p:txBody>
-          <a:bodyPr/>
-          <a:lstStyle/>
-          <a:p>
-            <a:fld id="{E6AB8EDD-9EF2-4633-A1C2-4D908C1019B4}" type="slidenum">
-              <a:rPr lang="he-IL" smtClean="0"/>
-              <a:pPr/>
-              <a:t>19</a:t>
-            </a:fld>
-            <a:endParaRPr lang="he-IL" dirty="0"/>
-          </a:p>
-        </p:txBody>
-      </p:sp>
-      <p:sp>
-        <p:nvSpPr>
-          <p:cNvPr id="6" name="Rectangle: Rounded Corners 5">
-            <a:extLst>
-              <a:ext uri="{FF2B5EF4-FFF2-40B4-BE49-F238E27FC236}">
-                <a16:creationId xmlns:a16="http://schemas.microsoft.com/office/drawing/2014/main" id="{A8B4057E-2496-168A-678C-2939AA01B135}"/>
-              </a:ext>
-            </a:extLst>
-          </p:cNvPr>
-          <p:cNvSpPr/>
-          <p:nvPr/>
-        </p:nvSpPr>
-        <p:spPr>
-          <a:xfrm>
-            <a:off x="6674005" y="3876906"/>
-            <a:ext cx="2631688" cy="959005"/>
-          </a:xfrm>
-          <a:prstGeom prst="roundRect">
-            <a:avLst/>
-          </a:prstGeom>
-          <a:noFill/>
-          <a:ln w="38100">
-            <a:solidFill>
-              <a:srgbClr val="FF4343"/>
-            </a:solidFill>
-          </a:ln>
-        </p:spPr>
-        <p:style>
-          <a:lnRef idx="2">
-            <a:schemeClr val="accent1">
-              <a:shade val="15000"/>
-            </a:schemeClr>
-          </a:lnRef>
-          <a:fillRef idx="1">
-            <a:schemeClr val="accent1"/>
-          </a:fillRef>
-          <a:effectRef idx="0">
-            <a:schemeClr val="accent1"/>
-          </a:effectRef>
-          <a:fontRef idx="minor">
-            <a:schemeClr val="lt1"/>
-          </a:fontRef>
-        </p:style>
-        <p:txBody>
-          <a:bodyPr rtlCol="0" anchor="ctr"/>
-          <a:lstStyle/>
-          <a:p>
-            <a:pPr algn="ctr"/>
-            <a:endParaRPr lang="en-IL" dirty="0"/>
-          </a:p>
-        </p:txBody>
-      </p:sp>
-    </p:spTree>
-    <p:extLst>
-      <p:ext uri="{BB962C8B-B14F-4D97-AF65-F5344CB8AC3E}">
-        <p14:creationId xmlns:p14="http://schemas.microsoft.com/office/powerpoint/2010/main" val="1445114060"/>
       </p:ext>
     </p:extLst>
   </p:cSld>
@@ -8567,6 +8677,124 @@
         <p:cNvPr id="1" name="">
           <a:extLst>
             <a:ext uri="{FF2B5EF4-FFF2-40B4-BE49-F238E27FC236}">
+              <a16:creationId xmlns:a16="http://schemas.microsoft.com/office/drawing/2014/main" id="{B1355F20-3769-8063-49C1-4D33BDCEF843}"/>
+            </a:ext>
+          </a:extLst>
+        </p:cNvPr>
+        <p:cNvGrpSpPr/>
+        <p:nvPr/>
+      </p:nvGrpSpPr>
+      <p:grpSpPr>
+        <a:xfrm>
+          <a:off x="0" y="0"/>
+          <a:ext cx="0" cy="0"/>
+          <a:chOff x="0" y="0"/>
+          <a:chExt cx="0" cy="0"/>
+        </a:xfrm>
+      </p:grpSpPr>
+      <p:sp>
+        <p:nvSpPr>
+          <p:cNvPr id="2" name="Slide Number Placeholder 1">
+            <a:extLst>
+              <a:ext uri="{FF2B5EF4-FFF2-40B4-BE49-F238E27FC236}">
+                <a16:creationId xmlns:a16="http://schemas.microsoft.com/office/drawing/2014/main" id="{C678F141-5A91-3D76-0E83-86E67DAF0E63}"/>
+              </a:ext>
+            </a:extLst>
+          </p:cNvPr>
+          <p:cNvSpPr>
+            <a:spLocks noGrp="1"/>
+          </p:cNvSpPr>
+          <p:nvPr>
+            <p:ph type="sldNum" sz="quarter" idx="12"/>
+          </p:nvPr>
+        </p:nvSpPr>
+        <p:spPr/>
+        <p:txBody>
+          <a:bodyPr/>
+          <a:lstStyle/>
+          <a:p>
+            <a:fld id="{E6AB8EDD-9EF2-4633-A1C2-4D908C1019B4}" type="slidenum">
+              <a:rPr lang="he-IL" smtClean="0"/>
+              <a:pPr/>
+              <a:t>20</a:t>
+            </a:fld>
+            <a:endParaRPr lang="he-IL" dirty="0"/>
+          </a:p>
+        </p:txBody>
+      </p:sp>
+      <p:sp>
+        <p:nvSpPr>
+          <p:cNvPr id="6" name="Rectangle: Rounded Corners 5">
+            <a:extLst>
+              <a:ext uri="{FF2B5EF4-FFF2-40B4-BE49-F238E27FC236}">
+                <a16:creationId xmlns:a16="http://schemas.microsoft.com/office/drawing/2014/main" id="{A8B4057E-2496-168A-678C-2939AA01B135}"/>
+              </a:ext>
+            </a:extLst>
+          </p:cNvPr>
+          <p:cNvSpPr/>
+          <p:nvPr/>
+        </p:nvSpPr>
+        <p:spPr>
+          <a:xfrm>
+            <a:off x="6674005" y="3876906"/>
+            <a:ext cx="2631688" cy="959005"/>
+          </a:xfrm>
+          <a:prstGeom prst="roundRect">
+            <a:avLst/>
+          </a:prstGeom>
+          <a:noFill/>
+          <a:ln w="38100">
+            <a:solidFill>
+              <a:srgbClr val="FF4343"/>
+            </a:solidFill>
+          </a:ln>
+        </p:spPr>
+        <p:style>
+          <a:lnRef idx="2">
+            <a:schemeClr val="accent1">
+              <a:shade val="15000"/>
+            </a:schemeClr>
+          </a:lnRef>
+          <a:fillRef idx="1">
+            <a:schemeClr val="accent1"/>
+          </a:fillRef>
+          <a:effectRef idx="0">
+            <a:schemeClr val="accent1"/>
+          </a:effectRef>
+          <a:fontRef idx="minor">
+            <a:schemeClr val="lt1"/>
+          </a:fontRef>
+        </p:style>
+        <p:txBody>
+          <a:bodyPr rtlCol="0" anchor="ctr"/>
+          <a:lstStyle/>
+          <a:p>
+            <a:pPr algn="ctr"/>
+            <a:endParaRPr lang="en-IL" dirty="0"/>
+          </a:p>
+        </p:txBody>
+      </p:sp>
+    </p:spTree>
+    <p:extLst>
+      <p:ext uri="{BB962C8B-B14F-4D97-AF65-F5344CB8AC3E}">
+        <p14:creationId xmlns:p14="http://schemas.microsoft.com/office/powerpoint/2010/main" val="1445114060"/>
+      </p:ext>
+    </p:extLst>
+  </p:cSld>
+  <p:clrMapOvr>
+    <a:masterClrMapping/>
+  </p:clrMapOvr>
+</p:sld>
+</file>
+
+<file path=ppt/slides/slide21.xml><?xml version="1.0" encoding="utf-8"?>
+<p:sld xmlns:a="http://schemas.openxmlformats.org/drawingml/2006/main" xmlns:r="http://schemas.openxmlformats.org/officeDocument/2006/relationships" xmlns:p="http://schemas.openxmlformats.org/presentationml/2006/main">
+  <p:cSld>
+    <p:spTree>
+      <p:nvGrpSpPr>
+        <p:cNvPr id="1" name="">
+          <a:extLst>
+            <a:ext uri="{FF2B5EF4-FFF2-40B4-BE49-F238E27FC236}">
               <a16:creationId xmlns:a16="http://schemas.microsoft.com/office/drawing/2014/main" id="{858E27CD-C8FF-B185-45D8-666A78A68D92}"/>
             </a:ext>
           </a:extLst>
@@ -8733,7 +8961,7 @@
           <a:p>
             <a:fld id="{E6AB8EDD-9EF2-4633-A1C2-4D908C1019B4}" type="slidenum">
               <a:rPr lang="he-IL" smtClean="0"/>
-              <a:t>20</a:t>
+              <a:t>21</a:t>
             </a:fld>
             <a:endParaRPr lang="he-IL"/>
           </a:p>
@@ -8752,7 +8980,7 @@
 </p:sld>
 </file>
 
-<file path=ppt/slides/slide21.xml><?xml version="1.0" encoding="utf-8"?>
+<file path=ppt/slides/slide22.xml><?xml version="1.0" encoding="utf-8"?>
 <p:sld xmlns:a="http://schemas.openxmlformats.org/drawingml/2006/main" xmlns:r="http://schemas.openxmlformats.org/officeDocument/2006/relationships" xmlns:p="http://schemas.openxmlformats.org/presentationml/2006/main">
   <p:cSld>
     <p:spTree>
@@ -8834,7 +9062,7 @@
           <a:p>
             <a:fld id="{E6AB8EDD-9EF2-4633-A1C2-4D908C1019B4}" type="slidenum">
               <a:rPr lang="he-IL" smtClean="0"/>
-              <a:t>21</a:t>
+              <a:t>22</a:t>
             </a:fld>
             <a:endParaRPr lang="he-IL"/>
           </a:p>
@@ -8888,7 +9116,7 @@
 </p:sld>
 </file>
 
-<file path=ppt/slides/slide22.xml><?xml version="1.0" encoding="utf-8"?>
+<file path=ppt/slides/slide23.xml><?xml version="1.0" encoding="utf-8"?>
 <p:sld xmlns:a="http://schemas.openxmlformats.org/drawingml/2006/main" xmlns:r="http://schemas.openxmlformats.org/officeDocument/2006/relationships" xmlns:p="http://schemas.openxmlformats.org/presentationml/2006/main">
   <p:cSld>
     <p:spTree>
@@ -8935,7 +9163,7 @@
             <a:fld id="{E6AB8EDD-9EF2-4633-A1C2-4D908C1019B4}" type="slidenum">
               <a:rPr lang="he-IL" smtClean="0"/>
               <a:pPr/>
-              <a:t>22</a:t>
+              <a:t>23</a:t>
             </a:fld>
             <a:endParaRPr lang="he-IL" dirty="0"/>
           </a:p>
@@ -9006,7 +9234,7 @@
 </p:sld>
 </file>
 
-<file path=ppt/slides/slide23.xml><?xml version="1.0" encoding="utf-8"?>
+<file path=ppt/slides/slide24.xml><?xml version="1.0" encoding="utf-8"?>
 <p:sld xmlns:a="http://schemas.openxmlformats.org/drawingml/2006/main" xmlns:r="http://schemas.openxmlformats.org/officeDocument/2006/relationships" xmlns:p="http://schemas.openxmlformats.org/presentationml/2006/main">
   <p:cSld>
     <p:spTree>
@@ -9135,7 +9363,7 @@
           <a:p>
             <a:fld id="{E6AB8EDD-9EF2-4633-A1C2-4D908C1019B4}" type="slidenum">
               <a:rPr lang="he-IL" smtClean="0"/>
-              <a:t>23</a:t>
+              <a:t>24</a:t>
             </a:fld>
             <a:endParaRPr lang="he-IL"/>
           </a:p>
@@ -9154,7 +9382,7 @@
 </p:sld>
 </file>
 
-<file path=ppt/slides/slide24.xml><?xml version="1.0" encoding="utf-8"?>
+<file path=ppt/slides/slide25.xml><?xml version="1.0" encoding="utf-8"?>
 <p:sld xmlns:a="http://schemas.openxmlformats.org/drawingml/2006/main" xmlns:r="http://schemas.openxmlformats.org/officeDocument/2006/relationships" xmlns:p="http://schemas.openxmlformats.org/presentationml/2006/main">
   <p:cSld>
     <p:spTree>
@@ -9297,7 +9525,7 @@
           <a:p>
             <a:fld id="{E6AB8EDD-9EF2-4633-A1C2-4D908C1019B4}" type="slidenum">
               <a:rPr lang="he-IL" smtClean="0"/>
-              <a:t>24</a:t>
+              <a:t>25</a:t>
             </a:fld>
             <a:endParaRPr lang="he-IL"/>
           </a:p>
@@ -9316,7 +9544,7 @@
 </p:sld>
 </file>
 
-<file path=ppt/slides/slide25.xml><?xml version="1.0" encoding="utf-8"?>
+<file path=ppt/slides/slide26.xml><?xml version="1.0" encoding="utf-8"?>
 <p:sld xmlns:a="http://schemas.openxmlformats.org/drawingml/2006/main" xmlns:r="http://schemas.openxmlformats.org/officeDocument/2006/relationships" xmlns:p="http://schemas.openxmlformats.org/presentationml/2006/main">
   <p:cSld>
     <p:spTree>
@@ -9369,7 +9597,7 @@
           <a:p>
             <a:r>
               <a:rPr lang="en-GB" dirty="0"/>
-              <a:t>Backbone Graph</a:t>
+              <a:t>IO Indicators</a:t>
             </a:r>
             <a:endParaRPr lang="en-IL" dirty="0"/>
           </a:p>
@@ -9398,7 +9626,7 @@
           <a:p>
             <a:fld id="{E6AB8EDD-9EF2-4633-A1C2-4D908C1019B4}" type="slidenum">
               <a:rPr lang="he-IL" smtClean="0"/>
-              <a:t>25</a:t>
+              <a:t>26</a:t>
             </a:fld>
             <a:endParaRPr lang="he-IL"/>
           </a:p>
@@ -10025,7 +10253,7 @@
 </p:sld>
 </file>
 
-<file path=ppt/slides/slide26.xml><?xml version="1.0" encoding="utf-8"?>
+<file path=ppt/slides/slide27.xml><?xml version="1.0" encoding="utf-8"?>
 <p:sld xmlns:a="http://schemas.openxmlformats.org/drawingml/2006/main" xmlns:r="http://schemas.openxmlformats.org/officeDocument/2006/relationships" xmlns:p="http://schemas.openxmlformats.org/presentationml/2006/main">
   <p:cSld>
     <p:spTree>
@@ -10078,7 +10306,7 @@
           <a:p>
             <a:r>
               <a:rPr lang="en-GB" dirty="0"/>
-              <a:t>IO Indicators</a:t>
+              <a:t>IO Indicators – Information Gain</a:t>
             </a:r>
             <a:endParaRPr lang="en-IL" dirty="0"/>
           </a:p>
@@ -10107,7 +10335,7 @@
           <a:p>
             <a:fld id="{E6AB8EDD-9EF2-4633-A1C2-4D908C1019B4}" type="slidenum">
               <a:rPr lang="he-IL" smtClean="0"/>
-              <a:t>26</a:t>
+              <a:t>27</a:t>
             </a:fld>
             <a:endParaRPr lang="he-IL"/>
           </a:p>
@@ -10578,7 +10806,7 @@
           <p:nvPr>
             <p:extLst>
               <p:ext uri="{D42A27DB-BD31-4B8C-83A1-F6EECF244321}">
-                <p14:modId xmlns:p14="http://schemas.microsoft.com/office/powerpoint/2010/main" val="176423838"/>
+                <p14:modId xmlns:p14="http://schemas.microsoft.com/office/powerpoint/2010/main" val="1248197935"/>
               </p:ext>
             </p:extLst>
           </p:nvPr>
@@ -10726,6 +10954,23 @@
                           <a:schemeClr val="tx1"/>
                         </a:solidFill>
                       </a:endParaRPr>
+                    </a:p>
+                    <a:p>
+                      <a:pPr marL="285750" indent="-285750">
+                        <a:lnSpc>
+                          <a:spcPct val="150000"/>
+                        </a:lnSpc>
+                        <a:buFont typeface="Arial" panose="020B0604020202020204" pitchFamily="34" charset="0"/>
+                        <a:buChar char="•"/>
+                      </a:pPr>
+                      <a:r>
+                        <a:rPr lang="en-US" b="0" dirty="0">
+                          <a:solidFill>
+                            <a:srgbClr val="F58377"/>
+                          </a:solidFill>
+                        </a:rPr>
+                        <a:t>More details on the next slides…</a:t>
+                      </a:r>
                     </a:p>
                     <a:p>
                       <a:pPr>
@@ -11177,7 +11422,7 @@
             </a:pPr>
             <a:r>
               <a:rPr lang="en-GB" dirty="0"/>
-              <a:t>- Post metadata: account ID, reply-to account ID (anonymized)</a:t>
+              <a:t>- Post metadata: account ID, reply-to account ID (anonymized)…</a:t>
             </a:r>
           </a:p>
           <a:p>
@@ -11186,7 +11431,7 @@
             </a:pPr>
             <a:r>
               <a:rPr lang="en-GB" dirty="0"/>
-              <a:t>- Account metadata: creation date, follower count</a:t>
+              <a:t>- Account metadata: creation date, follower count…</a:t>
             </a:r>
           </a:p>
           <a:p>
@@ -11299,6 +11544,216 @@
 </file>
 
 <file path=ppt/slides/slide7.xml><?xml version="1.0" encoding="utf-8"?>
+<p:sld xmlns:a="http://schemas.openxmlformats.org/drawingml/2006/main" xmlns:r="http://schemas.openxmlformats.org/officeDocument/2006/relationships" xmlns:p="http://schemas.openxmlformats.org/presentationml/2006/main">
+  <p:cSld>
+    <p:spTree>
+      <p:nvGrpSpPr>
+        <p:cNvPr id="1" name="">
+          <a:extLst>
+            <a:ext uri="{FF2B5EF4-FFF2-40B4-BE49-F238E27FC236}">
+              <a16:creationId xmlns:a16="http://schemas.microsoft.com/office/drawing/2014/main" id="{F12D0628-6780-1384-CA4B-A5131543DFEB}"/>
+            </a:ext>
+          </a:extLst>
+        </p:cNvPr>
+        <p:cNvGrpSpPr/>
+        <p:nvPr/>
+      </p:nvGrpSpPr>
+      <p:grpSpPr>
+        <a:xfrm>
+          <a:off x="0" y="0"/>
+          <a:ext cx="0" cy="0"/>
+          <a:chOff x="0" y="0"/>
+          <a:chExt cx="0" cy="0"/>
+        </a:xfrm>
+      </p:grpSpPr>
+      <p:sp>
+        <p:nvSpPr>
+          <p:cNvPr id="2" name="Title 1">
+            <a:extLst>
+              <a:ext uri="{FF2B5EF4-FFF2-40B4-BE49-F238E27FC236}">
+                <a16:creationId xmlns:a16="http://schemas.microsoft.com/office/drawing/2014/main" id="{B4026D9D-D869-889F-EA1B-8CA3DA16C901}"/>
+              </a:ext>
+            </a:extLst>
+          </p:cNvPr>
+          <p:cNvSpPr>
+            <a:spLocks noGrp="1"/>
+          </p:cNvSpPr>
+          <p:nvPr>
+            <p:ph type="title"/>
+          </p:nvPr>
+        </p:nvSpPr>
+        <p:spPr>
+          <a:xfrm>
+            <a:off x="3072268" y="401637"/>
+            <a:ext cx="8753475" cy="1325563"/>
+          </a:xfrm>
+        </p:spPr>
+        <p:txBody>
+          <a:bodyPr anchor="ctr">
+            <a:normAutofit/>
+          </a:bodyPr>
+          <a:lstStyle/>
+          <a:p>
+            <a:r>
+              <a:rPr lang="en-IL" dirty="0"/>
+              <a:t> </a:t>
+            </a:r>
+            <a:r>
+              <a:rPr lang="en-GB" dirty="0"/>
+              <a:t>Labeled </a:t>
+            </a:r>
+            <a:r>
+              <a:rPr lang="en-US" dirty="0"/>
+              <a:t>IO Corpus - Ecuador</a:t>
+            </a:r>
+            <a:endParaRPr lang="en-IL" dirty="0"/>
+          </a:p>
+        </p:txBody>
+      </p:sp>
+      <p:sp>
+        <p:nvSpPr>
+          <p:cNvPr id="3" name="Content Placeholder 2">
+            <a:extLst>
+              <a:ext uri="{FF2B5EF4-FFF2-40B4-BE49-F238E27FC236}">
+                <a16:creationId xmlns:a16="http://schemas.microsoft.com/office/drawing/2014/main" id="{7BBB860E-190A-B98A-87F4-A07A0B4C4E89}"/>
+              </a:ext>
+            </a:extLst>
+          </p:cNvPr>
+          <p:cNvSpPr>
+            <a:spLocks noGrp="1"/>
+          </p:cNvSpPr>
+          <p:nvPr>
+            <p:ph sz="half" idx="1"/>
+          </p:nvPr>
+        </p:nvSpPr>
+        <p:spPr>
+          <a:xfrm>
+            <a:off x="6096000" y="2011536"/>
+            <a:ext cx="5099824" cy="4351338"/>
+          </a:xfrm>
+        </p:spPr>
+        <p:txBody>
+          <a:bodyPr>
+            <a:normAutofit/>
+          </a:bodyPr>
+          <a:lstStyle/>
+          <a:p>
+            <a:r>
+              <a:rPr lang="en-US" dirty="0"/>
+              <a:t>787 IO accounts | 21,138 Control accounts</a:t>
+            </a:r>
+          </a:p>
+          <a:p>
+            <a:pPr marL="0" indent="0">
+              <a:buNone/>
+            </a:pPr>
+            <a:endParaRPr lang="en-US" dirty="0"/>
+          </a:p>
+          <a:p>
+            <a:r>
+              <a:rPr lang="en-US" dirty="0"/>
+              <a:t>700K IO tweets | 770K Control tweets</a:t>
+            </a:r>
+          </a:p>
+        </p:txBody>
+      </p:sp>
+      <p:sp>
+        <p:nvSpPr>
+          <p:cNvPr id="4" name="Slide Number Placeholder 3">
+            <a:extLst>
+              <a:ext uri="{FF2B5EF4-FFF2-40B4-BE49-F238E27FC236}">
+                <a16:creationId xmlns:a16="http://schemas.microsoft.com/office/drawing/2014/main" id="{C2710E3D-0ECC-E98C-4D94-B7BC6D78454C}"/>
+              </a:ext>
+            </a:extLst>
+          </p:cNvPr>
+          <p:cNvSpPr>
+            <a:spLocks noGrp="1"/>
+          </p:cNvSpPr>
+          <p:nvPr>
+            <p:ph type="sldNum" sz="quarter" idx="12"/>
+          </p:nvPr>
+        </p:nvSpPr>
+        <p:spPr>
+          <a:xfrm>
+            <a:off x="11728704" y="6464649"/>
+            <a:ext cx="452233" cy="365125"/>
+          </a:xfrm>
+        </p:spPr>
+        <p:txBody>
+          <a:bodyPr anchor="ctr">
+            <a:normAutofit/>
+          </a:bodyPr>
+          <a:lstStyle/>
+          <a:p>
+            <a:pPr>
+              <a:spcAft>
+                <a:spcPts val="600"/>
+              </a:spcAft>
+            </a:pPr>
+            <a:fld id="{E6AB8EDD-9EF2-4633-A1C2-4D908C1019B4}" type="slidenum">
+              <a:rPr lang="he-IL" smtClean="0"/>
+              <a:pPr>
+                <a:spcAft>
+                  <a:spcPts val="600"/>
+                </a:spcAft>
+              </a:pPr>
+              <a:t>7</a:t>
+            </a:fld>
+            <a:endParaRPr lang="he-IL"/>
+          </a:p>
+        </p:txBody>
+      </p:sp>
+      <p:pic>
+        <p:nvPicPr>
+          <p:cNvPr id="6" name="Picture 5" descr="A timeline of the year&#10;&#10;AI-generated content may be incorrect.">
+            <a:extLst>
+              <a:ext uri="{FF2B5EF4-FFF2-40B4-BE49-F238E27FC236}">
+                <a16:creationId xmlns:a16="http://schemas.microsoft.com/office/drawing/2014/main" id="{873AE556-26CD-7E9D-1F69-69C59E614B75}"/>
+              </a:ext>
+            </a:extLst>
+          </p:cNvPr>
+          <p:cNvPicPr>
+            <a:picLocks noChangeAspect="1"/>
+          </p:cNvPicPr>
+          <p:nvPr/>
+        </p:nvPicPr>
+        <p:blipFill>
+          <a:blip r:embed="rId3">
+            <a:extLst>
+              <a:ext uri="{28A0092B-C50C-407E-A947-70E740481C1C}">
+                <a14:useLocalDpi xmlns:a14="http://schemas.microsoft.com/office/drawing/2010/main" val="0"/>
+              </a:ext>
+            </a:extLst>
+          </a:blip>
+          <a:srcRect l="8596" t="9898" r="5901" b="6568"/>
+          <a:stretch>
+            <a:fillRect/>
+          </a:stretch>
+        </p:blipFill>
+        <p:spPr>
+          <a:xfrm>
+            <a:off x="1984917" y="1371227"/>
+            <a:ext cx="3668752" cy="5376346"/>
+          </a:xfrm>
+          <a:prstGeom prst="rect">
+            <a:avLst/>
+          </a:prstGeom>
+        </p:spPr>
+      </p:pic>
+    </p:spTree>
+    <p:extLst>
+      <p:ext uri="{BB962C8B-B14F-4D97-AF65-F5344CB8AC3E}">
+        <p14:creationId xmlns:p14="http://schemas.microsoft.com/office/powerpoint/2010/main" val="437478658"/>
+      </p:ext>
+    </p:extLst>
+  </p:cSld>
+  <p:clrMapOvr>
+    <a:masterClrMapping/>
+  </p:clrMapOvr>
+</p:sld>
+</file>
+
+<file path=ppt/slides/slide8.xml><?xml version="1.0" encoding="utf-8"?>
 <p:sld xmlns:a="http://schemas.openxmlformats.org/drawingml/2006/main" xmlns:r="http://schemas.openxmlformats.org/officeDocument/2006/relationships" xmlns:p="http://schemas.openxmlformats.org/presentationml/2006/main" show="0">
   <p:cSld>
     <p:spTree>
@@ -11345,7 +11800,7 @@
             <a:fld id="{E6AB8EDD-9EF2-4633-A1C2-4D908C1019B4}" type="slidenum">
               <a:rPr lang="he-IL" smtClean="0"/>
               <a:pPr/>
-              <a:t>7</a:t>
+              <a:t>8</a:t>
             </a:fld>
             <a:endParaRPr lang="he-IL" dirty="0"/>
           </a:p>
@@ -11728,7 +12183,7 @@
 </p:sld>
 </file>
 
-<file path=ppt/slides/slide8.xml><?xml version="1.0" encoding="utf-8"?>
+<file path=ppt/slides/slide9.xml><?xml version="1.0" encoding="utf-8"?>
 <p:sld xmlns:a="http://schemas.openxmlformats.org/drawingml/2006/main" xmlns:r="http://schemas.openxmlformats.org/officeDocument/2006/relationships" xmlns:p="http://schemas.openxmlformats.org/presentationml/2006/main">
   <p:cSld>
     <p:spTree>
@@ -11769,7 +12224,7 @@
             <a:fld id="{E6AB8EDD-9EF2-4633-A1C2-4D908C1019B4}" type="slidenum">
               <a:rPr lang="he-IL" smtClean="0"/>
               <a:pPr/>
-              <a:t>8</a:t>
+              <a:t>9</a:t>
             </a:fld>
             <a:endParaRPr lang="he-IL" dirty="0"/>
           </a:p>
@@ -11779,124 +12234,6 @@
     <p:extLst>
       <p:ext uri="{BB962C8B-B14F-4D97-AF65-F5344CB8AC3E}">
         <p14:creationId xmlns:p14="http://schemas.microsoft.com/office/powerpoint/2010/main" val="1613618911"/>
-      </p:ext>
-    </p:extLst>
-  </p:cSld>
-  <p:clrMapOvr>
-    <a:masterClrMapping/>
-  </p:clrMapOvr>
-</p:sld>
-</file>
-
-<file path=ppt/slides/slide9.xml><?xml version="1.0" encoding="utf-8"?>
-<p:sld xmlns:a="http://schemas.openxmlformats.org/drawingml/2006/main" xmlns:r="http://schemas.openxmlformats.org/officeDocument/2006/relationships" xmlns:p="http://schemas.openxmlformats.org/presentationml/2006/main">
-  <p:cSld>
-    <p:spTree>
-      <p:nvGrpSpPr>
-        <p:cNvPr id="1" name="">
-          <a:extLst>
-            <a:ext uri="{FF2B5EF4-FFF2-40B4-BE49-F238E27FC236}">
-              <a16:creationId xmlns:a16="http://schemas.microsoft.com/office/drawing/2014/main" id="{C7E8398B-F7AB-19EE-5B85-9AC3E8C31BB0}"/>
-            </a:ext>
-          </a:extLst>
-        </p:cNvPr>
-        <p:cNvGrpSpPr/>
-        <p:nvPr/>
-      </p:nvGrpSpPr>
-      <p:grpSpPr>
-        <a:xfrm>
-          <a:off x="0" y="0"/>
-          <a:ext cx="0" cy="0"/>
-          <a:chOff x="0" y="0"/>
-          <a:chExt cx="0" cy="0"/>
-        </a:xfrm>
-      </p:grpSpPr>
-      <p:sp>
-        <p:nvSpPr>
-          <p:cNvPr id="2" name="Slide Number Placeholder 1">
-            <a:extLst>
-              <a:ext uri="{FF2B5EF4-FFF2-40B4-BE49-F238E27FC236}">
-                <a16:creationId xmlns:a16="http://schemas.microsoft.com/office/drawing/2014/main" id="{98329E4F-8D65-CC0A-06D5-07F7C6FA1A50}"/>
-              </a:ext>
-            </a:extLst>
-          </p:cNvPr>
-          <p:cNvSpPr>
-            <a:spLocks noGrp="1"/>
-          </p:cNvSpPr>
-          <p:nvPr>
-            <p:ph type="sldNum" sz="quarter" idx="12"/>
-          </p:nvPr>
-        </p:nvSpPr>
-        <p:spPr/>
-        <p:txBody>
-          <a:bodyPr/>
-          <a:lstStyle/>
-          <a:p>
-            <a:fld id="{E6AB8EDD-9EF2-4633-A1C2-4D908C1019B4}" type="slidenum">
-              <a:rPr lang="he-IL" smtClean="0"/>
-              <a:pPr/>
-              <a:t>9</a:t>
-            </a:fld>
-            <a:endParaRPr lang="he-IL" dirty="0"/>
-          </a:p>
-        </p:txBody>
-      </p:sp>
-      <p:sp>
-        <p:nvSpPr>
-          <p:cNvPr id="3" name="Rectangle: Rounded Corners 2">
-            <a:extLst>
-              <a:ext uri="{FF2B5EF4-FFF2-40B4-BE49-F238E27FC236}">
-                <a16:creationId xmlns:a16="http://schemas.microsoft.com/office/drawing/2014/main" id="{D19E09B3-19C0-459B-DBB7-700C7A72C84F}"/>
-              </a:ext>
-            </a:extLst>
-          </p:cNvPr>
-          <p:cNvSpPr/>
-          <p:nvPr/>
-        </p:nvSpPr>
-        <p:spPr>
-          <a:xfrm>
-            <a:off x="877824" y="2364058"/>
-            <a:ext cx="2434089" cy="959005"/>
-          </a:xfrm>
-          <a:prstGeom prst="roundRect">
-            <a:avLst/>
-          </a:prstGeom>
-          <a:noFill/>
-          <a:ln w="38100">
-            <a:solidFill>
-              <a:srgbClr val="FF4343"/>
-            </a:solidFill>
-          </a:ln>
-        </p:spPr>
-        <p:style>
-          <a:lnRef idx="2">
-            <a:schemeClr val="accent1">
-              <a:shade val="15000"/>
-            </a:schemeClr>
-          </a:lnRef>
-          <a:fillRef idx="1">
-            <a:schemeClr val="accent1"/>
-          </a:fillRef>
-          <a:effectRef idx="0">
-            <a:schemeClr val="accent1"/>
-          </a:effectRef>
-          <a:fontRef idx="minor">
-            <a:schemeClr val="lt1"/>
-          </a:fontRef>
-        </p:style>
-        <p:txBody>
-          <a:bodyPr rtlCol="0" anchor="ctr"/>
-          <a:lstStyle/>
-          <a:p>
-            <a:pPr algn="ctr"/>
-            <a:endParaRPr lang="en-IL" dirty="0"/>
-          </a:p>
-        </p:txBody>
-      </p:sp>
-    </p:spTree>
-    <p:extLst>
-      <p:ext uri="{BB962C8B-B14F-4D97-AF65-F5344CB8AC3E}">
-        <p14:creationId xmlns:p14="http://schemas.microsoft.com/office/powerpoint/2010/main" val="2074207589"/>
       </p:ext>
     </p:extLst>
   </p:cSld>

--- a/docs/cbg_saback.pptx
+++ b/docs/cbg_saback.pptx
@@ -6646,7 +6646,7 @@
                   <a:prstClr val="white"/>
                 </a:solidFill>
               </a:rPr>
-              <a:t>05.01.2026</a:t>
+              <a:t>07.01.2026</a:t>
             </a:r>
           </a:p>
           <a:p>

--- a/docs/cbg_saback.pptx
+++ b/docs/cbg_saback.pptx
@@ -5,7 +5,7 @@
     <p:sldMasterId id="2147483648" r:id="rId1"/>
   </p:sldMasterIdLst>
   <p:notesMasterIdLst>
-    <p:notesMasterId r:id="rId29"/>
+    <p:notesMasterId r:id="rId31"/>
   </p:notesMasterIdLst>
   <p:sldIdLst>
     <p:sldId id="1574" r:id="rId2"/>
@@ -35,6 +35,8 @@
     <p:sldId id="1612" r:id="rId26"/>
     <p:sldId id="1613" r:id="rId27"/>
     <p:sldId id="1595" r:id="rId28"/>
+    <p:sldId id="1615" r:id="rId29"/>
+    <p:sldId id="260" r:id="rId30"/>
   </p:sldIdLst>
   <p:sldSz cx="12192000" cy="6858000"/>
   <p:notesSz cx="6858000" cy="9144000"/>
@@ -165,6 +167,8 @@
             <p14:sldId id="1612"/>
             <p14:sldId id="1613"/>
             <p14:sldId id="1595"/>
+            <p14:sldId id="1615"/>
+            <p14:sldId id="260"/>
           </p14:sldIdLst>
         </p14:section>
       </p14:sectionLst>
@@ -574,7 +578,7 @@
           <a:p>
             <a:fld id="{2915196C-CDBC-4DEE-A220-849C85FC22AC}" type="datetimeFigureOut">
               <a:rPr lang="he-IL" smtClean="0"/>
-              <a:t>י"ח/טבת/תשפ"ו</a:t>
+              <a:t>ג'/שבט/תשפ"ו</a:t>
             </a:fld>
             <a:endParaRPr lang="he-IL"/>
           </a:p>
@@ -1501,6 +1505,121 @@
 </p:notes>
 </file>
 
+<file path=ppt/notesSlides/notesSlide15.xml><?xml version="1.0" encoding="utf-8"?>
+<p:notes xmlns:a="http://schemas.openxmlformats.org/drawingml/2006/main" xmlns:r="http://schemas.openxmlformats.org/officeDocument/2006/relationships" xmlns:p="http://schemas.openxmlformats.org/presentationml/2006/main">
+  <p:cSld>
+    <p:spTree>
+      <p:nvGrpSpPr>
+        <p:cNvPr id="1" name="">
+          <a:extLst>
+            <a:ext uri="{FF2B5EF4-FFF2-40B4-BE49-F238E27FC236}">
+              <a16:creationId xmlns:a16="http://schemas.microsoft.com/office/drawing/2014/main" id="{40FC647F-80C7-2236-EC62-A54740DD323B}"/>
+            </a:ext>
+          </a:extLst>
+        </p:cNvPr>
+        <p:cNvGrpSpPr/>
+        <p:nvPr/>
+      </p:nvGrpSpPr>
+      <p:grpSpPr>
+        <a:xfrm>
+          <a:off x="0" y="0"/>
+          <a:ext cx="0" cy="0"/>
+          <a:chOff x="0" y="0"/>
+          <a:chExt cx="0" cy="0"/>
+        </a:xfrm>
+      </p:grpSpPr>
+      <p:sp>
+        <p:nvSpPr>
+          <p:cNvPr id="2" name="Slide Image Placeholder 1">
+            <a:extLst>
+              <a:ext uri="{FF2B5EF4-FFF2-40B4-BE49-F238E27FC236}">
+                <a16:creationId xmlns:a16="http://schemas.microsoft.com/office/drawing/2014/main" id="{3FC2095D-0DCC-9FA6-6CC0-CA06BC8EE0D3}"/>
+              </a:ext>
+            </a:extLst>
+          </p:cNvPr>
+          <p:cNvSpPr>
+            <a:spLocks noGrp="1" noRot="1" noChangeAspect="1"/>
+          </p:cNvSpPr>
+          <p:nvPr>
+            <p:ph type="sldImg"/>
+          </p:nvPr>
+        </p:nvSpPr>
+        <p:spPr/>
+        <p:txBody>
+          <a:bodyPr/>
+          <a:lstStyle/>
+          <a:p>
+            <a:endParaRPr lang="en-IL"/>
+          </a:p>
+        </p:txBody>
+      </p:sp>
+      <p:sp>
+        <p:nvSpPr>
+          <p:cNvPr id="3" name="Notes Placeholder 2">
+            <a:extLst>
+              <a:ext uri="{FF2B5EF4-FFF2-40B4-BE49-F238E27FC236}">
+                <a16:creationId xmlns:a16="http://schemas.microsoft.com/office/drawing/2014/main" id="{894CE52A-8FC7-F2DD-E019-271546E4D32E}"/>
+              </a:ext>
+            </a:extLst>
+          </p:cNvPr>
+          <p:cNvSpPr>
+            <a:spLocks noGrp="1"/>
+          </p:cNvSpPr>
+          <p:nvPr>
+            <p:ph type="body" idx="1"/>
+          </p:nvPr>
+        </p:nvSpPr>
+        <p:spPr/>
+        <p:txBody>
+          <a:bodyPr/>
+          <a:lstStyle/>
+          <a:p>
+            <a:endParaRPr lang="en-IL" dirty="0"/>
+          </a:p>
+        </p:txBody>
+      </p:sp>
+      <p:sp>
+        <p:nvSpPr>
+          <p:cNvPr id="4" name="Slide Number Placeholder 3">
+            <a:extLst>
+              <a:ext uri="{FF2B5EF4-FFF2-40B4-BE49-F238E27FC236}">
+                <a16:creationId xmlns:a16="http://schemas.microsoft.com/office/drawing/2014/main" id="{FCEE2851-14A4-DD27-2D0C-827472018B83}"/>
+              </a:ext>
+            </a:extLst>
+          </p:cNvPr>
+          <p:cNvSpPr>
+            <a:spLocks noGrp="1"/>
+          </p:cNvSpPr>
+          <p:nvPr>
+            <p:ph type="sldNum" sz="quarter" idx="5"/>
+          </p:nvPr>
+        </p:nvSpPr>
+        <p:spPr/>
+        <p:txBody>
+          <a:bodyPr/>
+          <a:lstStyle/>
+          <a:p>
+            <a:fld id="{7F6CD5E7-A5BE-4430-AD67-E129D63AAC5C}" type="slidenum">
+              <a:rPr lang="he-IL" smtClean="0"/>
+              <a:t>28</a:t>
+            </a:fld>
+            <a:endParaRPr lang="he-IL"/>
+          </a:p>
+        </p:txBody>
+      </p:sp>
+    </p:spTree>
+    <p:extLst>
+      <p:ext uri="{BB962C8B-B14F-4D97-AF65-F5344CB8AC3E}">
+        <p14:creationId xmlns:p14="http://schemas.microsoft.com/office/powerpoint/2010/main" val="514154953"/>
+      </p:ext>
+    </p:extLst>
+  </p:cSld>
+  <p:clrMapOvr>
+    <a:masterClrMapping/>
+  </p:clrMapOvr>
+</p:notes>
+</file>
+
 <file path=ppt/notesSlides/notesSlide2.xml><?xml version="1.0" encoding="utf-8"?>
 <p:notes xmlns:a="http://schemas.openxmlformats.org/drawingml/2006/main" xmlns:r="http://schemas.openxmlformats.org/officeDocument/2006/relationships" xmlns:p="http://schemas.openxmlformats.org/presentationml/2006/main">
   <p:cSld>
@@ -2684,7 +2803,7 @@
           <a:p>
             <a:fld id="{FC6B3A86-AB79-4388-8CA5-9FC4B834779B}" type="datetime8">
               <a:rPr lang="he-IL" smtClean="0"/>
-              <a:t>07 ינואר 26</a:t>
+              <a:t>21 ינואר 26</a:t>
             </a:fld>
             <a:endParaRPr lang="he-IL"/>
           </a:p>
@@ -2907,7 +3026,7 @@
           <a:p>
             <a:fld id="{18F56BC8-8E7D-4896-9980-77BC87FB8E3E}" type="datetime8">
               <a:rPr lang="he-IL" smtClean="0"/>
-              <a:t>07 ינואר 26</a:t>
+              <a:t>21 ינואר 26</a:t>
             </a:fld>
             <a:endParaRPr lang="he-IL"/>
           </a:p>
@@ -3140,7 +3259,7 @@
           <a:p>
             <a:fld id="{0FE327C8-CB36-417E-834B-544633ADCE63}" type="datetime8">
               <a:rPr lang="he-IL" smtClean="0"/>
-              <a:t>07 ינואר 26</a:t>
+              <a:t>21 ינואר 26</a:t>
             </a:fld>
             <a:endParaRPr lang="he-IL"/>
           </a:p>
@@ -3258,7 +3377,7 @@
           <a:p>
             <a:fld id="{8E065D1C-C98B-44F5-AB2A-FEE3E85D0A94}" type="datetime8">
               <a:rPr lang="he-IL" smtClean="0"/>
-              <a:t>07 ינואר 26</a:t>
+              <a:t>21 ינואר 26</a:t>
             </a:fld>
             <a:endParaRPr lang="he-IL"/>
           </a:p>
@@ -3569,7 +3688,7 @@
           <a:p>
             <a:fld id="{7634CBFB-2532-48BA-BAE2-ADD925390740}" type="datetime8">
               <a:rPr lang="he-IL" smtClean="0"/>
-              <a:t>07 ינואר 26</a:t>
+              <a:t>21 ינואר 26</a:t>
             </a:fld>
             <a:endParaRPr lang="he-IL"/>
           </a:p>
@@ -3852,7 +3971,7 @@
           <a:p>
             <a:fld id="{8EAC1FDD-37C4-4A6B-BF31-779943CE32CF}" type="datetime8">
               <a:rPr lang="he-IL" smtClean="0"/>
-              <a:t>07 ינואר 26</a:t>
+              <a:t>21 ינואר 26</a:t>
             </a:fld>
             <a:endParaRPr lang="he-IL"/>
           </a:p>
@@ -4165,7 +4284,7 @@
           <a:p>
             <a:fld id="{C73C226C-A76A-4927-8F1D-1BD4AC033ABB}" type="datetime8">
               <a:rPr lang="he-IL" smtClean="0"/>
-              <a:t>07 ינואר 26</a:t>
+              <a:t>21 ינואר 26</a:t>
             </a:fld>
             <a:endParaRPr lang="he-IL"/>
           </a:p>
@@ -4668,7 +4787,7 @@
           <a:p>
             <a:fld id="{430DF2BF-D428-43E9-B36B-6DD16CF93579}" type="datetime8">
               <a:rPr lang="he-IL" smtClean="0"/>
-              <a:t>07 ינואר 26</a:t>
+              <a:t>21 ינואר 26</a:t>
             </a:fld>
             <a:endParaRPr lang="he-IL"/>
           </a:p>
@@ -4815,7 +4934,7 @@
           <a:p>
             <a:fld id="{390A9136-4922-4C74-B05C-12CD0951E601}" type="datetime8">
               <a:rPr lang="he-IL" smtClean="0"/>
-              <a:t>07 ינואר 26</a:t>
+              <a:t>21 ינואר 26</a:t>
             </a:fld>
             <a:endParaRPr lang="he-IL"/>
           </a:p>
@@ -4933,7 +5052,7 @@
           <a:p>
             <a:fld id="{C29F3CA8-2E63-412C-AA06-0D760EBE5965}" type="datetime8">
               <a:rPr lang="he-IL" smtClean="0"/>
-              <a:t>07 ינואר 26</a:t>
+              <a:t>21 ינואר 26</a:t>
             </a:fld>
             <a:endParaRPr lang="he-IL"/>
           </a:p>
@@ -5255,7 +5374,7 @@
           <a:p>
             <a:fld id="{7AC7B867-AA4A-4FF3-AD8B-0AD0F18EE595}" type="datetime8">
               <a:rPr lang="he-IL" smtClean="0"/>
-              <a:t>07 ינואר 26</a:t>
+              <a:t>21 ינואר 26</a:t>
             </a:fld>
             <a:endParaRPr lang="he-IL"/>
           </a:p>
@@ -5553,7 +5672,7 @@
           <a:p>
             <a:fld id="{F5E9EBD3-88E8-46DB-BD3B-F935B7013014}" type="datetime8">
               <a:rPr lang="he-IL" smtClean="0"/>
-              <a:t>07 ינואר 26</a:t>
+              <a:t>21 ינואר 26</a:t>
             </a:fld>
             <a:endParaRPr lang="he-IL"/>
           </a:p>
@@ -5837,7 +5956,7 @@
           <a:p>
             <a:fld id="{8E065D1C-C98B-44F5-AB2A-FEE3E85D0A94}" type="datetime8">
               <a:rPr lang="he-IL" smtClean="0"/>
-              <a:t>07 ינואר 26</a:t>
+              <a:t>21 ינואר 26</a:t>
             </a:fld>
             <a:endParaRPr lang="he-IL"/>
           </a:p>
@@ -6646,7 +6765,7 @@
                   <a:prstClr val="white"/>
                 </a:solidFill>
               </a:rPr>
-              <a:t>07.01.2026</a:t>
+              <a:t>21.01.2026</a:t>
             </a:r>
           </a:p>
           <a:p>
@@ -10380,6 +10499,801 @@
     <p:extLst>
       <p:ext uri="{BB962C8B-B14F-4D97-AF65-F5344CB8AC3E}">
         <p14:creationId xmlns:p14="http://schemas.microsoft.com/office/powerpoint/2010/main" val="64184808"/>
+      </p:ext>
+    </p:extLst>
+  </p:cSld>
+  <p:clrMapOvr>
+    <a:masterClrMapping/>
+  </p:clrMapOvr>
+</p:sld>
+</file>
+
+<file path=ppt/slides/slide28.xml><?xml version="1.0" encoding="utf-8"?>
+<p:sld xmlns:a="http://schemas.openxmlformats.org/drawingml/2006/main" xmlns:r="http://schemas.openxmlformats.org/officeDocument/2006/relationships" xmlns:p="http://schemas.openxmlformats.org/presentationml/2006/main">
+  <p:cSld>
+    <p:spTree>
+      <p:nvGrpSpPr>
+        <p:cNvPr id="1" name="">
+          <a:extLst>
+            <a:ext uri="{FF2B5EF4-FFF2-40B4-BE49-F238E27FC236}">
+              <a16:creationId xmlns:a16="http://schemas.microsoft.com/office/drawing/2014/main" id="{545903B2-0F9C-87DB-DD4F-B51BBDC7487D}"/>
+            </a:ext>
+          </a:extLst>
+        </p:cNvPr>
+        <p:cNvGrpSpPr/>
+        <p:nvPr/>
+      </p:nvGrpSpPr>
+      <p:grpSpPr>
+        <a:xfrm>
+          <a:off x="0" y="0"/>
+          <a:ext cx="0" cy="0"/>
+          <a:chOff x="0" y="0"/>
+          <a:chExt cx="0" cy="0"/>
+        </a:xfrm>
+      </p:grpSpPr>
+      <p:sp>
+        <p:nvSpPr>
+          <p:cNvPr id="2" name="Title 1">
+            <a:extLst>
+              <a:ext uri="{FF2B5EF4-FFF2-40B4-BE49-F238E27FC236}">
+                <a16:creationId xmlns:a16="http://schemas.microsoft.com/office/drawing/2014/main" id="{2CFB959E-6C25-A6FE-2DF5-AA27610FB6C2}"/>
+              </a:ext>
+            </a:extLst>
+          </p:cNvPr>
+          <p:cNvSpPr>
+            <a:spLocks noGrp="1"/>
+          </p:cNvSpPr>
+          <p:nvPr>
+            <p:ph type="title"/>
+          </p:nvPr>
+        </p:nvSpPr>
+        <p:spPr>
+          <a:xfrm>
+            <a:off x="3072268" y="401637"/>
+            <a:ext cx="8949044" cy="1325563"/>
+          </a:xfrm>
+        </p:spPr>
+        <p:txBody>
+          <a:bodyPr>
+            <a:normAutofit/>
+          </a:bodyPr>
+          <a:lstStyle/>
+          <a:p>
+            <a:r>
+              <a:rPr lang="en-GB" dirty="0"/>
+              <a:t>IO Indicators – </a:t>
+            </a:r>
+            <a:r>
+              <a:rPr lang="en-GB" dirty="0" err="1"/>
+              <a:t>Zscore</a:t>
+            </a:r>
+            <a:endParaRPr lang="en-IL" dirty="0"/>
+          </a:p>
+        </p:txBody>
+      </p:sp>
+      <p:sp>
+        <p:nvSpPr>
+          <p:cNvPr id="4" name="Slide Number Placeholder 3">
+            <a:extLst>
+              <a:ext uri="{FF2B5EF4-FFF2-40B4-BE49-F238E27FC236}">
+                <a16:creationId xmlns:a16="http://schemas.microsoft.com/office/drawing/2014/main" id="{7110360D-30D8-6E35-7D5D-1DECBACC4106}"/>
+              </a:ext>
+            </a:extLst>
+          </p:cNvPr>
+          <p:cNvSpPr>
+            <a:spLocks noGrp="1"/>
+          </p:cNvSpPr>
+          <p:nvPr>
+            <p:ph type="sldNum" sz="quarter" idx="12"/>
+          </p:nvPr>
+        </p:nvSpPr>
+        <p:spPr/>
+        <p:txBody>
+          <a:bodyPr/>
+          <a:lstStyle/>
+          <a:p>
+            <a:fld id="{E6AB8EDD-9EF2-4633-A1C2-4D908C1019B4}" type="slidenum">
+              <a:rPr lang="he-IL" smtClean="0"/>
+              <a:t>28</a:t>
+            </a:fld>
+            <a:endParaRPr lang="he-IL"/>
+          </a:p>
+        </p:txBody>
+      </p:sp>
+      <p:pic>
+        <p:nvPicPr>
+          <p:cNvPr id="9" name="Content Placeholder 8" descr="A screenshot of a computer&#10;&#10;AI-generated content may be incorrect.">
+            <a:extLst>
+              <a:ext uri="{FF2B5EF4-FFF2-40B4-BE49-F238E27FC236}">
+                <a16:creationId xmlns:a16="http://schemas.microsoft.com/office/drawing/2014/main" id="{92C40B0B-1370-0D45-8B9E-14AE87C1892C}"/>
+              </a:ext>
+            </a:extLst>
+          </p:cNvPr>
+          <p:cNvPicPr>
+            <a:picLocks noGrp="1" noChangeAspect="1"/>
+          </p:cNvPicPr>
+          <p:nvPr>
+            <p:ph idx="1"/>
+          </p:nvPr>
+        </p:nvPicPr>
+        <p:blipFill>
+          <a:blip r:embed="rId3">
+            <a:extLst>
+              <a:ext uri="{28A0092B-C50C-407E-A947-70E740481C1C}">
+                <a14:useLocalDpi xmlns:a14="http://schemas.microsoft.com/office/drawing/2010/main" val="0"/>
+              </a:ext>
+            </a:extLst>
+          </a:blip>
+          <a:stretch>
+            <a:fillRect/>
+          </a:stretch>
+        </p:blipFill>
+        <p:spPr>
+          <a:xfrm>
+            <a:off x="4135343" y="2096810"/>
+            <a:ext cx="3870772" cy="2359580"/>
+          </a:xfrm>
+        </p:spPr>
+      </p:pic>
+      <p:sp>
+        <p:nvSpPr>
+          <p:cNvPr id="7" name="AutoShape 2">
+            <a:extLst>
+              <a:ext uri="{FF2B5EF4-FFF2-40B4-BE49-F238E27FC236}">
+                <a16:creationId xmlns:a16="http://schemas.microsoft.com/office/drawing/2014/main" id="{F53164B1-E4FB-A546-37F5-F32E0381A310}"/>
+              </a:ext>
+            </a:extLst>
+          </p:cNvPr>
+          <p:cNvSpPr>
+            <a:spLocks noChangeAspect="1" noChangeArrowheads="1"/>
+          </p:cNvSpPr>
+          <p:nvPr/>
+        </p:nvSpPr>
+        <p:spPr bwMode="auto">
+          <a:xfrm>
+            <a:off x="5943600" y="3276600"/>
+            <a:ext cx="304800" cy="304800"/>
+          </a:xfrm>
+          <a:prstGeom prst="rect">
+            <a:avLst/>
+          </a:prstGeom>
+          <a:noFill/>
+          <a:extLst>
+            <a:ext uri="{909E8E84-426E-40DD-AFC4-6F175D3DCCD1}">
+              <a14:hiddenFill xmlns:a14="http://schemas.microsoft.com/office/drawing/2010/main">
+                <a:solidFill>
+                  <a:srgbClr val="FFFFFF"/>
+                </a:solidFill>
+              </a14:hiddenFill>
+            </a:ext>
+          </a:extLst>
+        </p:spPr>
+        <p:txBody>
+          <a:bodyPr vert="horz" wrap="square" lIns="91440" tIns="45720" rIns="91440" bIns="45720" numCol="1" anchor="t" anchorCtr="0" compatLnSpc="1">
+            <a:prstTxWarp prst="textNoShape">
+              <a:avLst/>
+            </a:prstTxWarp>
+          </a:bodyPr>
+          <a:lstStyle/>
+          <a:p>
+            <a:endParaRPr lang="en-IL"/>
+          </a:p>
+        </p:txBody>
+      </p:sp>
+      <p:pic>
+        <p:nvPicPr>
+          <p:cNvPr id="11" name="Picture 10" descr="A screenshot of a computer&#10;&#10;AI-generated content may be incorrect.">
+            <a:extLst>
+              <a:ext uri="{FF2B5EF4-FFF2-40B4-BE49-F238E27FC236}">
+                <a16:creationId xmlns:a16="http://schemas.microsoft.com/office/drawing/2014/main" id="{03F5A7AC-E71B-F3C5-42E9-1B71C626D9EF}"/>
+              </a:ext>
+            </a:extLst>
+          </p:cNvPr>
+          <p:cNvPicPr>
+            <a:picLocks noChangeAspect="1"/>
+          </p:cNvPicPr>
+          <p:nvPr/>
+        </p:nvPicPr>
+        <p:blipFill>
+          <a:blip r:embed="rId4">
+            <a:extLst>
+              <a:ext uri="{28A0092B-C50C-407E-A947-70E740481C1C}">
+                <a14:useLocalDpi xmlns:a14="http://schemas.microsoft.com/office/drawing/2010/main" val="0"/>
+              </a:ext>
+            </a:extLst>
+          </a:blip>
+          <a:stretch>
+            <a:fillRect/>
+          </a:stretch>
+        </p:blipFill>
+        <p:spPr>
+          <a:xfrm>
+            <a:off x="258144" y="2096811"/>
+            <a:ext cx="3758474" cy="2359580"/>
+          </a:xfrm>
+          <a:prstGeom prst="rect">
+            <a:avLst/>
+          </a:prstGeom>
+        </p:spPr>
+      </p:pic>
+      <p:pic>
+        <p:nvPicPr>
+          <p:cNvPr id="13" name="Picture 12" descr="A screenshot of a computer&#10;&#10;AI-generated content may be incorrect.">
+            <a:extLst>
+              <a:ext uri="{FF2B5EF4-FFF2-40B4-BE49-F238E27FC236}">
+                <a16:creationId xmlns:a16="http://schemas.microsoft.com/office/drawing/2014/main" id="{A4DC6A40-E5EA-AF78-0D6A-FD6E47B2CA7F}"/>
+              </a:ext>
+            </a:extLst>
+          </p:cNvPr>
+          <p:cNvPicPr>
+            <a:picLocks noChangeAspect="1"/>
+          </p:cNvPicPr>
+          <p:nvPr/>
+        </p:nvPicPr>
+        <p:blipFill>
+          <a:blip r:embed="rId5">
+            <a:extLst>
+              <a:ext uri="{28A0092B-C50C-407E-A947-70E740481C1C}">
+                <a14:useLocalDpi xmlns:a14="http://schemas.microsoft.com/office/drawing/2010/main" val="0"/>
+              </a:ext>
+            </a:extLst>
+          </a:blip>
+          <a:stretch>
+            <a:fillRect/>
+          </a:stretch>
+        </p:blipFill>
+        <p:spPr>
+          <a:xfrm>
+            <a:off x="8124841" y="2096810"/>
+            <a:ext cx="3896471" cy="2359580"/>
+          </a:xfrm>
+          <a:prstGeom prst="rect">
+            <a:avLst/>
+          </a:prstGeom>
+        </p:spPr>
+      </p:pic>
+    </p:spTree>
+    <p:extLst>
+      <p:ext uri="{BB962C8B-B14F-4D97-AF65-F5344CB8AC3E}">
+        <p14:creationId xmlns:p14="http://schemas.microsoft.com/office/powerpoint/2010/main" val="2230491362"/>
+      </p:ext>
+    </p:extLst>
+  </p:cSld>
+  <p:clrMapOvr>
+    <a:masterClrMapping/>
+  </p:clrMapOvr>
+</p:sld>
+</file>
+
+<file path=ppt/slides/slide29.xml><?xml version="1.0" encoding="utf-8"?>
+<p:sld xmlns:a="http://schemas.openxmlformats.org/drawingml/2006/main" xmlns:r="http://schemas.openxmlformats.org/officeDocument/2006/relationships" xmlns:p="http://schemas.openxmlformats.org/presentationml/2006/main">
+  <p:cSld>
+    <p:spTree>
+      <p:nvGrpSpPr>
+        <p:cNvPr id="1" name="">
+          <a:extLst>
+            <a:ext uri="{FF2B5EF4-FFF2-40B4-BE49-F238E27FC236}">
+              <a16:creationId xmlns:a16="http://schemas.microsoft.com/office/drawing/2014/main" id="{9541050D-F640-0124-4C31-F28CFBF65617}"/>
+            </a:ext>
+          </a:extLst>
+        </p:cNvPr>
+        <p:cNvGrpSpPr/>
+        <p:nvPr/>
+      </p:nvGrpSpPr>
+      <p:grpSpPr>
+        <a:xfrm>
+          <a:off x="0" y="0"/>
+          <a:ext cx="0" cy="0"/>
+          <a:chOff x="0" y="0"/>
+          <a:chExt cx="0" cy="0"/>
+        </a:xfrm>
+      </p:grpSpPr>
+      <p:pic>
+        <p:nvPicPr>
+          <p:cNvPr id="9" name="Picture 8">
+            <a:extLst>
+              <a:ext uri="{FF2B5EF4-FFF2-40B4-BE49-F238E27FC236}">
+                <a16:creationId xmlns:a16="http://schemas.microsoft.com/office/drawing/2014/main" id="{82AAEB2F-B311-3DF6-FB47-2EE2E861AE63}"/>
+              </a:ext>
+            </a:extLst>
+          </p:cNvPr>
+          <p:cNvPicPr>
+            <a:picLocks noChangeAspect="1"/>
+          </p:cNvPicPr>
+          <p:nvPr/>
+        </p:nvPicPr>
+        <p:blipFill>
+          <a:blip r:embed="rId2">
+            <a:extLst>
+              <a:ext uri="{28A0092B-C50C-407E-A947-70E740481C1C}">
+                <a14:useLocalDpi xmlns:a14="http://schemas.microsoft.com/office/drawing/2010/main" val="0"/>
+              </a:ext>
+            </a:extLst>
+          </a:blip>
+          <a:stretch>
+            <a:fillRect/>
+          </a:stretch>
+        </p:blipFill>
+        <p:spPr>
+          <a:xfrm>
+            <a:off x="-294640" y="-304800"/>
+            <a:ext cx="12486640" cy="7162800"/>
+          </a:xfrm>
+          <a:prstGeom prst="rect">
+            <a:avLst/>
+          </a:prstGeom>
+        </p:spPr>
+      </p:pic>
+      <p:sp>
+        <p:nvSpPr>
+          <p:cNvPr id="2" name="Title 1">
+            <a:extLst>
+              <a:ext uri="{FF2B5EF4-FFF2-40B4-BE49-F238E27FC236}">
+                <a16:creationId xmlns:a16="http://schemas.microsoft.com/office/drawing/2014/main" id="{683E00D7-7321-A7B2-D42B-E8B37A883128}"/>
+              </a:ext>
+            </a:extLst>
+          </p:cNvPr>
+          <p:cNvSpPr>
+            <a:spLocks noGrp="1"/>
+          </p:cNvSpPr>
+          <p:nvPr>
+            <p:ph type="title"/>
+          </p:nvPr>
+        </p:nvSpPr>
+        <p:spPr>
+          <a:xfrm>
+            <a:off x="1191356" y="0"/>
+            <a:ext cx="10515600" cy="1325563"/>
+          </a:xfrm>
+        </p:spPr>
+        <p:txBody>
+          <a:bodyPr/>
+          <a:lstStyle/>
+          <a:p>
+            <a:pPr algn="r" rtl="1"/>
+            <a:r>
+              <a:rPr lang="he-IL" dirty="0">
+                <a:latin typeface="David" panose="020E0502060401010101" pitchFamily="34" charset="-79"/>
+                <a:cs typeface="David" panose="020E0502060401010101" pitchFamily="34" charset="-79"/>
+              </a:rPr>
+              <a:t>שאלונים פסיכולוגיים</a:t>
+            </a:r>
+            <a:endParaRPr lang="en-IL" dirty="0">
+              <a:latin typeface="David" panose="020E0502060401010101" pitchFamily="34" charset="-79"/>
+              <a:cs typeface="David" panose="020E0502060401010101" pitchFamily="34" charset="-79"/>
+            </a:endParaRPr>
+          </a:p>
+        </p:txBody>
+      </p:sp>
+      <p:pic>
+        <p:nvPicPr>
+          <p:cNvPr id="10" name="Picture 9">
+            <a:extLst>
+              <a:ext uri="{FF2B5EF4-FFF2-40B4-BE49-F238E27FC236}">
+                <a16:creationId xmlns:a16="http://schemas.microsoft.com/office/drawing/2014/main" id="{A9F02DBB-A5D3-1C24-C9E8-738E65C46798}"/>
+              </a:ext>
+            </a:extLst>
+          </p:cNvPr>
+          <p:cNvPicPr>
+            <a:picLocks noChangeAspect="1"/>
+          </p:cNvPicPr>
+          <p:nvPr/>
+        </p:nvPicPr>
+        <p:blipFill>
+          <a:blip r:embed="rId3">
+            <a:extLst>
+              <a:ext uri="{28A0092B-C50C-407E-A947-70E740481C1C}">
+                <a14:useLocalDpi xmlns:a14="http://schemas.microsoft.com/office/drawing/2010/main" val="0"/>
+              </a:ext>
+            </a:extLst>
+          </a:blip>
+          <a:stretch>
+            <a:fillRect/>
+          </a:stretch>
+        </p:blipFill>
+        <p:spPr>
+          <a:xfrm>
+            <a:off x="9549135" y="6093915"/>
+            <a:ext cx="2642865" cy="797919"/>
+          </a:xfrm>
+          <a:prstGeom prst="rect">
+            <a:avLst/>
+          </a:prstGeom>
+        </p:spPr>
+      </p:pic>
+      <p:sp>
+        <p:nvSpPr>
+          <p:cNvPr id="16" name="Content Placeholder 2">
+            <a:extLst>
+              <a:ext uri="{FF2B5EF4-FFF2-40B4-BE49-F238E27FC236}">
+                <a16:creationId xmlns:a16="http://schemas.microsoft.com/office/drawing/2014/main" id="{FE6CC82A-45C9-3638-DFE0-C01541C3CC0F}"/>
+              </a:ext>
+            </a:extLst>
+          </p:cNvPr>
+          <p:cNvSpPr txBox="1">
+            <a:spLocks/>
+          </p:cNvSpPr>
+          <p:nvPr/>
+        </p:nvSpPr>
+        <p:spPr>
+          <a:xfrm>
+            <a:off x="2148840" y="1070043"/>
+            <a:ext cx="9558116" cy="5023871"/>
+          </a:xfrm>
+          <a:prstGeom prst="rect">
+            <a:avLst/>
+          </a:prstGeom>
+        </p:spPr>
+        <p:txBody>
+          <a:bodyPr vert="horz" lIns="91440" tIns="45720" rIns="91440" bIns="45720" rtlCol="0">
+            <a:noAutofit/>
+          </a:bodyPr>
+          <a:lstStyle>
+            <a:lvl1pPr marL="228600" indent="-228600" algn="l" defTabSz="914400" rtl="0" eaLnBrk="1" latinLnBrk="0" hangingPunct="1">
+              <a:lnSpc>
+                <a:spcPct val="90000"/>
+              </a:lnSpc>
+              <a:spcBef>
+                <a:spcPts val="1000"/>
+              </a:spcBef>
+              <a:buFont typeface="Arial" panose="020B0604020202020204" pitchFamily="34" charset="0"/>
+              <a:buChar char="•"/>
+              <a:defRPr sz="2800" kern="1200">
+                <a:solidFill>
+                  <a:schemeClr val="tx1"/>
+                </a:solidFill>
+                <a:latin typeface="+mn-lt"/>
+                <a:ea typeface="+mn-ea"/>
+                <a:cs typeface="+mn-cs"/>
+              </a:defRPr>
+            </a:lvl1pPr>
+            <a:lvl2pPr marL="685800" indent="-228600" algn="l" defTabSz="914400" rtl="0" eaLnBrk="1" latinLnBrk="0" hangingPunct="1">
+              <a:lnSpc>
+                <a:spcPct val="90000"/>
+              </a:lnSpc>
+              <a:spcBef>
+                <a:spcPts val="500"/>
+              </a:spcBef>
+              <a:buFont typeface="Arial" panose="020B0604020202020204" pitchFamily="34" charset="0"/>
+              <a:buChar char="•"/>
+              <a:defRPr sz="2400" kern="1200">
+                <a:solidFill>
+                  <a:schemeClr val="tx1"/>
+                </a:solidFill>
+                <a:latin typeface="+mn-lt"/>
+                <a:ea typeface="+mn-ea"/>
+                <a:cs typeface="+mn-cs"/>
+              </a:defRPr>
+            </a:lvl2pPr>
+            <a:lvl3pPr marL="1143000" indent="-228600" algn="l" defTabSz="914400" rtl="0" eaLnBrk="1" latinLnBrk="0" hangingPunct="1">
+              <a:lnSpc>
+                <a:spcPct val="90000"/>
+              </a:lnSpc>
+              <a:spcBef>
+                <a:spcPts val="500"/>
+              </a:spcBef>
+              <a:buFont typeface="Arial" panose="020B0604020202020204" pitchFamily="34" charset="0"/>
+              <a:buChar char="•"/>
+              <a:defRPr sz="2000" kern="1200">
+                <a:solidFill>
+                  <a:schemeClr val="tx1"/>
+                </a:solidFill>
+                <a:latin typeface="+mn-lt"/>
+                <a:ea typeface="+mn-ea"/>
+                <a:cs typeface="+mn-cs"/>
+              </a:defRPr>
+            </a:lvl3pPr>
+            <a:lvl4pPr marL="1600200" indent="-228600" algn="l" defTabSz="914400" rtl="0" eaLnBrk="1" latinLnBrk="0" hangingPunct="1">
+              <a:lnSpc>
+                <a:spcPct val="90000"/>
+              </a:lnSpc>
+              <a:spcBef>
+                <a:spcPts val="500"/>
+              </a:spcBef>
+              <a:buFont typeface="Arial" panose="020B0604020202020204" pitchFamily="34" charset="0"/>
+              <a:buChar char="•"/>
+              <a:defRPr sz="1800" kern="1200">
+                <a:solidFill>
+                  <a:schemeClr val="tx1"/>
+                </a:solidFill>
+                <a:latin typeface="+mn-lt"/>
+                <a:ea typeface="+mn-ea"/>
+                <a:cs typeface="+mn-cs"/>
+              </a:defRPr>
+            </a:lvl4pPr>
+            <a:lvl5pPr marL="2057400" indent="-228600" algn="l" defTabSz="914400" rtl="0" eaLnBrk="1" latinLnBrk="0" hangingPunct="1">
+              <a:lnSpc>
+                <a:spcPct val="90000"/>
+              </a:lnSpc>
+              <a:spcBef>
+                <a:spcPts val="500"/>
+              </a:spcBef>
+              <a:buFont typeface="Arial" panose="020B0604020202020204" pitchFamily="34" charset="0"/>
+              <a:buChar char="•"/>
+              <a:defRPr sz="1800" kern="1200">
+                <a:solidFill>
+                  <a:schemeClr val="tx1"/>
+                </a:solidFill>
+                <a:latin typeface="+mn-lt"/>
+                <a:ea typeface="+mn-ea"/>
+                <a:cs typeface="+mn-cs"/>
+              </a:defRPr>
+            </a:lvl5pPr>
+            <a:lvl6pPr marL="2514600" indent="-228600" algn="l" defTabSz="914400" rtl="0" eaLnBrk="1" latinLnBrk="0" hangingPunct="1">
+              <a:lnSpc>
+                <a:spcPct val="90000"/>
+              </a:lnSpc>
+              <a:spcBef>
+                <a:spcPts val="500"/>
+              </a:spcBef>
+              <a:buFont typeface="Arial" panose="020B0604020202020204" pitchFamily="34" charset="0"/>
+              <a:buChar char="•"/>
+              <a:defRPr sz="1800" kern="1200">
+                <a:solidFill>
+                  <a:schemeClr val="tx1"/>
+                </a:solidFill>
+                <a:latin typeface="+mn-lt"/>
+                <a:ea typeface="+mn-ea"/>
+                <a:cs typeface="+mn-cs"/>
+              </a:defRPr>
+            </a:lvl6pPr>
+            <a:lvl7pPr marL="2971800" indent="-228600" algn="l" defTabSz="914400" rtl="0" eaLnBrk="1" latinLnBrk="0" hangingPunct="1">
+              <a:lnSpc>
+                <a:spcPct val="90000"/>
+              </a:lnSpc>
+              <a:spcBef>
+                <a:spcPts val="500"/>
+              </a:spcBef>
+              <a:buFont typeface="Arial" panose="020B0604020202020204" pitchFamily="34" charset="0"/>
+              <a:buChar char="•"/>
+              <a:defRPr sz="1800" kern="1200">
+                <a:solidFill>
+                  <a:schemeClr val="tx1"/>
+                </a:solidFill>
+                <a:latin typeface="+mn-lt"/>
+                <a:ea typeface="+mn-ea"/>
+                <a:cs typeface="+mn-cs"/>
+              </a:defRPr>
+            </a:lvl7pPr>
+            <a:lvl8pPr marL="3429000" indent="-228600" algn="l" defTabSz="914400" rtl="0" eaLnBrk="1" latinLnBrk="0" hangingPunct="1">
+              <a:lnSpc>
+                <a:spcPct val="90000"/>
+              </a:lnSpc>
+              <a:spcBef>
+                <a:spcPts val="500"/>
+              </a:spcBef>
+              <a:buFont typeface="Arial" panose="020B0604020202020204" pitchFamily="34" charset="0"/>
+              <a:buChar char="•"/>
+              <a:defRPr sz="1800" kern="1200">
+                <a:solidFill>
+                  <a:schemeClr val="tx1"/>
+                </a:solidFill>
+                <a:latin typeface="+mn-lt"/>
+                <a:ea typeface="+mn-ea"/>
+                <a:cs typeface="+mn-cs"/>
+              </a:defRPr>
+            </a:lvl8pPr>
+            <a:lvl9pPr marL="3886200" indent="-228600" algn="l" defTabSz="914400" rtl="0" eaLnBrk="1" latinLnBrk="0" hangingPunct="1">
+              <a:lnSpc>
+                <a:spcPct val="90000"/>
+              </a:lnSpc>
+              <a:spcBef>
+                <a:spcPts val="500"/>
+              </a:spcBef>
+              <a:buFont typeface="Arial" panose="020B0604020202020204" pitchFamily="34" charset="0"/>
+              <a:buChar char="•"/>
+              <a:defRPr sz="1800" kern="1200">
+                <a:solidFill>
+                  <a:schemeClr val="tx1"/>
+                </a:solidFill>
+                <a:latin typeface="+mn-lt"/>
+                <a:ea typeface="+mn-ea"/>
+                <a:cs typeface="+mn-cs"/>
+              </a:defRPr>
+            </a:lvl9pPr>
+          </a:lstStyle>
+          <a:p>
+            <a:pPr marL="0" indent="0" algn="r" rtl="1">
+              <a:lnSpc>
+                <a:spcPct val="100000"/>
+              </a:lnSpc>
+              <a:buNone/>
+            </a:pPr>
+            <a:r>
+              <a:rPr lang="he-IL" b="1" dirty="0">
+                <a:latin typeface="David" panose="020E0502060401010101" pitchFamily="34" charset="-79"/>
+              </a:rPr>
+              <a:t>מי מנהל את השיח והאם בהצלחה? </a:t>
+            </a:r>
+          </a:p>
+          <a:p>
+            <a:pPr algn="r" rtl="1">
+              <a:lnSpc>
+                <a:spcPct val="100000"/>
+              </a:lnSpc>
+            </a:pPr>
+            <a:r>
+              <a:rPr lang="he-IL" sz="1800" dirty="0">
+                <a:latin typeface="David" panose="020E0502060401010101" pitchFamily="34" charset="-79"/>
+              </a:rPr>
+              <a:t>זיהוי המאפיינים הפסיכולוגיים והערכיים של המשפיעים והמושפעים ומיפוי הקשרים </a:t>
+            </a:r>
+            <a:r>
+              <a:rPr lang="he-IL" sz="1800" dirty="0" err="1">
+                <a:latin typeface="David" panose="020E0502060401010101" pitchFamily="34" charset="-79"/>
+              </a:rPr>
+              <a:t>בינהם</a:t>
+            </a:r>
+            <a:r>
+              <a:rPr lang="he-IL" sz="1800" dirty="0">
+                <a:latin typeface="David" panose="020E0502060401010101" pitchFamily="34" charset="-79"/>
+              </a:rPr>
+              <a:t>. </a:t>
+            </a:r>
+          </a:p>
+          <a:p>
+            <a:pPr marL="0" indent="0" algn="r" rtl="1">
+              <a:lnSpc>
+                <a:spcPct val="100000"/>
+              </a:lnSpc>
+              <a:buNone/>
+            </a:pPr>
+            <a:r>
+              <a:rPr lang="he-IL" sz="1800" b="1" dirty="0">
+                <a:latin typeface="David" panose="020E0502060401010101" pitchFamily="34" charset="-79"/>
+              </a:rPr>
+              <a:t> אומדנים פסיכולוגים בניתוח טקסט באמצעות ספריית </a:t>
+            </a:r>
+            <a:r>
+              <a:rPr lang="en-US" sz="1800" b="1" dirty="0">
+                <a:latin typeface="David" panose="020E0502060401010101" pitchFamily="34" charset="-79"/>
+              </a:rPr>
+              <a:t>QLATENT</a:t>
+            </a:r>
+            <a:r>
+              <a:rPr lang="he-IL" sz="1800" b="1" dirty="0">
+                <a:latin typeface="David" panose="020E0502060401010101" pitchFamily="34" charset="-79"/>
+              </a:rPr>
+              <a:t> שפותחה ופורסמה ע"י </a:t>
+            </a:r>
+            <a:r>
+              <a:rPr lang="en-US" sz="1800" b="1" dirty="0">
+                <a:latin typeface="David" panose="020E0502060401010101" pitchFamily="34" charset="-79"/>
+              </a:rPr>
+              <a:t>BGU</a:t>
+            </a:r>
+            <a:r>
+              <a:rPr lang="he-IL" sz="1800" dirty="0">
+                <a:latin typeface="David" panose="020E0502060401010101" pitchFamily="34" charset="-79"/>
+              </a:rPr>
+              <a:t>: </a:t>
+            </a:r>
+          </a:p>
+          <a:p>
+            <a:pPr algn="r" rtl="1">
+              <a:lnSpc>
+                <a:spcPct val="100000"/>
+              </a:lnSpc>
+            </a:pPr>
+            <a:r>
+              <a:rPr lang="he-IL" sz="1800" dirty="0">
+                <a:latin typeface="David" panose="020E0502060401010101" pitchFamily="34" charset="-79"/>
+              </a:rPr>
+              <a:t>ייושם ניתוח אישיות מבוסס </a:t>
+            </a:r>
+            <a:r>
+              <a:rPr lang="en-US" sz="1800" dirty="0">
+                <a:latin typeface="David" panose="020E0502060401010101" pitchFamily="34" charset="-79"/>
+              </a:rPr>
+              <a:t>LLM</a:t>
+            </a:r>
+            <a:r>
+              <a:rPr lang="he-IL" sz="1800" dirty="0">
+                <a:latin typeface="David" panose="020E0502060401010101" pitchFamily="34" charset="-79"/>
+              </a:rPr>
+              <a:t>, המדמה את פעולת השאלונים הפסיכולוגיים הקלאסיים (כגון </a:t>
+            </a:r>
+            <a:r>
+              <a:rPr lang="en-US" sz="1800" dirty="0">
+                <a:latin typeface="David" panose="020E0502060401010101" pitchFamily="34" charset="-79"/>
+              </a:rPr>
+              <a:t>Big Five</a:t>
+            </a:r>
+            <a:r>
+              <a:rPr lang="he-IL" sz="1800" dirty="0">
+                <a:latin typeface="David" panose="020E0502060401010101" pitchFamily="34" charset="-79"/>
+              </a:rPr>
+              <a:t> ועוד..)</a:t>
+            </a:r>
+          </a:p>
+          <a:p>
+            <a:pPr algn="r" rtl="1">
+              <a:lnSpc>
+                <a:spcPct val="100000"/>
+              </a:lnSpc>
+            </a:pPr>
+            <a:r>
+              <a:rPr lang="he-IL" sz="1800" dirty="0">
+                <a:latin typeface="David" panose="020E0502060401010101" pitchFamily="34" charset="-79"/>
+              </a:rPr>
+              <a:t>מבוסס על הפוסטים של המשתמשים.</a:t>
+            </a:r>
+          </a:p>
+          <a:p>
+            <a:pPr algn="r" rtl="1">
+              <a:lnSpc>
+                <a:spcPct val="100000"/>
+              </a:lnSpc>
+            </a:pPr>
+            <a:r>
+              <a:rPr lang="he-IL" sz="1800" dirty="0">
+                <a:latin typeface="David" panose="020E0502060401010101" pitchFamily="34" charset="-79"/>
+              </a:rPr>
+              <a:t>המודל יבצע אבחון חישובי של פרופיל אישיות, לרבות מאפיינים כגון: פתיחות, מצפוניות, אמפתיה, קונפורמיות, רמות נוירוטיות, וכן הטיות ערכיות ונטיות חברתיות</a:t>
+            </a:r>
+            <a:r>
+              <a:rPr lang="en-US" sz="1800" dirty="0">
+                <a:latin typeface="David" panose="020E0502060401010101" pitchFamily="34" charset="-79"/>
+              </a:rPr>
+              <a:t>- </a:t>
+            </a:r>
+            <a:r>
+              <a:rPr lang="he-IL" sz="1800" dirty="0">
+                <a:latin typeface="David" panose="020E0502060401010101" pitchFamily="34" charset="-79"/>
+              </a:rPr>
+              <a:t>למשל ביטויי גזענות , סקסיזם </a:t>
+            </a:r>
+            <a:r>
+              <a:rPr lang="he-IL" sz="1800" dirty="0" err="1">
+                <a:latin typeface="David" panose="020E0502060401010101" pitchFamily="34" charset="-79"/>
+              </a:rPr>
+              <a:t>וכו</a:t>
+            </a:r>
+            <a:r>
+              <a:rPr lang="en-US" sz="1800" dirty="0">
+                <a:latin typeface="David" panose="020E0502060401010101" pitchFamily="34" charset="-79"/>
+              </a:rPr>
+              <a:t>’</a:t>
+            </a:r>
+            <a:r>
+              <a:rPr lang="he-IL" sz="1800" dirty="0">
+                <a:latin typeface="David" panose="020E0502060401010101" pitchFamily="34" charset="-79"/>
+              </a:rPr>
+              <a:t>. </a:t>
+            </a:r>
+          </a:p>
+          <a:p>
+            <a:pPr lvl="1" algn="r" rtl="1">
+              <a:lnSpc>
+                <a:spcPct val="100000"/>
+              </a:lnSpc>
+            </a:pPr>
+            <a:r>
+              <a:rPr lang="he-IL" sz="1400" dirty="0">
+                <a:latin typeface="David" panose="020E0502060401010101" pitchFamily="34" charset="-79"/>
+              </a:rPr>
+              <a:t>נזהה את הפרופיל הפסיכולוגי והערכי של משפיעים ונבחון כיצד תכונות אלו קשורות להצלחת תפעול שיח.</a:t>
+            </a:r>
+          </a:p>
+          <a:p>
+            <a:pPr lvl="1" algn="r" rtl="1">
+              <a:lnSpc>
+                <a:spcPct val="100000"/>
+              </a:lnSpc>
+            </a:pPr>
+            <a:r>
+              <a:rPr lang="he-IL" sz="1400" dirty="0">
+                <a:latin typeface="David" panose="020E0502060401010101" pitchFamily="34" charset="-79"/>
+              </a:rPr>
+              <a:t>מאפיין את הציבור המושפע ונזהה טיפוסי אישיות או נטיות חברתיות נוטות להשתנות או להקצין בעקבות חשיפה לפרסומים.</a:t>
+            </a:r>
+          </a:p>
+        </p:txBody>
+      </p:sp>
+    </p:spTree>
+    <p:extLst>
+      <p:ext uri="{BB962C8B-B14F-4D97-AF65-F5344CB8AC3E}">
+        <p14:creationId xmlns:p14="http://schemas.microsoft.com/office/powerpoint/2010/main" val="3747228069"/>
       </p:ext>
     </p:extLst>
   </p:cSld>

--- a/docs/cbg_saback.pptx
+++ b/docs/cbg_saback.pptx
@@ -5,7 +5,7 @@
     <p:sldMasterId id="2147483648" r:id="rId1"/>
   </p:sldMasterIdLst>
   <p:notesMasterIdLst>
-    <p:notesMasterId r:id="rId31"/>
+    <p:notesMasterId r:id="rId32"/>
   </p:notesMasterIdLst>
   <p:sldIdLst>
     <p:sldId id="1574" r:id="rId2"/>
@@ -35,8 +35,9 @@
     <p:sldId id="1612" r:id="rId26"/>
     <p:sldId id="1613" r:id="rId27"/>
     <p:sldId id="1595" r:id="rId28"/>
-    <p:sldId id="1615" r:id="rId29"/>
-    <p:sldId id="260" r:id="rId30"/>
+    <p:sldId id="1616" r:id="rId29"/>
+    <p:sldId id="1615" r:id="rId30"/>
+    <p:sldId id="260" r:id="rId31"/>
   </p:sldIdLst>
   <p:sldSz cx="12192000" cy="6858000"/>
   <p:notesSz cx="6858000" cy="9144000"/>
@@ -167,6 +168,7 @@
             <p14:sldId id="1612"/>
             <p14:sldId id="1613"/>
             <p14:sldId id="1595"/>
+            <p14:sldId id="1616"/>
             <p14:sldId id="1615"/>
             <p14:sldId id="260"/>
           </p14:sldIdLst>
@@ -1513,6 +1515,121 @@
         <p:cNvPr id="1" name="">
           <a:extLst>
             <a:ext uri="{FF2B5EF4-FFF2-40B4-BE49-F238E27FC236}">
+              <a16:creationId xmlns:a16="http://schemas.microsoft.com/office/drawing/2014/main" id="{33A6EE99-448E-4B33-2BA5-5E33596FCAEC}"/>
+            </a:ext>
+          </a:extLst>
+        </p:cNvPr>
+        <p:cNvGrpSpPr/>
+        <p:nvPr/>
+      </p:nvGrpSpPr>
+      <p:grpSpPr>
+        <a:xfrm>
+          <a:off x="0" y="0"/>
+          <a:ext cx="0" cy="0"/>
+          <a:chOff x="0" y="0"/>
+          <a:chExt cx="0" cy="0"/>
+        </a:xfrm>
+      </p:grpSpPr>
+      <p:sp>
+        <p:nvSpPr>
+          <p:cNvPr id="2" name="Slide Image Placeholder 1">
+            <a:extLst>
+              <a:ext uri="{FF2B5EF4-FFF2-40B4-BE49-F238E27FC236}">
+                <a16:creationId xmlns:a16="http://schemas.microsoft.com/office/drawing/2014/main" id="{EF4785A3-E8D9-4D55-0487-E800511FF05F}"/>
+              </a:ext>
+            </a:extLst>
+          </p:cNvPr>
+          <p:cNvSpPr>
+            <a:spLocks noGrp="1" noRot="1" noChangeAspect="1"/>
+          </p:cNvSpPr>
+          <p:nvPr>
+            <p:ph type="sldImg"/>
+          </p:nvPr>
+        </p:nvSpPr>
+        <p:spPr/>
+        <p:txBody>
+          <a:bodyPr/>
+          <a:lstStyle/>
+          <a:p>
+            <a:endParaRPr lang="en-IL"/>
+          </a:p>
+        </p:txBody>
+      </p:sp>
+      <p:sp>
+        <p:nvSpPr>
+          <p:cNvPr id="3" name="Notes Placeholder 2">
+            <a:extLst>
+              <a:ext uri="{FF2B5EF4-FFF2-40B4-BE49-F238E27FC236}">
+                <a16:creationId xmlns:a16="http://schemas.microsoft.com/office/drawing/2014/main" id="{10934A7F-6BB5-30A8-CA31-C6ACC005245F}"/>
+              </a:ext>
+            </a:extLst>
+          </p:cNvPr>
+          <p:cNvSpPr>
+            <a:spLocks noGrp="1"/>
+          </p:cNvSpPr>
+          <p:nvPr>
+            <p:ph type="body" idx="1"/>
+          </p:nvPr>
+        </p:nvSpPr>
+        <p:spPr/>
+        <p:txBody>
+          <a:bodyPr/>
+          <a:lstStyle/>
+          <a:p>
+            <a:endParaRPr lang="en-IL" dirty="0"/>
+          </a:p>
+        </p:txBody>
+      </p:sp>
+      <p:sp>
+        <p:nvSpPr>
+          <p:cNvPr id="4" name="Slide Number Placeholder 3">
+            <a:extLst>
+              <a:ext uri="{FF2B5EF4-FFF2-40B4-BE49-F238E27FC236}">
+                <a16:creationId xmlns:a16="http://schemas.microsoft.com/office/drawing/2014/main" id="{56239E01-28D9-8FBD-A1E6-34C8F93D3218}"/>
+              </a:ext>
+            </a:extLst>
+          </p:cNvPr>
+          <p:cNvSpPr>
+            <a:spLocks noGrp="1"/>
+          </p:cNvSpPr>
+          <p:nvPr>
+            <p:ph type="sldNum" sz="quarter" idx="5"/>
+          </p:nvPr>
+        </p:nvSpPr>
+        <p:spPr/>
+        <p:txBody>
+          <a:bodyPr/>
+          <a:lstStyle/>
+          <a:p>
+            <a:fld id="{7F6CD5E7-A5BE-4430-AD67-E129D63AAC5C}" type="slidenum">
+              <a:rPr lang="he-IL" smtClean="0"/>
+              <a:t>28</a:t>
+            </a:fld>
+            <a:endParaRPr lang="he-IL"/>
+          </a:p>
+        </p:txBody>
+      </p:sp>
+    </p:spTree>
+    <p:extLst>
+      <p:ext uri="{BB962C8B-B14F-4D97-AF65-F5344CB8AC3E}">
+        <p14:creationId xmlns:p14="http://schemas.microsoft.com/office/powerpoint/2010/main" val="493325593"/>
+      </p:ext>
+    </p:extLst>
+  </p:cSld>
+  <p:clrMapOvr>
+    <a:masterClrMapping/>
+  </p:clrMapOvr>
+</p:notes>
+</file>
+
+<file path=ppt/notesSlides/notesSlide16.xml><?xml version="1.0" encoding="utf-8"?>
+<p:notes xmlns:a="http://schemas.openxmlformats.org/drawingml/2006/main" xmlns:r="http://schemas.openxmlformats.org/officeDocument/2006/relationships" xmlns:p="http://schemas.openxmlformats.org/presentationml/2006/main">
+  <p:cSld>
+    <p:spTree>
+      <p:nvGrpSpPr>
+        <p:cNvPr id="1" name="">
+          <a:extLst>
+            <a:ext uri="{FF2B5EF4-FFF2-40B4-BE49-F238E27FC236}">
               <a16:creationId xmlns:a16="http://schemas.microsoft.com/office/drawing/2014/main" id="{40FC647F-80C7-2236-EC62-A54740DD323B}"/>
             </a:ext>
           </a:extLst>
@@ -1601,7 +1718,7 @@
           <a:p>
             <a:fld id="{7F6CD5E7-A5BE-4430-AD67-E129D63AAC5C}" type="slidenum">
               <a:rPr lang="he-IL" smtClean="0"/>
-              <a:t>28</a:t>
+              <a:t>29</a:t>
             </a:fld>
             <a:endParaRPr lang="he-IL"/>
           </a:p>
@@ -10516,6 +10633,154 @@
         <p:cNvPr id="1" name="">
           <a:extLst>
             <a:ext uri="{FF2B5EF4-FFF2-40B4-BE49-F238E27FC236}">
+              <a16:creationId xmlns:a16="http://schemas.microsoft.com/office/drawing/2014/main" id="{426AC833-FD6F-D1DF-E576-C13596AD3289}"/>
+            </a:ext>
+          </a:extLst>
+        </p:cNvPr>
+        <p:cNvGrpSpPr/>
+        <p:nvPr/>
+      </p:nvGrpSpPr>
+      <p:grpSpPr>
+        <a:xfrm>
+          <a:off x="0" y="0"/>
+          <a:ext cx="0" cy="0"/>
+          <a:chOff x="0" y="0"/>
+          <a:chExt cx="0" cy="0"/>
+        </a:xfrm>
+      </p:grpSpPr>
+      <p:sp>
+        <p:nvSpPr>
+          <p:cNvPr id="2" name="Title 1">
+            <a:extLst>
+              <a:ext uri="{FF2B5EF4-FFF2-40B4-BE49-F238E27FC236}">
+                <a16:creationId xmlns:a16="http://schemas.microsoft.com/office/drawing/2014/main" id="{4F4FAAC0-A304-ED9E-9DE2-44C6FD2C09EB}"/>
+              </a:ext>
+            </a:extLst>
+          </p:cNvPr>
+          <p:cNvSpPr>
+            <a:spLocks noGrp="1"/>
+          </p:cNvSpPr>
+          <p:nvPr>
+            <p:ph type="title"/>
+          </p:nvPr>
+        </p:nvSpPr>
+        <p:spPr>
+          <a:xfrm>
+            <a:off x="3072268" y="401637"/>
+            <a:ext cx="8753475" cy="1325563"/>
+          </a:xfrm>
+        </p:spPr>
+        <p:txBody>
+          <a:bodyPr anchor="ctr">
+            <a:normAutofit/>
+          </a:bodyPr>
+          <a:lstStyle/>
+          <a:p>
+            <a:r>
+              <a:rPr lang="en-GB" dirty="0"/>
+              <a:t>IO Indicators – Box Plot</a:t>
+            </a:r>
+            <a:endParaRPr lang="en-IL" dirty="0"/>
+          </a:p>
+        </p:txBody>
+      </p:sp>
+      <p:sp>
+        <p:nvSpPr>
+          <p:cNvPr id="4" name="Slide Number Placeholder 3">
+            <a:extLst>
+              <a:ext uri="{FF2B5EF4-FFF2-40B4-BE49-F238E27FC236}">
+                <a16:creationId xmlns:a16="http://schemas.microsoft.com/office/drawing/2014/main" id="{33DEC76D-1FA7-9970-370C-32CF9E870287}"/>
+              </a:ext>
+            </a:extLst>
+          </p:cNvPr>
+          <p:cNvSpPr>
+            <a:spLocks noGrp="1"/>
+          </p:cNvSpPr>
+          <p:nvPr>
+            <p:ph type="sldNum" sz="quarter" idx="12"/>
+          </p:nvPr>
+        </p:nvSpPr>
+        <p:spPr>
+          <a:xfrm>
+            <a:off x="11728704" y="6464649"/>
+            <a:ext cx="452233" cy="365125"/>
+          </a:xfrm>
+        </p:spPr>
+        <p:txBody>
+          <a:bodyPr anchor="ctr">
+            <a:normAutofit/>
+          </a:bodyPr>
+          <a:lstStyle/>
+          <a:p>
+            <a:pPr>
+              <a:spcAft>
+                <a:spcPts val="600"/>
+              </a:spcAft>
+            </a:pPr>
+            <a:fld id="{E6AB8EDD-9EF2-4633-A1C2-4D908C1019B4}" type="slidenum">
+              <a:rPr lang="he-IL" smtClean="0"/>
+              <a:pPr>
+                <a:spcAft>
+                  <a:spcPts val="600"/>
+                </a:spcAft>
+              </a:pPr>
+              <a:t>28</a:t>
+            </a:fld>
+            <a:endParaRPr lang="he-IL"/>
+          </a:p>
+        </p:txBody>
+      </p:sp>
+      <p:pic>
+        <p:nvPicPr>
+          <p:cNvPr id="10" name="Picture 9" descr="A screenshot of a graph&#10;&#10;AI-generated content may be incorrect.">
+            <a:extLst>
+              <a:ext uri="{FF2B5EF4-FFF2-40B4-BE49-F238E27FC236}">
+                <a16:creationId xmlns:a16="http://schemas.microsoft.com/office/drawing/2014/main" id="{EB900789-A8BE-139E-217D-F7BD0703EE78}"/>
+              </a:ext>
+            </a:extLst>
+          </p:cNvPr>
+          <p:cNvPicPr>
+            <a:picLocks noChangeAspect="1"/>
+          </p:cNvPicPr>
+          <p:nvPr/>
+        </p:nvPicPr>
+        <p:blipFill>
+          <a:blip r:embed="rId3"/>
+          <a:stretch>
+            <a:fillRect/>
+          </a:stretch>
+        </p:blipFill>
+        <p:spPr>
+          <a:xfrm>
+            <a:off x="1260294" y="1727200"/>
+            <a:ext cx="10468410" cy="4145280"/>
+          </a:xfrm>
+          <a:prstGeom prst="rect">
+            <a:avLst/>
+          </a:prstGeom>
+        </p:spPr>
+      </p:pic>
+    </p:spTree>
+    <p:extLst>
+      <p:ext uri="{BB962C8B-B14F-4D97-AF65-F5344CB8AC3E}">
+        <p14:creationId xmlns:p14="http://schemas.microsoft.com/office/powerpoint/2010/main" val="1847633051"/>
+      </p:ext>
+    </p:extLst>
+  </p:cSld>
+  <p:clrMapOvr>
+    <a:masterClrMapping/>
+  </p:clrMapOvr>
+</p:sld>
+</file>
+
+<file path=ppt/slides/slide29.xml><?xml version="1.0" encoding="utf-8"?>
+<p:sld xmlns:a="http://schemas.openxmlformats.org/drawingml/2006/main" xmlns:r="http://schemas.openxmlformats.org/officeDocument/2006/relationships" xmlns:p="http://schemas.openxmlformats.org/presentationml/2006/main">
+  <p:cSld>
+    <p:spTree>
+      <p:nvGrpSpPr>
+        <p:cNvPr id="1" name="">
+          <a:extLst>
+            <a:ext uri="{FF2B5EF4-FFF2-40B4-BE49-F238E27FC236}">
               <a16:creationId xmlns:a16="http://schemas.microsoft.com/office/drawing/2014/main" id="{545903B2-0F9C-87DB-DD4F-B51BBDC7487D}"/>
             </a:ext>
           </a:extLst>
@@ -10594,7 +10859,7 @@
           <a:p>
             <a:fld id="{E6AB8EDD-9EF2-4633-A1C2-4D908C1019B4}" type="slidenum">
               <a:rPr lang="he-IL" smtClean="0"/>
-              <a:t>28</a:t>
+              <a:t>29</a:t>
             </a:fld>
             <a:endParaRPr lang="he-IL"/>
           </a:p>
@@ -10765,7 +11030,175 @@
 </p:sld>
 </file>
 
-<file path=ppt/slides/slide29.xml><?xml version="1.0" encoding="utf-8"?>
+<file path=ppt/slides/slide3.xml><?xml version="1.0" encoding="utf-8"?>
+<p:sld xmlns:a="http://schemas.openxmlformats.org/drawingml/2006/main" xmlns:r="http://schemas.openxmlformats.org/officeDocument/2006/relationships" xmlns:p="http://schemas.openxmlformats.org/presentationml/2006/main" show="0">
+  <p:cSld>
+    <p:spTree>
+      <p:nvGrpSpPr>
+        <p:cNvPr id="1" name="">
+          <a:extLst>
+            <a:ext uri="{FF2B5EF4-FFF2-40B4-BE49-F238E27FC236}">
+              <a16:creationId xmlns:a16="http://schemas.microsoft.com/office/drawing/2014/main" id="{883ADC35-446C-6244-68C0-AB19DC69C5F0}"/>
+            </a:ext>
+          </a:extLst>
+        </p:cNvPr>
+        <p:cNvGrpSpPr/>
+        <p:nvPr/>
+      </p:nvGrpSpPr>
+      <p:grpSpPr>
+        <a:xfrm>
+          <a:off x="0" y="0"/>
+          <a:ext cx="0" cy="0"/>
+          <a:chOff x="0" y="0"/>
+          <a:chExt cx="0" cy="0"/>
+        </a:xfrm>
+      </p:grpSpPr>
+      <p:sp>
+        <p:nvSpPr>
+          <p:cNvPr id="2" name="Title 1">
+            <a:extLst>
+              <a:ext uri="{FF2B5EF4-FFF2-40B4-BE49-F238E27FC236}">
+                <a16:creationId xmlns:a16="http://schemas.microsoft.com/office/drawing/2014/main" id="{CB3F7731-A5D6-A5D6-B947-8809B148BC37}"/>
+              </a:ext>
+            </a:extLst>
+          </p:cNvPr>
+          <p:cNvSpPr>
+            <a:spLocks noGrp="1"/>
+          </p:cNvSpPr>
+          <p:nvPr>
+            <p:ph type="title"/>
+          </p:nvPr>
+        </p:nvSpPr>
+        <p:spPr/>
+        <p:txBody>
+          <a:bodyPr>
+            <a:normAutofit/>
+          </a:bodyPr>
+          <a:lstStyle/>
+          <a:p>
+            <a:r>
+              <a:rPr lang="en-GB" dirty="0"/>
+              <a:t>Introduction</a:t>
+            </a:r>
+            <a:endParaRPr lang="en-IL" dirty="0"/>
+          </a:p>
+        </p:txBody>
+      </p:sp>
+      <p:sp>
+        <p:nvSpPr>
+          <p:cNvPr id="3" name="Content Placeholder 2">
+            <a:extLst>
+              <a:ext uri="{FF2B5EF4-FFF2-40B4-BE49-F238E27FC236}">
+                <a16:creationId xmlns:a16="http://schemas.microsoft.com/office/drawing/2014/main" id="{FA84AA17-52A5-C4E4-4B3C-968711677CB3}"/>
+              </a:ext>
+            </a:extLst>
+          </p:cNvPr>
+          <p:cNvSpPr>
+            <a:spLocks noGrp="1"/>
+          </p:cNvSpPr>
+          <p:nvPr>
+            <p:ph idx="1"/>
+          </p:nvPr>
+        </p:nvSpPr>
+        <p:spPr>
+          <a:xfrm>
+            <a:off x="1243087" y="1825625"/>
+            <a:ext cx="10582656" cy="4491356"/>
+          </a:xfrm>
+        </p:spPr>
+        <p:txBody>
+          <a:bodyPr>
+            <a:normAutofit fontScale="77500" lnSpcReduction="20000"/>
+          </a:bodyPr>
+          <a:lstStyle/>
+          <a:p>
+            <a:r>
+              <a:rPr lang="en-GB" sz="3900" dirty="0"/>
+              <a:t>Information Operations (IOs) definition: A set of actors performing similar or complementary actions in pursuit of a common intent, while misleading others.</a:t>
+            </a:r>
+          </a:p>
+          <a:p>
+            <a:r>
+              <a:rPr lang="en-GB" sz="3900" dirty="0"/>
+              <a:t>Social media serves as the modern public square but is increasingly exploited by IOs.</a:t>
+            </a:r>
+          </a:p>
+          <a:p>
+            <a:r>
+              <a:rPr lang="en-GB" sz="3900" dirty="0"/>
+              <a:t>IOs rely on Coordinated Inauthentic Behavior (CIB) to amplify narratives and distort public discourse.</a:t>
+            </a:r>
+          </a:p>
+          <a:p>
+            <a:r>
+              <a:rPr lang="en-GB" sz="3900" dirty="0"/>
+              <a:t>Large language models (LLMs) can generate fluent, human-like content, limiting the discriminative power of semantic features alone.</a:t>
+            </a:r>
+          </a:p>
+          <a:p>
+            <a:r>
+              <a:rPr lang="en-GB" sz="3900" dirty="0"/>
+              <a:t>We therefore aim to identify IO actors using structural features and coordination patterns in online discourse.</a:t>
+            </a:r>
+          </a:p>
+          <a:p>
+            <a:endParaRPr lang="en-GB" sz="3600" dirty="0">
+              <a:solidFill>
+                <a:srgbClr val="FF0000"/>
+              </a:solidFill>
+            </a:endParaRPr>
+          </a:p>
+          <a:p>
+            <a:endParaRPr lang="en-GB" sz="3600" dirty="0"/>
+          </a:p>
+          <a:p>
+            <a:endParaRPr lang="en-IL" dirty="0"/>
+          </a:p>
+        </p:txBody>
+      </p:sp>
+      <p:sp>
+        <p:nvSpPr>
+          <p:cNvPr id="4" name="Slide Number Placeholder 3">
+            <a:extLst>
+              <a:ext uri="{FF2B5EF4-FFF2-40B4-BE49-F238E27FC236}">
+                <a16:creationId xmlns:a16="http://schemas.microsoft.com/office/drawing/2014/main" id="{E1EABADF-DC39-301C-4C98-5C58B72B250E}"/>
+              </a:ext>
+            </a:extLst>
+          </p:cNvPr>
+          <p:cNvSpPr>
+            <a:spLocks noGrp="1"/>
+          </p:cNvSpPr>
+          <p:nvPr>
+            <p:ph type="sldNum" sz="quarter" idx="12"/>
+          </p:nvPr>
+        </p:nvSpPr>
+        <p:spPr/>
+        <p:txBody>
+          <a:bodyPr/>
+          <a:lstStyle/>
+          <a:p>
+            <a:fld id="{E6AB8EDD-9EF2-4633-A1C2-4D908C1019B4}" type="slidenum">
+              <a:rPr lang="he-IL" smtClean="0"/>
+              <a:t>3</a:t>
+            </a:fld>
+            <a:endParaRPr lang="he-IL"/>
+          </a:p>
+        </p:txBody>
+      </p:sp>
+    </p:spTree>
+    <p:extLst>
+      <p:ext uri="{BB962C8B-B14F-4D97-AF65-F5344CB8AC3E}">
+        <p14:creationId xmlns:p14="http://schemas.microsoft.com/office/powerpoint/2010/main" val="2375271482"/>
+      </p:ext>
+    </p:extLst>
+  </p:cSld>
+  <p:clrMapOvr>
+    <a:masterClrMapping/>
+  </p:clrMapOvr>
+</p:sld>
+</file>
+
+<file path=ppt/slides/slide30.xml><?xml version="1.0" encoding="utf-8"?>
 <p:sld xmlns:a="http://schemas.openxmlformats.org/drawingml/2006/main" xmlns:r="http://schemas.openxmlformats.org/officeDocument/2006/relationships" xmlns:p="http://schemas.openxmlformats.org/presentationml/2006/main">
   <p:cSld>
     <p:spTree>
@@ -11294,174 +11727,6 @@
     <p:extLst>
       <p:ext uri="{BB962C8B-B14F-4D97-AF65-F5344CB8AC3E}">
         <p14:creationId xmlns:p14="http://schemas.microsoft.com/office/powerpoint/2010/main" val="3747228069"/>
-      </p:ext>
-    </p:extLst>
-  </p:cSld>
-  <p:clrMapOvr>
-    <a:masterClrMapping/>
-  </p:clrMapOvr>
-</p:sld>
-</file>
-
-<file path=ppt/slides/slide3.xml><?xml version="1.0" encoding="utf-8"?>
-<p:sld xmlns:a="http://schemas.openxmlformats.org/drawingml/2006/main" xmlns:r="http://schemas.openxmlformats.org/officeDocument/2006/relationships" xmlns:p="http://schemas.openxmlformats.org/presentationml/2006/main" show="0">
-  <p:cSld>
-    <p:spTree>
-      <p:nvGrpSpPr>
-        <p:cNvPr id="1" name="">
-          <a:extLst>
-            <a:ext uri="{FF2B5EF4-FFF2-40B4-BE49-F238E27FC236}">
-              <a16:creationId xmlns:a16="http://schemas.microsoft.com/office/drawing/2014/main" id="{883ADC35-446C-6244-68C0-AB19DC69C5F0}"/>
-            </a:ext>
-          </a:extLst>
-        </p:cNvPr>
-        <p:cNvGrpSpPr/>
-        <p:nvPr/>
-      </p:nvGrpSpPr>
-      <p:grpSpPr>
-        <a:xfrm>
-          <a:off x="0" y="0"/>
-          <a:ext cx="0" cy="0"/>
-          <a:chOff x="0" y="0"/>
-          <a:chExt cx="0" cy="0"/>
-        </a:xfrm>
-      </p:grpSpPr>
-      <p:sp>
-        <p:nvSpPr>
-          <p:cNvPr id="2" name="Title 1">
-            <a:extLst>
-              <a:ext uri="{FF2B5EF4-FFF2-40B4-BE49-F238E27FC236}">
-                <a16:creationId xmlns:a16="http://schemas.microsoft.com/office/drawing/2014/main" id="{CB3F7731-A5D6-A5D6-B947-8809B148BC37}"/>
-              </a:ext>
-            </a:extLst>
-          </p:cNvPr>
-          <p:cNvSpPr>
-            <a:spLocks noGrp="1"/>
-          </p:cNvSpPr>
-          <p:nvPr>
-            <p:ph type="title"/>
-          </p:nvPr>
-        </p:nvSpPr>
-        <p:spPr/>
-        <p:txBody>
-          <a:bodyPr>
-            <a:normAutofit/>
-          </a:bodyPr>
-          <a:lstStyle/>
-          <a:p>
-            <a:r>
-              <a:rPr lang="en-GB" dirty="0"/>
-              <a:t>Introduction</a:t>
-            </a:r>
-            <a:endParaRPr lang="en-IL" dirty="0"/>
-          </a:p>
-        </p:txBody>
-      </p:sp>
-      <p:sp>
-        <p:nvSpPr>
-          <p:cNvPr id="3" name="Content Placeholder 2">
-            <a:extLst>
-              <a:ext uri="{FF2B5EF4-FFF2-40B4-BE49-F238E27FC236}">
-                <a16:creationId xmlns:a16="http://schemas.microsoft.com/office/drawing/2014/main" id="{FA84AA17-52A5-C4E4-4B3C-968711677CB3}"/>
-              </a:ext>
-            </a:extLst>
-          </p:cNvPr>
-          <p:cNvSpPr>
-            <a:spLocks noGrp="1"/>
-          </p:cNvSpPr>
-          <p:nvPr>
-            <p:ph idx="1"/>
-          </p:nvPr>
-        </p:nvSpPr>
-        <p:spPr>
-          <a:xfrm>
-            <a:off x="1243087" y="1825625"/>
-            <a:ext cx="10582656" cy="4491356"/>
-          </a:xfrm>
-        </p:spPr>
-        <p:txBody>
-          <a:bodyPr>
-            <a:normAutofit fontScale="77500" lnSpcReduction="20000"/>
-          </a:bodyPr>
-          <a:lstStyle/>
-          <a:p>
-            <a:r>
-              <a:rPr lang="en-GB" sz="3900" dirty="0"/>
-              <a:t>Information Operations (IOs) definition: A set of actors performing similar or complementary actions in pursuit of a common intent, while misleading others.</a:t>
-            </a:r>
-          </a:p>
-          <a:p>
-            <a:r>
-              <a:rPr lang="en-GB" sz="3900" dirty="0"/>
-              <a:t>Social media serves as the modern public square but is increasingly exploited by IOs.</a:t>
-            </a:r>
-          </a:p>
-          <a:p>
-            <a:r>
-              <a:rPr lang="en-GB" sz="3900" dirty="0"/>
-              <a:t>IOs rely on Coordinated Inauthentic Behavior (CIB) to amplify narratives and distort public discourse.</a:t>
-            </a:r>
-          </a:p>
-          <a:p>
-            <a:r>
-              <a:rPr lang="en-GB" sz="3900" dirty="0"/>
-              <a:t>Large language models (LLMs) can generate fluent, human-like content, limiting the discriminative power of semantic features alone.</a:t>
-            </a:r>
-          </a:p>
-          <a:p>
-            <a:r>
-              <a:rPr lang="en-GB" sz="3900" dirty="0"/>
-              <a:t>We therefore aim to identify IO actors using structural features and coordination patterns in online discourse.</a:t>
-            </a:r>
-          </a:p>
-          <a:p>
-            <a:endParaRPr lang="en-GB" sz="3600" dirty="0">
-              <a:solidFill>
-                <a:srgbClr val="FF0000"/>
-              </a:solidFill>
-            </a:endParaRPr>
-          </a:p>
-          <a:p>
-            <a:endParaRPr lang="en-GB" sz="3600" dirty="0"/>
-          </a:p>
-          <a:p>
-            <a:endParaRPr lang="en-IL" dirty="0"/>
-          </a:p>
-        </p:txBody>
-      </p:sp>
-      <p:sp>
-        <p:nvSpPr>
-          <p:cNvPr id="4" name="Slide Number Placeholder 3">
-            <a:extLst>
-              <a:ext uri="{FF2B5EF4-FFF2-40B4-BE49-F238E27FC236}">
-                <a16:creationId xmlns:a16="http://schemas.microsoft.com/office/drawing/2014/main" id="{E1EABADF-DC39-301C-4C98-5C58B72B250E}"/>
-              </a:ext>
-            </a:extLst>
-          </p:cNvPr>
-          <p:cNvSpPr>
-            <a:spLocks noGrp="1"/>
-          </p:cNvSpPr>
-          <p:nvPr>
-            <p:ph type="sldNum" sz="quarter" idx="12"/>
-          </p:nvPr>
-        </p:nvSpPr>
-        <p:spPr/>
-        <p:txBody>
-          <a:bodyPr/>
-          <a:lstStyle/>
-          <a:p>
-            <a:fld id="{E6AB8EDD-9EF2-4633-A1C2-4D908C1019B4}" type="slidenum">
-              <a:rPr lang="he-IL" smtClean="0"/>
-              <a:t>3</a:t>
-            </a:fld>
-            <a:endParaRPr lang="he-IL"/>
-          </a:p>
-        </p:txBody>
-      </p:sp>
-    </p:spTree>
-    <p:extLst>
-      <p:ext uri="{BB962C8B-B14F-4D97-AF65-F5344CB8AC3E}">
-        <p14:creationId xmlns:p14="http://schemas.microsoft.com/office/powerpoint/2010/main" val="2375271482"/>
       </p:ext>
     </p:extLst>
   </p:cSld>

--- a/docs/cbg_saback.pptx
+++ b/docs/cbg_saback.pptx
@@ -580,7 +580,7 @@
           <a:p>
             <a:fld id="{2915196C-CDBC-4DEE-A220-849C85FC22AC}" type="datetimeFigureOut">
               <a:rPr lang="he-IL" smtClean="0"/>
-              <a:t>ג'/שבט/תשפ"ו</a:t>
+              <a:t>כ"ה/שבט/תשפ"ו</a:t>
             </a:fld>
             <a:endParaRPr lang="he-IL"/>
           </a:p>
@@ -2920,7 +2920,7 @@
           <a:p>
             <a:fld id="{FC6B3A86-AB79-4388-8CA5-9FC4B834779B}" type="datetime8">
               <a:rPr lang="he-IL" smtClean="0"/>
-              <a:t>21 ינואר 26</a:t>
+              <a:t>12 פברואר 26</a:t>
             </a:fld>
             <a:endParaRPr lang="he-IL"/>
           </a:p>
@@ -3143,7 +3143,7 @@
           <a:p>
             <a:fld id="{18F56BC8-8E7D-4896-9980-77BC87FB8E3E}" type="datetime8">
               <a:rPr lang="he-IL" smtClean="0"/>
-              <a:t>21 ינואר 26</a:t>
+              <a:t>12 פברואר 26</a:t>
             </a:fld>
             <a:endParaRPr lang="he-IL"/>
           </a:p>
@@ -3376,7 +3376,7 @@
           <a:p>
             <a:fld id="{0FE327C8-CB36-417E-834B-544633ADCE63}" type="datetime8">
               <a:rPr lang="he-IL" smtClean="0"/>
-              <a:t>21 ינואר 26</a:t>
+              <a:t>12 פברואר 26</a:t>
             </a:fld>
             <a:endParaRPr lang="he-IL"/>
           </a:p>
@@ -3494,7 +3494,7 @@
           <a:p>
             <a:fld id="{8E065D1C-C98B-44F5-AB2A-FEE3E85D0A94}" type="datetime8">
               <a:rPr lang="he-IL" smtClean="0"/>
-              <a:t>21 ינואר 26</a:t>
+              <a:t>12 פברואר 26</a:t>
             </a:fld>
             <a:endParaRPr lang="he-IL"/>
           </a:p>
@@ -3805,7 +3805,7 @@
           <a:p>
             <a:fld id="{7634CBFB-2532-48BA-BAE2-ADD925390740}" type="datetime8">
               <a:rPr lang="he-IL" smtClean="0"/>
-              <a:t>21 ינואר 26</a:t>
+              <a:t>12 פברואר 26</a:t>
             </a:fld>
             <a:endParaRPr lang="he-IL"/>
           </a:p>
@@ -4088,7 +4088,7 @@
           <a:p>
             <a:fld id="{8EAC1FDD-37C4-4A6B-BF31-779943CE32CF}" type="datetime8">
               <a:rPr lang="he-IL" smtClean="0"/>
-              <a:t>21 ינואר 26</a:t>
+              <a:t>12 פברואר 26</a:t>
             </a:fld>
             <a:endParaRPr lang="he-IL"/>
           </a:p>
@@ -4401,7 +4401,7 @@
           <a:p>
             <a:fld id="{C73C226C-A76A-4927-8F1D-1BD4AC033ABB}" type="datetime8">
               <a:rPr lang="he-IL" smtClean="0"/>
-              <a:t>21 ינואר 26</a:t>
+              <a:t>12 פברואר 26</a:t>
             </a:fld>
             <a:endParaRPr lang="he-IL"/>
           </a:p>
@@ -4904,7 +4904,7 @@
           <a:p>
             <a:fld id="{430DF2BF-D428-43E9-B36B-6DD16CF93579}" type="datetime8">
               <a:rPr lang="he-IL" smtClean="0"/>
-              <a:t>21 ינואר 26</a:t>
+              <a:t>12 פברואר 26</a:t>
             </a:fld>
             <a:endParaRPr lang="he-IL"/>
           </a:p>
@@ -5051,7 +5051,7 @@
           <a:p>
             <a:fld id="{390A9136-4922-4C74-B05C-12CD0951E601}" type="datetime8">
               <a:rPr lang="he-IL" smtClean="0"/>
-              <a:t>21 ינואר 26</a:t>
+              <a:t>12 פברואר 26</a:t>
             </a:fld>
             <a:endParaRPr lang="he-IL"/>
           </a:p>
@@ -5169,7 +5169,7 @@
           <a:p>
             <a:fld id="{C29F3CA8-2E63-412C-AA06-0D760EBE5965}" type="datetime8">
               <a:rPr lang="he-IL" smtClean="0"/>
-              <a:t>21 ינואר 26</a:t>
+              <a:t>12 פברואר 26</a:t>
             </a:fld>
             <a:endParaRPr lang="he-IL"/>
           </a:p>
@@ -5491,7 +5491,7 @@
           <a:p>
             <a:fld id="{7AC7B867-AA4A-4FF3-AD8B-0AD0F18EE595}" type="datetime8">
               <a:rPr lang="he-IL" smtClean="0"/>
-              <a:t>21 ינואר 26</a:t>
+              <a:t>12 פברואר 26</a:t>
             </a:fld>
             <a:endParaRPr lang="he-IL"/>
           </a:p>
@@ -5789,7 +5789,7 @@
           <a:p>
             <a:fld id="{F5E9EBD3-88E8-46DB-BD3B-F935B7013014}" type="datetime8">
               <a:rPr lang="he-IL" smtClean="0"/>
-              <a:t>21 ינואר 26</a:t>
+              <a:t>12 פברואר 26</a:t>
             </a:fld>
             <a:endParaRPr lang="he-IL"/>
           </a:p>
@@ -6073,7 +6073,7 @@
           <a:p>
             <a:fld id="{8E065D1C-C98B-44F5-AB2A-FEE3E85D0A94}" type="datetime8">
               <a:rPr lang="he-IL" smtClean="0"/>
-              <a:t>21 ינואר 26</a:t>
+              <a:t>12 פברואר 26</a:t>
             </a:fld>
             <a:endParaRPr lang="he-IL"/>
           </a:p>
